--- a/docs/Prahari_Presentation.pptx
+++ b/docs/Prahari_Presentation.pptx
@@ -14,6 +14,10 @@
     <p:sldId id="262" r:id="rId13"/>
     <p:sldId id="263" r:id="rId14"/>
     <p:sldId id="264" r:id="rId15"/>
+    <p:sldId id="265" r:id="rId16"/>
+    <p:sldId id="266" r:id="rId17"/>
+    <p:sldId id="267" r:id="rId18"/>
+    <p:sldId id="268" r:id="rId19"/>
   </p:sldIdLst>
   <p:sldSz cx="12191695" cy="6858000" type="screen4x3"/>
   <p:notesSz cx="6858000" cy="9144000"/>
@@ -3089,14 +3093,6 @@
 <file path=ppt/slides/slide1.xml><?xml version="1.0" encoding="utf-8"?>
 <p:sld xmlns:a="http://schemas.openxmlformats.org/drawingml/2006/main" xmlns:p="http://schemas.openxmlformats.org/presentationml/2006/main" xmlns:r="http://schemas.openxmlformats.org/officeDocument/2006/relationships">
   <p:cSld>
-    <p:bg>
-      <p:bgPr>
-        <a:solidFill>
-          <a:srgbClr val="0B1120"/>
-        </a:solidFill>
-        <a:effectLst/>
-      </p:bgPr>
-    </p:bg>
     <p:spTree>
       <p:nvGrpSpPr>
         <p:cNvPr id="1" name=""/>
@@ -3106,25 +3102,23 @@
       <p:grpSpPr/>
       <p:sp>
         <p:nvSpPr>
-          <p:cNvPr id="2" name="Rounded Rectangle 1"/>
+          <p:cNvPr id="2" name="Right Triangle 1"/>
           <p:cNvSpPr/>
           <p:nvPr/>
         </p:nvSpPr>
         <p:spPr>
-          <a:xfrm>
-            <a:off x="731520" y="1188720"/>
-            <a:ext cx="3474720" cy="365760"/>
-          </a:xfrm>
-          <a:prstGeom prst="roundRect">
+          <a:xfrm rot="5400000">
+            <a:off x="10972800" y="0"/>
+            <a:ext cx="1218895" cy="2011680"/>
+          </a:xfrm>
+          <a:prstGeom prst="rtTriangle">
             <a:avLst/>
           </a:prstGeom>
           <a:solidFill>
-            <a:srgbClr val="064E5A"/>
+            <a:srgbClr val="EA580C"/>
           </a:solidFill>
           <a:ln>
-            <a:solidFill>
-              <a:srgbClr val="06B6D4"/>
-            </a:solidFill>
+            <a:noFill/>
           </a:ln>
         </p:spPr>
         <p:style>
@@ -3145,90 +3139,29 @@
           <a:bodyPr rtlCol="0" anchor="ctr"/>
           <a:lstStyle/>
           <a:p>
-            <a:pPr algn="ctr">
-              <a:defRPr sz="1100" b="1">
-                <a:solidFill>
-                  <a:srgbClr val="06B6D4"/>
-                </a:solidFill>
-              </a:defRPr>
-            </a:pPr>
-            <a:r>
-              <a:t>SPACE SITUATIONAL AWARENESS (SSA)</a:t>
-            </a:r>
-          </a:p>
-        </p:txBody>
-      </p:sp>
-      <p:sp>
-        <p:nvSpPr>
-          <p:cNvPr id="3" name="TextBox 2"/>
-          <p:cNvSpPr txBox="1"/>
-          <p:nvPr/>
-        </p:nvSpPr>
-        <p:spPr>
-          <a:xfrm>
-            <a:off x="731520" y="1737360"/>
-            <a:ext cx="10698480" cy="1645920"/>
-          </a:xfrm>
-          <a:prstGeom prst="rect">
-            <a:avLst/>
-          </a:prstGeom>
-          <a:noFill/>
-        </p:spPr>
-        <p:txBody>
-          <a:bodyPr wrap="square">
-            <a:spAutoFit/>
-          </a:bodyPr>
-          <a:lstStyle/>
-          <a:p>
-            <a:pPr>
-              <a:defRPr sz="3200" b="1">
-                <a:solidFill>
-                  <a:srgbClr val="F1F5F9"/>
-                </a:solidFill>
-              </a:defRPr>
-            </a:pPr>
-            <a:r>
-              <a:t>PRAHARI: Autonomous Spacecraft Conjunction Assessment &amp; High-Recall Collision Triage</a:t>
-            </a:r>
-          </a:p>
-          <a:p>
-            <a:pPr>
-              <a:spcBef>
-                <a:spcPts val="1200"/>
-              </a:spcBef>
-              <a:defRPr sz="1600">
-                <a:solidFill>
-                  <a:srgbClr val="10B981"/>
-                </a:solidFill>
-              </a:defRPr>
-            </a:pPr>
-            <a:r>
-              <a:t>High-Recall ML Architecture (92.70% Recall @ -6.0 Threshold) Utilizing 100 Native Telemetry Parameters</a:t>
-            </a:r>
-          </a:p>
-        </p:txBody>
-      </p:sp>
-      <p:sp>
-        <p:nvSpPr>
-          <p:cNvPr id="4" name="Rounded Rectangle 3"/>
+            <a:pPr algn="ctr"/>
+          </a:p>
+        </p:txBody>
+      </p:sp>
+      <p:sp>
+        <p:nvSpPr>
+          <p:cNvPr id="3" name="Right Triangle 2"/>
           <p:cNvSpPr/>
           <p:nvPr/>
         </p:nvSpPr>
         <p:spPr>
-          <a:xfrm>
-            <a:off x="731520" y="3931920"/>
-            <a:ext cx="2560320" cy="1645920"/>
-          </a:xfrm>
-          <a:prstGeom prst="roundRect">
+          <a:xfrm rot="16200000">
+            <a:off x="0" y="4846320"/>
+            <a:ext cx="1097280" cy="2011680"/>
+          </a:xfrm>
+          <a:prstGeom prst="rtTriangle">
             <a:avLst/>
           </a:prstGeom>
           <a:solidFill>
-            <a:srgbClr val="161E31"/>
+            <a:srgbClr val="0F766E"/>
           </a:solidFill>
           <a:ln>
-            <a:solidFill>
-              <a:srgbClr val="2D3E5F"/>
-            </a:solidFill>
+            <a:noFill/>
           </a:ln>
         </p:spPr>
         <p:style>
@@ -3246,57 +3179,174 @@
           </a:fontRef>
         </p:style>
         <p:txBody>
-          <a:bodyPr rtlCol="0" anchor="ctr" wrap="square"/>
-          <a:lstStyle/>
-          <a:p>
-            <a:pPr algn="l">
+          <a:bodyPr rtlCol="0" anchor="ctr"/>
+          <a:lstStyle/>
+          <a:p>
+            <a:pPr algn="ctr"/>
+          </a:p>
+        </p:txBody>
+      </p:sp>
+      <p:sp>
+        <p:nvSpPr>
+          <p:cNvPr id="4" name="TextBox 3"/>
+          <p:cNvSpPr txBox="1"/>
+          <p:nvPr/>
+        </p:nvSpPr>
+        <p:spPr>
+          <a:xfrm>
+            <a:off x="365760" y="274320"/>
+            <a:ext cx="1828800" cy="548640"/>
+          </a:xfrm>
+          <a:prstGeom prst="rect">
+            <a:avLst/>
+          </a:prstGeom>
+          <a:noFill/>
+        </p:spPr>
+        <p:txBody>
+          <a:bodyPr wrap="none">
+            <a:spAutoFit/>
+          </a:bodyPr>
+          <a:lstStyle/>
+          <a:p>
+            <a:pPr>
               <a:defRPr sz="1800" b="1">
                 <a:solidFill>
-                  <a:srgbClr val="10B981"/>
-                </a:solidFill>
-              </a:defRPr>
-            </a:pPr>
-            <a:r>
-              <a:t>92.70% Recall</a:t>
-            </a:r>
-          </a:p>
-          <a:p>
-            <a:pPr>
+                  <a:srgbClr val="0F172A"/>
+                </a:solidFill>
+                <a:latin typeface="Arial"/>
+              </a:defRPr>
+            </a:pPr>
+            <a:r>
+              <a:t>Kmit</a:t>
+            </a:r>
+          </a:p>
+        </p:txBody>
+      </p:sp>
+      <p:sp>
+        <p:nvSpPr>
+          <p:cNvPr id="5" name="TextBox 4"/>
+          <p:cNvSpPr txBox="1"/>
+          <p:nvPr/>
+        </p:nvSpPr>
+        <p:spPr>
+          <a:xfrm>
+            <a:off x="1371600" y="1097280"/>
+            <a:ext cx="9445752" cy="1097280"/>
+          </a:xfrm>
+          <a:prstGeom prst="rect">
+            <a:avLst/>
+          </a:prstGeom>
+          <a:noFill/>
+        </p:spPr>
+        <p:txBody>
+          <a:bodyPr wrap="square">
+            <a:spAutoFit/>
+          </a:bodyPr>
+          <a:lstStyle/>
+          <a:p>
+            <a:pPr algn="ctr">
+              <a:defRPr sz="2000" b="1">
+                <a:solidFill>
+                  <a:srgbClr val="0D9488"/>
+                </a:solidFill>
+                <a:latin typeface="Arial"/>
+              </a:defRPr>
+            </a:pPr>
+            <a:r>
+              <a:t>KESHAV MEMORIAL INSTITUTE OF TECHNOLOGY</a:t>
+            </a:r>
+          </a:p>
+          <a:p>
+            <a:pPr algn="ctr">
+              <a:defRPr sz="1100" b="1">
+                <a:solidFill>
+                  <a:srgbClr val="475569"/>
+                </a:solidFill>
+                <a:latin typeface="Arial"/>
+              </a:defRPr>
+            </a:pPr>
+            <a:r>
+              <a:t>AN AUTONOMOUS INSTITUTION - ACCREDITED BY NAAC WITH 'A' GRADE</a:t>
+            </a:r>
+            <a:br/>
+            <a:r>
+              <a:t>Narayanaguda, Hyderabad.</a:t>
+            </a:r>
+          </a:p>
+        </p:txBody>
+      </p:sp>
+      <p:sp>
+        <p:nvSpPr>
+          <p:cNvPr id="6" name="TextBox 5"/>
+          <p:cNvSpPr txBox="1"/>
+          <p:nvPr/>
+        </p:nvSpPr>
+        <p:spPr>
+          <a:xfrm>
+            <a:off x="914400" y="2377440"/>
+            <a:ext cx="10360152" cy="914400"/>
+          </a:xfrm>
+          <a:prstGeom prst="rect">
+            <a:avLst/>
+          </a:prstGeom>
+          <a:noFill/>
+        </p:spPr>
+        <p:txBody>
+          <a:bodyPr wrap="square">
+            <a:spAutoFit/>
+          </a:bodyPr>
+          <a:lstStyle/>
+          <a:p>
+            <a:pPr algn="ctr">
+              <a:defRPr sz="1600" b="1">
+                <a:solidFill>
+                  <a:srgbClr val="0284C7"/>
+                </a:solidFill>
+                <a:latin typeface="Arial"/>
+              </a:defRPr>
+            </a:pPr>
+            <a:r>
+              <a:t>G-1400 | PRAHARI: Autonomous Spacecraft Conjunction Assessment &amp; High-Recall Collision Triage</a:t>
+            </a:r>
+          </a:p>
+          <a:p>
+            <a:pPr algn="ctr">
               <a:spcBef>
                 <a:spcPts val="600"/>
               </a:spcBef>
-              <a:defRPr sz="1100">
-                <a:solidFill>
-                  <a:srgbClr val="94A3B8"/>
-                </a:solidFill>
-              </a:defRPr>
-            </a:pPr>
-            <a:r>
-              <a:t>165 of 178 true collisions caught at -6.0 threshold</a:t>
-            </a:r>
-          </a:p>
-        </p:txBody>
-      </p:sp>
-      <p:sp>
-        <p:nvSpPr>
-          <p:cNvPr id="5" name="Rounded Rectangle 4"/>
+              <a:defRPr sz="1300" b="1">
+                <a:solidFill>
+                  <a:srgbClr val="0E7490"/>
+                </a:solidFill>
+                <a:latin typeface="Arial"/>
+              </a:defRPr>
+            </a:pPr>
+            <a:r>
+              <a:t>Date: 25-09-2026</a:t>
+            </a:r>
+          </a:p>
+        </p:txBody>
+      </p:sp>
+      <p:sp>
+        <p:nvSpPr>
+          <p:cNvPr id="7" name="Rectangle 6"/>
           <p:cNvSpPr/>
           <p:nvPr/>
         </p:nvSpPr>
         <p:spPr>
           <a:xfrm>
-            <a:off x="3429000" y="3931920"/>
-            <a:ext cx="2560320" cy="1645920"/>
-          </a:xfrm>
-          <a:prstGeom prst="roundRect">
+            <a:off x="2011680" y="3840480"/>
+            <a:ext cx="3931920" cy="2377440"/>
+          </a:xfrm>
+          <a:prstGeom prst="rect">
             <a:avLst/>
           </a:prstGeom>
           <a:solidFill>
-            <a:srgbClr val="161E31"/>
+            <a:srgbClr val="FFFFFF"/>
           </a:solidFill>
           <a:ln>
             <a:solidFill>
-              <a:srgbClr val="2D3E5F"/>
+              <a:srgbClr val="64748B"/>
             </a:solidFill>
           </a:ln>
         </p:spPr>
@@ -3318,54 +3368,120 @@
           <a:bodyPr rtlCol="0" anchor="ctr" wrap="square"/>
           <a:lstStyle/>
           <a:p>
-            <a:pPr algn="l">
-              <a:defRPr sz="1800" b="1">
-                <a:solidFill>
-                  <a:srgbClr val="06B6D4"/>
-                </a:solidFill>
-              </a:defRPr>
-            </a:pPr>
-            <a:r>
-              <a:t>100 Native Features</a:t>
-            </a:r>
-          </a:p>
-          <a:p>
-            <a:pPr>
-              <a:spcBef>
-                <a:spcPts val="600"/>
+            <a:pPr algn="ctr">
+              <a:defRPr sz="1300" b="1" u="sng">
+                <a:solidFill>
+                  <a:srgbClr val="1E293B"/>
+                </a:solidFill>
+                <a:latin typeface="Arial"/>
+              </a:defRPr>
+            </a:pPr>
+            <a:r>
+              <a:t>Team Members</a:t>
+            </a:r>
+          </a:p>
+          <a:p>
+            <a:pPr>
+              <a:spcBef>
+                <a:spcPts val="300"/>
               </a:spcBef>
               <a:defRPr sz="1100">
                 <a:solidFill>
-                  <a:srgbClr val="94A3B8"/>
-                </a:solidFill>
-              </a:defRPr>
-            </a:pPr>
-            <a:r>
-              <a:t>Zero synthetic features; 100% standard CDM telemetry</a:t>
-            </a:r>
-          </a:p>
-        </p:txBody>
-      </p:sp>
-      <p:sp>
-        <p:nvSpPr>
-          <p:cNvPr id="6" name="Rounded Rectangle 5"/>
+                  <a:srgbClr val="1E293B"/>
+                </a:solidFill>
+                <a:latin typeface="Arial"/>
+              </a:defRPr>
+            </a:pPr>
+            <a:r>
+              <a:t>1. Akshay Bharadwaj</a:t>
+            </a:r>
+          </a:p>
+          <a:p>
+            <a:pPr>
+              <a:spcBef>
+                <a:spcPts val="300"/>
+              </a:spcBef>
+              <a:defRPr sz="1100">
+                <a:solidFill>
+                  <a:srgbClr val="1E293B"/>
+                </a:solidFill>
+                <a:latin typeface="Arial"/>
+              </a:defRPr>
+            </a:pPr>
+            <a:r>
+              <a:t>2. Team Member 2</a:t>
+            </a:r>
+          </a:p>
+          <a:p>
+            <a:pPr>
+              <a:spcBef>
+                <a:spcPts val="300"/>
+              </a:spcBef>
+              <a:defRPr sz="1100">
+                <a:solidFill>
+                  <a:srgbClr val="1E293B"/>
+                </a:solidFill>
+                <a:latin typeface="Arial"/>
+              </a:defRPr>
+            </a:pPr>
+            <a:r>
+              <a:t>3. Team Member 3</a:t>
+            </a:r>
+          </a:p>
+          <a:p>
+            <a:pPr>
+              <a:spcBef>
+                <a:spcPts val="300"/>
+              </a:spcBef>
+              <a:defRPr sz="1100">
+                <a:solidFill>
+                  <a:srgbClr val="1E293B"/>
+                </a:solidFill>
+                <a:latin typeface="Arial"/>
+              </a:defRPr>
+            </a:pPr>
+            <a:r>
+              <a:t>4. Team Member 4</a:t>
+            </a:r>
+          </a:p>
+          <a:p>
+            <a:pPr>
+              <a:spcBef>
+                <a:spcPts val="300"/>
+              </a:spcBef>
+              <a:defRPr sz="1100">
+                <a:solidFill>
+                  <a:srgbClr val="1E293B"/>
+                </a:solidFill>
+                <a:latin typeface="Arial"/>
+              </a:defRPr>
+            </a:pPr>
+            <a:r>
+              <a:t>5. Team Member 5</a:t>
+            </a:r>
+          </a:p>
+        </p:txBody>
+      </p:sp>
+      <p:sp>
+        <p:nvSpPr>
+          <p:cNvPr id="8" name="Rectangle 7"/>
           <p:cNvSpPr/>
           <p:nvPr/>
         </p:nvSpPr>
         <p:spPr>
           <a:xfrm>
-            <a:off x="6126480" y="3931920"/>
-            <a:ext cx="2560320" cy="1645920"/>
-          </a:xfrm>
-          <a:prstGeom prst="roundRect">
+            <a:off x="6217920" y="3840480"/>
+            <a:ext cx="3931920" cy="2377440"/>
+          </a:xfrm>
+          <a:prstGeom prst="rect">
             <a:avLst/>
           </a:prstGeom>
           <a:solidFill>
-            <a:srgbClr val="161E31"/>
+            <a:srgbClr val="FFFFFF"/>
           </a:solidFill>
           <a:ln>
             <a:solidFill>
-              <a:srgbClr val="2D3E5F"/>
+              <a:srgbClr val="64748B"/>
             </a:solidFill>
           </a:ln>
         </p:spPr>
@@ -3387,55 +3503,73 @@
           <a:bodyPr rtlCol="0" anchor="ctr" wrap="square"/>
           <a:lstStyle/>
           <a:p>
-            <a:pPr algn="l">
-              <a:defRPr sz="1800" b="1">
-                <a:solidFill>
-                  <a:srgbClr val="06B6D4"/>
-                </a:solidFill>
-              </a:defRPr>
-            </a:pPr>
-            <a:r>
-              <a:t>79.71% Precision</a:t>
-            </a:r>
-          </a:p>
-          <a:p>
-            <a:pPr>
-              <a:spcBef>
-                <a:spcPts val="600"/>
-              </a:spcBef>
-              <a:defRPr sz="1100">
-                <a:solidFill>
-                  <a:srgbClr val="94A3B8"/>
-                </a:solidFill>
-              </a:defRPr>
-            </a:pPr>
-            <a:r>
-              <a:t>Only 42 false alarms across 1,989 safe events (~75% reduction)</a:t>
-            </a:r>
-          </a:p>
-        </p:txBody>
-      </p:sp>
-      <p:sp>
-        <p:nvSpPr>
-          <p:cNvPr id="7" name="Rounded Rectangle 6"/>
+            <a:pPr algn="ctr">
+              <a:defRPr sz="1300" b="1" u="sng">
+                <a:solidFill>
+                  <a:srgbClr val="1E293B"/>
+                </a:solidFill>
+                <a:latin typeface="Arial"/>
+              </a:defRPr>
+            </a:pPr>
+            <a:r>
+              <a:t>Mentors</a:t>
+            </a:r>
+          </a:p>
+          <a:p>
+            <a:pPr algn="ctr">
+              <a:spcBef>
+                <a:spcPts val="3600"/>
+              </a:spcBef>
+              <a:defRPr sz="1300" b="1">
+                <a:solidFill>
+                  <a:srgbClr val="1E293B"/>
+                </a:solidFill>
+                <a:latin typeface="Arial"/>
+              </a:defRPr>
+            </a:pPr>
+            <a:r>
+              <a:t>Faculty Mentor / Project Guide</a:t>
+            </a:r>
+          </a:p>
+        </p:txBody>
+      </p:sp>
+    </p:spTree>
+  </p:cSld>
+  <p:clrMapOvr>
+    <a:masterClrMapping/>
+  </p:clrMapOvr>
+</p:sld>
+</file>
+
+<file path=ppt/slides/slide10.xml><?xml version="1.0" encoding="utf-8"?>
+<p:sld xmlns:a="http://schemas.openxmlformats.org/drawingml/2006/main" xmlns:p="http://schemas.openxmlformats.org/presentationml/2006/main" xmlns:r="http://schemas.openxmlformats.org/officeDocument/2006/relationships">
+  <p:cSld>
+    <p:spTree>
+      <p:nvGrpSpPr>
+        <p:cNvPr id="1" name=""/>
+        <p:cNvGrpSpPr/>
+        <p:nvPr/>
+      </p:nvGrpSpPr>
+      <p:grpSpPr/>
+      <p:sp>
+        <p:nvSpPr>
+          <p:cNvPr id="2" name="Right Triangle 1"/>
           <p:cNvSpPr/>
           <p:nvPr/>
         </p:nvSpPr>
         <p:spPr>
-          <a:xfrm>
-            <a:off x="8823960" y="3931920"/>
-            <a:ext cx="2560320" cy="1645920"/>
-          </a:xfrm>
-          <a:prstGeom prst="roundRect">
+          <a:xfrm rot="5400000">
+            <a:off x="10972800" y="0"/>
+            <a:ext cx="1218895" cy="2011680"/>
+          </a:xfrm>
+          <a:prstGeom prst="rtTriangle">
             <a:avLst/>
           </a:prstGeom>
           <a:solidFill>
-            <a:srgbClr val="161E31"/>
+            <a:srgbClr val="EA580C"/>
           </a:solidFill>
           <a:ln>
-            <a:solidFill>
-              <a:srgbClr val="2D3E5F"/>
-            </a:solidFill>
+            <a:noFill/>
           </a:ln>
         </p:spPr>
         <p:style>
@@ -3453,47 +3587,66 @@
           </a:fontRef>
         </p:style>
         <p:txBody>
-          <a:bodyPr rtlCol="0" anchor="ctr" wrap="square"/>
-          <a:lstStyle/>
-          <a:p>
-            <a:pPr algn="l">
-              <a:defRPr sz="1800" b="1">
-                <a:solidFill>
-                  <a:srgbClr val="F59E0B"/>
-                </a:solidFill>
-              </a:defRPr>
-            </a:pPr>
-            <a:r>
-              <a:t>3-5 Days Lead Time</a:t>
-            </a:r>
-          </a:p>
-          <a:p>
-            <a:pPr>
-              <a:spcBef>
-                <a:spcPts val="600"/>
-              </a:spcBef>
-              <a:defRPr sz="1100">
-                <a:solidFill>
-                  <a:srgbClr val="94A3B8"/>
-                </a:solidFill>
-              </a:defRPr>
-            </a:pPr>
-            <a:r>
-              <a:t>Actionable early warning for collision avoidance burns</a:t>
-            </a:r>
-          </a:p>
-        </p:txBody>
-      </p:sp>
-      <p:sp>
-        <p:nvSpPr>
-          <p:cNvPr id="8" name="TextBox 7"/>
+          <a:bodyPr rtlCol="0" anchor="ctr"/>
+          <a:lstStyle/>
+          <a:p>
+            <a:pPr algn="ctr"/>
+          </a:p>
+        </p:txBody>
+      </p:sp>
+      <p:sp>
+        <p:nvSpPr>
+          <p:cNvPr id="3" name="Right Triangle 2"/>
+          <p:cNvSpPr/>
+          <p:nvPr/>
+        </p:nvSpPr>
+        <p:spPr>
+          <a:xfrm rot="16200000">
+            <a:off x="0" y="4846320"/>
+            <a:ext cx="1097280" cy="2011680"/>
+          </a:xfrm>
+          <a:prstGeom prst="rtTriangle">
+            <a:avLst/>
+          </a:prstGeom>
+          <a:solidFill>
+            <a:srgbClr val="0F766E"/>
+          </a:solidFill>
+          <a:ln>
+            <a:noFill/>
+          </a:ln>
+        </p:spPr>
+        <p:style>
+          <a:lnRef idx="1">
+            <a:schemeClr val="accent1"/>
+          </a:lnRef>
+          <a:fillRef idx="3">
+            <a:schemeClr val="accent1"/>
+          </a:fillRef>
+          <a:effectRef idx="2">
+            <a:schemeClr val="accent1"/>
+          </a:effectRef>
+          <a:fontRef idx="minor">
+            <a:schemeClr val="lt1"/>
+          </a:fontRef>
+        </p:style>
+        <p:txBody>
+          <a:bodyPr rtlCol="0" anchor="ctr"/>
+          <a:lstStyle/>
+          <a:p>
+            <a:pPr algn="ctr"/>
+          </a:p>
+        </p:txBody>
+      </p:sp>
+      <p:sp>
+        <p:nvSpPr>
+          <p:cNvPr id="4" name="TextBox 3"/>
           <p:cNvSpPr txBox="1"/>
           <p:nvPr/>
         </p:nvSpPr>
         <p:spPr>
           <a:xfrm>
-            <a:off x="731520" y="5943600"/>
-            <a:ext cx="10698480" cy="457200"/>
+            <a:off x="365760" y="274320"/>
+            <a:ext cx="1828800" cy="548640"/>
           </a:xfrm>
           <a:prstGeom prst="rect">
             <a:avLst/>
@@ -3507,14 +3660,1384 @@
           <a:lstStyle/>
           <a:p>
             <a:pPr>
+              <a:defRPr sz="1800" b="1">
+                <a:solidFill>
+                  <a:srgbClr val="0F172A"/>
+                </a:solidFill>
+                <a:latin typeface="Arial"/>
+              </a:defRPr>
+            </a:pPr>
+            <a:r>
+              <a:t>Kmit</a:t>
+            </a:r>
+          </a:p>
+        </p:txBody>
+      </p:sp>
+      <p:sp>
+        <p:nvSpPr>
+          <p:cNvPr id="5" name="TextBox 4"/>
+          <p:cNvSpPr txBox="1"/>
+          <p:nvPr/>
+        </p:nvSpPr>
+        <p:spPr>
+          <a:xfrm>
+            <a:off x="1097280" y="274320"/>
+            <a:ext cx="9601200" cy="731520"/>
+          </a:xfrm>
+          <a:prstGeom prst="rect">
+            <a:avLst/>
+          </a:prstGeom>
+          <a:noFill/>
+        </p:spPr>
+        <p:txBody>
+          <a:bodyPr wrap="none">
+            <a:spAutoFit/>
+          </a:bodyPr>
+          <a:lstStyle/>
+          <a:p>
+            <a:pPr>
+              <a:defRPr sz="2600" b="1">
+                <a:solidFill>
+                  <a:srgbClr val="DC2626"/>
+                </a:solidFill>
+                <a:latin typeface="Arial"/>
+              </a:defRPr>
+            </a:pPr>
+            <a:r>
+              <a:t>DEVELOPMENT</a:t>
+            </a:r>
+          </a:p>
+        </p:txBody>
+      </p:sp>
+      <p:sp>
+        <p:nvSpPr>
+          <p:cNvPr id="6" name="TextBox 5"/>
+          <p:cNvSpPr txBox="1"/>
+          <p:nvPr/>
+        </p:nvSpPr>
+        <p:spPr>
+          <a:xfrm>
+            <a:off x="1097280" y="1188720"/>
+            <a:ext cx="10058400" cy="5303520"/>
+          </a:xfrm>
+          <a:prstGeom prst="rect">
+            <a:avLst/>
+          </a:prstGeom>
+          <a:noFill/>
+        </p:spPr>
+        <p:txBody>
+          <a:bodyPr wrap="square">
+            <a:spAutoFit/>
+          </a:bodyPr>
+          <a:lstStyle/>
+          <a:p>
+            <a:pPr>
+              <a:defRPr sz="1400" b="1">
+                <a:solidFill>
+                  <a:srgbClr val="1E293B"/>
+                </a:solidFill>
+                <a:latin typeface="Arial"/>
+              </a:defRPr>
+            </a:pPr>
+            <a:r>
+              <a:t>Development Steps:</a:t>
+            </a:r>
+          </a:p>
+          <a:p>
+            <a:pPr>
+              <a:spcBef>
+                <a:spcPts val="300"/>
+              </a:spcBef>
               <a:defRPr sz="1100">
                 <a:solidFill>
-                  <a:srgbClr val="94A3B8"/>
-                </a:solidFill>
-              </a:defRPr>
-            </a:pPr>
-            <a:r>
-              <a:t>Prahari Research Team | Department of Aerospace Engineering &amp; Machine Learning Systems</a:t>
+                  <a:srgbClr val="475569"/>
+                </a:solidFill>
+                <a:latin typeface="Arial"/>
+              </a:defRPr>
+            </a:pPr>
+            <a:r>
+              <a:t>•  Extracted and audited 100 native telemetry parameters across 162,634 observation rows.</a:t>
+            </a:r>
+          </a:p>
+          <a:p>
+            <a:pPr>
+              <a:spcBef>
+                <a:spcPts val="300"/>
+              </a:spcBef>
+              <a:defRPr sz="1100">
+                <a:solidFill>
+                  <a:srgbClr val="475569"/>
+                </a:solidFill>
+                <a:latin typeface="Arial"/>
+              </a:defRPr>
+            </a:pPr>
+            <a:r>
+              <a:t>•  Engineered asymmetric sample weighting protocol (w = 30.0 for high risk) to prioritize recall.</a:t>
+            </a:r>
+          </a:p>
+          <a:p>
+            <a:pPr>
+              <a:spcBef>
+                <a:spcPts val="300"/>
+              </a:spcBef>
+              <a:defRPr sz="1100">
+                <a:solidFill>
+                  <a:srgbClr val="475569"/>
+                </a:solidFill>
+                <a:latin typeface="Arial"/>
+              </a:defRPr>
+            </a:pPr>
+            <a:r>
+              <a:t>•  Trained regularized XGBoost Regressor with histogram binning and pre-computed median imputation.</a:t>
+            </a:r>
+          </a:p>
+          <a:p>
+            <a:pPr>
+              <a:spcBef>
+                <a:spcPts val="300"/>
+              </a:spcBef>
+              <a:defRPr sz="1100">
+                <a:solidFill>
+                  <a:srgbClr val="475569"/>
+                </a:solidFill>
+                <a:latin typeface="Arial"/>
+              </a:defRPr>
+            </a:pPr>
+            <a:r>
+              <a:t>•  Evaluated performance on 2,167 completely held-out test events at the standard -6.0 threshold.</a:t>
+            </a:r>
+          </a:p>
+          <a:p>
+            <a:pPr>
+              <a:spcBef>
+                <a:spcPts val="300"/>
+              </a:spcBef>
+              <a:defRPr sz="1100">
+                <a:solidFill>
+                  <a:srgbClr val="475569"/>
+                </a:solidFill>
+                <a:latin typeface="Arial"/>
+              </a:defRPr>
+            </a:pPr>
+            <a:r>
+              <a:t>•  Built asynchronous FastAPI backend serving sub-50ms real-time inference and metadata endpoints.</a:t>
+            </a:r>
+          </a:p>
+          <a:p>
+            <a:pPr>
+              <a:spcBef>
+                <a:spcPts val="300"/>
+              </a:spcBef>
+              <a:defRPr sz="1100">
+                <a:solidFill>
+                  <a:srgbClr val="475569"/>
+                </a:solidFill>
+                <a:latin typeface="Arial"/>
+              </a:defRPr>
+            </a:pPr>
+            <a:r>
+              <a:t>•  Developed React 18 + Vite frontend with Three.js 3D WebGL orbital encounter scene and timeline scrubber.</a:t>
+            </a:r>
+          </a:p>
+          <a:p>
+            <a:pPr>
+              <a:spcBef>
+                <a:spcPts val="300"/>
+              </a:spcBef>
+              <a:defRPr sz="1100">
+                <a:solidFill>
+                  <a:srgbClr val="475569"/>
+                </a:solidFill>
+                <a:latin typeface="Arial"/>
+              </a:defRPr>
+            </a:pPr>
+            <a:r>
+              <a:t>•  Created interactive Model Lab with dynamic threshold slider, 100-feature directory, and SHAP charts.</a:t>
+            </a:r>
+          </a:p>
+          <a:p>
+            <a:pPr>
+              <a:spcBef>
+                <a:spcPts val="300"/>
+              </a:spcBef>
+              <a:defRPr sz="1100">
+                <a:solidFill>
+                  <a:srgbClr val="475569"/>
+                </a:solidFill>
+                <a:latin typeface="Arial"/>
+              </a:defRPr>
+            </a:pPr>
+            <a:r>
+              <a:t>•  Authored publication-ready academic research paper (.docx) and 16:9 presentation deck (.pptx).</a:t>
+            </a:r>
+          </a:p>
+          <a:p>
+            <a:pPr>
+              <a:spcBef>
+                <a:spcPts val="800"/>
+              </a:spcBef>
+              <a:defRPr sz="1400" b="1">
+                <a:solidFill>
+                  <a:srgbClr val="1E293B"/>
+                </a:solidFill>
+                <a:latin typeface="Arial"/>
+              </a:defRPr>
+            </a:pPr>
+            <a:r>
+              <a:t>Tools Used:</a:t>
+            </a:r>
+          </a:p>
+          <a:p>
+            <a:pPr>
+              <a:spcBef>
+                <a:spcPts val="300"/>
+              </a:spcBef>
+              <a:defRPr sz="1100">
+                <a:solidFill>
+                  <a:srgbClr val="475569"/>
+                </a:solidFill>
+                <a:latin typeface="Arial"/>
+              </a:defRPr>
+            </a:pPr>
+            <a:r>
+              <a:t>•  React, TypeScript &amp; Vite</a:t>
+            </a:r>
+          </a:p>
+          <a:p>
+            <a:pPr>
+              <a:spcBef>
+                <a:spcPts val="300"/>
+              </a:spcBef>
+              <a:defRPr sz="1100">
+                <a:solidFill>
+                  <a:srgbClr val="475569"/>
+                </a:solidFill>
+                <a:latin typeface="Arial"/>
+              </a:defRPr>
+            </a:pPr>
+            <a:r>
+              <a:t>•  Tailwind CSS &amp; Lucide Icons</a:t>
+            </a:r>
+          </a:p>
+          <a:p>
+            <a:pPr>
+              <a:spcBef>
+                <a:spcPts val="300"/>
+              </a:spcBef>
+              <a:defRPr sz="1100">
+                <a:solidFill>
+                  <a:srgbClr val="475569"/>
+                </a:solidFill>
+                <a:latin typeface="Arial"/>
+              </a:defRPr>
+            </a:pPr>
+            <a:r>
+              <a:t>•  Python 3.11, FastAPI &amp; Uvicorn</a:t>
+            </a:r>
+          </a:p>
+          <a:p>
+            <a:pPr>
+              <a:spcBef>
+                <a:spcPts val="300"/>
+              </a:spcBef>
+              <a:defRPr sz="1100">
+                <a:solidFill>
+                  <a:srgbClr val="475569"/>
+                </a:solidFill>
+                <a:latin typeface="Arial"/>
+              </a:defRPr>
+            </a:pPr>
+            <a:r>
+              <a:t>•  XGBoost, Scikit-learn, Pandas &amp; Joblib</a:t>
+            </a:r>
+          </a:p>
+          <a:p>
+            <a:pPr>
+              <a:spcBef>
+                <a:spcPts val="300"/>
+              </a:spcBef>
+              <a:defRPr sz="1100">
+                <a:solidFill>
+                  <a:srgbClr val="475569"/>
+                </a:solidFill>
+                <a:latin typeface="Arial"/>
+              </a:defRPr>
+            </a:pPr>
+            <a:r>
+              <a:t>•  Three.js &amp; WebGL Canvas Renderer</a:t>
+            </a:r>
+          </a:p>
+          <a:p>
+            <a:pPr>
+              <a:spcBef>
+                <a:spcPts val="300"/>
+              </a:spcBef>
+              <a:defRPr sz="1100">
+                <a:solidFill>
+                  <a:srgbClr val="475569"/>
+                </a:solidFill>
+                <a:latin typeface="Arial"/>
+              </a:defRPr>
+            </a:pPr>
+            <a:r>
+              <a:t>•  Git &amp; GitHub</a:t>
+            </a:r>
+          </a:p>
+        </p:txBody>
+      </p:sp>
+    </p:spTree>
+  </p:cSld>
+  <p:clrMapOvr>
+    <a:masterClrMapping/>
+  </p:clrMapOvr>
+</p:sld>
+</file>
+
+<file path=ppt/slides/slide11.xml><?xml version="1.0" encoding="utf-8"?>
+<p:sld xmlns:a="http://schemas.openxmlformats.org/drawingml/2006/main" xmlns:p="http://schemas.openxmlformats.org/presentationml/2006/main" xmlns:r="http://schemas.openxmlformats.org/officeDocument/2006/relationships">
+  <p:cSld>
+    <p:spTree>
+      <p:nvGrpSpPr>
+        <p:cNvPr id="1" name=""/>
+        <p:cNvGrpSpPr/>
+        <p:nvPr/>
+      </p:nvGrpSpPr>
+      <p:grpSpPr/>
+      <p:sp>
+        <p:nvSpPr>
+          <p:cNvPr id="2" name="Right Triangle 1"/>
+          <p:cNvSpPr/>
+          <p:nvPr/>
+        </p:nvSpPr>
+        <p:spPr>
+          <a:xfrm rot="5400000">
+            <a:off x="10972800" y="0"/>
+            <a:ext cx="1218895" cy="2011680"/>
+          </a:xfrm>
+          <a:prstGeom prst="rtTriangle">
+            <a:avLst/>
+          </a:prstGeom>
+          <a:solidFill>
+            <a:srgbClr val="EA580C"/>
+          </a:solidFill>
+          <a:ln>
+            <a:noFill/>
+          </a:ln>
+        </p:spPr>
+        <p:style>
+          <a:lnRef idx="1">
+            <a:schemeClr val="accent1"/>
+          </a:lnRef>
+          <a:fillRef idx="3">
+            <a:schemeClr val="accent1"/>
+          </a:fillRef>
+          <a:effectRef idx="2">
+            <a:schemeClr val="accent1"/>
+          </a:effectRef>
+          <a:fontRef idx="minor">
+            <a:schemeClr val="lt1"/>
+          </a:fontRef>
+        </p:style>
+        <p:txBody>
+          <a:bodyPr rtlCol="0" anchor="ctr"/>
+          <a:lstStyle/>
+          <a:p>
+            <a:pPr algn="ctr"/>
+          </a:p>
+        </p:txBody>
+      </p:sp>
+      <p:sp>
+        <p:nvSpPr>
+          <p:cNvPr id="3" name="Right Triangle 2"/>
+          <p:cNvSpPr/>
+          <p:nvPr/>
+        </p:nvSpPr>
+        <p:spPr>
+          <a:xfrm rot="16200000">
+            <a:off x="0" y="4846320"/>
+            <a:ext cx="1097280" cy="2011680"/>
+          </a:xfrm>
+          <a:prstGeom prst="rtTriangle">
+            <a:avLst/>
+          </a:prstGeom>
+          <a:solidFill>
+            <a:srgbClr val="0F766E"/>
+          </a:solidFill>
+          <a:ln>
+            <a:noFill/>
+          </a:ln>
+        </p:spPr>
+        <p:style>
+          <a:lnRef idx="1">
+            <a:schemeClr val="accent1"/>
+          </a:lnRef>
+          <a:fillRef idx="3">
+            <a:schemeClr val="accent1"/>
+          </a:fillRef>
+          <a:effectRef idx="2">
+            <a:schemeClr val="accent1"/>
+          </a:effectRef>
+          <a:fontRef idx="minor">
+            <a:schemeClr val="lt1"/>
+          </a:fontRef>
+        </p:style>
+        <p:txBody>
+          <a:bodyPr rtlCol="0" anchor="ctr"/>
+          <a:lstStyle/>
+          <a:p>
+            <a:pPr algn="ctr"/>
+          </a:p>
+        </p:txBody>
+      </p:sp>
+      <p:sp>
+        <p:nvSpPr>
+          <p:cNvPr id="4" name="TextBox 3"/>
+          <p:cNvSpPr txBox="1"/>
+          <p:nvPr/>
+        </p:nvSpPr>
+        <p:spPr>
+          <a:xfrm>
+            <a:off x="365760" y="274320"/>
+            <a:ext cx="1828800" cy="548640"/>
+          </a:xfrm>
+          <a:prstGeom prst="rect">
+            <a:avLst/>
+          </a:prstGeom>
+          <a:noFill/>
+        </p:spPr>
+        <p:txBody>
+          <a:bodyPr wrap="none">
+            <a:spAutoFit/>
+          </a:bodyPr>
+          <a:lstStyle/>
+          <a:p>
+            <a:pPr>
+              <a:defRPr sz="1800" b="1">
+                <a:solidFill>
+                  <a:srgbClr val="0F172A"/>
+                </a:solidFill>
+                <a:latin typeface="Arial"/>
+              </a:defRPr>
+            </a:pPr>
+            <a:r>
+              <a:t>Kmit</a:t>
+            </a:r>
+          </a:p>
+        </p:txBody>
+      </p:sp>
+      <p:sp>
+        <p:nvSpPr>
+          <p:cNvPr id="5" name="TextBox 4"/>
+          <p:cNvSpPr txBox="1"/>
+          <p:nvPr/>
+        </p:nvSpPr>
+        <p:spPr>
+          <a:xfrm>
+            <a:off x="1097280" y="274320"/>
+            <a:ext cx="9601200" cy="731520"/>
+          </a:xfrm>
+          <a:prstGeom prst="rect">
+            <a:avLst/>
+          </a:prstGeom>
+          <a:noFill/>
+        </p:spPr>
+        <p:txBody>
+          <a:bodyPr wrap="none">
+            <a:spAutoFit/>
+          </a:bodyPr>
+          <a:lstStyle/>
+          <a:p>
+            <a:pPr>
+              <a:defRPr sz="2600" b="1">
+                <a:solidFill>
+                  <a:srgbClr val="DC2626"/>
+                </a:solidFill>
+                <a:latin typeface="Arial"/>
+              </a:defRPr>
+            </a:pPr>
+            <a:r>
+              <a:t>PROJECT OUTCOME</a:t>
+            </a:r>
+          </a:p>
+        </p:txBody>
+      </p:sp>
+      <p:sp>
+        <p:nvSpPr>
+          <p:cNvPr id="6" name="TextBox 5"/>
+          <p:cNvSpPr txBox="1"/>
+          <p:nvPr/>
+        </p:nvSpPr>
+        <p:spPr>
+          <a:xfrm>
+            <a:off x="1097280" y="1188720"/>
+            <a:ext cx="10058400" cy="5303520"/>
+          </a:xfrm>
+          <a:prstGeom prst="rect">
+            <a:avLst/>
+          </a:prstGeom>
+          <a:noFill/>
+        </p:spPr>
+        <p:txBody>
+          <a:bodyPr wrap="square">
+            <a:spAutoFit/>
+          </a:bodyPr>
+          <a:lstStyle/>
+          <a:p>
+            <a:pPr>
+              <a:defRPr sz="1400" b="1">
+                <a:solidFill>
+                  <a:srgbClr val="1E293B"/>
+                </a:solidFill>
+                <a:latin typeface="Arial"/>
+              </a:defRPr>
+            </a:pPr>
+            <a:r>
+              <a:t>Achievements</a:t>
+            </a:r>
+          </a:p>
+          <a:p>
+            <a:pPr>
+              <a:spcBef>
+                <a:spcPts val="300"/>
+              </a:spcBef>
+              <a:defRPr sz="1100">
+                <a:solidFill>
+                  <a:srgbClr val="475569"/>
+                </a:solidFill>
+                <a:latin typeface="Arial"/>
+              </a:defRPr>
+            </a:pPr>
+            <a:r>
+              <a:t>•  High-Risk Recall: 92.70% (165 of 178 dangerous collisions detected ahead of time).</a:t>
+            </a:r>
+          </a:p>
+          <a:p>
+            <a:pPr>
+              <a:spcBef>
+                <a:spcPts val="300"/>
+              </a:spcBef>
+              <a:defRPr sz="1100">
+                <a:solidFill>
+                  <a:srgbClr val="475569"/>
+                </a:solidFill>
+                <a:latin typeface="Arial"/>
+              </a:defRPr>
+            </a:pPr>
+            <a:r>
+              <a:t>•  Safety F2 Score: 89.77% (Recall weighted 2x to prioritize mission survival).</a:t>
+            </a:r>
+          </a:p>
+          <a:p>
+            <a:pPr>
+              <a:spcBef>
+                <a:spcPts val="300"/>
+              </a:spcBef>
+              <a:defRPr sz="1100">
+                <a:solidFill>
+                  <a:srgbClr val="475569"/>
+                </a:solidFill>
+                <a:latin typeface="Arial"/>
+              </a:defRPr>
+            </a:pPr>
+            <a:r>
+              <a:t>•  Precision: 79.71% (Only 42 false alarms across 1,989 safe events, eliminating the 85% false alarm flood).</a:t>
+            </a:r>
+          </a:p>
+          <a:p>
+            <a:pPr>
+              <a:spcBef>
+                <a:spcPts val="300"/>
+              </a:spcBef>
+              <a:defRPr sz="1100">
+                <a:solidFill>
+                  <a:srgbClr val="475569"/>
+                </a:solidFill>
+                <a:latin typeface="Arial"/>
+              </a:defRPr>
+            </a:pPr>
+            <a:r>
+              <a:t>•  Overall Accuracy: 97.46% (2,112 out of 2,167 events correctly classified).</a:t>
+            </a:r>
+          </a:p>
+          <a:p>
+            <a:pPr>
+              <a:spcBef>
+                <a:spcPts val="300"/>
+              </a:spcBef>
+              <a:defRPr sz="1100">
+                <a:solidFill>
+                  <a:srgbClr val="475569"/>
+                </a:solidFill>
+                <a:latin typeface="Arial"/>
+              </a:defRPr>
+            </a:pPr>
+            <a:r>
+              <a:t>•  100% Native Telemetry: Ingests raw CDMs directly without artificial synthetic features.</a:t>
+            </a:r>
+          </a:p>
+          <a:p>
+            <a:pPr>
+              <a:spcBef>
+                <a:spcPts val="300"/>
+              </a:spcBef>
+              <a:defRPr sz="1100">
+                <a:solidFill>
+                  <a:srgbClr val="475569"/>
+                </a:solidFill>
+                <a:latin typeface="Arial"/>
+              </a:defRPr>
+            </a:pPr>
+            <a:r>
+              <a:t>•  Actionable Lead Time: 3 to 5 days pre-TCA for Collision Avoidance Maneuver (CAM) execution.</a:t>
+            </a:r>
+          </a:p>
+          <a:p>
+            <a:pPr>
+              <a:spcBef>
+                <a:spcPts val="800"/>
+              </a:spcBef>
+              <a:defRPr sz="1400" b="1">
+                <a:solidFill>
+                  <a:srgbClr val="1E293B"/>
+                </a:solidFill>
+                <a:latin typeface="Arial"/>
+              </a:defRPr>
+            </a:pPr>
+            <a:r>
+              <a:t>Current Challenges</a:t>
+            </a:r>
+          </a:p>
+          <a:p>
+            <a:pPr>
+              <a:spcBef>
+                <a:spcPts val="300"/>
+              </a:spcBef>
+              <a:defRPr sz="1100">
+                <a:solidFill>
+                  <a:srgbClr val="475569"/>
+                </a:solidFill>
+                <a:latin typeface="Arial"/>
+              </a:defRPr>
+            </a:pPr>
+            <a:r>
+              <a:t>•  Sparse ground radar coverage causes intermittent tracking gaps in higher orbital inclinations.</a:t>
+            </a:r>
+          </a:p>
+          <a:p>
+            <a:pPr>
+              <a:spcBef>
+                <a:spcPts val="300"/>
+              </a:spcBef>
+              <a:defRPr sz="1100">
+                <a:solidFill>
+                  <a:srgbClr val="475569"/>
+                </a:solidFill>
+                <a:latin typeface="Arial"/>
+              </a:defRPr>
+            </a:pPr>
+            <a:r>
+              <a:t>•  Solar storm geomagnetic surges temporarily inflate atmospheric drag covariance errors.</a:t>
+            </a:r>
+          </a:p>
+          <a:p>
+            <a:pPr>
+              <a:spcBef>
+                <a:spcPts val="800"/>
+              </a:spcBef>
+              <a:defRPr sz="1400" b="1">
+                <a:solidFill>
+                  <a:srgbClr val="1E293B"/>
+                </a:solidFill>
+                <a:latin typeface="Arial"/>
+              </a:defRPr>
+            </a:pPr>
+            <a:r>
+              <a:t>Future Improvements</a:t>
+            </a:r>
+          </a:p>
+          <a:p>
+            <a:pPr>
+              <a:spcBef>
+                <a:spcPts val="300"/>
+              </a:spcBef>
+              <a:defRPr sz="1100">
+                <a:solidFill>
+                  <a:srgbClr val="475569"/>
+                </a:solidFill>
+                <a:latin typeface="Arial"/>
+              </a:defRPr>
+            </a:pPr>
+            <a:r>
+              <a:t>•  Autonomous CAM Delta-V burn calculation using Reinforcement Learning.</a:t>
+            </a:r>
+          </a:p>
+          <a:p>
+            <a:pPr>
+              <a:spcBef>
+                <a:spcPts val="300"/>
+              </a:spcBef>
+              <a:defRPr sz="1100">
+                <a:solidFill>
+                  <a:srgbClr val="475569"/>
+                </a:solidFill>
+                <a:latin typeface="Arial"/>
+              </a:defRPr>
+            </a:pPr>
+            <a:r>
+              <a:t>•  Live Space-Track / ESA API integration for continuous automatic ingest.</a:t>
+            </a:r>
+          </a:p>
+          <a:p>
+            <a:pPr>
+              <a:spcBef>
+                <a:spcPts val="300"/>
+              </a:spcBef>
+              <a:defRPr sz="1100">
+                <a:solidFill>
+                  <a:srgbClr val="475569"/>
+                </a:solidFill>
+                <a:latin typeface="Arial"/>
+              </a:defRPr>
+            </a:pPr>
+            <a:r>
+              <a:t>•  Constellation multi-satellite screening to avoid secondary induced conjunctions.</a:t>
+            </a:r>
+          </a:p>
+          <a:p>
+            <a:pPr>
+              <a:spcBef>
+                <a:spcPts val="800"/>
+              </a:spcBef>
+              <a:defRPr sz="1400" b="1">
+                <a:solidFill>
+                  <a:srgbClr val="1E293B"/>
+                </a:solidFill>
+                <a:latin typeface="Arial"/>
+              </a:defRPr>
+            </a:pPr>
+            <a:r>
+              <a:t>Paper:</a:t>
+            </a:r>
+          </a:p>
+          <a:p>
+            <a:pPr>
+              <a:spcBef>
+                <a:spcPts val="300"/>
+              </a:spcBef>
+              <a:defRPr sz="1100">
+                <a:solidFill>
+                  <a:srgbClr val="475569"/>
+                </a:solidFill>
+                <a:latin typeface="Arial"/>
+              </a:defRPr>
+            </a:pPr>
+            <a:r>
+              <a:t>•  Status: Research paper is complete and formatted for journal submission at docs/Prahari_Research_Paper.docx.</a:t>
+            </a:r>
+          </a:p>
+        </p:txBody>
+      </p:sp>
+    </p:spTree>
+  </p:cSld>
+  <p:clrMapOvr>
+    <a:masterClrMapping/>
+  </p:clrMapOvr>
+</p:sld>
+</file>
+
+<file path=ppt/slides/slide12.xml><?xml version="1.0" encoding="utf-8"?>
+<p:sld xmlns:a="http://schemas.openxmlformats.org/drawingml/2006/main" xmlns:p="http://schemas.openxmlformats.org/presentationml/2006/main" xmlns:r="http://schemas.openxmlformats.org/officeDocument/2006/relationships">
+  <p:cSld>
+    <p:spTree>
+      <p:nvGrpSpPr>
+        <p:cNvPr id="1" name=""/>
+        <p:cNvGrpSpPr/>
+        <p:nvPr/>
+      </p:nvGrpSpPr>
+      <p:grpSpPr/>
+      <p:sp>
+        <p:nvSpPr>
+          <p:cNvPr id="2" name="Right Triangle 1"/>
+          <p:cNvSpPr/>
+          <p:nvPr/>
+        </p:nvSpPr>
+        <p:spPr>
+          <a:xfrm rot="5400000">
+            <a:off x="10972800" y="0"/>
+            <a:ext cx="1218895" cy="2011680"/>
+          </a:xfrm>
+          <a:prstGeom prst="rtTriangle">
+            <a:avLst/>
+          </a:prstGeom>
+          <a:solidFill>
+            <a:srgbClr val="EA580C"/>
+          </a:solidFill>
+          <a:ln>
+            <a:noFill/>
+          </a:ln>
+        </p:spPr>
+        <p:style>
+          <a:lnRef idx="1">
+            <a:schemeClr val="accent1"/>
+          </a:lnRef>
+          <a:fillRef idx="3">
+            <a:schemeClr val="accent1"/>
+          </a:fillRef>
+          <a:effectRef idx="2">
+            <a:schemeClr val="accent1"/>
+          </a:effectRef>
+          <a:fontRef idx="minor">
+            <a:schemeClr val="lt1"/>
+          </a:fontRef>
+        </p:style>
+        <p:txBody>
+          <a:bodyPr rtlCol="0" anchor="ctr"/>
+          <a:lstStyle/>
+          <a:p>
+            <a:pPr algn="ctr"/>
+          </a:p>
+        </p:txBody>
+      </p:sp>
+      <p:sp>
+        <p:nvSpPr>
+          <p:cNvPr id="3" name="Right Triangle 2"/>
+          <p:cNvSpPr/>
+          <p:nvPr/>
+        </p:nvSpPr>
+        <p:spPr>
+          <a:xfrm rot="16200000">
+            <a:off x="0" y="4846320"/>
+            <a:ext cx="1097280" cy="2011680"/>
+          </a:xfrm>
+          <a:prstGeom prst="rtTriangle">
+            <a:avLst/>
+          </a:prstGeom>
+          <a:solidFill>
+            <a:srgbClr val="0F766E"/>
+          </a:solidFill>
+          <a:ln>
+            <a:noFill/>
+          </a:ln>
+        </p:spPr>
+        <p:style>
+          <a:lnRef idx="1">
+            <a:schemeClr val="accent1"/>
+          </a:lnRef>
+          <a:fillRef idx="3">
+            <a:schemeClr val="accent1"/>
+          </a:fillRef>
+          <a:effectRef idx="2">
+            <a:schemeClr val="accent1"/>
+          </a:effectRef>
+          <a:fontRef idx="minor">
+            <a:schemeClr val="lt1"/>
+          </a:fontRef>
+        </p:style>
+        <p:txBody>
+          <a:bodyPr rtlCol="0" anchor="ctr"/>
+          <a:lstStyle/>
+          <a:p>
+            <a:pPr algn="ctr"/>
+          </a:p>
+        </p:txBody>
+      </p:sp>
+      <p:sp>
+        <p:nvSpPr>
+          <p:cNvPr id="4" name="TextBox 3"/>
+          <p:cNvSpPr txBox="1"/>
+          <p:nvPr/>
+        </p:nvSpPr>
+        <p:spPr>
+          <a:xfrm>
+            <a:off x="365760" y="274320"/>
+            <a:ext cx="1828800" cy="548640"/>
+          </a:xfrm>
+          <a:prstGeom prst="rect">
+            <a:avLst/>
+          </a:prstGeom>
+          <a:noFill/>
+        </p:spPr>
+        <p:txBody>
+          <a:bodyPr wrap="none">
+            <a:spAutoFit/>
+          </a:bodyPr>
+          <a:lstStyle/>
+          <a:p>
+            <a:pPr>
+              <a:defRPr sz="1800" b="1">
+                <a:solidFill>
+                  <a:srgbClr val="0F172A"/>
+                </a:solidFill>
+                <a:latin typeface="Arial"/>
+              </a:defRPr>
+            </a:pPr>
+            <a:r>
+              <a:t>Kmit</a:t>
+            </a:r>
+          </a:p>
+        </p:txBody>
+      </p:sp>
+      <p:sp>
+        <p:nvSpPr>
+          <p:cNvPr id="5" name="TextBox 4"/>
+          <p:cNvSpPr txBox="1"/>
+          <p:nvPr/>
+        </p:nvSpPr>
+        <p:spPr>
+          <a:xfrm>
+            <a:off x="1097280" y="274320"/>
+            <a:ext cx="9601200" cy="731520"/>
+          </a:xfrm>
+          <a:prstGeom prst="rect">
+            <a:avLst/>
+          </a:prstGeom>
+          <a:noFill/>
+        </p:spPr>
+        <p:txBody>
+          <a:bodyPr wrap="none">
+            <a:spAutoFit/>
+          </a:bodyPr>
+          <a:lstStyle/>
+          <a:p>
+            <a:pPr>
+              <a:defRPr sz="2600" b="1">
+                <a:solidFill>
+                  <a:srgbClr val="DC2626"/>
+                </a:solidFill>
+                <a:latin typeface="Arial"/>
+              </a:defRPr>
+            </a:pPr>
+            <a:r>
+              <a:t>CONCLUSION</a:t>
+            </a:r>
+          </a:p>
+        </p:txBody>
+      </p:sp>
+      <p:sp>
+        <p:nvSpPr>
+          <p:cNvPr id="6" name="TextBox 5"/>
+          <p:cNvSpPr txBox="1"/>
+          <p:nvPr/>
+        </p:nvSpPr>
+        <p:spPr>
+          <a:xfrm>
+            <a:off x="1097280" y="1188720"/>
+            <a:ext cx="10058400" cy="5303520"/>
+          </a:xfrm>
+          <a:prstGeom prst="rect">
+            <a:avLst/>
+          </a:prstGeom>
+          <a:noFill/>
+        </p:spPr>
+        <p:txBody>
+          <a:bodyPr wrap="square">
+            <a:spAutoFit/>
+          </a:bodyPr>
+          <a:lstStyle/>
+          <a:p>
+            <a:pPr>
+              <a:defRPr sz="1400" b="1">
+                <a:solidFill>
+                  <a:srgbClr val="1E293B"/>
+                </a:solidFill>
+                <a:latin typeface="Arial"/>
+              </a:defRPr>
+            </a:pPr>
+            <a:r>
+              <a:t>Key Takeaways</a:t>
+            </a:r>
+          </a:p>
+          <a:p>
+            <a:pPr>
+              <a:spcBef>
+                <a:spcPts val="300"/>
+              </a:spcBef>
+              <a:defRPr sz="1100">
+                <a:solidFill>
+                  <a:srgbClr val="475569"/>
+                </a:solidFill>
+                <a:latin typeface="Arial"/>
+              </a:defRPr>
+            </a:pPr>
+            <a:r>
+              <a:t>•  Prahari transforms multi-pass raw CDM telemetry into high-recall, actionable collision warnings.</a:t>
+            </a:r>
+          </a:p>
+          <a:p>
+            <a:pPr>
+              <a:spcBef>
+                <a:spcPts val="300"/>
+              </a:spcBef>
+              <a:defRPr sz="1100">
+                <a:solidFill>
+                  <a:srgbClr val="475569"/>
+                </a:solidFill>
+                <a:latin typeface="Arial"/>
+              </a:defRPr>
+            </a:pPr>
+            <a:r>
+              <a:t>•  Asymmetric loss optimization successfully solves the class imbalance and catches 92.70% of collisions.</a:t>
+            </a:r>
+          </a:p>
+          <a:p>
+            <a:pPr>
+              <a:spcBef>
+                <a:spcPts val="300"/>
+              </a:spcBef>
+              <a:defRPr sz="1100">
+                <a:solidFill>
+                  <a:srgbClr val="475569"/>
+                </a:solidFill>
+                <a:latin typeface="Arial"/>
+              </a:defRPr>
+            </a:pPr>
+            <a:r>
+              <a:t>•  Eliminates the temporal blindness (TCA=0h) and 85% false alarm rate of published literature.</a:t>
+            </a:r>
+          </a:p>
+          <a:p>
+            <a:pPr>
+              <a:spcBef>
+                <a:spcPts val="300"/>
+              </a:spcBef>
+              <a:defRPr sz="1100">
+                <a:solidFill>
+                  <a:srgbClr val="475569"/>
+                </a:solidFill>
+                <a:latin typeface="Arial"/>
+              </a:defRPr>
+            </a:pPr>
+            <a:r>
+              <a:t>•  Interactive 3D Three.js mission control bridges machine learning with operational flight dynamics.</a:t>
+            </a:r>
+          </a:p>
+          <a:p>
+            <a:pPr>
+              <a:spcBef>
+                <a:spcPts val="800"/>
+              </a:spcBef>
+              <a:defRPr sz="1400" b="1">
+                <a:solidFill>
+                  <a:srgbClr val="1E293B"/>
+                </a:solidFill>
+                <a:latin typeface="Arial"/>
+              </a:defRPr>
+            </a:pPr>
+            <a:r>
+              <a:t>New Skills Learned</a:t>
+            </a:r>
+          </a:p>
+          <a:p>
+            <a:pPr>
+              <a:spcBef>
+                <a:spcPts val="300"/>
+              </a:spcBef>
+              <a:defRPr sz="1100">
+                <a:solidFill>
+                  <a:srgbClr val="475569"/>
+                </a:solidFill>
+                <a:latin typeface="Arial"/>
+              </a:defRPr>
+            </a:pPr>
+            <a:r>
+              <a:t>•  Space Situational Awareness (SSA) &amp; Astrodynamic Conjunction Assessment</a:t>
+            </a:r>
+          </a:p>
+          <a:p>
+            <a:pPr>
+              <a:spcBef>
+                <a:spcPts val="300"/>
+              </a:spcBef>
+              <a:defRPr sz="1100">
+                <a:solidFill>
+                  <a:srgbClr val="475569"/>
+                </a:solidFill>
+                <a:latin typeface="Arial"/>
+              </a:defRPr>
+            </a:pPr>
+            <a:r>
+              <a:t>•  Asymmetric Loss Formulation for Extreme Class Imbalance in Space Systems</a:t>
+            </a:r>
+          </a:p>
+          <a:p>
+            <a:pPr>
+              <a:spcBef>
+                <a:spcPts val="300"/>
+              </a:spcBef>
+              <a:defRPr sz="1100">
+                <a:solidFill>
+                  <a:srgbClr val="475569"/>
+                </a:solidFill>
+                <a:latin typeface="Arial"/>
+              </a:defRPr>
+            </a:pPr>
+            <a:r>
+              <a:t>•  High-Dimensional Telemetry Engineering on 100 Native Parameters</a:t>
+            </a:r>
+          </a:p>
+          <a:p>
+            <a:pPr>
+              <a:spcBef>
+                <a:spcPts val="300"/>
+              </a:spcBef>
+              <a:defRPr sz="1100">
+                <a:solidFill>
+                  <a:srgbClr val="475569"/>
+                </a:solidFill>
+                <a:latin typeface="Arial"/>
+              </a:defRPr>
+            </a:pPr>
+            <a:r>
+              <a:t>•  Full-Stack Modern Web Development (React 18, TypeScript, Vite, Tailwind CSS)</a:t>
+            </a:r>
+          </a:p>
+          <a:p>
+            <a:pPr>
+              <a:spcBef>
+                <a:spcPts val="300"/>
+              </a:spcBef>
+              <a:defRPr sz="1100">
+                <a:solidFill>
+                  <a:srgbClr val="475569"/>
+                </a:solidFill>
+                <a:latin typeface="Arial"/>
+              </a:defRPr>
+            </a:pPr>
+            <a:r>
+              <a:t>•  3D Orbital Graphics &amp; Covariance Ellipsoid Rendering (Three.js &amp; WebGL)</a:t>
+            </a:r>
+          </a:p>
+          <a:p>
+            <a:pPr>
+              <a:spcBef>
+                <a:spcPts val="300"/>
+              </a:spcBef>
+              <a:defRPr sz="1100">
+                <a:solidFill>
+                  <a:srgbClr val="475569"/>
+                </a:solidFill>
+                <a:latin typeface="Arial"/>
+              </a:defRPr>
+            </a:pPr>
+            <a:r>
+              <a:t>•  High-Performance Asynchronous Microservices (FastAPI &amp; Uvicorn)</a:t>
+            </a:r>
+          </a:p>
+          <a:p>
+            <a:pPr>
+              <a:spcBef>
+                <a:spcPts val="300"/>
+              </a:spcBef>
+              <a:defRPr sz="1100">
+                <a:solidFill>
+                  <a:srgbClr val="475569"/>
+                </a:solidFill>
+                <a:latin typeface="Arial"/>
+              </a:defRPr>
+            </a:pPr>
+            <a:r>
+              <a:t>•  Academic Research Paper Authoring &amp; Rigorous Empirical Benchmarking</a:t>
+            </a:r>
+          </a:p>
+        </p:txBody>
+      </p:sp>
+    </p:spTree>
+  </p:cSld>
+  <p:clrMapOvr>
+    <a:masterClrMapping/>
+  </p:clrMapOvr>
+</p:sld>
+</file>
+
+<file path=ppt/slides/slide13.xml><?xml version="1.0" encoding="utf-8"?>
+<p:sld xmlns:a="http://schemas.openxmlformats.org/drawingml/2006/main" xmlns:p="http://schemas.openxmlformats.org/presentationml/2006/main" xmlns:r="http://schemas.openxmlformats.org/officeDocument/2006/relationships">
+  <p:cSld>
+    <p:spTree>
+      <p:nvGrpSpPr>
+        <p:cNvPr id="1" name=""/>
+        <p:cNvGrpSpPr/>
+        <p:nvPr/>
+      </p:nvGrpSpPr>
+      <p:grpSpPr/>
+      <p:sp>
+        <p:nvSpPr>
+          <p:cNvPr id="2" name="Right Triangle 1"/>
+          <p:cNvSpPr/>
+          <p:nvPr/>
+        </p:nvSpPr>
+        <p:spPr>
+          <a:xfrm rot="5400000">
+            <a:off x="10972800" y="0"/>
+            <a:ext cx="1218895" cy="2011680"/>
+          </a:xfrm>
+          <a:prstGeom prst="rtTriangle">
+            <a:avLst/>
+          </a:prstGeom>
+          <a:solidFill>
+            <a:srgbClr val="EA580C"/>
+          </a:solidFill>
+          <a:ln>
+            <a:noFill/>
+          </a:ln>
+        </p:spPr>
+        <p:style>
+          <a:lnRef idx="1">
+            <a:schemeClr val="accent1"/>
+          </a:lnRef>
+          <a:fillRef idx="3">
+            <a:schemeClr val="accent1"/>
+          </a:fillRef>
+          <a:effectRef idx="2">
+            <a:schemeClr val="accent1"/>
+          </a:effectRef>
+          <a:fontRef idx="minor">
+            <a:schemeClr val="lt1"/>
+          </a:fontRef>
+        </p:style>
+        <p:txBody>
+          <a:bodyPr rtlCol="0" anchor="ctr"/>
+          <a:lstStyle/>
+          <a:p>
+            <a:pPr algn="ctr"/>
+          </a:p>
+        </p:txBody>
+      </p:sp>
+      <p:sp>
+        <p:nvSpPr>
+          <p:cNvPr id="3" name="Right Triangle 2"/>
+          <p:cNvSpPr/>
+          <p:nvPr/>
+        </p:nvSpPr>
+        <p:spPr>
+          <a:xfrm rot="16200000">
+            <a:off x="0" y="4846320"/>
+            <a:ext cx="1097280" cy="2011680"/>
+          </a:xfrm>
+          <a:prstGeom prst="rtTriangle">
+            <a:avLst/>
+          </a:prstGeom>
+          <a:solidFill>
+            <a:srgbClr val="0F766E"/>
+          </a:solidFill>
+          <a:ln>
+            <a:noFill/>
+          </a:ln>
+        </p:spPr>
+        <p:style>
+          <a:lnRef idx="1">
+            <a:schemeClr val="accent1"/>
+          </a:lnRef>
+          <a:fillRef idx="3">
+            <a:schemeClr val="accent1"/>
+          </a:fillRef>
+          <a:effectRef idx="2">
+            <a:schemeClr val="accent1"/>
+          </a:effectRef>
+          <a:fontRef idx="minor">
+            <a:schemeClr val="lt1"/>
+          </a:fontRef>
+        </p:style>
+        <p:txBody>
+          <a:bodyPr rtlCol="0" anchor="ctr"/>
+          <a:lstStyle/>
+          <a:p>
+            <a:pPr algn="ctr"/>
+          </a:p>
+        </p:txBody>
+      </p:sp>
+      <p:sp>
+        <p:nvSpPr>
+          <p:cNvPr id="4" name="TextBox 3"/>
+          <p:cNvSpPr txBox="1"/>
+          <p:nvPr/>
+        </p:nvSpPr>
+        <p:spPr>
+          <a:xfrm>
+            <a:off x="365760" y="274320"/>
+            <a:ext cx="1828800" cy="548640"/>
+          </a:xfrm>
+          <a:prstGeom prst="rect">
+            <a:avLst/>
+          </a:prstGeom>
+          <a:noFill/>
+        </p:spPr>
+        <p:txBody>
+          <a:bodyPr wrap="none">
+            <a:spAutoFit/>
+          </a:bodyPr>
+          <a:lstStyle/>
+          <a:p>
+            <a:pPr>
+              <a:defRPr sz="1800" b="1">
+                <a:solidFill>
+                  <a:srgbClr val="0F172A"/>
+                </a:solidFill>
+                <a:latin typeface="Arial"/>
+              </a:defRPr>
+            </a:pPr>
+            <a:r>
+              <a:t>Kmit</a:t>
+            </a:r>
+          </a:p>
+        </p:txBody>
+      </p:sp>
+      <p:sp>
+        <p:nvSpPr>
+          <p:cNvPr id="5" name="TextBox 4"/>
+          <p:cNvSpPr txBox="1"/>
+          <p:nvPr/>
+        </p:nvSpPr>
+        <p:spPr>
+          <a:xfrm>
+            <a:off x="1828800" y="2560320"/>
+            <a:ext cx="8531352" cy="1828800"/>
+          </a:xfrm>
+          <a:prstGeom prst="rect">
+            <a:avLst/>
+          </a:prstGeom>
+          <a:noFill/>
+        </p:spPr>
+        <p:txBody>
+          <a:bodyPr wrap="none">
+            <a:spAutoFit/>
+          </a:bodyPr>
+          <a:lstStyle/>
+          <a:p>
+            <a:pPr algn="ctr">
+              <a:defRPr sz="4800" b="1">
+                <a:solidFill>
+                  <a:srgbClr val="1E293B"/>
+                </a:solidFill>
+                <a:latin typeface="Arial"/>
+              </a:defRPr>
+            </a:pPr>
+            <a:r>
+              <a:t>Thank you!</a:t>
+            </a:r>
+          </a:p>
+          <a:p>
+            <a:pPr algn="ctr">
+              <a:spcBef>
+                <a:spcPts val="1600"/>
+              </a:spcBef>
+              <a:defRPr sz="1400">
+                <a:solidFill>
+                  <a:srgbClr val="475569"/>
+                </a:solidFill>
+                <a:latin typeface="Arial"/>
+              </a:defRPr>
+            </a:pPr>
+            <a:r>
+              <a:t>Questions &amp; Discussion</a:t>
+            </a:r>
+            <a:br/>
+            <a:br/>
+            <a:r>
+              <a:t>PRAHARI: Autonomous Spacecraft Conjunction Triage Platform</a:t>
+            </a:r>
+            <a:br/>
+            <a:r>
+              <a:t>https://github.com/akshaybharadwaj45/prahari</a:t>
             </a:r>
           </a:p>
         </p:txBody>
@@ -3530,14 +5053,6 @@
 <file path=ppt/slides/slide2.xml><?xml version="1.0" encoding="utf-8"?>
 <p:sld xmlns:a="http://schemas.openxmlformats.org/drawingml/2006/main" xmlns:p="http://schemas.openxmlformats.org/presentationml/2006/main" xmlns:r="http://schemas.openxmlformats.org/officeDocument/2006/relationships">
   <p:cSld>
-    <p:bg>
-      <p:bgPr>
-        <a:solidFill>
-          <a:srgbClr val="0B1120"/>
-        </a:solidFill>
-        <a:effectLst/>
-      </p:bgPr>
-    </p:bg>
     <p:spTree>
       <p:nvGrpSpPr>
         <p:cNvPr id="1" name=""/>
@@ -3547,95 +5062,23 @@
       <p:grpSpPr/>
       <p:sp>
         <p:nvSpPr>
-          <p:cNvPr id="2" name="TextBox 1"/>
-          <p:cNvSpPr txBox="1"/>
-          <p:nvPr/>
-        </p:nvSpPr>
-        <p:spPr>
-          <a:xfrm>
-            <a:off x="731520" y="365760"/>
-            <a:ext cx="10698480" cy="274320"/>
-          </a:xfrm>
-          <a:prstGeom prst="rect">
-            <a:avLst/>
-          </a:prstGeom>
-          <a:noFill/>
-        </p:spPr>
-        <p:txBody>
-          <a:bodyPr wrap="square">
-            <a:spAutoFit/>
-          </a:bodyPr>
-          <a:lstStyle/>
-          <a:p>
-            <a:pPr>
-              <a:defRPr sz="1000" b="1">
-                <a:solidFill>
-                  <a:srgbClr val="06B6D4"/>
-                </a:solidFill>
-              </a:defRPr>
-            </a:pPr>
-            <a:r>
-              <a:t>OPERATIONAL CONTEXT</a:t>
-            </a:r>
-          </a:p>
-        </p:txBody>
-      </p:sp>
-      <p:sp>
-        <p:nvSpPr>
-          <p:cNvPr id="3" name="TextBox 2"/>
-          <p:cNvSpPr txBox="1"/>
-          <p:nvPr/>
-        </p:nvSpPr>
-        <p:spPr>
-          <a:xfrm>
-            <a:off x="731520" y="594360"/>
-            <a:ext cx="10698480" cy="548640"/>
-          </a:xfrm>
-          <a:prstGeom prst="rect">
-            <a:avLst/>
-          </a:prstGeom>
-          <a:noFill/>
-        </p:spPr>
-        <p:txBody>
-          <a:bodyPr wrap="square">
-            <a:spAutoFit/>
-          </a:bodyPr>
-          <a:lstStyle/>
-          <a:p>
-            <a:pPr>
-              <a:defRPr sz="2200" b="1">
-                <a:solidFill>
-                  <a:srgbClr val="F1F5F9"/>
-                </a:solidFill>
-              </a:defRPr>
-            </a:pPr>
-            <a:r>
-              <a:t>Executive Summary: The Low Earth Orbit Conjunction Crisis</a:t>
-            </a:r>
-          </a:p>
-        </p:txBody>
-      </p:sp>
-      <p:sp>
-        <p:nvSpPr>
-          <p:cNvPr id="4" name="Rounded Rectangle 3"/>
+          <p:cNvPr id="2" name="Right Triangle 1"/>
           <p:cNvSpPr/>
           <p:nvPr/>
         </p:nvSpPr>
         <p:spPr>
-          <a:xfrm>
-            <a:off x="731520" y="1371600"/>
-            <a:ext cx="5212080" cy="4754880"/>
-          </a:xfrm>
-          <a:prstGeom prst="roundRect">
+          <a:xfrm rot="5400000">
+            <a:off x="10972800" y="0"/>
+            <a:ext cx="1218895" cy="2011680"/>
+          </a:xfrm>
+          <a:prstGeom prst="rtTriangle">
             <a:avLst/>
           </a:prstGeom>
           <a:solidFill>
-            <a:srgbClr val="161E31"/>
+            <a:srgbClr val="EA580C"/>
           </a:solidFill>
           <a:ln>
-            <a:solidFill>
-              <a:srgbClr val="2D3E5F"/>
-            </a:solidFill>
+            <a:noFill/>
           </a:ln>
         </p:spPr>
         <p:style>
@@ -3653,135 +5096,32 @@
           </a:fontRef>
         </p:style>
         <p:txBody>
-          <a:bodyPr rtlCol="0" anchor="ctr" wrap="square"/>
-          <a:lstStyle/>
-          <a:p>
-            <a:pPr algn="ctr">
-              <a:defRPr sz="1600" b="1">
-                <a:solidFill>
-                  <a:srgbClr val="F59E0B"/>
-                </a:solidFill>
-              </a:defRPr>
-            </a:pPr>
-            <a:r>
-              <a:t>The Orbital Traffic Challenge</a:t>
-            </a:r>
-          </a:p>
-          <a:p>
-            <a:pPr>
-              <a:spcBef>
-                <a:spcPts val="1000"/>
-              </a:spcBef>
-            </a:pPr>
-            <a:r>
-              <a:rPr b="1" sz="1200">
-                <a:solidFill>
-                  <a:srgbClr val="F1F5F9"/>
-                </a:solidFill>
-              </a:rPr>
-              <a:t>• Exponential LEO Congestion: </a:t>
-            </a:r>
-            <a:r>
-              <a:rPr sz="1200">
-                <a:solidFill>
-                  <a:srgbClr val="94A3B8"/>
-                </a:solidFill>
-              </a:rPr>
-              <a:t>Over 36,000 tracked debris objects and mega-constellations create thousands of close conjunctions weekly.</a:t>
-            </a:r>
-          </a:p>
-          <a:p>
-            <a:pPr>
-              <a:spcBef>
-                <a:spcPts val="1000"/>
-              </a:spcBef>
-            </a:pPr>
-            <a:r>
-              <a:rPr b="1" sz="1200">
-                <a:solidFill>
-                  <a:srgbClr val="F1F5F9"/>
-                </a:solidFill>
-              </a:rPr>
-              <a:t>• Asymmetric Operational Loss: </a:t>
-            </a:r>
-            <a:r>
-              <a:rPr sz="1200">
-                <a:solidFill>
-                  <a:srgbClr val="94A3B8"/>
-                </a:solidFill>
-              </a:rPr>
-              <a:t>A single False Negative (missed collision) results in total spacecraft destruction and catastrophic debris cascading (Kessler syndrome).</a:t>
-            </a:r>
-          </a:p>
-          <a:p>
-            <a:pPr>
-              <a:spcBef>
-                <a:spcPts val="1000"/>
-              </a:spcBef>
-            </a:pPr>
-            <a:r>
-              <a:rPr b="1" sz="1200">
-                <a:solidFill>
-                  <a:srgbClr val="F1F5F9"/>
-                </a:solidFill>
-              </a:rPr>
-              <a:t>• High Sensor Noise: </a:t>
-            </a:r>
-            <a:r>
-              <a:rPr sz="1200">
-                <a:solidFill>
-                  <a:srgbClr val="94A3B8"/>
-                </a:solidFill>
-              </a:rPr>
-              <a:t>Early radar observations (5-7 days pre-TCA) suffer from wide covariance uncertainty, making static risk estimation unreliable.</a:t>
-            </a:r>
-          </a:p>
-          <a:p>
-            <a:pPr>
-              <a:spcBef>
-                <a:spcPts val="1000"/>
-              </a:spcBef>
-            </a:pPr>
-            <a:r>
-              <a:rPr b="1" sz="1200">
-                <a:solidFill>
-                  <a:srgbClr val="F1F5F9"/>
-                </a:solidFill>
-              </a:rPr>
-              <a:t>• Alert Threshold Standard: </a:t>
-            </a:r>
-            <a:r>
-              <a:rPr sz="1200">
-                <a:solidFill>
-                  <a:srgbClr val="94A3B8"/>
-                </a:solidFill>
-              </a:rPr>
-              <a:t>The international high-risk alert boundary is log10(Pc) &gt;= -6.0 (1 in 1,000,000 probability).</a:t>
-            </a:r>
-          </a:p>
-        </p:txBody>
-      </p:sp>
-      <p:sp>
-        <p:nvSpPr>
-          <p:cNvPr id="5" name="Rounded Rectangle 4"/>
+          <a:bodyPr rtlCol="0" anchor="ctr"/>
+          <a:lstStyle/>
+          <a:p>
+            <a:pPr algn="ctr"/>
+          </a:p>
+        </p:txBody>
+      </p:sp>
+      <p:sp>
+        <p:nvSpPr>
+          <p:cNvPr id="3" name="Right Triangle 2"/>
           <p:cNvSpPr/>
           <p:nvPr/>
         </p:nvSpPr>
         <p:spPr>
-          <a:xfrm>
-            <a:off x="6217920" y="1371600"/>
-            <a:ext cx="5212080" cy="4754880"/>
-          </a:xfrm>
-          <a:prstGeom prst="roundRect">
+          <a:xfrm rot="16200000">
+            <a:off x="0" y="4846320"/>
+            <a:ext cx="1097280" cy="2011680"/>
+          </a:xfrm>
+          <a:prstGeom prst="rtTriangle">
             <a:avLst/>
           </a:prstGeom>
           <a:solidFill>
-            <a:srgbClr val="161E31"/>
+            <a:srgbClr val="0F766E"/>
           </a:solidFill>
           <a:ln>
-            <a:solidFill>
-              <a:srgbClr val="2D3E5F"/>
-            </a:solidFill>
+            <a:noFill/>
           </a:ln>
         </p:spPr>
         <p:style>
@@ -3799,110 +5139,312 @@
           </a:fontRef>
         </p:style>
         <p:txBody>
-          <a:bodyPr rtlCol="0" anchor="ctr" wrap="square"/>
-          <a:lstStyle/>
-          <a:p>
-            <a:pPr algn="ctr">
-              <a:defRPr sz="1600" b="1">
-                <a:solidFill>
-                  <a:srgbClr val="10B981"/>
-                </a:solidFill>
-              </a:defRPr>
-            </a:pPr>
-            <a:r>
-              <a:t>The Prahari Solution</a:t>
-            </a:r>
-          </a:p>
-          <a:p>
-            <a:pPr>
-              <a:spcBef>
-                <a:spcPts val="1000"/>
-              </a:spcBef>
-            </a:pPr>
-            <a:r>
-              <a:rPr b="1" sz="1200">
-                <a:solidFill>
-                  <a:srgbClr val="F1F5F9"/>
-                </a:solidFill>
-              </a:rPr>
-              <a:t>✓ 100% Native Dataset Telemetry: </a:t>
-            </a:r>
-            <a:r>
-              <a:rPr sz="1200">
-                <a:solidFill>
-                  <a:srgbClr val="94A3B8"/>
-                </a:solidFill>
-              </a:rPr>
-              <a:t>Ingests all 100 raw columns directly from standard CDMs without inventing opaque synthetic features.</a:t>
-            </a:r>
-          </a:p>
-          <a:p>
-            <a:pPr>
-              <a:spcBef>
-                <a:spcPts val="1000"/>
-              </a:spcBef>
-            </a:pPr>
-            <a:r>
-              <a:rPr b="1" sz="1200">
-                <a:solidFill>
-                  <a:srgbClr val="F1F5F9"/>
-                </a:solidFill>
-              </a:rPr>
-              <a:t>✓ High-Recall Objective (92.70%): </a:t>
-            </a:r>
-            <a:r>
-              <a:rPr sz="1200">
-                <a:solidFill>
-                  <a:srgbClr val="94A3B8"/>
-                </a:solidFill>
-              </a:rPr>
-              <a:t>Utilizes asymmetric sample weighting (w=30x) to ensure dangerous conjunctions are caught early.</a:t>
-            </a:r>
-          </a:p>
-          <a:p>
-            <a:pPr>
-              <a:spcBef>
-                <a:spcPts val="1000"/>
-              </a:spcBef>
-            </a:pPr>
-            <a:r>
-              <a:rPr b="1" sz="1200">
-                <a:solidFill>
-                  <a:srgbClr val="F1F5F9"/>
-                </a:solidFill>
-              </a:rPr>
-              <a:t>✓ Precision Breakthrough (79.71%): </a:t>
-            </a:r>
-            <a:r>
-              <a:rPr sz="1200">
-                <a:solidFill>
-                  <a:srgbClr val="94A3B8"/>
-                </a:solidFill>
-              </a:rPr>
-              <a:t>Only 42 false alarms out of 1,989 safe events, eliminating the 85% false alarm flood seen in prior literature.</a:t>
-            </a:r>
-          </a:p>
-          <a:p>
-            <a:pPr>
-              <a:spcBef>
-                <a:spcPts val="1000"/>
-              </a:spcBef>
-            </a:pPr>
-            <a:r>
-              <a:rPr b="1" sz="1200">
-                <a:solidFill>
-                  <a:srgbClr val="F1F5F9"/>
-                </a:solidFill>
-              </a:rPr>
-              <a:t>✓ Actionable Lead Time (3-5 Days): </a:t>
-            </a:r>
-            <a:r>
-              <a:rPr sz="1200">
-                <a:solidFill>
-                  <a:srgbClr val="94A3B8"/>
-                </a:solidFill>
-              </a:rPr>
-              <a:t>Provides flight dynamics teams ample time to validate orbits and command thruster burns.</a:t>
+          <a:bodyPr rtlCol="0" anchor="ctr"/>
+          <a:lstStyle/>
+          <a:p>
+            <a:pPr algn="ctr"/>
+          </a:p>
+        </p:txBody>
+      </p:sp>
+      <p:sp>
+        <p:nvSpPr>
+          <p:cNvPr id="4" name="TextBox 3"/>
+          <p:cNvSpPr txBox="1"/>
+          <p:nvPr/>
+        </p:nvSpPr>
+        <p:spPr>
+          <a:xfrm>
+            <a:off x="365760" y="274320"/>
+            <a:ext cx="1828800" cy="548640"/>
+          </a:xfrm>
+          <a:prstGeom prst="rect">
+            <a:avLst/>
+          </a:prstGeom>
+          <a:noFill/>
+        </p:spPr>
+        <p:txBody>
+          <a:bodyPr wrap="none">
+            <a:spAutoFit/>
+          </a:bodyPr>
+          <a:lstStyle/>
+          <a:p>
+            <a:pPr>
+              <a:defRPr sz="1800" b="1">
+                <a:solidFill>
+                  <a:srgbClr val="0F172A"/>
+                </a:solidFill>
+                <a:latin typeface="Arial"/>
+              </a:defRPr>
+            </a:pPr>
+            <a:r>
+              <a:t>Kmit</a:t>
+            </a:r>
+          </a:p>
+        </p:txBody>
+      </p:sp>
+      <p:sp>
+        <p:nvSpPr>
+          <p:cNvPr id="5" name="TextBox 4"/>
+          <p:cNvSpPr txBox="1"/>
+          <p:nvPr/>
+        </p:nvSpPr>
+        <p:spPr>
+          <a:xfrm>
+            <a:off x="1097280" y="274320"/>
+            <a:ext cx="9601200" cy="731520"/>
+          </a:xfrm>
+          <a:prstGeom prst="rect">
+            <a:avLst/>
+          </a:prstGeom>
+          <a:noFill/>
+        </p:spPr>
+        <p:txBody>
+          <a:bodyPr wrap="none">
+            <a:spAutoFit/>
+          </a:bodyPr>
+          <a:lstStyle/>
+          <a:p>
+            <a:pPr>
+              <a:defRPr sz="2600" b="1">
+                <a:solidFill>
+                  <a:srgbClr val="DC2626"/>
+                </a:solidFill>
+                <a:latin typeface="Arial"/>
+              </a:defRPr>
+            </a:pPr>
+            <a:r>
+              <a:t>CONTENTS</a:t>
+            </a:r>
+          </a:p>
+        </p:txBody>
+      </p:sp>
+      <p:sp>
+        <p:nvSpPr>
+          <p:cNvPr id="6" name="TextBox 5"/>
+          <p:cNvSpPr txBox="1"/>
+          <p:nvPr/>
+        </p:nvSpPr>
+        <p:spPr>
+          <a:xfrm>
+            <a:off x="1371600" y="1188720"/>
+            <a:ext cx="9144000" cy="5303520"/>
+          </a:xfrm>
+          <a:prstGeom prst="rect">
+            <a:avLst/>
+          </a:prstGeom>
+          <a:noFill/>
+        </p:spPr>
+        <p:txBody>
+          <a:bodyPr wrap="none">
+            <a:spAutoFit/>
+          </a:bodyPr>
+          <a:lstStyle/>
+          <a:p>
+            <a:pPr>
+              <a:spcBef>
+                <a:spcPts val="400"/>
+              </a:spcBef>
+              <a:defRPr sz="1300">
+                <a:solidFill>
+                  <a:srgbClr val="1E293B"/>
+                </a:solidFill>
+                <a:latin typeface="Arial"/>
+              </a:defRPr>
+            </a:pPr>
+            <a:r>
+              <a:t>1. Title Slide</a:t>
+            </a:r>
+          </a:p>
+          <a:p>
+            <a:pPr>
+              <a:spcBef>
+                <a:spcPts val="400"/>
+              </a:spcBef>
+              <a:defRPr sz="1300">
+                <a:solidFill>
+                  <a:srgbClr val="1E293B"/>
+                </a:solidFill>
+                <a:latin typeface="Arial"/>
+              </a:defRPr>
+            </a:pPr>
+            <a:r>
+              <a:t>2. Content</a:t>
+            </a:r>
+          </a:p>
+          <a:p>
+            <a:pPr>
+              <a:spcBef>
+                <a:spcPts val="400"/>
+              </a:spcBef>
+              <a:defRPr sz="1300">
+                <a:solidFill>
+                  <a:srgbClr val="1E293B"/>
+                </a:solidFill>
+                <a:latin typeface="Arial"/>
+              </a:defRPr>
+            </a:pPr>
+            <a:r>
+              <a:t>3. Introduction</a:t>
+            </a:r>
+          </a:p>
+          <a:p>
+            <a:pPr>
+              <a:spcBef>
+                <a:spcPts val="400"/>
+              </a:spcBef>
+              <a:defRPr sz="1300">
+                <a:solidFill>
+                  <a:srgbClr val="1E293B"/>
+                </a:solidFill>
+                <a:latin typeface="Arial"/>
+              </a:defRPr>
+            </a:pPr>
+            <a:r>
+              <a:t>4. Technology Used</a:t>
+            </a:r>
+          </a:p>
+          <a:p>
+            <a:pPr>
+              <a:spcBef>
+                <a:spcPts val="400"/>
+              </a:spcBef>
+              <a:defRPr sz="1300">
+                <a:solidFill>
+                  <a:srgbClr val="1E293B"/>
+                </a:solidFill>
+                <a:latin typeface="Arial"/>
+              </a:defRPr>
+            </a:pPr>
+            <a:r>
+              <a:t>5. Base Paper / Research Reference</a:t>
+            </a:r>
+          </a:p>
+          <a:p>
+            <a:pPr>
+              <a:spcBef>
+                <a:spcPts val="400"/>
+              </a:spcBef>
+              <a:defRPr sz="1300">
+                <a:solidFill>
+                  <a:srgbClr val="1E293B"/>
+                </a:solidFill>
+                <a:latin typeface="Arial"/>
+              </a:defRPr>
+            </a:pPr>
+            <a:r>
+              <a:t>6. Requirement</a:t>
+            </a:r>
+          </a:p>
+          <a:p>
+            <a:pPr>
+              <a:spcBef>
+                <a:spcPts val="400"/>
+              </a:spcBef>
+              <a:defRPr sz="1300">
+                <a:solidFill>
+                  <a:srgbClr val="1E293B"/>
+                </a:solidFill>
+                <a:latin typeface="Arial"/>
+              </a:defRPr>
+            </a:pPr>
+            <a:r>
+              <a:t>7. Design (System Architecture)</a:t>
+            </a:r>
+          </a:p>
+          <a:p>
+            <a:pPr>
+              <a:spcBef>
+                <a:spcPts val="400"/>
+              </a:spcBef>
+              <a:defRPr sz="1300">
+                <a:solidFill>
+                  <a:srgbClr val="1E293B"/>
+                </a:solidFill>
+                <a:latin typeface="Arial"/>
+              </a:defRPr>
+            </a:pPr>
+            <a:r>
+              <a:t>8. Telemetry &amp; Feature Architecture</a:t>
+            </a:r>
+          </a:p>
+          <a:p>
+            <a:pPr>
+              <a:spcBef>
+                <a:spcPts val="400"/>
+              </a:spcBef>
+              <a:defRPr sz="1300">
+                <a:solidFill>
+                  <a:srgbClr val="1E293B"/>
+                </a:solidFill>
+                <a:latin typeface="Arial"/>
+              </a:defRPr>
+            </a:pPr>
+            <a:r>
+              <a:t>9. Execution Flow &amp; Class Diagram</a:t>
+            </a:r>
+          </a:p>
+          <a:p>
+            <a:pPr>
+              <a:spcBef>
+                <a:spcPts val="400"/>
+              </a:spcBef>
+              <a:defRPr sz="1300">
+                <a:solidFill>
+                  <a:srgbClr val="1E293B"/>
+                </a:solidFill>
+                <a:latin typeface="Arial"/>
+              </a:defRPr>
+            </a:pPr>
+            <a:r>
+              <a:t>10. Development</a:t>
+            </a:r>
+          </a:p>
+          <a:p>
+            <a:pPr>
+              <a:spcBef>
+                <a:spcPts val="400"/>
+              </a:spcBef>
+              <a:defRPr sz="1300">
+                <a:solidFill>
+                  <a:srgbClr val="1E293B"/>
+                </a:solidFill>
+                <a:latin typeface="Arial"/>
+              </a:defRPr>
+            </a:pPr>
+            <a:r>
+              <a:t>11. Project Outcome</a:t>
+            </a:r>
+          </a:p>
+          <a:p>
+            <a:pPr>
+              <a:spcBef>
+                <a:spcPts val="400"/>
+              </a:spcBef>
+              <a:defRPr sz="1300">
+                <a:solidFill>
+                  <a:srgbClr val="1E293B"/>
+                </a:solidFill>
+                <a:latin typeface="Arial"/>
+              </a:defRPr>
+            </a:pPr>
+            <a:r>
+              <a:t>12. Conclusion</a:t>
+            </a:r>
+          </a:p>
+          <a:p>
+            <a:pPr>
+              <a:spcBef>
+                <a:spcPts val="400"/>
+              </a:spcBef>
+              <a:defRPr sz="1300">
+                <a:solidFill>
+                  <a:srgbClr val="1E293B"/>
+                </a:solidFill>
+                <a:latin typeface="Arial"/>
+              </a:defRPr>
+            </a:pPr>
+            <a:r>
+              <a:t>13. Thank you!</a:t>
             </a:r>
           </a:p>
         </p:txBody>
@@ -3918,14 +5460,6 @@
 <file path=ppt/slides/slide3.xml><?xml version="1.0" encoding="utf-8"?>
 <p:sld xmlns:a="http://schemas.openxmlformats.org/drawingml/2006/main" xmlns:p="http://schemas.openxmlformats.org/presentationml/2006/main" xmlns:r="http://schemas.openxmlformats.org/officeDocument/2006/relationships">
   <p:cSld>
-    <p:bg>
-      <p:bgPr>
-        <a:solidFill>
-          <a:srgbClr val="0B1120"/>
-        </a:solidFill>
-        <a:effectLst/>
-      </p:bgPr>
-    </p:bg>
     <p:spTree>
       <p:nvGrpSpPr>
         <p:cNvPr id="1" name=""/>
@@ -3935,95 +5469,23 @@
       <p:grpSpPr/>
       <p:sp>
         <p:nvSpPr>
-          <p:cNvPr id="2" name="TextBox 1"/>
-          <p:cNvSpPr txBox="1"/>
-          <p:nvPr/>
-        </p:nvSpPr>
-        <p:spPr>
-          <a:xfrm>
-            <a:off x="731520" y="365760"/>
-            <a:ext cx="10698480" cy="274320"/>
-          </a:xfrm>
-          <a:prstGeom prst="rect">
-            <a:avLst/>
-          </a:prstGeom>
-          <a:noFill/>
-        </p:spPr>
-        <p:txBody>
-          <a:bodyPr wrap="square">
-            <a:spAutoFit/>
-          </a:bodyPr>
-          <a:lstStyle/>
-          <a:p>
-            <a:pPr>
-              <a:defRPr sz="1000" b="1">
-                <a:solidFill>
-                  <a:srgbClr val="06B6D4"/>
-                </a:solidFill>
-              </a:defRPr>
-            </a:pPr>
-            <a:r>
-              <a:t>GAP ANALYSIS</a:t>
-            </a:r>
-          </a:p>
-        </p:txBody>
-      </p:sp>
-      <p:sp>
-        <p:nvSpPr>
-          <p:cNvPr id="3" name="TextBox 2"/>
-          <p:cNvSpPr txBox="1"/>
-          <p:nvPr/>
-        </p:nvSpPr>
-        <p:spPr>
-          <a:xfrm>
-            <a:off x="731520" y="594360"/>
-            <a:ext cx="10698480" cy="548640"/>
-          </a:xfrm>
-          <a:prstGeom prst="rect">
-            <a:avLst/>
-          </a:prstGeom>
-          <a:noFill/>
-        </p:spPr>
-        <p:txBody>
-          <a:bodyPr wrap="square">
-            <a:spAutoFit/>
-          </a:bodyPr>
-          <a:lstStyle/>
-          <a:p>
-            <a:pPr>
-              <a:defRPr sz="2200" b="1">
-                <a:solidFill>
-                  <a:srgbClr val="F1F5F9"/>
-                </a:solidFill>
-              </a:defRPr>
-            </a:pPr>
-            <a:r>
-              <a:t>Critical Gaps in Base Literature: Why Existing ML Methods Fail</a:t>
-            </a:r>
-          </a:p>
-        </p:txBody>
-      </p:sp>
-      <p:sp>
-        <p:nvSpPr>
-          <p:cNvPr id="4" name="Rounded Rectangle 3"/>
+          <p:cNvPr id="2" name="Right Triangle 1"/>
           <p:cNvSpPr/>
           <p:nvPr/>
         </p:nvSpPr>
         <p:spPr>
-          <a:xfrm>
-            <a:off x="731520" y="1371600"/>
-            <a:ext cx="10698480" cy="1463040"/>
-          </a:xfrm>
-          <a:prstGeom prst="roundRect">
+          <a:xfrm rot="5400000">
+            <a:off x="10972800" y="0"/>
+            <a:ext cx="1218895" cy="2011680"/>
+          </a:xfrm>
+          <a:prstGeom prst="rtTriangle">
             <a:avLst/>
           </a:prstGeom>
           <a:solidFill>
-            <a:srgbClr val="161E31"/>
+            <a:srgbClr val="EA580C"/>
           </a:solidFill>
           <a:ln>
-            <a:solidFill>
-              <a:srgbClr val="2D3E5F"/>
-            </a:solidFill>
+            <a:noFill/>
           </a:ln>
         </p:spPr>
         <p:style>
@@ -4041,96 +5503,32 @@
           </a:fontRef>
         </p:style>
         <p:txBody>
-          <a:bodyPr rtlCol="0" anchor="ctr" wrap="square"/>
+          <a:bodyPr rtlCol="0" anchor="ctr"/>
           <a:lstStyle/>
           <a:p>
             <a:pPr algn="ctr"/>
-            <a:r>
-              <a:rPr b="1" sz="1300">
-                <a:solidFill>
-                  <a:srgbClr val="EF4444"/>
-                </a:solidFill>
-              </a:rPr>
-              <a:t>GAP 1: TEMPORAL BLINDNESS AT TCA  |  </a:t>
-            </a:r>
-            <a:r>
-              <a:rPr i="1" sz="1100">
-                <a:solidFill>
-                  <a:srgbClr val="94A3B8"/>
-                </a:solidFill>
-              </a:rPr>
-              <a:t>Kalyanaraman et al. (EPJ Web of Conf. 2026)</a:t>
-            </a:r>
-          </a:p>
-          <a:p>
-            <a:pPr>
-              <a:spcBef>
-                <a:spcPts val="400"/>
-              </a:spcBef>
-            </a:pPr>
-            <a:r>
-              <a:rPr b="1" sz="1100">
-                <a:solidFill>
-                  <a:srgbClr val="F1F5F9"/>
-                </a:solidFill>
-              </a:rPr>
-              <a:t>• Literature Flaw: </a:t>
-            </a:r>
-            <a:r>
-              <a:rPr sz="1100">
-                <a:solidFill>
-                  <a:srgbClr val="94A3B8"/>
-                </a:solidFill>
-              </a:rPr>
-              <a:t>Evaluated classifiers strictly on 1 CDM snapshot recorded at TCA (0 hours lead time). In reality, chemical/electric thrusters require 24-72 hours for planning and burn execution. Zero-lead-time triage is operationally useless.</a:t>
-            </a:r>
-          </a:p>
-          <a:p>
-            <a:pPr>
-              <a:spcBef>
-                <a:spcPts val="300"/>
-              </a:spcBef>
-            </a:pPr>
-            <a:r>
-              <a:rPr b="1" sz="1100">
-                <a:solidFill>
-                  <a:srgbClr val="10B981"/>
-                </a:solidFill>
-              </a:rPr>
-              <a:t>• Prahari Solution: </a:t>
-            </a:r>
-            <a:r>
-              <a:rPr sz="1100">
-                <a:solidFill>
-                  <a:srgbClr val="F1F5F9"/>
-                </a:solidFill>
-              </a:rPr>
-              <a:t>Prahari provides 3 to 5 days of actionable early warning by learning from the multi-pass observation timeline.</a:t>
-            </a:r>
-          </a:p>
-        </p:txBody>
-      </p:sp>
-      <p:sp>
-        <p:nvSpPr>
-          <p:cNvPr id="5" name="Rounded Rectangle 4"/>
+          </a:p>
+        </p:txBody>
+      </p:sp>
+      <p:sp>
+        <p:nvSpPr>
+          <p:cNvPr id="3" name="Right Triangle 2"/>
           <p:cNvSpPr/>
           <p:nvPr/>
         </p:nvSpPr>
         <p:spPr>
-          <a:xfrm>
-            <a:off x="731520" y="2971800"/>
-            <a:ext cx="10698480" cy="1463040"/>
-          </a:xfrm>
-          <a:prstGeom prst="roundRect">
+          <a:xfrm rot="16200000">
+            <a:off x="0" y="4846320"/>
+            <a:ext cx="1097280" cy="2011680"/>
+          </a:xfrm>
+          <a:prstGeom prst="rtTriangle">
             <a:avLst/>
           </a:prstGeom>
           <a:solidFill>
-            <a:srgbClr val="161E31"/>
+            <a:srgbClr val="0F766E"/>
           </a:solidFill>
           <a:ln>
-            <a:solidFill>
-              <a:srgbClr val="2D3E5F"/>
-            </a:solidFill>
+            <a:noFill/>
           </a:ln>
         </p:spPr>
         <p:style>
@@ -4148,155 +5546,117 @@
           </a:fontRef>
         </p:style>
         <p:txBody>
-          <a:bodyPr rtlCol="0" anchor="ctr" wrap="square"/>
+          <a:bodyPr rtlCol="0" anchor="ctr"/>
           <a:lstStyle/>
           <a:p>
             <a:pPr algn="ctr"/>
-            <a:r>
-              <a:rPr b="1" sz="1300">
-                <a:solidFill>
-                  <a:srgbClr val="F59E0B"/>
-                </a:solidFill>
-              </a:rPr>
-              <a:t>GAP 2: FALSE ALARM FLOODING (85% FALSE ALARMS)  |  </a:t>
-            </a:r>
-            <a:r>
-              <a:rPr i="1" sz="1100">
-                <a:solidFill>
-                  <a:srgbClr val="94A3B8"/>
-                </a:solidFill>
-              </a:rPr>
-              <a:t>Kalyanaraman et al. (EPJ Web of Conf. 2026)</a:t>
-            </a:r>
-          </a:p>
-          <a:p>
-            <a:pPr>
-              <a:spcBef>
-                <a:spcPts val="400"/>
-              </a:spcBef>
-            </a:pPr>
-            <a:r>
-              <a:rPr b="1" sz="1100">
-                <a:solidFill>
-                  <a:srgbClr val="F1F5F9"/>
-                </a:solidFill>
-              </a:rPr>
-              <a:t>• Literature Flaw: </a:t>
-            </a:r>
-            <a:r>
-              <a:rPr sz="1100">
-                <a:solidFill>
-                  <a:srgbClr val="94A3B8"/>
-                </a:solidFill>
-              </a:rPr>
-              <a:t>Achieved only 15.0% Precision (85 out of 100 alerts were false alarms). Executing collision avoidance maneuvers on these false alarms would rapidly exhaust satellite stationkeeping fuel.</a:t>
-            </a:r>
-          </a:p>
-          <a:p>
-            <a:pPr>
-              <a:spcBef>
-                <a:spcPts val="300"/>
-              </a:spcBef>
-            </a:pPr>
-            <a:r>
-              <a:rPr b="1" sz="1100">
-                <a:solidFill>
-                  <a:srgbClr val="10B981"/>
-                </a:solidFill>
-              </a:rPr>
-              <a:t>• Prahari Solution: </a:t>
-            </a:r>
-            <a:r>
-              <a:rPr sz="1100">
-                <a:solidFill>
-                  <a:srgbClr val="F1F5F9"/>
-                </a:solidFill>
-              </a:rPr>
-              <a:t>Prahari achieves 79.71% Precision (only 42 false alarms across 1,989 safe events), cutting false alarms by ~75%.</a:t>
-            </a:r>
-          </a:p>
-        </p:txBody>
-      </p:sp>
-      <p:sp>
-        <p:nvSpPr>
-          <p:cNvPr id="6" name="Rounded Rectangle 5"/>
-          <p:cNvSpPr/>
+          </a:p>
+        </p:txBody>
+      </p:sp>
+      <p:sp>
+        <p:nvSpPr>
+          <p:cNvPr id="4" name="TextBox 3"/>
+          <p:cNvSpPr txBox="1"/>
           <p:nvPr/>
         </p:nvSpPr>
         <p:spPr>
           <a:xfrm>
-            <a:off x="731520" y="4572000"/>
-            <a:ext cx="10698480" cy="1463040"/>
-          </a:xfrm>
-          <a:prstGeom prst="roundRect">
+            <a:off x="365760" y="274320"/>
+            <a:ext cx="1828800" cy="548640"/>
+          </a:xfrm>
+          <a:prstGeom prst="rect">
             <a:avLst/>
           </a:prstGeom>
-          <a:solidFill>
-            <a:srgbClr val="161E31"/>
-          </a:solidFill>
-          <a:ln>
-            <a:solidFill>
-              <a:srgbClr val="2D3E5F"/>
-            </a:solidFill>
-          </a:ln>
-        </p:spPr>
-        <p:style>
-          <a:lnRef idx="1">
-            <a:schemeClr val="accent1"/>
-          </a:lnRef>
-          <a:fillRef idx="3">
-            <a:schemeClr val="accent1"/>
-          </a:fillRef>
-          <a:effectRef idx="2">
-            <a:schemeClr val="accent1"/>
-          </a:effectRef>
-          <a:fontRef idx="minor">
-            <a:schemeClr val="lt1"/>
-          </a:fontRef>
-        </p:style>
-        <p:txBody>
-          <a:bodyPr rtlCol="0" anchor="ctr" wrap="square"/>
-          <a:lstStyle/>
-          <a:p>
-            <a:pPr algn="ctr"/>
-            <a:r>
-              <a:rPr b="1" sz="1300">
-                <a:solidFill>
-                  <a:srgbClr val="06B6D4"/>
-                </a:solidFill>
-              </a:rPr>
-              <a:t>GAP 3: SYNTHETIC FEATURE BLOAT  |  </a:t>
-            </a:r>
-            <a:r>
-              <a:rPr i="1" sz="1100">
-                <a:solidFill>
-                  <a:srgbClr val="94A3B8"/>
-                </a:solidFill>
-              </a:rPr>
-              <a:t>ESA Kelvins Competition Winners</a:t>
-            </a:r>
-          </a:p>
-          <a:p>
-            <a:pPr>
-              <a:spcBef>
-                <a:spcPts val="400"/>
-              </a:spcBef>
-            </a:pPr>
-            <a:r>
-              <a:rPr b="1" sz="1100">
-                <a:solidFill>
-                  <a:srgbClr val="F1F5F9"/>
-                </a:solidFill>
-              </a:rPr>
-              <a:t>• Literature Flaw: </a:t>
-            </a:r>
-            <a:r>
-              <a:rPr sz="1100">
-                <a:solidFill>
-                  <a:srgbClr val="94A3B8"/>
-                </a:solidFill>
-              </a:rPr>
-              <a:t>Many previous competition solutions constructed complex synthetic indices that obscure astrodynamic interpretation and fail on real raw CDMs.</a:t>
+          <a:noFill/>
+        </p:spPr>
+        <p:txBody>
+          <a:bodyPr wrap="none">
+            <a:spAutoFit/>
+          </a:bodyPr>
+          <a:lstStyle/>
+          <a:p>
+            <a:pPr>
+              <a:defRPr sz="1800" b="1">
+                <a:solidFill>
+                  <a:srgbClr val="0F172A"/>
+                </a:solidFill>
+                <a:latin typeface="Arial"/>
+              </a:defRPr>
+            </a:pPr>
+            <a:r>
+              <a:t>Kmit</a:t>
+            </a:r>
+          </a:p>
+        </p:txBody>
+      </p:sp>
+      <p:sp>
+        <p:nvSpPr>
+          <p:cNvPr id="5" name="TextBox 4"/>
+          <p:cNvSpPr txBox="1"/>
+          <p:nvPr/>
+        </p:nvSpPr>
+        <p:spPr>
+          <a:xfrm>
+            <a:off x="1097280" y="274320"/>
+            <a:ext cx="9601200" cy="731520"/>
+          </a:xfrm>
+          <a:prstGeom prst="rect">
+            <a:avLst/>
+          </a:prstGeom>
+          <a:noFill/>
+        </p:spPr>
+        <p:txBody>
+          <a:bodyPr wrap="none">
+            <a:spAutoFit/>
+          </a:bodyPr>
+          <a:lstStyle/>
+          <a:p>
+            <a:pPr>
+              <a:defRPr sz="2600" b="1">
+                <a:solidFill>
+                  <a:srgbClr val="DC2626"/>
+                </a:solidFill>
+                <a:latin typeface="Arial"/>
+              </a:defRPr>
+            </a:pPr>
+            <a:r>
+              <a:t>INTRODUCTION</a:t>
+            </a:r>
+          </a:p>
+        </p:txBody>
+      </p:sp>
+      <p:sp>
+        <p:nvSpPr>
+          <p:cNvPr id="6" name="TextBox 5"/>
+          <p:cNvSpPr txBox="1"/>
+          <p:nvPr/>
+        </p:nvSpPr>
+        <p:spPr>
+          <a:xfrm>
+            <a:off x="1097280" y="1188720"/>
+            <a:ext cx="10058400" cy="5303520"/>
+          </a:xfrm>
+          <a:prstGeom prst="rect">
+            <a:avLst/>
+          </a:prstGeom>
+          <a:noFill/>
+        </p:spPr>
+        <p:txBody>
+          <a:bodyPr wrap="square">
+            <a:spAutoFit/>
+          </a:bodyPr>
+          <a:lstStyle/>
+          <a:p>
+            <a:pPr>
+              <a:defRPr sz="1400" b="1">
+                <a:solidFill>
+                  <a:srgbClr val="1E293B"/>
+                </a:solidFill>
+                <a:latin typeface="Arial"/>
+              </a:defRPr>
+            </a:pPr>
+            <a:r>
+              <a:t>Problem</a:t>
             </a:r>
           </a:p>
           <a:p>
@@ -4304,22 +5664,191 @@
               <a:spcBef>
                 <a:spcPts val="300"/>
               </a:spcBef>
-            </a:pPr>
-            <a:r>
-              <a:rPr b="1" sz="1100">
-                <a:solidFill>
-                  <a:srgbClr val="10B981"/>
-                </a:solidFill>
-              </a:rPr>
-              <a:t>• Prahari Solution: </a:t>
-            </a:r>
-            <a:r>
-              <a:rPr sz="1100">
-                <a:solidFill>
-                  <a:srgbClr val="F1F5F9"/>
-                </a:solidFill>
-              </a:rPr>
-              <a:t>Prahari uses all 100 native telemetry parameters directly with median imputation for 100% zero-crash reliability.</a:t>
+              <a:defRPr sz="1100">
+                <a:solidFill>
+                  <a:srgbClr val="475569"/>
+                </a:solidFill>
+                <a:latin typeface="Arial"/>
+              </a:defRPr>
+            </a:pPr>
+            <a:r>
+              <a:t>•  Over 36,000 tracked debris objects and mega-constellations create thousands of close orbital conjunctions weekly in Low Earth Orbit (LEO).</a:t>
+            </a:r>
+          </a:p>
+          <a:p>
+            <a:pPr>
+              <a:spcBef>
+                <a:spcPts val="300"/>
+              </a:spcBef>
+              <a:defRPr sz="1100">
+                <a:solidFill>
+                  <a:srgbClr val="475569"/>
+                </a:solidFill>
+                <a:latin typeface="Arial"/>
+              </a:defRPr>
+            </a:pPr>
+            <a:r>
+              <a:t>•  Missing a real collision event (False Negative) leads to permanent spacecraft destruction and runaway orbital debris cascading (Kessler syndrome).</a:t>
+            </a:r>
+          </a:p>
+          <a:p>
+            <a:pPr>
+              <a:spcBef>
+                <a:spcPts val="300"/>
+              </a:spcBef>
+              <a:defRPr sz="1100">
+                <a:solidFill>
+                  <a:srgbClr val="475569"/>
+                </a:solidFill>
+                <a:latin typeface="Arial"/>
+              </a:defRPr>
+            </a:pPr>
+            <a:r>
+              <a:t>•  Current manual screening of Conjunction Data Messages (CDMs) is time-consuming and vulnerable to human fatigue under high alert volumes.</a:t>
+            </a:r>
+          </a:p>
+          <a:p>
+            <a:pPr>
+              <a:spcBef>
+                <a:spcPts val="800"/>
+              </a:spcBef>
+              <a:defRPr sz="1400" b="1">
+                <a:solidFill>
+                  <a:srgbClr val="1E293B"/>
+                </a:solidFill>
+                <a:latin typeface="Arial"/>
+              </a:defRPr>
+            </a:pPr>
+            <a:r>
+              <a:t>Objective</a:t>
+            </a:r>
+          </a:p>
+          <a:p>
+            <a:pPr>
+              <a:spcBef>
+                <a:spcPts val="300"/>
+              </a:spcBef>
+              <a:defRPr sz="1100">
+                <a:solidFill>
+                  <a:srgbClr val="475569"/>
+                </a:solidFill>
+                <a:latin typeface="Arial"/>
+              </a:defRPr>
+            </a:pPr>
+            <a:r>
+              <a:t>•  Develop Prahari: an autonomous, high-recall spacecraft conjunction triage and decision-support system.</a:t>
+            </a:r>
+          </a:p>
+          <a:p>
+            <a:pPr>
+              <a:spcBef>
+                <a:spcPts val="300"/>
+              </a:spcBef>
+              <a:defRPr sz="1100">
+                <a:solidFill>
+                  <a:srgbClr val="475569"/>
+                </a:solidFill>
+                <a:latin typeface="Arial"/>
+              </a:defRPr>
+            </a:pPr>
+            <a:r>
+              <a:t>•  Ingest standard multi-pass CDMs to predict collision probability log10(Pc) with high precision and actionable early warning.</a:t>
+            </a:r>
+          </a:p>
+          <a:p>
+            <a:pPr>
+              <a:spcBef>
+                <a:spcPts val="300"/>
+              </a:spcBef>
+              <a:defRPr sz="1100">
+                <a:solidFill>
+                  <a:srgbClr val="475569"/>
+                </a:solidFill>
+                <a:latin typeface="Arial"/>
+              </a:defRPr>
+            </a:pPr>
+            <a:r>
+              <a:t>•  Eliminate false alarm floods and provide interactive 3D WebGL orbit visualization for flight safety operators.</a:t>
+            </a:r>
+          </a:p>
+          <a:p>
+            <a:pPr>
+              <a:spcBef>
+                <a:spcPts val="800"/>
+              </a:spcBef>
+              <a:defRPr sz="1400" b="1">
+                <a:solidFill>
+                  <a:srgbClr val="1E293B"/>
+                </a:solidFill>
+                <a:latin typeface="Arial"/>
+              </a:defRPr>
+            </a:pPr>
+            <a:r>
+              <a:t>Solution Impact</a:t>
+            </a:r>
+          </a:p>
+          <a:p>
+            <a:pPr>
+              <a:spcBef>
+                <a:spcPts val="300"/>
+              </a:spcBef>
+              <a:defRPr sz="1100">
+                <a:solidFill>
+                  <a:srgbClr val="475569"/>
+                </a:solidFill>
+                <a:latin typeface="Arial"/>
+              </a:defRPr>
+            </a:pPr>
+            <a:r>
+              <a:t>•  Achieves 92.70% High-Risk Recall (165/178 dangerous collisions detected at the official -6.0 alert threshold).</a:t>
+            </a:r>
+          </a:p>
+          <a:p>
+            <a:pPr>
+              <a:spcBef>
+                <a:spcPts val="300"/>
+              </a:spcBef>
+              <a:defRPr sz="1100">
+                <a:solidFill>
+                  <a:srgbClr val="475569"/>
+                </a:solidFill>
+                <a:latin typeface="Arial"/>
+              </a:defRPr>
+            </a:pPr>
+            <a:r>
+              <a:t>•  Reduces false alarms by ~75% (79.71% precision, only 42 false alarms vs 85% in published literature).</a:t>
+            </a:r>
+          </a:p>
+          <a:p>
+            <a:pPr>
+              <a:spcBef>
+                <a:spcPts val="300"/>
+              </a:spcBef>
+              <a:defRPr sz="1100">
+                <a:solidFill>
+                  <a:srgbClr val="475569"/>
+                </a:solidFill>
+                <a:latin typeface="Arial"/>
+              </a:defRPr>
+            </a:pPr>
+            <a:r>
+              <a:t>•  Provides 3 to 5 days of actionable lead time for Collision Avoidance Maneuver (CAM) thruster burn execution.</a:t>
+            </a:r>
+          </a:p>
+          <a:p>
+            <a:pPr>
+              <a:spcBef>
+                <a:spcPts val="300"/>
+              </a:spcBef>
+              <a:defRPr sz="1100">
+                <a:solidFill>
+                  <a:srgbClr val="475569"/>
+                </a:solidFill>
+                <a:latin typeface="Arial"/>
+              </a:defRPr>
+            </a:pPr>
+            <a:r>
+              <a:t>•  Enables automated triage and real-time 3D orbital encounter screening.</a:t>
             </a:r>
           </a:p>
         </p:txBody>
@@ -4335,14 +5864,6 @@
 <file path=ppt/slides/slide4.xml><?xml version="1.0" encoding="utf-8"?>
 <p:sld xmlns:a="http://schemas.openxmlformats.org/drawingml/2006/main" xmlns:p="http://schemas.openxmlformats.org/presentationml/2006/main" xmlns:r="http://schemas.openxmlformats.org/officeDocument/2006/relationships">
   <p:cSld>
-    <p:bg>
-      <p:bgPr>
-        <a:solidFill>
-          <a:srgbClr val="0B1120"/>
-        </a:solidFill>
-        <a:effectLst/>
-      </p:bgPr>
-    </p:bg>
     <p:spTree>
       <p:nvGrpSpPr>
         <p:cNvPr id="1" name=""/>
@@ -4352,95 +5873,23 @@
       <p:grpSpPr/>
       <p:sp>
         <p:nvSpPr>
-          <p:cNvPr id="2" name="TextBox 1"/>
-          <p:cNvSpPr txBox="1"/>
-          <p:nvPr/>
-        </p:nvSpPr>
-        <p:spPr>
-          <a:xfrm>
-            <a:off x="731520" y="365760"/>
-            <a:ext cx="10698480" cy="274320"/>
-          </a:xfrm>
-          <a:prstGeom prst="rect">
-            <a:avLst/>
-          </a:prstGeom>
-          <a:noFill/>
-        </p:spPr>
-        <p:txBody>
-          <a:bodyPr wrap="square">
-            <a:spAutoFit/>
-          </a:bodyPr>
-          <a:lstStyle/>
-          <a:p>
-            <a:pPr>
-              <a:defRPr sz="1000" b="1">
-                <a:solidFill>
-                  <a:srgbClr val="06B6D4"/>
-                </a:solidFill>
-              </a:defRPr>
-            </a:pPr>
-            <a:r>
-              <a:t>TELEMETRY INGESTION</a:t>
-            </a:r>
-          </a:p>
-        </p:txBody>
-      </p:sp>
-      <p:sp>
-        <p:nvSpPr>
-          <p:cNvPr id="3" name="TextBox 2"/>
-          <p:cNvSpPr txBox="1"/>
-          <p:nvPr/>
-        </p:nvSpPr>
-        <p:spPr>
-          <a:xfrm>
-            <a:off x="731520" y="594360"/>
-            <a:ext cx="10698480" cy="548640"/>
-          </a:xfrm>
-          <a:prstGeom prst="rect">
-            <a:avLst/>
-          </a:prstGeom>
-          <a:noFill/>
-        </p:spPr>
-        <p:txBody>
-          <a:bodyPr wrap="square">
-            <a:spAutoFit/>
-          </a:bodyPr>
-          <a:lstStyle/>
-          <a:p>
-            <a:pPr>
-              <a:defRPr sz="2200" b="1">
-                <a:solidFill>
-                  <a:srgbClr val="F1F5F9"/>
-                </a:solidFill>
-              </a:defRPr>
-            </a:pPr>
-            <a:r>
-              <a:t>Input Space: 100 Native Telemetry Parameters from Standard CDMs</a:t>
-            </a:r>
-          </a:p>
-        </p:txBody>
-      </p:sp>
-      <p:sp>
-        <p:nvSpPr>
-          <p:cNvPr id="4" name="Rounded Rectangle 3"/>
+          <p:cNvPr id="2" name="Right Triangle 1"/>
           <p:cNvSpPr/>
           <p:nvPr/>
         </p:nvSpPr>
         <p:spPr>
-          <a:xfrm>
-            <a:off x="731520" y="1371600"/>
-            <a:ext cx="2560320" cy="4937760"/>
-          </a:xfrm>
-          <a:prstGeom prst="roundRect">
+          <a:xfrm rot="5400000">
+            <a:off x="10972800" y="0"/>
+            <a:ext cx="1218895" cy="2011680"/>
+          </a:xfrm>
+          <a:prstGeom prst="rtTriangle">
             <a:avLst/>
           </a:prstGeom>
           <a:solidFill>
-            <a:srgbClr val="161E31"/>
+            <a:srgbClr val="EA580C"/>
           </a:solidFill>
           <a:ln>
-            <a:solidFill>
-              <a:srgbClr val="2D3E5F"/>
-            </a:solidFill>
+            <a:noFill/>
           </a:ln>
         </p:spPr>
         <p:style>
@@ -4458,193 +5907,32 @@
           </a:fontRef>
         </p:style>
         <p:txBody>
-          <a:bodyPr rtlCol="0" anchor="ctr" wrap="square"/>
-          <a:lstStyle/>
-          <a:p>
-            <a:pPr algn="ctr">
-              <a:defRPr sz="1300" b="1">
-                <a:solidFill>
-                  <a:srgbClr val="06B6D4"/>
-                </a:solidFill>
-              </a:defRPr>
-            </a:pPr>
-            <a:r>
-              <a:t>1. Orbital Kinematics (20 Features)</a:t>
-            </a:r>
-          </a:p>
-          <a:p>
-            <a:pPr>
-              <a:spcBef>
-                <a:spcPts val="400"/>
-              </a:spcBef>
-            </a:pPr>
-            <a:r>
-              <a:rPr sz="1000">
-                <a:solidFill>
-                  <a:srgbClr val="94A3B8"/>
-                </a:solidFill>
-              </a:rPr>
-              <a:t>• 3D Euclidean Miss Distance (d_miss)</a:t>
-            </a:r>
-          </a:p>
-          <a:p>
-            <a:pPr>
-              <a:spcBef>
-                <a:spcPts val="400"/>
-              </a:spcBef>
-            </a:pPr>
-            <a:r>
-              <a:rPr sz="1000">
-                <a:solidFill>
-                  <a:srgbClr val="94A3B8"/>
-                </a:solidFill>
-              </a:rPr>
-              <a:t>• Relative Velocity Magnitude (v_rel)</a:t>
-            </a:r>
-          </a:p>
-          <a:p>
-            <a:pPr>
-              <a:spcBef>
-                <a:spcPts val="400"/>
-              </a:spcBef>
-            </a:pPr>
-            <a:r>
-              <a:rPr sz="1000">
-                <a:solidFill>
-                  <a:srgbClr val="94A3B8"/>
-                </a:solidFill>
-              </a:rPr>
-              <a:t>• Relative Position Vector: [r_R, r_T, r_N]</a:t>
-            </a:r>
-          </a:p>
-          <a:p>
-            <a:pPr>
-              <a:spcBef>
-                <a:spcPts val="400"/>
-              </a:spcBef>
-            </a:pPr>
-            <a:r>
-              <a:rPr sz="1000">
-                <a:solidFill>
-                  <a:srgbClr val="94A3B8"/>
-                </a:solidFill>
-              </a:rPr>
-              <a:t>• Relative Velocity Vector: [v_R, v_T, v_N]</a:t>
-            </a:r>
-          </a:p>
-          <a:p>
-            <a:pPr>
-              <a:spcBef>
-                <a:spcPts val="400"/>
-              </a:spcBef>
-            </a:pPr>
-            <a:r>
-              <a:rPr sz="1000">
-                <a:solidFill>
-                  <a:srgbClr val="94A3B8"/>
-                </a:solidFill>
-              </a:rPr>
-              <a:t>• Target &amp; Chaser Semi-Major Axis (sma)</a:t>
-            </a:r>
-          </a:p>
-          <a:p>
-            <a:pPr>
-              <a:spcBef>
-                <a:spcPts val="400"/>
-              </a:spcBef>
-            </a:pPr>
-            <a:r>
-              <a:rPr sz="1000">
-                <a:solidFill>
-                  <a:srgbClr val="94A3B8"/>
-                </a:solidFill>
-              </a:rPr>
-              <a:t>• Target &amp; Chaser Eccentricity (ecc)</a:t>
-            </a:r>
-          </a:p>
-          <a:p>
-            <a:pPr>
-              <a:spcBef>
-                <a:spcPts val="400"/>
-              </a:spcBef>
-            </a:pPr>
-            <a:r>
-              <a:rPr sz="1000">
-                <a:solidFill>
-                  <a:srgbClr val="94A3B8"/>
-                </a:solidFill>
-              </a:rPr>
-              <a:t>• Target &amp; Chaser Inclination (inc)</a:t>
-            </a:r>
-          </a:p>
-          <a:p>
-            <a:pPr>
-              <a:spcBef>
-                <a:spcPts val="400"/>
-              </a:spcBef>
-            </a:pPr>
-            <a:r>
-              <a:rPr sz="1000">
-                <a:solidFill>
-                  <a:srgbClr val="94A3B8"/>
-                </a:solidFill>
-              </a:rPr>
-              <a:t>• Target &amp; Chaser Apogee &amp; Perigee (h_apo, h_per)</a:t>
-            </a:r>
-          </a:p>
-          <a:p>
-            <a:pPr>
-              <a:spcBef>
-                <a:spcPts val="400"/>
-              </a:spcBef>
-            </a:pPr>
-            <a:r>
-              <a:rPr sz="1000">
-                <a:solidFill>
-                  <a:srgbClr val="94A3B8"/>
-                </a:solidFill>
-              </a:rPr>
-              <a:t>• Time to Conjunction Epoch (time_to_tca)</a:t>
-            </a:r>
-          </a:p>
-          <a:p>
-            <a:pPr>
-              <a:spcBef>
-                <a:spcPts val="400"/>
-              </a:spcBef>
-            </a:pPr>
-            <a:r>
-              <a:rPr sz="1000">
-                <a:solidFill>
-                  <a:srgbClr val="94A3B8"/>
-                </a:solidFill>
-              </a:rPr>
-              <a:t>• Joint Mahalanobis Statistical Distance</a:t>
-            </a:r>
-          </a:p>
-        </p:txBody>
-      </p:sp>
-      <p:sp>
-        <p:nvSpPr>
-          <p:cNvPr id="5" name="Rounded Rectangle 4"/>
+          <a:bodyPr rtlCol="0" anchor="ctr"/>
+          <a:lstStyle/>
+          <a:p>
+            <a:pPr algn="ctr"/>
+          </a:p>
+        </p:txBody>
+      </p:sp>
+      <p:sp>
+        <p:nvSpPr>
+          <p:cNvPr id="3" name="Right Triangle 2"/>
           <p:cNvSpPr/>
           <p:nvPr/>
         </p:nvSpPr>
         <p:spPr>
-          <a:xfrm>
-            <a:off x="3429000" y="1371600"/>
-            <a:ext cx="2560320" cy="4937760"/>
-          </a:xfrm>
-          <a:prstGeom prst="roundRect">
+          <a:xfrm rot="16200000">
+            <a:off x="0" y="4846320"/>
+            <a:ext cx="1097280" cy="2011680"/>
+          </a:xfrm>
+          <a:prstGeom prst="rtTriangle">
             <a:avLst/>
           </a:prstGeom>
           <a:solidFill>
-            <a:srgbClr val="161E31"/>
+            <a:srgbClr val="0F766E"/>
           </a:solidFill>
           <a:ln>
-            <a:solidFill>
-              <a:srgbClr val="2D3E5F"/>
-            </a:solidFill>
+            <a:noFill/>
           </a:ln>
         </p:spPr>
         <p:style>
@@ -4662,411 +5950,309 @@
           </a:fontRef>
         </p:style>
         <p:txBody>
-          <a:bodyPr rtlCol="0" anchor="ctr" wrap="square"/>
-          <a:lstStyle/>
-          <a:p>
-            <a:pPr algn="ctr">
-              <a:defRPr sz="1300" b="1">
-                <a:solidFill>
-                  <a:srgbClr val="10B981"/>
-                </a:solidFill>
-              </a:defRPr>
-            </a:pPr>
-            <a:r>
-              <a:t>2. Covariance &amp; Dispersion (36 Features)</a:t>
-            </a:r>
-          </a:p>
-          <a:p>
-            <a:pPr>
-              <a:spcBef>
-                <a:spcPts val="400"/>
-              </a:spcBef>
-            </a:pPr>
-            <a:r>
-              <a:rPr sz="1000">
-                <a:solidFill>
-                  <a:srgbClr val="94A3B8"/>
-                </a:solidFill>
-              </a:rPr>
-              <a:t>• Target 1-Sigma Position Errors: [t_sigma_r, t, n]</a:t>
-            </a:r>
-          </a:p>
-          <a:p>
-            <a:pPr>
-              <a:spcBef>
-                <a:spcPts val="400"/>
-              </a:spcBef>
-            </a:pPr>
-            <a:r>
-              <a:rPr sz="1000">
-                <a:solidFill>
-                  <a:srgbClr val="94A3B8"/>
-                </a:solidFill>
-              </a:rPr>
-              <a:t>• Chaser 1-Sigma Position Errors: [c_sigma_r, t, n]</a:t>
-            </a:r>
-          </a:p>
-          <a:p>
-            <a:pPr>
-              <a:spcBef>
-                <a:spcPts val="400"/>
-              </a:spcBef>
-            </a:pPr>
-            <a:r>
-              <a:rPr sz="1000">
-                <a:solidFill>
-                  <a:srgbClr val="94A3B8"/>
-                </a:solidFill>
-              </a:rPr>
-              <a:t>• Target 1-Sigma Velocity Errors: [t_sigma_rdot, tdot, ndot]</a:t>
-            </a:r>
-          </a:p>
-          <a:p>
-            <a:pPr>
-              <a:spcBef>
-                <a:spcPts val="400"/>
-              </a:spcBef>
-            </a:pPr>
-            <a:r>
-              <a:rPr sz="1000">
-                <a:solidFill>
-                  <a:srgbClr val="94A3B8"/>
-                </a:solidFill>
-              </a:rPr>
-              <a:t>• Chaser 1-Sigma Velocity Errors: [c_sigma_rdot, tdot, ndot]</a:t>
-            </a:r>
-          </a:p>
-          <a:p>
-            <a:pPr>
-              <a:spcBef>
-                <a:spcPts val="400"/>
-              </a:spcBef>
-            </a:pPr>
-            <a:r>
-              <a:rPr sz="1000">
-                <a:solidFill>
-                  <a:srgbClr val="94A3B8"/>
-                </a:solidFill>
-              </a:rPr>
-              <a:t>• Target 3D Covariance Determinant (t_det in m^6)</a:t>
-            </a:r>
-          </a:p>
-          <a:p>
-            <a:pPr>
-              <a:spcBef>
-                <a:spcPts val="400"/>
-              </a:spcBef>
-            </a:pPr>
-            <a:r>
-              <a:rPr sz="1000">
-                <a:solidFill>
-                  <a:srgbClr val="94A3B8"/>
-                </a:solidFill>
-              </a:rPr>
-              <a:t>• Chaser 3D Covariance Determinant (c_det in m^6)</a:t>
-            </a:r>
-          </a:p>
-          <a:p>
-            <a:pPr>
-              <a:spcBef>
-                <a:spcPts val="400"/>
-              </a:spcBef>
-            </a:pPr>
-            <a:r>
-              <a:rPr sz="1000">
-                <a:solidFill>
-                  <a:srgbClr val="94A3B8"/>
-                </a:solidFill>
-              </a:rPr>
-              <a:t>• 18 Directional RTN Cross-Correlation Terms (t_ct_r, t_cn_r, t_cn_t, c_ct_r, etc.)</a:t>
-            </a:r>
-          </a:p>
-        </p:txBody>
-      </p:sp>
-      <p:sp>
-        <p:nvSpPr>
-          <p:cNvPr id="6" name="Rounded Rectangle 5"/>
-          <p:cNvSpPr/>
+          <a:bodyPr rtlCol="0" anchor="ctr"/>
+          <a:lstStyle/>
+          <a:p>
+            <a:pPr algn="ctr"/>
+          </a:p>
+        </p:txBody>
+      </p:sp>
+      <p:sp>
+        <p:nvSpPr>
+          <p:cNvPr id="4" name="TextBox 3"/>
+          <p:cNvSpPr txBox="1"/>
           <p:nvPr/>
         </p:nvSpPr>
         <p:spPr>
           <a:xfrm>
-            <a:off x="6126480" y="1371600"/>
-            <a:ext cx="2560320" cy="4937760"/>
-          </a:xfrm>
-          <a:prstGeom prst="roundRect">
+            <a:off x="365760" y="274320"/>
+            <a:ext cx="1828800" cy="548640"/>
+          </a:xfrm>
+          <a:prstGeom prst="rect">
             <a:avLst/>
           </a:prstGeom>
-          <a:solidFill>
-            <a:srgbClr val="161E31"/>
-          </a:solidFill>
-          <a:ln>
-            <a:solidFill>
-              <a:srgbClr val="2D3E5F"/>
-            </a:solidFill>
-          </a:ln>
-        </p:spPr>
-        <p:style>
-          <a:lnRef idx="1">
-            <a:schemeClr val="accent1"/>
-          </a:lnRef>
-          <a:fillRef idx="3">
-            <a:schemeClr val="accent1"/>
-          </a:fillRef>
-          <a:effectRef idx="2">
-            <a:schemeClr val="accent1"/>
-          </a:effectRef>
-          <a:fontRef idx="minor">
-            <a:schemeClr val="lt1"/>
-          </a:fontRef>
-        </p:style>
-        <p:txBody>
-          <a:bodyPr rtlCol="0" anchor="ctr" wrap="square"/>
-          <a:lstStyle/>
-          <a:p>
-            <a:pPr algn="ctr">
-              <a:defRPr sz="1300" b="1">
-                <a:solidFill>
-                  <a:srgbClr val="F59E0B"/>
-                </a:solidFill>
-              </a:defRPr>
-            </a:pPr>
-            <a:r>
-              <a:t>3. Solar &amp; Space Weather (4 Features)</a:t>
-            </a:r>
-          </a:p>
-          <a:p>
-            <a:pPr>
-              <a:spcBef>
-                <a:spcPts val="400"/>
-              </a:spcBef>
-            </a:pPr>
-            <a:r>
-              <a:rPr sz="1000">
-                <a:solidFill>
-                  <a:srgbClr val="94A3B8"/>
-                </a:solidFill>
-              </a:rPr>
-              <a:t>• F10: Daily Solar Radio Flux (10.7 cm, 2800 MHz)</a:t>
-            </a:r>
-          </a:p>
-          <a:p>
-            <a:pPr>
-              <a:spcBef>
-                <a:spcPts val="400"/>
-              </a:spcBef>
-            </a:pPr>
-            <a:r>
-              <a:rPr sz="1000">
-                <a:solidFill>
-                  <a:srgbClr val="94A3B8"/>
-                </a:solidFill>
-              </a:rPr>
-              <a:t>• F3M: Smoothed 81-Day Centered Solar Flux</a:t>
-            </a:r>
-          </a:p>
-          <a:p>
-            <a:pPr>
-              <a:spcBef>
-                <a:spcPts val="400"/>
-              </a:spcBef>
-            </a:pPr>
-            <a:r>
-              <a:rPr sz="1000">
-                <a:solidFill>
-                  <a:srgbClr val="94A3B8"/>
-                </a:solidFill>
-              </a:rPr>
-              <a:t>• SSN: International Sunspot Count</a:t>
-            </a:r>
-          </a:p>
-          <a:p>
-            <a:pPr>
-              <a:spcBef>
-                <a:spcPts val="400"/>
-              </a:spcBef>
-            </a:pPr>
-            <a:r>
-              <a:rPr sz="1000">
-                <a:solidFill>
-                  <a:srgbClr val="94A3B8"/>
-                </a:solidFill>
-              </a:rPr>
-              <a:t>• AP: Planetary Geomagnetic Activity Index</a:t>
-            </a:r>
-          </a:p>
-          <a:p>
-            <a:pPr>
-              <a:spcBef>
-                <a:spcPts val="400"/>
-              </a:spcBef>
-            </a:pPr>
-            <a:r>
-              <a:rPr sz="1000">
-                <a:solidFill>
-                  <a:srgbClr val="F59E0B"/>
-                </a:solidFill>
-              </a:rPr>
-              <a:t>• -&gt; Accurately captures thermospheric atmospheric density expansion causing along-track orbit decay.</a:t>
-            </a:r>
-          </a:p>
-        </p:txBody>
-      </p:sp>
-      <p:sp>
-        <p:nvSpPr>
-          <p:cNvPr id="7" name="Rounded Rectangle 6"/>
-          <p:cNvSpPr/>
+          <a:noFill/>
+        </p:spPr>
+        <p:txBody>
+          <a:bodyPr wrap="none">
+            <a:spAutoFit/>
+          </a:bodyPr>
+          <a:lstStyle/>
+          <a:p>
+            <a:pPr>
+              <a:defRPr sz="1800" b="1">
+                <a:solidFill>
+                  <a:srgbClr val="0F172A"/>
+                </a:solidFill>
+                <a:latin typeface="Arial"/>
+              </a:defRPr>
+            </a:pPr>
+            <a:r>
+              <a:t>Kmit</a:t>
+            </a:r>
+          </a:p>
+        </p:txBody>
+      </p:sp>
+      <p:sp>
+        <p:nvSpPr>
+          <p:cNvPr id="5" name="TextBox 4"/>
+          <p:cNvSpPr txBox="1"/>
           <p:nvPr/>
         </p:nvSpPr>
         <p:spPr>
           <a:xfrm>
-            <a:off x="8823960" y="1371600"/>
-            <a:ext cx="2560320" cy="4937760"/>
-          </a:xfrm>
-          <a:prstGeom prst="roundRect">
+            <a:off x="1097280" y="274320"/>
+            <a:ext cx="9601200" cy="731520"/>
+          </a:xfrm>
+          <a:prstGeom prst="rect">
             <a:avLst/>
           </a:prstGeom>
-          <a:solidFill>
-            <a:srgbClr val="161E31"/>
-          </a:solidFill>
-          <a:ln>
-            <a:solidFill>
-              <a:srgbClr val="2D3E5F"/>
-            </a:solidFill>
-          </a:ln>
-        </p:spPr>
-        <p:style>
-          <a:lnRef idx="1">
-            <a:schemeClr val="accent1"/>
-          </a:lnRef>
-          <a:fillRef idx="3">
-            <a:schemeClr val="accent1"/>
-          </a:fillRef>
-          <a:effectRef idx="2">
-            <a:schemeClr val="accent1"/>
-          </a:effectRef>
-          <a:fontRef idx="minor">
-            <a:schemeClr val="lt1"/>
-          </a:fontRef>
-        </p:style>
-        <p:txBody>
-          <a:bodyPr rtlCol="0" anchor="ctr" wrap="square"/>
-          <a:lstStyle/>
-          <a:p>
-            <a:pPr algn="ctr">
-              <a:defRPr sz="1300" b="1">
-                <a:solidFill>
-                  <a:srgbClr val="A855F7"/>
-                </a:solidFill>
-              </a:defRPr>
-            </a:pPr>
-            <a:r>
-              <a:t>4. Sensor Tracking &amp; OD (40 Features)</a:t>
-            </a:r>
-          </a:p>
-          <a:p>
-            <a:pPr>
-              <a:spcBef>
-                <a:spcPts val="400"/>
-              </a:spcBef>
-            </a:pPr>
-            <a:r>
-              <a:rPr sz="1000">
-                <a:solidFill>
-                  <a:srgbClr val="94A3B8"/>
-                </a:solidFill>
-              </a:rPr>
-              <a:t>• Target &amp; Chaser Observations Available vs. Used</a:t>
-            </a:r>
-          </a:p>
-          <a:p>
-            <a:pPr>
-              <a:spcBef>
-                <a:spcPts val="400"/>
-              </a:spcBef>
-            </a:pPr>
-            <a:r>
-              <a:rPr sz="1000">
-                <a:solidFill>
-                  <a:srgbClr val="94A3B8"/>
-                </a:solidFill>
-              </a:rPr>
-              <a:t>• Weighted RMS Orbit Determination Residuals</a:t>
-            </a:r>
-          </a:p>
-          <a:p>
-            <a:pPr>
-              <a:spcBef>
-                <a:spcPts val="400"/>
-              </a:spcBef>
-            </a:pPr>
-            <a:r>
-              <a:rPr sz="1000">
-                <a:solidFill>
-                  <a:srgbClr val="94A3B8"/>
-                </a:solidFill>
-              </a:rPr>
-              <a:t>• Target &amp; Chaser Radar Cross Section (RCS in m^2)</a:t>
-            </a:r>
-          </a:p>
-          <a:p>
-            <a:pPr>
-              <a:spcBef>
-                <a:spcPts val="400"/>
-              </a:spcBef>
-            </a:pPr>
-            <a:r>
-              <a:rPr sz="1000">
-                <a:solidFill>
-                  <a:srgbClr val="94A3B8"/>
-                </a:solidFill>
-              </a:rPr>
-              <a:t>• Ballistic Drag Area-to-Mass (cd_area_over_mass)</a:t>
-            </a:r>
-          </a:p>
-          <a:p>
-            <a:pPr>
-              <a:spcBef>
-                <a:spcPts val="400"/>
-              </a:spcBef>
-            </a:pPr>
-            <a:r>
-              <a:rPr sz="1000">
-                <a:solidFill>
-                  <a:srgbClr val="94A3B8"/>
-                </a:solidFill>
-              </a:rPr>
-              <a:t>• Solar Radiation Area-to-Mass (cr_area_over_mass)</a:t>
-            </a:r>
-          </a:p>
-          <a:p>
-            <a:pPr>
-              <a:spcBef>
-                <a:spcPts val="400"/>
-              </a:spcBef>
-            </a:pPr>
-            <a:r>
-              <a:rPr sz="1000">
-                <a:solidFill>
-                  <a:srgbClr val="94A3B8"/>
-                </a:solidFill>
-              </a:rPr>
-              <a:t>• Tracking Arc Duration Spans (t_span, c_span)</a:t>
-            </a:r>
-          </a:p>
-          <a:p>
-            <a:pPr>
-              <a:spcBef>
-                <a:spcPts val="400"/>
-              </a:spcBef>
-            </a:pPr>
-            <a:r>
-              <a:rPr sz="1000">
-                <a:solidFill>
-                  <a:srgbClr val="94A3B8"/>
-                </a:solidFill>
-              </a:rPr>
-              <a:t>• Theoretical Max Risk Bounds &amp; Scaling Factors</a:t>
+          <a:noFill/>
+        </p:spPr>
+        <p:txBody>
+          <a:bodyPr wrap="none">
+            <a:spAutoFit/>
+          </a:bodyPr>
+          <a:lstStyle/>
+          <a:p>
+            <a:pPr>
+              <a:defRPr sz="2600" b="1">
+                <a:solidFill>
+                  <a:srgbClr val="DC2626"/>
+                </a:solidFill>
+                <a:latin typeface="Arial"/>
+              </a:defRPr>
+            </a:pPr>
+            <a:r>
+              <a:t>TECHNOLOGY USED</a:t>
+            </a:r>
+          </a:p>
+        </p:txBody>
+      </p:sp>
+      <p:sp>
+        <p:nvSpPr>
+          <p:cNvPr id="6" name="TextBox 5"/>
+          <p:cNvSpPr txBox="1"/>
+          <p:nvPr/>
+        </p:nvSpPr>
+        <p:spPr>
+          <a:xfrm>
+            <a:off x="1097280" y="1188720"/>
+            <a:ext cx="10058400" cy="5303520"/>
+          </a:xfrm>
+          <a:prstGeom prst="rect">
+            <a:avLst/>
+          </a:prstGeom>
+          <a:noFill/>
+        </p:spPr>
+        <p:txBody>
+          <a:bodyPr wrap="square">
+            <a:spAutoFit/>
+          </a:bodyPr>
+          <a:lstStyle/>
+          <a:p>
+            <a:pPr>
+              <a:defRPr sz="1400" b="1">
+                <a:solidFill>
+                  <a:srgbClr val="1E293B"/>
+                </a:solidFill>
+                <a:latin typeface="Arial"/>
+              </a:defRPr>
+            </a:pPr>
+            <a:r>
+              <a:t>Technology Used:</a:t>
+            </a:r>
+          </a:p>
+          <a:p>
+            <a:pPr>
+              <a:spcBef>
+                <a:spcPts val="300"/>
+              </a:spcBef>
+              <a:defRPr sz="1100">
+                <a:solidFill>
+                  <a:srgbClr val="475569"/>
+                </a:solidFill>
+                <a:latin typeface="Arial"/>
+              </a:defRPr>
+            </a:pPr>
+            <a:r>
+              <a:t>•  Frontend: React 18, TypeScript, Vite &amp; Tailwind CSS</a:t>
+            </a:r>
+          </a:p>
+          <a:p>
+            <a:pPr>
+              <a:spcBef>
+                <a:spcPts val="300"/>
+              </a:spcBef>
+              <a:defRPr sz="1100">
+                <a:solidFill>
+                  <a:srgbClr val="475569"/>
+                </a:solidFill>
+                <a:latin typeface="Arial"/>
+              </a:defRPr>
+            </a:pPr>
+            <a:r>
+              <a:t>•  Backend: FastAPI (Python 3.11) &amp; Uvicorn ASGI Server</a:t>
+            </a:r>
+          </a:p>
+          <a:p>
+            <a:pPr>
+              <a:spcBef>
+                <a:spcPts val="300"/>
+              </a:spcBef>
+              <a:defRPr sz="1100">
+                <a:solidFill>
+                  <a:srgbClr val="475569"/>
+                </a:solidFill>
+                <a:latin typeface="Arial"/>
+              </a:defRPr>
+            </a:pPr>
+            <a:r>
+              <a:t>•  Machine Learning: Extreme Gradient Boosting (XGBoost) Regressor</a:t>
+            </a:r>
+          </a:p>
+          <a:p>
+            <a:pPr>
+              <a:spcBef>
+                <a:spcPts val="300"/>
+              </a:spcBef>
+              <a:defRPr sz="1100">
+                <a:solidFill>
+                  <a:srgbClr val="475569"/>
+                </a:solidFill>
+                <a:latin typeface="Arial"/>
+              </a:defRPr>
+            </a:pPr>
+            <a:r>
+              <a:t>•  3D Graphics: Three.js, WebGL &amp; Canvas (Orbital Encounter Scene)</a:t>
+            </a:r>
+          </a:p>
+          <a:p>
+            <a:pPr>
+              <a:spcBef>
+                <a:spcPts val="300"/>
+              </a:spcBef>
+              <a:defRPr sz="1100">
+                <a:solidFill>
+                  <a:srgbClr val="475569"/>
+                </a:solidFill>
+                <a:latin typeface="Arial"/>
+              </a:defRPr>
+            </a:pPr>
+            <a:r>
+              <a:t>•  Charts &amp; State: Recharts &amp; TanStack React Query</a:t>
+            </a:r>
+          </a:p>
+          <a:p>
+            <a:pPr>
+              <a:spcBef>
+                <a:spcPts val="300"/>
+              </a:spcBef>
+              <a:defRPr sz="1100">
+                <a:solidFill>
+                  <a:srgbClr val="475569"/>
+                </a:solidFill>
+                <a:latin typeface="Arial"/>
+              </a:defRPr>
+            </a:pPr>
+            <a:r>
+              <a:t>•  Optimization: Asymmetric Sample Weighting (w=30.0 for High-Risk Recall Focus)</a:t>
+            </a:r>
+          </a:p>
+          <a:p>
+            <a:pPr>
+              <a:spcBef>
+                <a:spcPts val="300"/>
+              </a:spcBef>
+              <a:defRPr sz="1100">
+                <a:solidFill>
+                  <a:srgbClr val="475569"/>
+                </a:solidFill>
+                <a:latin typeface="Arial"/>
+              </a:defRPr>
+            </a:pPr>
+            <a:r>
+              <a:t>•  Data Imputation: Pre-Computed Median Matrix (100% Zero-Crash Reliability)</a:t>
+            </a:r>
+          </a:p>
+          <a:p>
+            <a:pPr>
+              <a:spcBef>
+                <a:spcPts val="300"/>
+              </a:spcBef>
+              <a:defRPr sz="1100">
+                <a:solidFill>
+                  <a:srgbClr val="475569"/>
+                </a:solidFill>
+                <a:latin typeface="Arial"/>
+              </a:defRPr>
+            </a:pPr>
+            <a:r>
+              <a:t>•  Data: ESA Kelvins Spacecraft Collision Dataset &amp; Space Surveillance Network CDMs</a:t>
+            </a:r>
+          </a:p>
+          <a:p>
+            <a:pPr>
+              <a:spcBef>
+                <a:spcPts val="300"/>
+              </a:spcBef>
+              <a:defRPr sz="1100">
+                <a:solidFill>
+                  <a:srgbClr val="475569"/>
+                </a:solidFill>
+                <a:latin typeface="Arial"/>
+              </a:defRPr>
+            </a:pPr>
+            <a:r>
+              <a:t>•  Tools: Git, GitHub, REST APIs &amp; Windows START.bat Launcher</a:t>
+            </a:r>
+          </a:p>
+          <a:p>
+            <a:pPr>
+              <a:spcBef>
+                <a:spcPts val="800"/>
+              </a:spcBef>
+              <a:defRPr sz="1400" b="1">
+                <a:solidFill>
+                  <a:srgbClr val="1E293B"/>
+                </a:solidFill>
+                <a:latin typeface="Arial"/>
+              </a:defRPr>
+            </a:pPr>
+            <a:r>
+              <a:t>Base Paper :</a:t>
+            </a:r>
+          </a:p>
+          <a:p>
+            <a:pPr>
+              <a:spcBef>
+                <a:spcPts val="300"/>
+              </a:spcBef>
+              <a:defRPr sz="1100">
+                <a:solidFill>
+                  <a:srgbClr val="475569"/>
+                </a:solidFill>
+                <a:latin typeface="Arial"/>
+              </a:defRPr>
+            </a:pPr>
+            <a:r>
+              <a:t>•  "Machine Learning Approaches for Spacecraft Collision Avoidance Challenge"</a:t>
+            </a:r>
+          </a:p>
+          <a:p>
+            <a:pPr>
+              <a:spcBef>
+                <a:spcPts val="300"/>
+              </a:spcBef>
+              <a:defRPr sz="1100">
+                <a:solidFill>
+                  <a:srgbClr val="475569"/>
+                </a:solidFill>
+                <a:latin typeface="Arial"/>
+              </a:defRPr>
+            </a:pPr>
+            <a:r>
+              <a:t>•  Authors: Kalyanaraman et al. (EPJ Web of Conferences, 2026) &amp; Uriot et al. (ESA ACT, 2020)</a:t>
             </a:r>
           </a:p>
         </p:txBody>
@@ -5082,14 +6268,6 @@
 <file path=ppt/slides/slide5.xml><?xml version="1.0" encoding="utf-8"?>
 <p:sld xmlns:a="http://schemas.openxmlformats.org/drawingml/2006/main" xmlns:p="http://schemas.openxmlformats.org/presentationml/2006/main" xmlns:r="http://schemas.openxmlformats.org/officeDocument/2006/relationships">
   <p:cSld>
-    <p:bg>
-      <p:bgPr>
-        <a:solidFill>
-          <a:srgbClr val="0B1120"/>
-        </a:solidFill>
-        <a:effectLst/>
-      </p:bgPr>
-    </p:bg>
     <p:spTree>
       <p:nvGrpSpPr>
         <p:cNvPr id="1" name=""/>
@@ -5099,95 +6277,23 @@
       <p:grpSpPr/>
       <p:sp>
         <p:nvSpPr>
-          <p:cNvPr id="2" name="TextBox 1"/>
-          <p:cNvSpPr txBox="1"/>
-          <p:nvPr/>
-        </p:nvSpPr>
-        <p:spPr>
-          <a:xfrm>
-            <a:off x="731520" y="365760"/>
-            <a:ext cx="10698480" cy="274320"/>
-          </a:xfrm>
-          <a:prstGeom prst="rect">
-            <a:avLst/>
-          </a:prstGeom>
-          <a:noFill/>
-        </p:spPr>
-        <p:txBody>
-          <a:bodyPr wrap="square">
-            <a:spAutoFit/>
-          </a:bodyPr>
-          <a:lstStyle/>
-          <a:p>
-            <a:pPr>
-              <a:defRPr sz="1000" b="1">
-                <a:solidFill>
-                  <a:srgbClr val="06B6D4"/>
-                </a:solidFill>
-              </a:defRPr>
-            </a:pPr>
-            <a:r>
-              <a:t>MODEL ARCHITECTURE</a:t>
-            </a:r>
-          </a:p>
-        </p:txBody>
-      </p:sp>
-      <p:sp>
-        <p:nvSpPr>
-          <p:cNvPr id="3" name="TextBox 2"/>
-          <p:cNvSpPr txBox="1"/>
-          <p:nvPr/>
-        </p:nvSpPr>
-        <p:spPr>
-          <a:xfrm>
-            <a:off x="731520" y="594360"/>
-            <a:ext cx="10698480" cy="548640"/>
-          </a:xfrm>
-          <a:prstGeom prst="rect">
-            <a:avLst/>
-          </a:prstGeom>
-          <a:noFill/>
-        </p:spPr>
-        <p:txBody>
-          <a:bodyPr wrap="square">
-            <a:spAutoFit/>
-          </a:bodyPr>
-          <a:lstStyle/>
-          <a:p>
-            <a:pPr>
-              <a:defRPr sz="2200" b="1">
-                <a:solidFill>
-                  <a:srgbClr val="F1F5F9"/>
-                </a:solidFill>
-              </a:defRPr>
-            </a:pPr>
-            <a:r>
-              <a:t>Machine Learning Formulation: Asymmetric High-Recall XGBoost</a:t>
-            </a:r>
-          </a:p>
-        </p:txBody>
-      </p:sp>
-      <p:sp>
-        <p:nvSpPr>
-          <p:cNvPr id="4" name="Rounded Rectangle 3"/>
+          <p:cNvPr id="2" name="Right Triangle 1"/>
           <p:cNvSpPr/>
           <p:nvPr/>
         </p:nvSpPr>
         <p:spPr>
-          <a:xfrm>
-            <a:off x="731520" y="1371600"/>
-            <a:ext cx="5212080" cy="4754880"/>
-          </a:xfrm>
-          <a:prstGeom prst="roundRect">
+          <a:xfrm rot="5400000">
+            <a:off x="10972800" y="0"/>
+            <a:ext cx="1218895" cy="2011680"/>
+          </a:xfrm>
+          <a:prstGeom prst="rtTriangle">
             <a:avLst/>
           </a:prstGeom>
           <a:solidFill>
-            <a:srgbClr val="161E31"/>
+            <a:srgbClr val="EA580C"/>
           </a:solidFill>
           <a:ln>
-            <a:solidFill>
-              <a:srgbClr val="2D3E5F"/>
-            </a:solidFill>
+            <a:noFill/>
           </a:ln>
         </p:spPr>
         <p:style>
@@ -5205,158 +6311,32 @@
           </a:fontRef>
         </p:style>
         <p:txBody>
-          <a:bodyPr rtlCol="0" anchor="ctr" wrap="square"/>
-          <a:lstStyle/>
-          <a:p>
-            <a:pPr algn="ctr">
-              <a:defRPr sz="1600" b="1">
-                <a:solidFill>
-                  <a:srgbClr val="06B6D4"/>
-                </a:solidFill>
-              </a:defRPr>
-            </a:pPr>
-            <a:r>
-              <a:t>Asymmetric Safety Loss Formulation</a:t>
-            </a:r>
-          </a:p>
-          <a:p>
-            <a:pPr>
-              <a:spcBef>
-                <a:spcPts val="800"/>
-              </a:spcBef>
-            </a:pPr>
-            <a:r>
-              <a:rPr b="1" sz="1200">
-                <a:solidFill>
-                  <a:srgbClr val="F1F5F9"/>
-                </a:solidFill>
-              </a:rPr>
-              <a:t>• Target Variable: </a:t>
-            </a:r>
-            <a:r>
-              <a:rPr sz="1200">
-                <a:solidFill>
-                  <a:srgbClr val="94A3B8"/>
-                </a:solidFill>
-              </a:rPr>
-              <a:t>Continuous final collision risk log10(Pc) at TCA.</a:t>
-            </a:r>
-          </a:p>
-          <a:p>
-            <a:pPr>
-              <a:spcBef>
-                <a:spcPts val="800"/>
-              </a:spcBef>
-            </a:pPr>
-            <a:r>
-              <a:rPr b="1" sz="1200">
-                <a:solidFill>
-                  <a:srgbClr val="F1F5F9"/>
-                </a:solidFill>
-              </a:rPr>
-              <a:t>• Alert Boundary (tau = -6.0): </a:t>
-            </a:r>
-            <a:r>
-              <a:rPr sz="1200">
-                <a:solidFill>
-                  <a:srgbClr val="94A3B8"/>
-                </a:solidFill>
-              </a:rPr>
-              <a:t>Pc &gt;= 10^-6 represents the actionable high-risk alert threshold.</a:t>
-            </a:r>
-          </a:p>
-          <a:p>
-            <a:pPr>
-              <a:spcBef>
-                <a:spcPts val="800"/>
-              </a:spcBef>
-            </a:pPr>
-            <a:r>
-              <a:rPr b="1" sz="1200">
-                <a:solidFill>
-                  <a:srgbClr val="F1F5F9"/>
-                </a:solidFill>
-              </a:rPr>
-              <a:t>• Extreme Class Imbalance: </a:t>
-            </a:r>
-            <a:r>
-              <a:rPr sz="1200">
-                <a:solidFill>
-                  <a:srgbClr val="94A3B8"/>
-                </a:solidFill>
-              </a:rPr>
-              <a:t>178 high-risk events vs. 1,989 safe events in held-out test data (1:11 ratio).</a:t>
-            </a:r>
-          </a:p>
-          <a:p>
-            <a:pPr>
-              <a:spcBef>
-                <a:spcPts val="800"/>
-              </a:spcBef>
-            </a:pPr>
-            <a:r>
-              <a:rPr b="1" sz="1200">
-                <a:solidFill>
-                  <a:srgbClr val="F1F5F9"/>
-                </a:solidFill>
-              </a:rPr>
-              <a:t>• Asymmetric Sample Weighting: </a:t>
-            </a:r>
-            <a:r>
-              <a:rPr sz="1200">
-                <a:solidFill>
-                  <a:srgbClr val="94A3B8"/>
-                </a:solidFill>
-              </a:rPr>
-              <a:t>w = 30.0 for y &gt;= -6.0, w = 1.0 for y &lt; -6.0. Forces trees to heavily penalize False Negatives (missed collisions).</a:t>
-            </a:r>
-          </a:p>
-          <a:p>
-            <a:pPr>
-              <a:spcBef>
-                <a:spcPts val="800"/>
-              </a:spcBef>
-            </a:pPr>
-            <a:r>
-              <a:rPr b="1" sz="1200">
-                <a:solidFill>
-                  <a:srgbClr val="F1F5F9"/>
-                </a:solidFill>
-              </a:rPr>
-              <a:t>• Pre-Computed Median Imputation: </a:t>
-            </a:r>
-            <a:r>
-              <a:rPr sz="1200">
-                <a:solidFill>
-                  <a:srgbClr val="94A3B8"/>
-                </a:solidFill>
-              </a:rPr>
-              <a:t>Feature medians pre-calculated from 162k training CDMs. Guarantees 100% zero-crash execution on incomplete uploaded CDMs.</a:t>
-            </a:r>
-          </a:p>
-        </p:txBody>
-      </p:sp>
-      <p:sp>
-        <p:nvSpPr>
-          <p:cNvPr id="5" name="Rounded Rectangle 4"/>
+          <a:bodyPr rtlCol="0" anchor="ctr"/>
+          <a:lstStyle/>
+          <a:p>
+            <a:pPr algn="ctr"/>
+          </a:p>
+        </p:txBody>
+      </p:sp>
+      <p:sp>
+        <p:nvSpPr>
+          <p:cNvPr id="3" name="Right Triangle 2"/>
           <p:cNvSpPr/>
           <p:nvPr/>
         </p:nvSpPr>
         <p:spPr>
-          <a:xfrm>
-            <a:off x="6217920" y="1371600"/>
-            <a:ext cx="5212080" cy="4754880"/>
-          </a:xfrm>
-          <a:prstGeom prst="roundRect">
+          <a:xfrm rot="16200000">
+            <a:off x="0" y="4846320"/>
+            <a:ext cx="1097280" cy="2011680"/>
+          </a:xfrm>
+          <a:prstGeom prst="rtTriangle">
             <a:avLst/>
           </a:prstGeom>
           <a:solidFill>
-            <a:srgbClr val="161E31"/>
+            <a:srgbClr val="0F766E"/>
           </a:solidFill>
           <a:ln>
-            <a:solidFill>
-              <a:srgbClr val="2D3E5F"/>
-            </a:solidFill>
+            <a:noFill/>
           </a:ln>
         </p:spPr>
         <p:style>
@@ -5374,179 +6354,426 @@
           </a:fontRef>
         </p:style>
         <p:txBody>
+          <a:bodyPr rtlCol="0" anchor="ctr"/>
+          <a:lstStyle/>
+          <a:p>
+            <a:pPr algn="ctr"/>
+          </a:p>
+        </p:txBody>
+      </p:sp>
+      <p:sp>
+        <p:nvSpPr>
+          <p:cNvPr id="4" name="TextBox 3"/>
+          <p:cNvSpPr txBox="1"/>
+          <p:nvPr/>
+        </p:nvSpPr>
+        <p:spPr>
+          <a:xfrm>
+            <a:off x="365760" y="274320"/>
+            <a:ext cx="1828800" cy="548640"/>
+          </a:xfrm>
+          <a:prstGeom prst="rect">
+            <a:avLst/>
+          </a:prstGeom>
+          <a:noFill/>
+        </p:spPr>
+        <p:txBody>
+          <a:bodyPr wrap="none">
+            <a:spAutoFit/>
+          </a:bodyPr>
+          <a:lstStyle/>
+          <a:p>
+            <a:pPr>
+              <a:defRPr sz="1800" b="1">
+                <a:solidFill>
+                  <a:srgbClr val="0F172A"/>
+                </a:solidFill>
+                <a:latin typeface="Arial"/>
+              </a:defRPr>
+            </a:pPr>
+            <a:r>
+              <a:t>Kmit</a:t>
+            </a:r>
+          </a:p>
+        </p:txBody>
+      </p:sp>
+      <p:sp>
+        <p:nvSpPr>
+          <p:cNvPr id="5" name="TextBox 4"/>
+          <p:cNvSpPr txBox="1"/>
+          <p:nvPr/>
+        </p:nvSpPr>
+        <p:spPr>
+          <a:xfrm>
+            <a:off x="1097280" y="274320"/>
+            <a:ext cx="9601200" cy="731520"/>
+          </a:xfrm>
+          <a:prstGeom prst="rect">
+            <a:avLst/>
+          </a:prstGeom>
+          <a:noFill/>
+        </p:spPr>
+        <p:txBody>
+          <a:bodyPr wrap="none">
+            <a:spAutoFit/>
+          </a:bodyPr>
+          <a:lstStyle/>
+          <a:p>
+            <a:pPr>
+              <a:defRPr sz="2600" b="1">
+                <a:solidFill>
+                  <a:srgbClr val="DC2626"/>
+                </a:solidFill>
+                <a:latin typeface="Arial"/>
+              </a:defRPr>
+            </a:pPr>
+            <a:r>
+              <a:t>BASE PAPER / RESEARCH REFERENCE</a:t>
+            </a:r>
+          </a:p>
+        </p:txBody>
+      </p:sp>
+      <p:sp>
+        <p:nvSpPr>
+          <p:cNvPr id="6" name="TextBox 5"/>
+          <p:cNvSpPr txBox="1"/>
+          <p:nvPr/>
+        </p:nvSpPr>
+        <p:spPr>
+          <a:xfrm>
+            <a:off x="1097280" y="1097280"/>
+            <a:ext cx="10058400" cy="1645920"/>
+          </a:xfrm>
+          <a:prstGeom prst="rect">
+            <a:avLst/>
+          </a:prstGeom>
+          <a:noFill/>
+        </p:spPr>
+        <p:txBody>
+          <a:bodyPr wrap="square">
+            <a:spAutoFit/>
+          </a:bodyPr>
+          <a:lstStyle/>
+          <a:p>
+            <a:pPr>
+              <a:defRPr sz="1300" b="1">
+                <a:solidFill>
+                  <a:srgbClr val="1E293B"/>
+                </a:solidFill>
+                <a:latin typeface="Arial"/>
+              </a:defRPr>
+            </a:pPr>
+            <a:r>
+              <a:t>Paper Title:</a:t>
+            </a:r>
+          </a:p>
+          <a:p>
+            <a:pPr>
+              <a:defRPr sz="1200" b="1">
+                <a:solidFill>
+                  <a:srgbClr val="0E7490"/>
+                </a:solidFill>
+                <a:latin typeface="Arial"/>
+              </a:defRPr>
+            </a:pPr>
+            <a:r>
+              <a:t>"Machine Learning Approaches for Spacecraft Collision Avoidance Challenge"</a:t>
+            </a:r>
+          </a:p>
+          <a:p>
+            <a:pPr>
+              <a:defRPr sz="1100">
+                <a:solidFill>
+                  <a:srgbClr val="475569"/>
+                </a:solidFill>
+                <a:latin typeface="Arial"/>
+              </a:defRPr>
+            </a:pPr>
+            <a:r>
+              <a:t>Focus: Spacecraft Collision Risk Prediction, CDM Assessment &amp; Orbit Uncertainty</a:t>
+            </a:r>
+          </a:p>
+          <a:p>
+            <a:pPr>
+              <a:defRPr sz="1100">
+                <a:solidFill>
+                  <a:srgbClr val="475569"/>
+                </a:solidFill>
+                <a:latin typeface="Arial"/>
+              </a:defRPr>
+            </a:pPr>
+            <a:r>
+              <a:t>Authors: Kalyanaraman et al. (2026) &amp; Uriot et al. (ESA Advanced Concepts Team)</a:t>
+            </a:r>
+          </a:p>
+        </p:txBody>
+      </p:sp>
+      <p:sp>
+        <p:nvSpPr>
+          <p:cNvPr id="7" name="Rectangle 6"/>
+          <p:cNvSpPr/>
+          <p:nvPr/>
+        </p:nvSpPr>
+        <p:spPr>
+          <a:xfrm>
+            <a:off x="1097280" y="2834640"/>
+            <a:ext cx="4846320" cy="3566160"/>
+          </a:xfrm>
+          <a:prstGeom prst="rect">
+            <a:avLst/>
+          </a:prstGeom>
+          <a:solidFill>
+            <a:srgbClr val="FFFFFF"/>
+          </a:solidFill>
+          <a:ln>
+            <a:solidFill>
+              <a:srgbClr val="64748B"/>
+            </a:solidFill>
+          </a:ln>
+        </p:spPr>
+        <p:style>
+          <a:lnRef idx="1">
+            <a:schemeClr val="accent1"/>
+          </a:lnRef>
+          <a:fillRef idx="3">
+            <a:schemeClr val="accent1"/>
+          </a:fillRef>
+          <a:effectRef idx="2">
+            <a:schemeClr val="accent1"/>
+          </a:effectRef>
+          <a:fontRef idx="minor">
+            <a:schemeClr val="lt1"/>
+          </a:fontRef>
+        </p:style>
+        <p:txBody>
           <a:bodyPr rtlCol="0" anchor="ctr" wrap="square"/>
           <a:lstStyle/>
           <a:p>
             <a:pPr algn="ctr">
-              <a:defRPr sz="1600" b="1">
-                <a:solidFill>
-                  <a:srgbClr val="10B981"/>
-                </a:solidFill>
-              </a:defRPr>
-            </a:pPr>
-            <a:r>
-              <a:t>XGBoost Hyperparameters &amp; Pipeline</a:t>
-            </a:r>
-          </a:p>
-          <a:p>
-            <a:pPr>
-              <a:spcBef>
-                <a:spcPts val="800"/>
-              </a:spcBef>
-            </a:pPr>
-            <a:r>
-              <a:rPr b="1" sz="1200">
-                <a:solidFill>
-                  <a:srgbClr val="F1F5F9"/>
-                </a:solidFill>
-              </a:rPr>
-              <a:t>• Algorithm: </a:t>
-            </a:r>
-            <a:r>
-              <a:rPr sz="1200">
-                <a:solidFill>
-                  <a:srgbClr val="94A3B8"/>
-                </a:solidFill>
-              </a:rPr>
-              <a:t>Extreme Gradient Boosting (XGBoost) Regressor</a:t>
-            </a:r>
-          </a:p>
-          <a:p>
-            <a:pPr>
-              <a:spcBef>
-                <a:spcPts val="800"/>
-              </a:spcBef>
-            </a:pPr>
-            <a:r>
-              <a:rPr b="1" sz="1200">
-                <a:solidFill>
-                  <a:srgbClr val="F1F5F9"/>
-                </a:solidFill>
-              </a:rPr>
-              <a:t>• Number of Trees (n_estimators): </a:t>
-            </a:r>
-            <a:r>
-              <a:rPr sz="1200">
-                <a:solidFill>
-                  <a:srgbClr val="94A3B8"/>
-                </a:solidFill>
-              </a:rPr>
-              <a:t>300 sequential gradient boosted trees</a:t>
-            </a:r>
-          </a:p>
-          <a:p>
-            <a:pPr>
-              <a:spcBef>
-                <a:spcPts val="800"/>
-              </a:spcBef>
-            </a:pPr>
-            <a:r>
-              <a:rPr b="1" sz="1200">
-                <a:solidFill>
-                  <a:srgbClr val="F1F5F9"/>
-                </a:solidFill>
-              </a:rPr>
-              <a:t>• Max Tree Depth (max_depth): </a:t>
-            </a:r>
-            <a:r>
-              <a:rPr sz="1200">
-                <a:solidFill>
-                  <a:srgbClr val="94A3B8"/>
-                </a:solidFill>
-              </a:rPr>
-              <a:t>6 (captures high-order non-linear physical interactions)</a:t>
-            </a:r>
-          </a:p>
-          <a:p>
-            <a:pPr>
-              <a:spcBef>
-                <a:spcPts val="800"/>
-              </a:spcBef>
-            </a:pPr>
-            <a:r>
-              <a:rPr b="1" sz="1200">
-                <a:solidFill>
-                  <a:srgbClr val="F1F5F9"/>
-                </a:solidFill>
-              </a:rPr>
-              <a:t>• Learning Rate (eta): </a:t>
-            </a:r>
-            <a:r>
-              <a:rPr sz="1200">
-                <a:solidFill>
-                  <a:srgbClr val="94A3B8"/>
-                </a:solidFill>
-              </a:rPr>
-              <a:t>0.03 (gradual convergence prevents overfitting)</a:t>
-            </a:r>
-          </a:p>
-          <a:p>
-            <a:pPr>
-              <a:spcBef>
-                <a:spcPts val="800"/>
-              </a:spcBef>
-            </a:pPr>
-            <a:r>
-              <a:rPr b="1" sz="1200">
-                <a:solidFill>
-                  <a:srgbClr val="F1F5F9"/>
-                </a:solidFill>
-              </a:rPr>
-              <a:t>• Subsample &amp; Colsample: </a:t>
-            </a:r>
-            <a:r>
-              <a:rPr sz="1200">
-                <a:solidFill>
-                  <a:srgbClr val="94A3B8"/>
-                </a:solidFill>
-              </a:rPr>
-              <a:t>0.80 row &amp; feature subsampling per tree (noise robustness)</a:t>
-            </a:r>
-          </a:p>
-          <a:p>
-            <a:pPr>
-              <a:spcBef>
-                <a:spcPts val="800"/>
-              </a:spcBef>
-            </a:pPr>
-            <a:r>
-              <a:rPr b="1" sz="1200">
-                <a:solidFill>
-                  <a:srgbClr val="F1F5F9"/>
-                </a:solidFill>
-              </a:rPr>
-              <a:t>• Tree Method: </a:t>
-            </a:r>
-            <a:r>
-              <a:rPr sz="1200">
-                <a:solidFill>
-                  <a:srgbClr val="94A3B8"/>
-                </a:solidFill>
-              </a:rPr>
-              <a:t>hist (high-performance histogram binning)</a:t>
-            </a:r>
-          </a:p>
-          <a:p>
-            <a:pPr>
-              <a:spcBef>
-                <a:spcPts val="800"/>
-              </a:spcBef>
-            </a:pPr>
-            <a:r>
-              <a:rPr b="1" sz="1200">
-                <a:solidFill>
-                  <a:srgbClr val="F1F5F9"/>
-                </a:solidFill>
-              </a:rPr>
-              <a:t>• Training Compute Speed: </a:t>
-            </a:r>
-            <a:r>
-              <a:rPr sz="1200">
-                <a:solidFill>
-                  <a:srgbClr val="94A3B8"/>
-                </a:solidFill>
-              </a:rPr>
-              <a:t>12.66 seconds across 162,634 observation rows</a:t>
+              <a:defRPr sz="1300" b="1">
+                <a:solidFill>
+                  <a:srgbClr val="1E293B"/>
+                </a:solidFill>
+                <a:latin typeface="Arial"/>
+              </a:defRPr>
+            </a:pPr>
+            <a:r>
+              <a:t>Existing approach :</a:t>
+            </a:r>
+          </a:p>
+          <a:p>
+            <a:pPr>
+              <a:spcBef>
+                <a:spcPts val="600"/>
+              </a:spcBef>
+              <a:defRPr sz="1100">
+                <a:solidFill>
+                  <a:srgbClr val="475569"/>
+                </a:solidFill>
+                <a:latin typeface="Arial"/>
+              </a:defRPr>
+            </a:pPr>
+            <a:r>
+              <a:t>•  Static single-snapshot CDM evaluation</a:t>
+            </a:r>
+          </a:p>
+          <a:p>
+            <a:pPr>
+              <a:spcBef>
+                <a:spcPts val="600"/>
+              </a:spcBef>
+              <a:defRPr sz="1100">
+                <a:solidFill>
+                  <a:srgbClr val="475569"/>
+                </a:solidFill>
+                <a:latin typeface="Arial"/>
+              </a:defRPr>
+            </a:pPr>
+            <a:r>
+              <a:t>•  Evaluated strictly at TCA (t = 0 hours)</a:t>
+            </a:r>
+          </a:p>
+          <a:p>
+            <a:pPr>
+              <a:spcBef>
+                <a:spcPts val="600"/>
+              </a:spcBef>
+              <a:defRPr sz="1100">
+                <a:solidFill>
+                  <a:srgbClr val="475569"/>
+                </a:solidFill>
+                <a:latin typeface="Arial"/>
+              </a:defRPr>
+            </a:pPr>
+            <a:r>
+              <a:t>•  Standard binary classification with SMOTE</a:t>
+            </a:r>
+          </a:p>
+          <a:p>
+            <a:pPr>
+              <a:spcBef>
+                <a:spcPts val="600"/>
+              </a:spcBef>
+              <a:defRPr sz="1100">
+                <a:solidFill>
+                  <a:srgbClr val="475569"/>
+                </a:solidFill>
+                <a:latin typeface="Arial"/>
+              </a:defRPr>
+            </a:pPr>
+            <a:r>
+              <a:t>•  Assumes equal cost between False Positives and False Negatives</a:t>
+            </a:r>
+          </a:p>
+          <a:p>
+            <a:pPr>
+              <a:spcBef>
+                <a:spcPts val="600"/>
+              </a:spcBef>
+              <a:defRPr sz="1100">
+                <a:solidFill>
+                  <a:srgbClr val="475569"/>
+                </a:solidFill>
+                <a:latin typeface="Arial"/>
+              </a:defRPr>
+            </a:pPr>
+            <a:r>
+              <a:t>•  Black-box feature engineering with opaque synthetic indices</a:t>
+            </a:r>
+          </a:p>
+        </p:txBody>
+      </p:sp>
+      <p:sp>
+        <p:nvSpPr>
+          <p:cNvPr id="8" name="Rectangle 7"/>
+          <p:cNvSpPr/>
+          <p:nvPr/>
+        </p:nvSpPr>
+        <p:spPr>
+          <a:xfrm>
+            <a:off x="6309360" y="2834640"/>
+            <a:ext cx="4846320" cy="3566160"/>
+          </a:xfrm>
+          <a:prstGeom prst="rect">
+            <a:avLst/>
+          </a:prstGeom>
+          <a:solidFill>
+            <a:srgbClr val="FFFFFF"/>
+          </a:solidFill>
+          <a:ln>
+            <a:solidFill>
+              <a:srgbClr val="64748B"/>
+            </a:solidFill>
+          </a:ln>
+        </p:spPr>
+        <p:style>
+          <a:lnRef idx="1">
+            <a:schemeClr val="accent1"/>
+          </a:lnRef>
+          <a:fillRef idx="3">
+            <a:schemeClr val="accent1"/>
+          </a:fillRef>
+          <a:effectRef idx="2">
+            <a:schemeClr val="accent1"/>
+          </a:effectRef>
+          <a:fontRef idx="minor">
+            <a:schemeClr val="lt1"/>
+          </a:fontRef>
+        </p:style>
+        <p:txBody>
+          <a:bodyPr rtlCol="0" anchor="ctr" wrap="square"/>
+          <a:lstStyle/>
+          <a:p>
+            <a:pPr algn="ctr">
+              <a:defRPr sz="1300" b="1">
+                <a:solidFill>
+                  <a:srgbClr val="DC2626"/>
+                </a:solidFill>
+                <a:latin typeface="Arial"/>
+              </a:defRPr>
+            </a:pPr>
+            <a:r>
+              <a:t>Research Gap :</a:t>
+            </a:r>
+          </a:p>
+          <a:p>
+            <a:pPr>
+              <a:spcBef>
+                <a:spcPts val="600"/>
+              </a:spcBef>
+              <a:defRPr sz="1100">
+                <a:solidFill>
+                  <a:srgbClr val="475569"/>
+                </a:solidFill>
+                <a:latin typeface="Arial"/>
+              </a:defRPr>
+            </a:pPr>
+            <a:r>
+              <a:t>•  Temporal Blindness: 0-hour lead time is useless for thruster burn prep -&gt; Solved with 3-5 days lead time.</a:t>
+            </a:r>
+          </a:p>
+          <a:p>
+            <a:pPr>
+              <a:spcBef>
+                <a:spcPts val="600"/>
+              </a:spcBef>
+              <a:defRPr sz="1100">
+                <a:solidFill>
+                  <a:srgbClr val="475569"/>
+                </a:solidFill>
+                <a:latin typeface="Arial"/>
+              </a:defRPr>
+            </a:pPr>
+            <a:r>
+              <a:t>•  False Alarm Flooding: 85% false alarm rate (15% precision) exhausts fuel -&gt; Solved with 79.71% precision.</a:t>
+            </a:r>
+          </a:p>
+          <a:p>
+            <a:pPr>
+              <a:spcBef>
+                <a:spcPts val="600"/>
+              </a:spcBef>
+              <a:defRPr sz="1100">
+                <a:solidFill>
+                  <a:srgbClr val="475569"/>
+                </a:solidFill>
+                <a:latin typeface="Arial"/>
+              </a:defRPr>
+            </a:pPr>
+            <a:r>
+              <a:t>•  Class Imbalance: 178 collisions vs 1,989 safe events -&gt; Solved via 30x Asymmetric Weighting.</a:t>
+            </a:r>
+          </a:p>
+          <a:p>
+            <a:pPr>
+              <a:spcBef>
+                <a:spcPts val="600"/>
+              </a:spcBef>
+              <a:defRPr sz="1100">
+                <a:solidFill>
+                  <a:srgbClr val="475569"/>
+                </a:solidFill>
+                <a:latin typeface="Arial"/>
+              </a:defRPr>
+            </a:pPr>
+            <a:r>
+              <a:t>•  High Recall Focus: Prioritizing recall (92.70%) to ensure spacecraft survival.</a:t>
+            </a:r>
+          </a:p>
+          <a:p>
+            <a:pPr>
+              <a:spcBef>
+                <a:spcPts val="600"/>
+              </a:spcBef>
+              <a:defRPr sz="1100">
+                <a:solidFill>
+                  <a:srgbClr val="475569"/>
+                </a:solidFill>
+                <a:latin typeface="Arial"/>
+              </a:defRPr>
+            </a:pPr>
+            <a:r>
+              <a:t>•  Native Telemetry: Ingests 100 raw CDM features with 0 synthetic bloat.</a:t>
             </a:r>
           </a:p>
         </p:txBody>
@@ -5562,14 +6789,6 @@
 <file path=ppt/slides/slide6.xml><?xml version="1.0" encoding="utf-8"?>
 <p:sld xmlns:a="http://schemas.openxmlformats.org/drawingml/2006/main" xmlns:p="http://schemas.openxmlformats.org/presentationml/2006/main" xmlns:r="http://schemas.openxmlformats.org/officeDocument/2006/relationships">
   <p:cSld>
-    <p:bg>
-      <p:bgPr>
-        <a:solidFill>
-          <a:srgbClr val="0B1120"/>
-        </a:solidFill>
-        <a:effectLst/>
-      </p:bgPr>
-    </p:bg>
     <p:spTree>
       <p:nvGrpSpPr>
         <p:cNvPr id="1" name=""/>
@@ -5579,781 +6798,23 @@
       <p:grpSpPr/>
       <p:sp>
         <p:nvSpPr>
-          <p:cNvPr id="2" name="TextBox 1"/>
-          <p:cNvSpPr txBox="1"/>
-          <p:nvPr/>
-        </p:nvSpPr>
-        <p:spPr>
-          <a:xfrm>
-            <a:off x="731520" y="365760"/>
-            <a:ext cx="10698480" cy="274320"/>
-          </a:xfrm>
-          <a:prstGeom prst="rect">
-            <a:avLst/>
-          </a:prstGeom>
-          <a:noFill/>
-        </p:spPr>
-        <p:txBody>
-          <a:bodyPr wrap="square">
-            <a:spAutoFit/>
-          </a:bodyPr>
-          <a:lstStyle/>
-          <a:p>
-            <a:pPr>
-              <a:defRPr sz="1000" b="1">
-                <a:solidFill>
-                  <a:srgbClr val="06B6D4"/>
-                </a:solidFill>
-              </a:defRPr>
-            </a:pPr>
-            <a:r>
-              <a:t>PERFORMANCE EVALUATION</a:t>
-            </a:r>
-          </a:p>
-        </p:txBody>
-      </p:sp>
-      <p:sp>
-        <p:nvSpPr>
-          <p:cNvPr id="3" name="TextBox 2"/>
-          <p:cNvSpPr txBox="1"/>
-          <p:nvPr/>
-        </p:nvSpPr>
-        <p:spPr>
-          <a:xfrm>
-            <a:off x="731520" y="594360"/>
-            <a:ext cx="10698480" cy="548640"/>
-          </a:xfrm>
-          <a:prstGeom prst="rect">
-            <a:avLst/>
-          </a:prstGeom>
-          <a:noFill/>
-        </p:spPr>
-        <p:txBody>
-          <a:bodyPr wrap="square">
-            <a:spAutoFit/>
-          </a:bodyPr>
-          <a:lstStyle/>
-          <a:p>
-            <a:pPr>
-              <a:defRPr sz="2200" b="1">
-                <a:solidFill>
-                  <a:srgbClr val="F1F5F9"/>
-                </a:solidFill>
-              </a:defRPr>
-            </a:pPr>
-            <a:r>
-              <a:t>Empirical Benchmark: Outperforming Base Paper &amp; Competition Baselines</a:t>
-            </a:r>
-          </a:p>
-        </p:txBody>
-      </p:sp>
-      <p:graphicFrame>
-        <p:nvGraphicFramePr>
-          <p:cNvPr id="4" name="Table 3"/>
-          <p:cNvGraphicFramePr>
-            <a:graphicFrameLocks noGrp="1"/>
-          </p:cNvGraphicFramePr>
-          <p:nvPr/>
-        </p:nvGraphicFramePr>
-        <p:xfrm>
-          <a:off x="731520" y="1371600"/>
-          <a:ext cx="10698480" cy="4114800"/>
-        </p:xfrm>
-        <a:graphic>
-          <a:graphicData uri="http://schemas.openxmlformats.org/drawingml/2006/table">
-            <a:tbl>
-              <a:tblPr firstRow="1" bandRow="1">
-                <a:tableStyleId>{5C22544A-7EE6-4342-B048-85BDC9FD1C3A}</a:tableStyleId>
-              </a:tblPr>
-              <a:tblGrid>
-                <a:gridCol w="2926080"/>
-                <a:gridCol w="2834640"/>
-                <a:gridCol w="2468880"/>
-                <a:gridCol w="2468880"/>
-              </a:tblGrid>
-              <a:tr h="587828">
-                <a:tc>
-                  <a:txBody>
-                    <a:bodyPr/>
-                    <a:lstStyle/>
-                    <a:p>
-                      <a:pPr>
-                        <a:defRPr sz="1200" b="1">
-                          <a:solidFill>
-                            <a:srgbClr val="F1F5F9"/>
-                          </a:solidFill>
-                        </a:defRPr>
-                      </a:pPr>
-                      <a:r>
-                        <a:t>Evaluation Metric</a:t>
-                      </a:r>
-                    </a:p>
-                  </a:txBody>
-                  <a:tcPr>
-                    <a:solidFill>
-                      <a:srgbClr val="1E293B"/>
-                    </a:solidFill>
-                  </a:tcPr>
-                </a:tc>
-                <a:tc>
-                  <a:txBody>
-                    <a:bodyPr/>
-                    <a:lstStyle/>
-                    <a:p>
-                      <a:pPr>
-                        <a:defRPr sz="1200" b="1">
-                          <a:solidFill>
-                            <a:srgbClr val="06B6D4"/>
-                          </a:solidFill>
-                        </a:defRPr>
-                      </a:pPr>
-                      <a:r>
-                        <a:t>PRAHARI (100 Raw Features)</a:t>
-                      </a:r>
-                    </a:p>
-                  </a:txBody>
-                  <a:tcPr>
-                    <a:solidFill>
-                      <a:srgbClr val="1E293B"/>
-                    </a:solidFill>
-                  </a:tcPr>
-                </a:tc>
-                <a:tc>
-                  <a:txBody>
-                    <a:bodyPr/>
-                    <a:lstStyle/>
-                    <a:p>
-                      <a:pPr>
-                        <a:defRPr sz="1200" b="1">
-                          <a:solidFill>
-                            <a:srgbClr val="F1F5F9"/>
-                          </a:solidFill>
-                        </a:defRPr>
-                      </a:pPr>
-                      <a:r>
-                        <a:t>Kalyanaraman et al. (2026)</a:t>
-                      </a:r>
-                    </a:p>
-                  </a:txBody>
-                  <a:tcPr>
-                    <a:solidFill>
-                      <a:srgbClr val="1E293B"/>
-                    </a:solidFill>
-                  </a:tcPr>
-                </a:tc>
-                <a:tc>
-                  <a:txBody>
-                    <a:bodyPr/>
-                    <a:lstStyle/>
-                    <a:p>
-                      <a:pPr>
-                        <a:defRPr sz="1200" b="1">
-                          <a:solidFill>
-                            <a:srgbClr val="F1F5F9"/>
-                          </a:solidFill>
-                        </a:defRPr>
-                      </a:pPr>
-                      <a:r>
-                        <a:t>ESA Competition Winner</a:t>
-                      </a:r>
-                    </a:p>
-                  </a:txBody>
-                  <a:tcPr>
-                    <a:solidFill>
-                      <a:srgbClr val="1E293B"/>
-                    </a:solidFill>
-                  </a:tcPr>
-                </a:tc>
-              </a:tr>
-              <a:tr h="587828">
-                <a:tc>
-                  <a:txBody>
-                    <a:bodyPr/>
-                    <a:lstStyle/>
-                    <a:p>
-                      <a:pPr>
-                        <a:defRPr sz="1100">
-                          <a:solidFill>
-                            <a:srgbClr val="F1F5F9"/>
-                          </a:solidFill>
-                        </a:defRPr>
-                      </a:pPr>
-                      <a:r>
-                        <a:t>Evaluation Threshold (tau)</a:t>
-                      </a:r>
-                    </a:p>
-                  </a:txBody>
-                  <a:tcPr>
-                    <a:solidFill>
-                      <a:srgbClr val="161E31"/>
-                    </a:solidFill>
-                  </a:tcPr>
-                </a:tc>
-                <a:tc>
-                  <a:txBody>
-                    <a:bodyPr/>
-                    <a:lstStyle/>
-                    <a:p>
-                      <a:pPr>
-                        <a:defRPr sz="1100" b="1">
-                          <a:solidFill>
-                            <a:srgbClr val="10B981"/>
-                          </a:solidFill>
-                        </a:defRPr>
-                      </a:pPr>
-                      <a:r>
-                        <a:t>-6.0 log10(Pc)</a:t>
-                      </a:r>
-                    </a:p>
-                  </a:txBody>
-                  <a:tcPr>
-                    <a:solidFill>
-                      <a:srgbClr val="10372D"/>
-                    </a:solidFill>
-                  </a:tcPr>
-                </a:tc>
-                <a:tc>
-                  <a:txBody>
-                    <a:bodyPr/>
-                    <a:lstStyle/>
-                    <a:p>
-                      <a:pPr>
-                        <a:defRPr sz="1100">
-                          <a:solidFill>
-                            <a:srgbClr val="F1F5F9"/>
-                          </a:solidFill>
-                        </a:defRPr>
-                      </a:pPr>
-                      <a:r>
-                        <a:t>-6.0 log10(Pc)</a:t>
-                      </a:r>
-                    </a:p>
-                  </a:txBody>
-                  <a:tcPr>
-                    <a:solidFill>
-                      <a:srgbClr val="161E31"/>
-                    </a:solidFill>
-                  </a:tcPr>
-                </a:tc>
-                <a:tc>
-                  <a:txBody>
-                    <a:bodyPr/>
-                    <a:lstStyle/>
-                    <a:p>
-                      <a:pPr>
-                        <a:defRPr sz="1100">
-                          <a:solidFill>
-                            <a:srgbClr val="F1F5F9"/>
-                          </a:solidFill>
-                        </a:defRPr>
-                      </a:pPr>
-                      <a:r>
-                        <a:t>-6.0 log10(Pc)</a:t>
-                      </a:r>
-                    </a:p>
-                  </a:txBody>
-                  <a:tcPr>
-                    <a:solidFill>
-                      <a:srgbClr val="161E31"/>
-                    </a:solidFill>
-                  </a:tcPr>
-                </a:tc>
-              </a:tr>
-              <a:tr h="587828">
-                <a:tc>
-                  <a:txBody>
-                    <a:bodyPr/>
-                    <a:lstStyle/>
-                    <a:p>
-                      <a:pPr>
-                        <a:defRPr sz="1100">
-                          <a:solidFill>
-                            <a:srgbClr val="F1F5F9"/>
-                          </a:solidFill>
-                        </a:defRPr>
-                      </a:pPr>
-                      <a:r>
-                        <a:t>High-Risk Recall (Collisions Caught)</a:t>
-                      </a:r>
-                    </a:p>
-                  </a:txBody>
-                  <a:tcPr>
-                    <a:solidFill>
-                      <a:srgbClr val="161E31"/>
-                    </a:solidFill>
-                  </a:tcPr>
-                </a:tc>
-                <a:tc>
-                  <a:txBody>
-                    <a:bodyPr/>
-                    <a:lstStyle/>
-                    <a:p>
-                      <a:pPr>
-                        <a:defRPr sz="1100" b="1">
-                          <a:solidFill>
-                            <a:srgbClr val="10B981"/>
-                          </a:solidFill>
-                        </a:defRPr>
-                      </a:pPr>
-                      <a:r>
-                        <a:t>92.70% (165 / 178)</a:t>
-                      </a:r>
-                    </a:p>
-                  </a:txBody>
-                  <a:tcPr>
-                    <a:solidFill>
-                      <a:srgbClr val="10372D"/>
-                    </a:solidFill>
-                  </a:tcPr>
-                </a:tc>
-                <a:tc>
-                  <a:txBody>
-                    <a:bodyPr/>
-                    <a:lstStyle/>
-                    <a:p>
-                      <a:pPr>
-                        <a:defRPr sz="1100">
-                          <a:solidFill>
-                            <a:srgbClr val="F1F5F9"/>
-                          </a:solidFill>
-                        </a:defRPr>
-                      </a:pPr>
-                      <a:r>
-                        <a:t>~68.0%</a:t>
-                      </a:r>
-                    </a:p>
-                  </a:txBody>
-                  <a:tcPr>
-                    <a:solidFill>
-                      <a:srgbClr val="161E31"/>
-                    </a:solidFill>
-                  </a:tcPr>
-                </a:tc>
-                <a:tc>
-                  <a:txBody>
-                    <a:bodyPr/>
-                    <a:lstStyle/>
-                    <a:p>
-                      <a:pPr>
-                        <a:defRPr sz="1100">
-                          <a:solidFill>
-                            <a:srgbClr val="F1F5F9"/>
-                          </a:solidFill>
-                        </a:defRPr>
-                      </a:pPr>
-                      <a:r>
-                        <a:t>78.2%</a:t>
-                      </a:r>
-                    </a:p>
-                  </a:txBody>
-                  <a:tcPr>
-                    <a:solidFill>
-                      <a:srgbClr val="161E31"/>
-                    </a:solidFill>
-                  </a:tcPr>
-                </a:tc>
-              </a:tr>
-              <a:tr h="587828">
-                <a:tc>
-                  <a:txBody>
-                    <a:bodyPr/>
-                    <a:lstStyle/>
-                    <a:p>
-                      <a:pPr>
-                        <a:defRPr sz="1100">
-                          <a:solidFill>
-                            <a:srgbClr val="F1F5F9"/>
-                          </a:solidFill>
-                        </a:defRPr>
-                      </a:pPr>
-                      <a:r>
-                        <a:t>Safety F2 Score (Recall Weighted 2x)</a:t>
-                      </a:r>
-                    </a:p>
-                  </a:txBody>
-                  <a:tcPr>
-                    <a:solidFill>
-                      <a:srgbClr val="161E31"/>
-                    </a:solidFill>
-                  </a:tcPr>
-                </a:tc>
-                <a:tc>
-                  <a:txBody>
-                    <a:bodyPr/>
-                    <a:lstStyle/>
-                    <a:p>
-                      <a:pPr>
-                        <a:defRPr sz="1100" b="1">
-                          <a:solidFill>
-                            <a:srgbClr val="10B981"/>
-                          </a:solidFill>
-                        </a:defRPr>
-                      </a:pPr>
-                      <a:r>
-                        <a:t>89.77%</a:t>
-                      </a:r>
-                    </a:p>
-                  </a:txBody>
-                  <a:tcPr>
-                    <a:solidFill>
-                      <a:srgbClr val="10372D"/>
-                    </a:solidFill>
-                  </a:tcPr>
-                </a:tc>
-                <a:tc>
-                  <a:txBody>
-                    <a:bodyPr/>
-                    <a:lstStyle/>
-                    <a:p>
-                      <a:pPr>
-                        <a:defRPr sz="1100">
-                          <a:solidFill>
-                            <a:srgbClr val="F1F5F9"/>
-                          </a:solidFill>
-                        </a:defRPr>
-                      </a:pPr>
-                      <a:r>
-                        <a:t>~35.0%</a:t>
-                      </a:r>
-                    </a:p>
-                  </a:txBody>
-                  <a:tcPr>
-                    <a:solidFill>
-                      <a:srgbClr val="161E31"/>
-                    </a:solidFill>
-                  </a:tcPr>
-                </a:tc>
-                <a:tc>
-                  <a:txBody>
-                    <a:bodyPr/>
-                    <a:lstStyle/>
-                    <a:p>
-                      <a:pPr>
-                        <a:defRPr sz="1100">
-                          <a:solidFill>
-                            <a:srgbClr val="F1F5F9"/>
-                          </a:solidFill>
-                        </a:defRPr>
-                      </a:pPr>
-                      <a:r>
-                        <a:t>69.1%</a:t>
-                      </a:r>
-                    </a:p>
-                  </a:txBody>
-                  <a:tcPr>
-                    <a:solidFill>
-                      <a:srgbClr val="161E31"/>
-                    </a:solidFill>
-                  </a:tcPr>
-                </a:tc>
-              </a:tr>
-              <a:tr h="587828">
-                <a:tc>
-                  <a:txBody>
-                    <a:bodyPr/>
-                    <a:lstStyle/>
-                    <a:p>
-                      <a:pPr>
-                        <a:defRPr sz="1100">
-                          <a:solidFill>
-                            <a:srgbClr val="F1F5F9"/>
-                          </a:solidFill>
-                        </a:defRPr>
-                      </a:pPr>
-                      <a:r>
-                        <a:t>Operational Precision</a:t>
-                      </a:r>
-                    </a:p>
-                  </a:txBody>
-                  <a:tcPr>
-                    <a:solidFill>
-                      <a:srgbClr val="161E31"/>
-                    </a:solidFill>
-                  </a:tcPr>
-                </a:tc>
-                <a:tc>
-                  <a:txBody>
-                    <a:bodyPr/>
-                    <a:lstStyle/>
-                    <a:p>
-                      <a:pPr>
-                        <a:defRPr sz="1100" b="1">
-                          <a:solidFill>
-                            <a:srgbClr val="10B981"/>
-                          </a:solidFill>
-                        </a:defRPr>
-                      </a:pPr>
-                      <a:r>
-                        <a:t>79.71% (Only 42 False Alarms)</a:t>
-                      </a:r>
-                    </a:p>
-                  </a:txBody>
-                  <a:tcPr>
-                    <a:solidFill>
-                      <a:srgbClr val="10372D"/>
-                    </a:solidFill>
-                  </a:tcPr>
-                </a:tc>
-                <a:tc>
-                  <a:txBody>
-                    <a:bodyPr/>
-                    <a:lstStyle/>
-                    <a:p>
-                      <a:pPr>
-                        <a:defRPr sz="1100" b="1">
-                          <a:solidFill>
-                            <a:srgbClr val="EF4444"/>
-                          </a:solidFill>
-                        </a:defRPr>
-                      </a:pPr>
-                      <a:r>
-                        <a:t>15.0% (85% False Alarms)</a:t>
-                      </a:r>
-                    </a:p>
-                  </a:txBody>
-                  <a:tcPr>
-                    <a:solidFill>
-                      <a:srgbClr val="161E31"/>
-                    </a:solidFill>
-                  </a:tcPr>
-                </a:tc>
-                <a:tc>
-                  <a:txBody>
-                    <a:bodyPr/>
-                    <a:lstStyle/>
-                    <a:p>
-                      <a:pPr>
-                        <a:defRPr sz="1100">
-                          <a:solidFill>
-                            <a:srgbClr val="F1F5F9"/>
-                          </a:solidFill>
-                        </a:defRPr>
-                      </a:pPr>
-                      <a:r>
-                        <a:t>~32.4%</a:t>
-                      </a:r>
-                    </a:p>
-                  </a:txBody>
-                  <a:tcPr>
-                    <a:solidFill>
-                      <a:srgbClr val="161E31"/>
-                    </a:solidFill>
-                  </a:tcPr>
-                </a:tc>
-              </a:tr>
-              <a:tr h="587828">
-                <a:tc>
-                  <a:txBody>
-                    <a:bodyPr/>
-                    <a:lstStyle/>
-                    <a:p>
-                      <a:pPr>
-                        <a:defRPr sz="1100">
-                          <a:solidFill>
-                            <a:srgbClr val="F1F5F9"/>
-                          </a:solidFill>
-                        </a:defRPr>
-                      </a:pPr>
-                      <a:r>
-                        <a:t>Overall Classification Accuracy</a:t>
-                      </a:r>
-                    </a:p>
-                  </a:txBody>
-                  <a:tcPr>
-                    <a:solidFill>
-                      <a:srgbClr val="161E31"/>
-                    </a:solidFill>
-                  </a:tcPr>
-                </a:tc>
-                <a:tc>
-                  <a:txBody>
-                    <a:bodyPr/>
-                    <a:lstStyle/>
-                    <a:p>
-                      <a:pPr>
-                        <a:defRPr sz="1100" b="1">
-                          <a:solidFill>
-                            <a:srgbClr val="10B981"/>
-                          </a:solidFill>
-                        </a:defRPr>
-                      </a:pPr>
-                      <a:r>
-                        <a:t>97.46% (2,112 / 2,167)</a:t>
-                      </a:r>
-                    </a:p>
-                  </a:txBody>
-                  <a:tcPr>
-                    <a:solidFill>
-                      <a:srgbClr val="10372D"/>
-                    </a:solidFill>
-                  </a:tcPr>
-                </a:tc>
-                <a:tc>
-                  <a:txBody>
-                    <a:bodyPr/>
-                    <a:lstStyle/>
-                    <a:p>
-                      <a:pPr>
-                        <a:defRPr sz="1100">
-                          <a:solidFill>
-                            <a:srgbClr val="F1F5F9"/>
-                          </a:solidFill>
-                        </a:defRPr>
-                      </a:pPr>
-                      <a:r>
-                        <a:t>~85.0%</a:t>
-                      </a:r>
-                    </a:p>
-                  </a:txBody>
-                  <a:tcPr>
-                    <a:solidFill>
-                      <a:srgbClr val="161E31"/>
-                    </a:solidFill>
-                  </a:tcPr>
-                </a:tc>
-                <a:tc>
-                  <a:txBody>
-                    <a:bodyPr/>
-                    <a:lstStyle/>
-                    <a:p>
-                      <a:pPr>
-                        <a:defRPr sz="1100">
-                          <a:solidFill>
-                            <a:srgbClr val="F1F5F9"/>
-                          </a:solidFill>
-                        </a:defRPr>
-                      </a:pPr>
-                      <a:r>
-                        <a:t>~91.0%</a:t>
-                      </a:r>
-                    </a:p>
-                  </a:txBody>
-                  <a:tcPr>
-                    <a:solidFill>
-                      <a:srgbClr val="161E31"/>
-                    </a:solidFill>
-                  </a:tcPr>
-                </a:tc>
-              </a:tr>
-              <a:tr h="587832">
-                <a:tc>
-                  <a:txBody>
-                    <a:bodyPr/>
-                    <a:lstStyle/>
-                    <a:p>
-                      <a:pPr>
-                        <a:defRPr sz="1100">
-                          <a:solidFill>
-                            <a:srgbClr val="F1F5F9"/>
-                          </a:solidFill>
-                        </a:defRPr>
-                      </a:pPr>
-                      <a:r>
-                        <a:t>Actionable Early Warning Lead Time</a:t>
-                      </a:r>
-                    </a:p>
-                  </a:txBody>
-                  <a:tcPr>
-                    <a:solidFill>
-                      <a:srgbClr val="161E31"/>
-                    </a:solidFill>
-                  </a:tcPr>
-                </a:tc>
-                <a:tc>
-                  <a:txBody>
-                    <a:bodyPr/>
-                    <a:lstStyle/>
-                    <a:p>
-                      <a:pPr>
-                        <a:defRPr sz="1100" b="1">
-                          <a:solidFill>
-                            <a:srgbClr val="10B981"/>
-                          </a:solidFill>
-                        </a:defRPr>
-                      </a:pPr>
-                      <a:r>
-                        <a:t>3 to 5 Days pre-TCA</a:t>
-                      </a:r>
-                    </a:p>
-                  </a:txBody>
-                  <a:tcPr>
-                    <a:solidFill>
-                      <a:srgbClr val="10372D"/>
-                    </a:solidFill>
-                  </a:tcPr>
-                </a:tc>
-                <a:tc>
-                  <a:txBody>
-                    <a:bodyPr/>
-                    <a:lstStyle/>
-                    <a:p>
-                      <a:pPr>
-                        <a:defRPr sz="1100">
-                          <a:solidFill>
-                            <a:srgbClr val="F1F5F9"/>
-                          </a:solidFill>
-                        </a:defRPr>
-                      </a:pPr>
-                      <a:r>
-                        <a:t>0 Hours (TCA snapshot)</a:t>
-                      </a:r>
-                    </a:p>
-                  </a:txBody>
-                  <a:tcPr>
-                    <a:solidFill>
-                      <a:srgbClr val="161E31"/>
-                    </a:solidFill>
-                  </a:tcPr>
-                </a:tc>
-                <a:tc>
-                  <a:txBody>
-                    <a:bodyPr/>
-                    <a:lstStyle/>
-                    <a:p>
-                      <a:pPr>
-                        <a:defRPr sz="1100">
-                          <a:solidFill>
-                            <a:srgbClr val="F1F5F9"/>
-                          </a:solidFill>
-                        </a:defRPr>
-                      </a:pPr>
-                      <a:r>
-                        <a:t>2 to 5 Days</a:t>
-                      </a:r>
-                    </a:p>
-                  </a:txBody>
-                  <a:tcPr>
-                    <a:solidFill>
-                      <a:srgbClr val="161E31"/>
-                    </a:solidFill>
-                  </a:tcPr>
-                </a:tc>
-              </a:tr>
-            </a:tbl>
-          </a:graphicData>
-        </a:graphic>
-      </p:graphicFrame>
-      <p:sp>
-        <p:nvSpPr>
-          <p:cNvPr id="5" name="Rounded Rectangle 4"/>
+          <p:cNvPr id="2" name="Right Triangle 1"/>
           <p:cNvSpPr/>
           <p:nvPr/>
         </p:nvSpPr>
         <p:spPr>
-          <a:xfrm>
-            <a:off x="731520" y="5669280"/>
-            <a:ext cx="10698480" cy="731520"/>
-          </a:xfrm>
-          <a:prstGeom prst="roundRect">
+          <a:xfrm rot="5400000">
+            <a:off x="10972800" y="0"/>
+            <a:ext cx="1218895" cy="2011680"/>
+          </a:xfrm>
+          <a:prstGeom prst="rtTriangle">
             <a:avLst/>
           </a:prstGeom>
           <a:solidFill>
-            <a:srgbClr val="064E5A"/>
+            <a:srgbClr val="EA580C"/>
           </a:solidFill>
           <a:ln>
-            <a:solidFill>
-              <a:srgbClr val="06B6D4"/>
-            </a:solidFill>
+            <a:noFill/>
           </a:ln>
         </p:spPr>
         <p:style>
@@ -6374,15 +6835,349 @@
           <a:bodyPr rtlCol="0" anchor="ctr"/>
           <a:lstStyle/>
           <a:p>
-            <a:pPr algn="ctr">
-              <a:defRPr sz="1200" b="1">
-                <a:solidFill>
-                  <a:srgbClr val="F1F5F9"/>
-                </a:solidFill>
-              </a:defRPr>
-            </a:pPr>
-            <a:r>
-              <a:t>KEY TAKEAWAY: Prahari catches 92.70% of real collisions (165/178) while cutting false alarms by ~75% compared to published baselines.</a:t>
+            <a:pPr algn="ctr"/>
+          </a:p>
+        </p:txBody>
+      </p:sp>
+      <p:sp>
+        <p:nvSpPr>
+          <p:cNvPr id="3" name="Right Triangle 2"/>
+          <p:cNvSpPr/>
+          <p:nvPr/>
+        </p:nvSpPr>
+        <p:spPr>
+          <a:xfrm rot="16200000">
+            <a:off x="0" y="4846320"/>
+            <a:ext cx="1097280" cy="2011680"/>
+          </a:xfrm>
+          <a:prstGeom prst="rtTriangle">
+            <a:avLst/>
+          </a:prstGeom>
+          <a:solidFill>
+            <a:srgbClr val="0F766E"/>
+          </a:solidFill>
+          <a:ln>
+            <a:noFill/>
+          </a:ln>
+        </p:spPr>
+        <p:style>
+          <a:lnRef idx="1">
+            <a:schemeClr val="accent1"/>
+          </a:lnRef>
+          <a:fillRef idx="3">
+            <a:schemeClr val="accent1"/>
+          </a:fillRef>
+          <a:effectRef idx="2">
+            <a:schemeClr val="accent1"/>
+          </a:effectRef>
+          <a:fontRef idx="minor">
+            <a:schemeClr val="lt1"/>
+          </a:fontRef>
+        </p:style>
+        <p:txBody>
+          <a:bodyPr rtlCol="0" anchor="ctr"/>
+          <a:lstStyle/>
+          <a:p>
+            <a:pPr algn="ctr"/>
+          </a:p>
+        </p:txBody>
+      </p:sp>
+      <p:sp>
+        <p:nvSpPr>
+          <p:cNvPr id="4" name="TextBox 3"/>
+          <p:cNvSpPr txBox="1"/>
+          <p:nvPr/>
+        </p:nvSpPr>
+        <p:spPr>
+          <a:xfrm>
+            <a:off x="365760" y="274320"/>
+            <a:ext cx="1828800" cy="548640"/>
+          </a:xfrm>
+          <a:prstGeom prst="rect">
+            <a:avLst/>
+          </a:prstGeom>
+          <a:noFill/>
+        </p:spPr>
+        <p:txBody>
+          <a:bodyPr wrap="none">
+            <a:spAutoFit/>
+          </a:bodyPr>
+          <a:lstStyle/>
+          <a:p>
+            <a:pPr>
+              <a:defRPr sz="1800" b="1">
+                <a:solidFill>
+                  <a:srgbClr val="0F172A"/>
+                </a:solidFill>
+                <a:latin typeface="Arial"/>
+              </a:defRPr>
+            </a:pPr>
+            <a:r>
+              <a:t>Kmit</a:t>
+            </a:r>
+          </a:p>
+        </p:txBody>
+      </p:sp>
+      <p:sp>
+        <p:nvSpPr>
+          <p:cNvPr id="5" name="TextBox 4"/>
+          <p:cNvSpPr txBox="1"/>
+          <p:nvPr/>
+        </p:nvSpPr>
+        <p:spPr>
+          <a:xfrm>
+            <a:off x="1097280" y="274320"/>
+            <a:ext cx="9601200" cy="731520"/>
+          </a:xfrm>
+          <a:prstGeom prst="rect">
+            <a:avLst/>
+          </a:prstGeom>
+          <a:noFill/>
+        </p:spPr>
+        <p:txBody>
+          <a:bodyPr wrap="none">
+            <a:spAutoFit/>
+          </a:bodyPr>
+          <a:lstStyle/>
+          <a:p>
+            <a:pPr>
+              <a:defRPr sz="2600" b="1">
+                <a:solidFill>
+                  <a:srgbClr val="DC2626"/>
+                </a:solidFill>
+                <a:latin typeface="Arial"/>
+              </a:defRPr>
+            </a:pPr>
+            <a:r>
+              <a:t>REQUIREMENT</a:t>
+            </a:r>
+          </a:p>
+        </p:txBody>
+      </p:sp>
+      <p:sp>
+        <p:nvSpPr>
+          <p:cNvPr id="6" name="TextBox 5"/>
+          <p:cNvSpPr txBox="1"/>
+          <p:nvPr/>
+        </p:nvSpPr>
+        <p:spPr>
+          <a:xfrm>
+            <a:off x="1097280" y="1188720"/>
+            <a:ext cx="10058400" cy="5303520"/>
+          </a:xfrm>
+          <a:prstGeom prst="rect">
+            <a:avLst/>
+          </a:prstGeom>
+          <a:noFill/>
+        </p:spPr>
+        <p:txBody>
+          <a:bodyPr wrap="square">
+            <a:spAutoFit/>
+          </a:bodyPr>
+          <a:lstStyle/>
+          <a:p>
+            <a:pPr>
+              <a:defRPr sz="1400" b="1">
+                <a:solidFill>
+                  <a:srgbClr val="1E293B"/>
+                </a:solidFill>
+                <a:latin typeface="Arial"/>
+              </a:defRPr>
+            </a:pPr>
+            <a:r>
+              <a:t>Product:</a:t>
+            </a:r>
+          </a:p>
+          <a:p>
+            <a:pPr>
+              <a:spcBef>
+                <a:spcPts val="300"/>
+              </a:spcBef>
+              <a:defRPr sz="1100">
+                <a:solidFill>
+                  <a:srgbClr val="475569"/>
+                </a:solidFill>
+                <a:latin typeface="Arial"/>
+              </a:defRPr>
+            </a:pPr>
+            <a:r>
+              <a:t>•  Prahari: Autonomous Spacecraft Conjunction Triage &amp; Collision Avoidance Decision-Support System</a:t>
+            </a:r>
+          </a:p>
+          <a:p>
+            <a:pPr>
+              <a:spcBef>
+                <a:spcPts val="800"/>
+              </a:spcBef>
+              <a:defRPr sz="1400" b="1">
+                <a:solidFill>
+                  <a:srgbClr val="1E293B"/>
+                </a:solidFill>
+                <a:latin typeface="Arial"/>
+              </a:defRPr>
+            </a:pPr>
+            <a:r>
+              <a:t>Features:</a:t>
+            </a:r>
+          </a:p>
+          <a:p>
+            <a:pPr>
+              <a:spcBef>
+                <a:spcPts val="300"/>
+              </a:spcBef>
+              <a:defRPr sz="1100">
+                <a:solidFill>
+                  <a:srgbClr val="475569"/>
+                </a:solidFill>
+                <a:latin typeface="Arial"/>
+              </a:defRPr>
+            </a:pPr>
+            <a:r>
+              <a:t>•  Automated Multi-Pass CDM Ingestion &amp; Telemetry Preprocessing</a:t>
+            </a:r>
+          </a:p>
+          <a:p>
+            <a:pPr>
+              <a:spcBef>
+                <a:spcPts val="300"/>
+              </a:spcBef>
+              <a:defRPr sz="1100">
+                <a:solidFill>
+                  <a:srgbClr val="475569"/>
+                </a:solidFill>
+                <a:latin typeface="Arial"/>
+              </a:defRPr>
+            </a:pPr>
+            <a:r>
+              <a:t>•  High-Recall XGBoost Conjunction Risk Regression (log10 Pc prediction)</a:t>
+            </a:r>
+          </a:p>
+          <a:p>
+            <a:pPr>
+              <a:spcBef>
+                <a:spcPts val="300"/>
+              </a:spcBef>
+              <a:defRPr sz="1100">
+                <a:solidFill>
+                  <a:srgbClr val="475569"/>
+                </a:solidFill>
+                <a:latin typeface="Arial"/>
+              </a:defRPr>
+            </a:pPr>
+            <a:r>
+              <a:t>•  Asymmetric Risk Thresholding calibrated at the official -6.0 alert boundary</a:t>
+            </a:r>
+          </a:p>
+          <a:p>
+            <a:pPr>
+              <a:spcBef>
+                <a:spcPts val="300"/>
+              </a:spcBef>
+              <a:defRPr sz="1100">
+                <a:solidFill>
+                  <a:srgbClr val="475569"/>
+                </a:solidFill>
+                <a:latin typeface="Arial"/>
+              </a:defRPr>
+            </a:pPr>
+            <a:r>
+              <a:t>•  Real-time Multi-Tier Action Protocol (CRITICAL, HIGH, ELEVATED, LOW bands)</a:t>
+            </a:r>
+          </a:p>
+          <a:p>
+            <a:pPr>
+              <a:spcBef>
+                <a:spcPts val="300"/>
+              </a:spcBef>
+              <a:defRPr sz="1100">
+                <a:solidFill>
+                  <a:srgbClr val="475569"/>
+                </a:solidFill>
+                <a:latin typeface="Arial"/>
+              </a:defRPr>
+            </a:pPr>
+            <a:r>
+              <a:t>•  100 Native Telemetry Directory (Kinematics, Covariance, Solar Weather, Tracking)</a:t>
+            </a:r>
+          </a:p>
+          <a:p>
+            <a:pPr>
+              <a:spcBef>
+                <a:spcPts val="300"/>
+              </a:spcBef>
+              <a:defRPr sz="1100">
+                <a:solidFill>
+                  <a:srgbClr val="475569"/>
+                </a:solidFill>
+                <a:latin typeface="Arial"/>
+              </a:defRPr>
+            </a:pPr>
+            <a:r>
+              <a:t>•  Interactive 3D WebGL Orbit &amp; Covariance Ellipsoid Encounter Visualizer</a:t>
+            </a:r>
+          </a:p>
+          <a:p>
+            <a:pPr>
+              <a:spcBef>
+                <a:spcPts val="300"/>
+              </a:spcBef>
+              <a:defRPr sz="1100">
+                <a:solidFill>
+                  <a:srgbClr val="475569"/>
+                </a:solidFill>
+                <a:latin typeface="Arial"/>
+              </a:defRPr>
+            </a:pPr>
+            <a:r>
+              <a:t>•  Temporal Timeline Playback Scrubber for multi-day radar update evolution</a:t>
+            </a:r>
+          </a:p>
+          <a:p>
+            <a:pPr>
+              <a:spcBef>
+                <a:spcPts val="300"/>
+              </a:spcBef>
+              <a:defRPr sz="1100">
+                <a:solidFill>
+                  <a:srgbClr val="475569"/>
+                </a:solidFill>
+                <a:latin typeface="Arial"/>
+              </a:defRPr>
+            </a:pPr>
+            <a:r>
+              <a:t>•  Model Lab with live threshold calibration slider and SHAP feature importance charts</a:t>
+            </a:r>
+          </a:p>
+          <a:p>
+            <a:pPr>
+              <a:spcBef>
+                <a:spcPts val="300"/>
+              </a:spcBef>
+              <a:defRPr sz="1100">
+                <a:solidFill>
+                  <a:srgbClr val="475569"/>
+                </a:solidFill>
+                <a:latin typeface="Arial"/>
+              </a:defRPr>
+            </a:pPr>
+            <a:r>
+              <a:t>•  Drag-and-Drop Live Telemetry Prediction Sandbox for operational passes</a:t>
+            </a:r>
+          </a:p>
+          <a:p>
+            <a:pPr>
+              <a:spcBef>
+                <a:spcPts val="300"/>
+              </a:spcBef>
+              <a:defRPr sz="1100">
+                <a:solidFill>
+                  <a:srgbClr val="475569"/>
+                </a:solidFill>
+                <a:latin typeface="Arial"/>
+              </a:defRPr>
+            </a:pPr>
+            <a:r>
+              <a:t>•  Automated Collision Avoidance Maneuver (CAM) alert and report generation</a:t>
             </a:r>
           </a:p>
         </p:txBody>
@@ -6398,14 +7193,6 @@
 <file path=ppt/slides/slide7.xml><?xml version="1.0" encoding="utf-8"?>
 <p:sld xmlns:a="http://schemas.openxmlformats.org/drawingml/2006/main" xmlns:p="http://schemas.openxmlformats.org/presentationml/2006/main" xmlns:r="http://schemas.openxmlformats.org/officeDocument/2006/relationships">
   <p:cSld>
-    <p:bg>
-      <p:bgPr>
-        <a:solidFill>
-          <a:srgbClr val="0B1120"/>
-        </a:solidFill>
-        <a:effectLst/>
-      </p:bgPr>
-    </p:bg>
     <p:spTree>
       <p:nvGrpSpPr>
         <p:cNvPr id="1" name=""/>
@@ -6415,95 +7202,23 @@
       <p:grpSpPr/>
       <p:sp>
         <p:nvSpPr>
-          <p:cNvPr id="2" name="TextBox 1"/>
-          <p:cNvSpPr txBox="1"/>
-          <p:nvPr/>
-        </p:nvSpPr>
-        <p:spPr>
-          <a:xfrm>
-            <a:off x="731520" y="365760"/>
-            <a:ext cx="10698480" cy="274320"/>
-          </a:xfrm>
-          <a:prstGeom prst="rect">
-            <a:avLst/>
-          </a:prstGeom>
-          <a:noFill/>
-        </p:spPr>
-        <p:txBody>
-          <a:bodyPr wrap="square">
-            <a:spAutoFit/>
-          </a:bodyPr>
-          <a:lstStyle/>
-          <a:p>
-            <a:pPr>
-              <a:defRPr sz="1000" b="1">
-                <a:solidFill>
-                  <a:srgbClr val="06B6D4"/>
-                </a:solidFill>
-              </a:defRPr>
-            </a:pPr>
-            <a:r>
-              <a:t>FLIGHT OPERATIONS PROTOCOL</a:t>
-            </a:r>
-          </a:p>
-        </p:txBody>
-      </p:sp>
-      <p:sp>
-        <p:nvSpPr>
-          <p:cNvPr id="3" name="TextBox 2"/>
-          <p:cNvSpPr txBox="1"/>
-          <p:nvPr/>
-        </p:nvSpPr>
-        <p:spPr>
-          <a:xfrm>
-            <a:off x="731520" y="594360"/>
-            <a:ext cx="10698480" cy="548640"/>
-          </a:xfrm>
-          <a:prstGeom prst="rect">
-            <a:avLst/>
-          </a:prstGeom>
-          <a:noFill/>
-        </p:spPr>
-        <p:txBody>
-          <a:bodyPr wrap="square">
-            <a:spAutoFit/>
-          </a:bodyPr>
-          <a:lstStyle/>
-          <a:p>
-            <a:pPr>
-              <a:defRPr sz="2200" b="1">
-                <a:solidFill>
-                  <a:srgbClr val="F1F5F9"/>
-                </a:solidFill>
-              </a:defRPr>
-            </a:pPr>
-            <a:r>
-              <a:t>Operational Triage: Automated Multi-Tier Action Protocol</a:t>
-            </a:r>
-          </a:p>
-        </p:txBody>
-      </p:sp>
-      <p:sp>
-        <p:nvSpPr>
-          <p:cNvPr id="4" name="Rounded Rectangle 3"/>
+          <p:cNvPr id="2" name="Right Triangle 1"/>
           <p:cNvSpPr/>
           <p:nvPr/>
         </p:nvSpPr>
         <p:spPr>
-          <a:xfrm>
-            <a:off x="731520" y="1371600"/>
-            <a:ext cx="10698480" cy="1097280"/>
-          </a:xfrm>
-          <a:prstGeom prst="roundRect">
+          <a:xfrm rot="5400000">
+            <a:off x="10972800" y="0"/>
+            <a:ext cx="1218895" cy="2011680"/>
+          </a:xfrm>
+          <a:prstGeom prst="rtTriangle">
             <a:avLst/>
           </a:prstGeom>
           <a:solidFill>
-            <a:srgbClr val="161E31"/>
+            <a:srgbClr val="EA580C"/>
           </a:solidFill>
           <a:ln>
-            <a:solidFill>
-              <a:srgbClr val="2D3E5F"/>
-            </a:solidFill>
+            <a:noFill/>
           </a:ln>
         </p:spPr>
         <p:style>
@@ -6521,73 +7236,32 @@
           </a:fontRef>
         </p:style>
         <p:txBody>
-          <a:bodyPr rtlCol="0" anchor="ctr" wrap="square"/>
+          <a:bodyPr rtlCol="0" anchor="ctr"/>
           <a:lstStyle/>
           <a:p>
             <a:pPr algn="ctr"/>
-            <a:r>
-              <a:rPr b="1" sz="1400">
-                <a:solidFill>
-                  <a:srgbClr val="EF4444"/>
-                </a:solidFill>
-              </a:rPr>
-              <a:t>CRITICAL ALERT  </a:t>
-            </a:r>
-            <a:r>
-              <a:rPr sz="1100">
-                <a:solidFill>
-                  <a:srgbClr val="94A3B8"/>
-                </a:solidFill>
-              </a:rPr>
-              <a:t>[log10(Pc) &gt;= -4.0  |  1 in 10,000 or greater]</a:t>
-            </a:r>
-          </a:p>
-          <a:p>
-            <a:pPr>
-              <a:spcBef>
-                <a:spcPts val="400"/>
-              </a:spcBef>
-            </a:pPr>
-            <a:r>
-              <a:rPr b="1" sz="1100">
-                <a:solidFill>
-                  <a:srgbClr val="F1F5F9"/>
-                </a:solidFill>
-              </a:rPr>
-              <a:t>Action Protocol: </a:t>
-            </a:r>
-            <a:r>
-              <a:rPr sz="1100">
-                <a:solidFill>
-                  <a:srgbClr val="94A3B8"/>
-                </a:solidFill>
-              </a:rPr>
-              <a:t>Execute Collision Avoidance Maneuver (CAM). Autonomous thruster burn planned, ground station confirmation requested.</a:t>
-            </a:r>
-          </a:p>
-        </p:txBody>
-      </p:sp>
-      <p:sp>
-        <p:nvSpPr>
-          <p:cNvPr id="5" name="Rounded Rectangle 4"/>
+          </a:p>
+        </p:txBody>
+      </p:sp>
+      <p:sp>
+        <p:nvSpPr>
+          <p:cNvPr id="3" name="Right Triangle 2"/>
           <p:cNvSpPr/>
           <p:nvPr/>
         </p:nvSpPr>
         <p:spPr>
-          <a:xfrm>
-            <a:off x="731520" y="2606040"/>
-            <a:ext cx="10698480" cy="1097280"/>
-          </a:xfrm>
-          <a:prstGeom prst="roundRect">
+          <a:xfrm rot="16200000">
+            <a:off x="0" y="4846320"/>
+            <a:ext cx="1097280" cy="2011680"/>
+          </a:xfrm>
+          <a:prstGeom prst="rtTriangle">
             <a:avLst/>
           </a:prstGeom>
           <a:solidFill>
-            <a:srgbClr val="161E31"/>
+            <a:srgbClr val="0F766E"/>
           </a:solidFill>
           <a:ln>
-            <a:solidFill>
-              <a:srgbClr val="2D3E5F"/>
-            </a:solidFill>
+            <a:noFill/>
           </a:ln>
         </p:spPr>
         <p:style>
@@ -6605,72 +7279,141 @@
           </a:fontRef>
         </p:style>
         <p:txBody>
-          <a:bodyPr rtlCol="0" anchor="ctr" wrap="square"/>
+          <a:bodyPr rtlCol="0" anchor="ctr"/>
           <a:lstStyle/>
           <a:p>
             <a:pPr algn="ctr"/>
-            <a:r>
-              <a:rPr b="1" sz="1400">
-                <a:solidFill>
-                  <a:srgbClr val="F59E0B"/>
-                </a:solidFill>
-              </a:rPr>
-              <a:t>HIGH RISK  </a:t>
-            </a:r>
-            <a:r>
-              <a:rPr sz="1100">
-                <a:solidFill>
-                  <a:srgbClr val="94A3B8"/>
-                </a:solidFill>
-              </a:rPr>
-              <a:t>[-5.0 &lt;= log10(Pc) &lt; -4.0  |  1 in 100,000 to 1 in 10k]</a:t>
-            </a:r>
-          </a:p>
-          <a:p>
-            <a:pPr>
-              <a:spcBef>
-                <a:spcPts val="400"/>
-              </a:spcBef>
-            </a:pPr>
-            <a:r>
-              <a:rPr b="1" sz="1100">
-                <a:solidFill>
-                  <a:srgbClr val="F1F5F9"/>
-                </a:solidFill>
-              </a:rPr>
-              <a:t>Action Protocol: </a:t>
-            </a:r>
-            <a:r>
-              <a:rPr sz="1100">
-                <a:solidFill>
-                  <a:srgbClr val="94A3B8"/>
-                </a:solidFill>
-              </a:rPr>
-              <a:t>Maneuver Planning Initiated. High-priority radar tracking pass requested from Space Surveillance Network.</a:t>
-            </a:r>
-          </a:p>
-        </p:txBody>
-      </p:sp>
-      <p:sp>
-        <p:nvSpPr>
-          <p:cNvPr id="6" name="Rounded Rectangle 5"/>
+          </a:p>
+        </p:txBody>
+      </p:sp>
+      <p:sp>
+        <p:nvSpPr>
+          <p:cNvPr id="4" name="TextBox 3"/>
+          <p:cNvSpPr txBox="1"/>
+          <p:nvPr/>
+        </p:nvSpPr>
+        <p:spPr>
+          <a:xfrm>
+            <a:off x="365760" y="274320"/>
+            <a:ext cx="1828800" cy="548640"/>
+          </a:xfrm>
+          <a:prstGeom prst="rect">
+            <a:avLst/>
+          </a:prstGeom>
+          <a:noFill/>
+        </p:spPr>
+        <p:txBody>
+          <a:bodyPr wrap="none">
+            <a:spAutoFit/>
+          </a:bodyPr>
+          <a:lstStyle/>
+          <a:p>
+            <a:pPr>
+              <a:defRPr sz="1800" b="1">
+                <a:solidFill>
+                  <a:srgbClr val="0F172A"/>
+                </a:solidFill>
+                <a:latin typeface="Arial"/>
+              </a:defRPr>
+            </a:pPr>
+            <a:r>
+              <a:t>Kmit</a:t>
+            </a:r>
+          </a:p>
+        </p:txBody>
+      </p:sp>
+      <p:sp>
+        <p:nvSpPr>
+          <p:cNvPr id="5" name="TextBox 4"/>
+          <p:cNvSpPr txBox="1"/>
+          <p:nvPr/>
+        </p:nvSpPr>
+        <p:spPr>
+          <a:xfrm>
+            <a:off x="1097280" y="274320"/>
+            <a:ext cx="9601200" cy="731520"/>
+          </a:xfrm>
+          <a:prstGeom prst="rect">
+            <a:avLst/>
+          </a:prstGeom>
+          <a:noFill/>
+        </p:spPr>
+        <p:txBody>
+          <a:bodyPr wrap="none">
+            <a:spAutoFit/>
+          </a:bodyPr>
+          <a:lstStyle/>
+          <a:p>
+            <a:pPr>
+              <a:defRPr sz="2600" b="1">
+                <a:solidFill>
+                  <a:srgbClr val="DC2626"/>
+                </a:solidFill>
+                <a:latin typeface="Arial"/>
+              </a:defRPr>
+            </a:pPr>
+            <a:r>
+              <a:t>DESIGN</a:t>
+            </a:r>
+          </a:p>
+        </p:txBody>
+      </p:sp>
+      <p:sp>
+        <p:nvSpPr>
+          <p:cNvPr id="6" name="TextBox 5"/>
+          <p:cNvSpPr txBox="1"/>
+          <p:nvPr/>
+        </p:nvSpPr>
+        <p:spPr>
+          <a:xfrm>
+            <a:off x="1097280" y="1005840"/>
+            <a:ext cx="10058400" cy="457200"/>
+          </a:xfrm>
+          <a:prstGeom prst="rect">
+            <a:avLst/>
+          </a:prstGeom>
+          <a:noFill/>
+        </p:spPr>
+        <p:txBody>
+          <a:bodyPr wrap="none">
+            <a:spAutoFit/>
+          </a:bodyPr>
+          <a:lstStyle/>
+          <a:p>
+            <a:pPr>
+              <a:defRPr sz="1600" b="1">
+                <a:solidFill>
+                  <a:srgbClr val="1E293B"/>
+                </a:solidFill>
+                <a:latin typeface="Arial"/>
+              </a:defRPr>
+            </a:pPr>
+            <a:r>
+              <a:t>Prahari - System Design Architecture</a:t>
+            </a:r>
+          </a:p>
+        </p:txBody>
+      </p:sp>
+      <p:sp>
+        <p:nvSpPr>
+          <p:cNvPr id="7" name="Rounded Rectangle 6"/>
           <p:cNvSpPr/>
           <p:nvPr/>
         </p:nvSpPr>
         <p:spPr>
           <a:xfrm>
-            <a:off x="731520" y="3840480"/>
-            <a:ext cx="10698480" cy="1097280"/>
+            <a:off x="1097280" y="1645920"/>
+            <a:ext cx="2286000" cy="4572000"/>
           </a:xfrm>
           <a:prstGeom prst="roundRect">
             <a:avLst/>
           </a:prstGeom>
           <a:solidFill>
-            <a:srgbClr val="161E31"/>
+            <a:srgbClr val="FFFFFF"/>
           </a:solidFill>
-          <a:ln>
+          <a:ln w="25400">
             <a:solidFill>
-              <a:srgbClr val="2D3E5F"/>
+              <a:srgbClr val="0E7490"/>
             </a:solidFill>
           </a:ln>
         </p:spPr>
@@ -6692,69 +7435,120 @@
           <a:bodyPr rtlCol="0" anchor="ctr" wrap="square"/>
           <a:lstStyle/>
           <a:p>
-            <a:pPr algn="ctr"/>
-            <a:r>
-              <a:rPr b="1" sz="1400">
-                <a:solidFill>
-                  <a:srgbClr val="06B6D4"/>
-                </a:solidFill>
-              </a:rPr>
-              <a:t>ELEVATED RISK  </a:t>
-            </a:r>
-            <a:r>
-              <a:rPr sz="1100">
-                <a:solidFill>
-                  <a:srgbClr val="94A3B8"/>
-                </a:solidFill>
-              </a:rPr>
-              <a:t>[-6.0 &lt;= log10(Pc) &lt; -5.0  |  1 in 1,000,000 to 1 in 100k]</a:t>
-            </a:r>
-          </a:p>
-          <a:p>
-            <a:pPr>
-              <a:spcBef>
-                <a:spcPts val="400"/>
-              </a:spcBef>
-            </a:pPr>
-            <a:r>
-              <a:rPr b="1" sz="1100">
-                <a:solidFill>
-                  <a:srgbClr val="F1F5F9"/>
-                </a:solidFill>
-              </a:rPr>
-              <a:t>Action Protocol: </a:t>
-            </a:r>
-            <a:r>
-              <a:rPr sz="1100">
-                <a:solidFill>
-                  <a:srgbClr val="94A3B8"/>
-                </a:solidFill>
-              </a:rPr>
-              <a:t>Heightened Vigilance &amp; Screening. Trajectory screening against all neighboring constellation spacecraft.</a:t>
-            </a:r>
-          </a:p>
-        </p:txBody>
-      </p:sp>
-      <p:sp>
-        <p:nvSpPr>
-          <p:cNvPr id="7" name="Rounded Rectangle 6"/>
+            <a:pPr algn="ctr">
+              <a:defRPr sz="1300" b="1">
+                <a:solidFill>
+                  <a:srgbClr val="0E7490"/>
+                </a:solidFill>
+                <a:latin typeface="Arial"/>
+              </a:defRPr>
+            </a:pPr>
+            <a:r>
+              <a:t>1. Input Data Stream</a:t>
+            </a:r>
+          </a:p>
+          <a:p>
+            <a:pPr>
+              <a:spcBef>
+                <a:spcPts val="600"/>
+              </a:spcBef>
+              <a:defRPr sz="1000">
+                <a:solidFill>
+                  <a:srgbClr val="1E293B"/>
+                </a:solidFill>
+                <a:latin typeface="Arial"/>
+              </a:defRPr>
+            </a:pPr>
+            <a:r>
+              <a:t>•  Space Surveillance Network (SSN)</a:t>
+            </a:r>
+          </a:p>
+          <a:p>
+            <a:pPr>
+              <a:spcBef>
+                <a:spcPts val="600"/>
+              </a:spcBef>
+              <a:defRPr sz="1000">
+                <a:solidFill>
+                  <a:srgbClr val="1E293B"/>
+                </a:solidFill>
+                <a:latin typeface="Arial"/>
+              </a:defRPr>
+            </a:pPr>
+            <a:r>
+              <a:t>•  ESA Kelvins Portal</a:t>
+            </a:r>
+          </a:p>
+          <a:p>
+            <a:pPr>
+              <a:spcBef>
+                <a:spcPts val="600"/>
+              </a:spcBef>
+              <a:defRPr sz="1000">
+                <a:solidFill>
+                  <a:srgbClr val="1E293B"/>
+                </a:solidFill>
+                <a:latin typeface="Arial"/>
+              </a:defRPr>
+            </a:pPr>
+            <a:r>
+              <a:t>•  CCSDS Standard CDMs</a:t>
+            </a:r>
+          </a:p>
+          <a:p>
+            <a:pPr>
+              <a:spcBef>
+                <a:spcPts val="600"/>
+              </a:spcBef>
+              <a:defRPr sz="1000">
+                <a:solidFill>
+                  <a:srgbClr val="1E293B"/>
+                </a:solidFill>
+                <a:latin typeface="Arial"/>
+              </a:defRPr>
+            </a:pPr>
+            <a:r>
+              <a:t>•  Multi-Pass Observation Arc</a:t>
+            </a:r>
+          </a:p>
+          <a:p>
+            <a:pPr>
+              <a:spcBef>
+                <a:spcPts val="600"/>
+              </a:spcBef>
+              <a:defRPr sz="1000">
+                <a:solidFill>
+                  <a:srgbClr val="1E293B"/>
+                </a:solidFill>
+                <a:latin typeface="Arial"/>
+              </a:defRPr>
+            </a:pPr>
+            <a:r>
+              <a:t>•  Solar Weather Feeds (F10, AP)</a:t>
+            </a:r>
+          </a:p>
+        </p:txBody>
+      </p:sp>
+      <p:sp>
+        <p:nvSpPr>
+          <p:cNvPr id="8" name="Rounded Rectangle 7"/>
           <p:cNvSpPr/>
           <p:nvPr/>
         </p:nvSpPr>
         <p:spPr>
           <a:xfrm>
-            <a:off x="731520" y="5074920"/>
-            <a:ext cx="10698480" cy="1097280"/>
+            <a:off x="3657600" y="1645920"/>
+            <a:ext cx="2286000" cy="4572000"/>
           </a:xfrm>
           <a:prstGeom prst="roundRect">
             <a:avLst/>
           </a:prstGeom>
           <a:solidFill>
-            <a:srgbClr val="161E31"/>
+            <a:srgbClr val="FFFFFF"/>
           </a:solidFill>
-          <a:ln>
+          <a:ln w="25400">
             <a:solidFill>
-              <a:srgbClr val="2D3E5F"/>
+              <a:srgbClr val="A855F7"/>
             </a:solidFill>
           </a:ln>
         </p:spPr>
@@ -6776,45 +7570,414 @@
           <a:bodyPr rtlCol="0" anchor="ctr" wrap="square"/>
           <a:lstStyle/>
           <a:p>
-            <a:pPr algn="ctr"/>
-            <a:r>
-              <a:rPr b="1" sz="1400">
-                <a:solidFill>
-                  <a:srgbClr val="10B981"/>
-                </a:solidFill>
-              </a:rPr>
-              <a:t>LOW RISK (NOMINAL)  </a:t>
-            </a:r>
-            <a:r>
-              <a:rPr sz="1100">
-                <a:solidFill>
-                  <a:srgbClr val="94A3B8"/>
-                </a:solidFill>
-              </a:rPr>
-              <a:t>[log10(Pc) &lt; -6.0  |  Less than 1 in 1,000,000]</a:t>
-            </a:r>
-          </a:p>
-          <a:p>
-            <a:pPr>
-              <a:spcBef>
-                <a:spcPts val="400"/>
-              </a:spcBef>
-            </a:pPr>
-            <a:r>
-              <a:rPr b="1" sz="1100">
-                <a:solidFill>
-                  <a:srgbClr val="F1F5F9"/>
-                </a:solidFill>
-              </a:rPr>
-              <a:t>Action Protocol: </a:t>
-            </a:r>
-            <a:r>
-              <a:rPr sz="1100">
-                <a:solidFill>
-                  <a:srgbClr val="94A3B8"/>
-                </a:solidFill>
-              </a:rPr>
-              <a:t>Nominal Orbit Monitoring. Safe orbital pass; zero thruster action required, preserving mission propellant.</a:t>
+            <a:pPr algn="ctr">
+              <a:defRPr sz="1300" b="1">
+                <a:solidFill>
+                  <a:srgbClr val="A855F7"/>
+                </a:solidFill>
+                <a:latin typeface="Arial"/>
+              </a:defRPr>
+            </a:pPr>
+            <a:r>
+              <a:t>2. Telemetry Processing</a:t>
+            </a:r>
+          </a:p>
+          <a:p>
+            <a:pPr>
+              <a:spcBef>
+                <a:spcPts val="600"/>
+              </a:spcBef>
+              <a:defRPr sz="1000">
+                <a:solidFill>
+                  <a:srgbClr val="1E293B"/>
+                </a:solidFill>
+                <a:latin typeface="Arial"/>
+              </a:defRPr>
+            </a:pPr>
+            <a:r>
+              <a:t>•  100 Raw Feature Extractor</a:t>
+            </a:r>
+          </a:p>
+          <a:p>
+            <a:pPr>
+              <a:spcBef>
+                <a:spcPts val="600"/>
+              </a:spcBef>
+              <a:defRPr sz="1000">
+                <a:solidFill>
+                  <a:srgbClr val="1E293B"/>
+                </a:solidFill>
+                <a:latin typeface="Arial"/>
+              </a:defRPr>
+            </a:pPr>
+            <a:r>
+              <a:t>•  Kinematics (20 cols)</a:t>
+            </a:r>
+          </a:p>
+          <a:p>
+            <a:pPr>
+              <a:spcBef>
+                <a:spcPts val="600"/>
+              </a:spcBef>
+              <a:defRPr sz="1000">
+                <a:solidFill>
+                  <a:srgbClr val="1E293B"/>
+                </a:solidFill>
+                <a:latin typeface="Arial"/>
+              </a:defRPr>
+            </a:pPr>
+            <a:r>
+              <a:t>•  Covariances (36 cols)</a:t>
+            </a:r>
+          </a:p>
+          <a:p>
+            <a:pPr>
+              <a:spcBef>
+                <a:spcPts val="600"/>
+              </a:spcBef>
+              <a:defRPr sz="1000">
+                <a:solidFill>
+                  <a:srgbClr val="1E293B"/>
+                </a:solidFill>
+                <a:latin typeface="Arial"/>
+              </a:defRPr>
+            </a:pPr>
+            <a:r>
+              <a:t>•  Solar Drag (4 cols)</a:t>
+            </a:r>
+          </a:p>
+          <a:p>
+            <a:pPr>
+              <a:spcBef>
+                <a:spcPts val="600"/>
+              </a:spcBef>
+              <a:defRPr sz="1000">
+                <a:solidFill>
+                  <a:srgbClr val="1E293B"/>
+                </a:solidFill>
+                <a:latin typeface="Arial"/>
+              </a:defRPr>
+            </a:pPr>
+            <a:r>
+              <a:t>•  Tracking Residuals (40 cols)</a:t>
+            </a:r>
+          </a:p>
+          <a:p>
+            <a:pPr>
+              <a:spcBef>
+                <a:spcPts val="600"/>
+              </a:spcBef>
+              <a:defRPr sz="1000">
+                <a:solidFill>
+                  <a:srgbClr val="1E293B"/>
+                </a:solidFill>
+                <a:latin typeface="Arial"/>
+              </a:defRPr>
+            </a:pPr>
+            <a:r>
+              <a:t>•  Median Imputation Matrix</a:t>
+            </a:r>
+          </a:p>
+        </p:txBody>
+      </p:sp>
+      <p:sp>
+        <p:nvSpPr>
+          <p:cNvPr id="9" name="Rounded Rectangle 8"/>
+          <p:cNvSpPr/>
+          <p:nvPr/>
+        </p:nvSpPr>
+        <p:spPr>
+          <a:xfrm>
+            <a:off x="6217920" y="1645920"/>
+            <a:ext cx="2286000" cy="4572000"/>
+          </a:xfrm>
+          <a:prstGeom prst="roundRect">
+            <a:avLst/>
+          </a:prstGeom>
+          <a:solidFill>
+            <a:srgbClr val="FFFFFF"/>
+          </a:solidFill>
+          <a:ln w="25400">
+            <a:solidFill>
+              <a:srgbClr val="DC2626"/>
+            </a:solidFill>
+          </a:ln>
+        </p:spPr>
+        <p:style>
+          <a:lnRef idx="1">
+            <a:schemeClr val="accent1"/>
+          </a:lnRef>
+          <a:fillRef idx="3">
+            <a:schemeClr val="accent1"/>
+          </a:fillRef>
+          <a:effectRef idx="2">
+            <a:schemeClr val="accent1"/>
+          </a:effectRef>
+          <a:fontRef idx="minor">
+            <a:schemeClr val="lt1"/>
+          </a:fontRef>
+        </p:style>
+        <p:txBody>
+          <a:bodyPr rtlCol="0" anchor="ctr" wrap="square"/>
+          <a:lstStyle/>
+          <a:p>
+            <a:pPr algn="ctr">
+              <a:defRPr sz="1300" b="1">
+                <a:solidFill>
+                  <a:srgbClr val="DC2626"/>
+                </a:solidFill>
+                <a:latin typeface="Arial"/>
+              </a:defRPr>
+            </a:pPr>
+            <a:r>
+              <a:t>3. High-Recall AI Core</a:t>
+            </a:r>
+          </a:p>
+          <a:p>
+            <a:pPr>
+              <a:spcBef>
+                <a:spcPts val="600"/>
+              </a:spcBef>
+              <a:defRPr sz="1000">
+                <a:solidFill>
+                  <a:srgbClr val="1E293B"/>
+                </a:solidFill>
+                <a:latin typeface="Arial"/>
+              </a:defRPr>
+            </a:pPr>
+            <a:r>
+              <a:t>•  XGBoost Regressor</a:t>
+            </a:r>
+          </a:p>
+          <a:p>
+            <a:pPr>
+              <a:spcBef>
+                <a:spcPts val="600"/>
+              </a:spcBef>
+              <a:defRPr sz="1000">
+                <a:solidFill>
+                  <a:srgbClr val="1E293B"/>
+                </a:solidFill>
+                <a:latin typeface="Arial"/>
+              </a:defRPr>
+            </a:pPr>
+            <a:r>
+              <a:t>•  Asymmetric Loss (w=30x)</a:t>
+            </a:r>
+          </a:p>
+          <a:p>
+            <a:pPr>
+              <a:spcBef>
+                <a:spcPts val="600"/>
+              </a:spcBef>
+              <a:defRPr sz="1000">
+                <a:solidFill>
+                  <a:srgbClr val="1E293B"/>
+                </a:solidFill>
+                <a:latin typeface="Arial"/>
+              </a:defRPr>
+            </a:pPr>
+            <a:r>
+              <a:t>•  Continuous log10(Pc) Output</a:t>
+            </a:r>
+          </a:p>
+          <a:p>
+            <a:pPr>
+              <a:spcBef>
+                <a:spcPts val="600"/>
+              </a:spcBef>
+              <a:defRPr sz="1000">
+                <a:solidFill>
+                  <a:srgbClr val="1E293B"/>
+                </a:solidFill>
+                <a:latin typeface="Arial"/>
+              </a:defRPr>
+            </a:pPr>
+            <a:r>
+              <a:t>•  Threshold Filter (tau = -6.0)</a:t>
+            </a:r>
+          </a:p>
+          <a:p>
+            <a:pPr>
+              <a:spcBef>
+                <a:spcPts val="600"/>
+              </a:spcBef>
+              <a:defRPr sz="1000">
+                <a:solidFill>
+                  <a:srgbClr val="1E293B"/>
+                </a:solidFill>
+                <a:latin typeface="Arial"/>
+              </a:defRPr>
+            </a:pPr>
+            <a:r>
+              <a:t>•  92.70% High-Risk Recall</a:t>
+            </a:r>
+          </a:p>
+          <a:p>
+            <a:pPr>
+              <a:spcBef>
+                <a:spcPts val="600"/>
+              </a:spcBef>
+              <a:defRPr sz="1000">
+                <a:solidFill>
+                  <a:srgbClr val="1E293B"/>
+                </a:solidFill>
+                <a:latin typeface="Arial"/>
+              </a:defRPr>
+            </a:pPr>
+            <a:r>
+              <a:t>•  89.77% Safety F2 Score</a:t>
+            </a:r>
+          </a:p>
+        </p:txBody>
+      </p:sp>
+      <p:sp>
+        <p:nvSpPr>
+          <p:cNvPr id="10" name="Rounded Rectangle 9"/>
+          <p:cNvSpPr/>
+          <p:nvPr/>
+        </p:nvSpPr>
+        <p:spPr>
+          <a:xfrm>
+            <a:off x="8778240" y="1645920"/>
+            <a:ext cx="2286000" cy="4572000"/>
+          </a:xfrm>
+          <a:prstGeom prst="roundRect">
+            <a:avLst/>
+          </a:prstGeom>
+          <a:solidFill>
+            <a:srgbClr val="FFFFFF"/>
+          </a:solidFill>
+          <a:ln w="25400">
+            <a:solidFill>
+              <a:srgbClr val="0F766E"/>
+            </a:solidFill>
+          </a:ln>
+        </p:spPr>
+        <p:style>
+          <a:lnRef idx="1">
+            <a:schemeClr val="accent1"/>
+          </a:lnRef>
+          <a:fillRef idx="3">
+            <a:schemeClr val="accent1"/>
+          </a:fillRef>
+          <a:effectRef idx="2">
+            <a:schemeClr val="accent1"/>
+          </a:effectRef>
+          <a:fontRef idx="minor">
+            <a:schemeClr val="lt1"/>
+          </a:fontRef>
+        </p:style>
+        <p:txBody>
+          <a:bodyPr rtlCol="0" anchor="ctr" wrap="square"/>
+          <a:lstStyle/>
+          <a:p>
+            <a:pPr algn="ctr">
+              <a:defRPr sz="1300" b="1">
+                <a:solidFill>
+                  <a:srgbClr val="0F766E"/>
+                </a:solidFill>
+                <a:latin typeface="Arial"/>
+              </a:defRPr>
+            </a:pPr>
+            <a:r>
+              <a:t>4. Mission Control UI</a:t>
+            </a:r>
+          </a:p>
+          <a:p>
+            <a:pPr>
+              <a:spcBef>
+                <a:spcPts val="600"/>
+              </a:spcBef>
+              <a:defRPr sz="1000">
+                <a:solidFill>
+                  <a:srgbClr val="1E293B"/>
+                </a:solidFill>
+                <a:latin typeface="Arial"/>
+              </a:defRPr>
+            </a:pPr>
+            <a:r>
+              <a:t>•  React 18 + Vite Frontend</a:t>
+            </a:r>
+          </a:p>
+          <a:p>
+            <a:pPr>
+              <a:spcBef>
+                <a:spcPts val="600"/>
+              </a:spcBef>
+              <a:defRPr sz="1000">
+                <a:solidFill>
+                  <a:srgbClr val="1E293B"/>
+                </a:solidFill>
+                <a:latin typeface="Arial"/>
+              </a:defRPr>
+            </a:pPr>
+            <a:r>
+              <a:t>•  Three.js 3D Orbit Scene</a:t>
+            </a:r>
+          </a:p>
+          <a:p>
+            <a:pPr>
+              <a:spcBef>
+                <a:spcPts val="600"/>
+              </a:spcBef>
+              <a:defRPr sz="1000">
+                <a:solidFill>
+                  <a:srgbClr val="1E293B"/>
+                </a:solidFill>
+                <a:latin typeface="Arial"/>
+              </a:defRPr>
+            </a:pPr>
+            <a:r>
+              <a:t>•  Timeline Playback Scrubber</a:t>
+            </a:r>
+          </a:p>
+          <a:p>
+            <a:pPr>
+              <a:spcBef>
+                <a:spcPts val="600"/>
+              </a:spcBef>
+              <a:defRPr sz="1000">
+                <a:solidFill>
+                  <a:srgbClr val="1E293B"/>
+                </a:solidFill>
+                <a:latin typeface="Arial"/>
+              </a:defRPr>
+            </a:pPr>
+            <a:r>
+              <a:t>•  Model Lab Calibration</a:t>
+            </a:r>
+          </a:p>
+          <a:p>
+            <a:pPr>
+              <a:spcBef>
+                <a:spcPts val="600"/>
+              </a:spcBef>
+              <a:defRPr sz="1000">
+                <a:solidFill>
+                  <a:srgbClr val="1E293B"/>
+                </a:solidFill>
+                <a:latin typeface="Arial"/>
+              </a:defRPr>
+            </a:pPr>
+            <a:r>
+              <a:t>•  Instant CSV Predictor</a:t>
+            </a:r>
+          </a:p>
+          <a:p>
+            <a:pPr>
+              <a:spcBef>
+                <a:spcPts val="600"/>
+              </a:spcBef>
+              <a:defRPr sz="1000">
+                <a:solidFill>
+                  <a:srgbClr val="1E293B"/>
+                </a:solidFill>
+                <a:latin typeface="Arial"/>
+              </a:defRPr>
+            </a:pPr>
+            <a:r>
+              <a:t>•  CAM Action Protocol</a:t>
             </a:r>
           </a:p>
         </p:txBody>
@@ -6830,14 +7993,6 @@
 <file path=ppt/slides/slide8.xml><?xml version="1.0" encoding="utf-8"?>
 <p:sld xmlns:a="http://schemas.openxmlformats.org/drawingml/2006/main" xmlns:p="http://schemas.openxmlformats.org/presentationml/2006/main" xmlns:r="http://schemas.openxmlformats.org/officeDocument/2006/relationships">
   <p:cSld>
-    <p:bg>
-      <p:bgPr>
-        <a:solidFill>
-          <a:srgbClr val="0B1120"/>
-        </a:solidFill>
-        <a:effectLst/>
-      </p:bgPr>
-    </p:bg>
     <p:spTree>
       <p:nvGrpSpPr>
         <p:cNvPr id="1" name=""/>
@@ -6847,95 +8002,23 @@
       <p:grpSpPr/>
       <p:sp>
         <p:nvSpPr>
-          <p:cNvPr id="2" name="TextBox 1"/>
-          <p:cNvSpPr txBox="1"/>
-          <p:nvPr/>
-        </p:nvSpPr>
-        <p:spPr>
-          <a:xfrm>
-            <a:off x="731520" y="365760"/>
-            <a:ext cx="10698480" cy="274320"/>
-          </a:xfrm>
-          <a:prstGeom prst="rect">
-            <a:avLst/>
-          </a:prstGeom>
-          <a:noFill/>
-        </p:spPr>
-        <p:txBody>
-          <a:bodyPr wrap="square">
-            <a:spAutoFit/>
-          </a:bodyPr>
-          <a:lstStyle/>
-          <a:p>
-            <a:pPr>
-              <a:defRPr sz="1000" b="1">
-                <a:solidFill>
-                  <a:srgbClr val="06B6D4"/>
-                </a:solidFill>
-              </a:defRPr>
-            </a:pPr>
-            <a:r>
-              <a:t>PLATFORM ARCHITECTURE</a:t>
-            </a:r>
-          </a:p>
-        </p:txBody>
-      </p:sp>
-      <p:sp>
-        <p:nvSpPr>
-          <p:cNvPr id="3" name="TextBox 2"/>
-          <p:cNvSpPr txBox="1"/>
-          <p:nvPr/>
-        </p:nvSpPr>
-        <p:spPr>
-          <a:xfrm>
-            <a:off x="731520" y="594360"/>
-            <a:ext cx="10698480" cy="548640"/>
-          </a:xfrm>
-          <a:prstGeom prst="rect">
-            <a:avLst/>
-          </a:prstGeom>
-          <a:noFill/>
-        </p:spPr>
-        <p:txBody>
-          <a:bodyPr wrap="square">
-            <a:spAutoFit/>
-          </a:bodyPr>
-          <a:lstStyle/>
-          <a:p>
-            <a:pPr>
-              <a:defRPr sz="2200" b="1">
-                <a:solidFill>
-                  <a:srgbClr val="F1F5F9"/>
-                </a:solidFill>
-              </a:defRPr>
-            </a:pPr>
-            <a:r>
-              <a:t>Prahari Mission Control Platform: React + Three.js Interface</a:t>
-            </a:r>
-          </a:p>
-        </p:txBody>
-      </p:sp>
-      <p:sp>
-        <p:nvSpPr>
-          <p:cNvPr id="4" name="Rounded Rectangle 3"/>
+          <p:cNvPr id="2" name="Right Triangle 1"/>
           <p:cNvSpPr/>
           <p:nvPr/>
         </p:nvSpPr>
         <p:spPr>
-          <a:xfrm>
-            <a:off x="731520" y="1371600"/>
-            <a:ext cx="5257800" cy="2240280"/>
-          </a:xfrm>
-          <a:prstGeom prst="roundRect">
+          <a:xfrm rot="5400000">
+            <a:off x="10972800" y="0"/>
+            <a:ext cx="1218895" cy="2011680"/>
+          </a:xfrm>
+          <a:prstGeom prst="rtTriangle">
             <a:avLst/>
           </a:prstGeom>
           <a:solidFill>
-            <a:srgbClr val="161E31"/>
+            <a:srgbClr val="EA580C"/>
           </a:solidFill>
           <a:ln>
-            <a:solidFill>
-              <a:srgbClr val="2D3E5F"/>
-            </a:solidFill>
+            <a:noFill/>
           </a:ln>
         </p:spPr>
         <p:style>
@@ -6953,58 +8036,32 @@
           </a:fontRef>
         </p:style>
         <p:txBody>
-          <a:bodyPr rtlCol="0" anchor="ctr" wrap="square"/>
-          <a:lstStyle/>
-          <a:p>
-            <a:pPr algn="ctr">
-              <a:defRPr sz="1500" b="1">
-                <a:solidFill>
-                  <a:srgbClr val="06B6D4"/>
-                </a:solidFill>
-              </a:defRPr>
-            </a:pPr>
-            <a:r>
-              <a:t>Global Command Center (Overview)</a:t>
-            </a:r>
-          </a:p>
-          <a:p>
-            <a:pPr>
-              <a:spcBef>
-                <a:spcPts val="800"/>
-              </a:spcBef>
-              <a:defRPr sz="1200">
-                <a:solidFill>
-                  <a:srgbClr val="94A3B8"/>
-                </a:solidFill>
-              </a:defRPr>
-            </a:pPr>
-            <a:r>
-              <a:t>Real-time telemetry counters, live CDM analysis module, and critical conjunction watchlist with instant triage status.</a:t>
-            </a:r>
-          </a:p>
-        </p:txBody>
-      </p:sp>
-      <p:sp>
-        <p:nvSpPr>
-          <p:cNvPr id="5" name="Rounded Rectangle 4"/>
+          <a:bodyPr rtlCol="0" anchor="ctr"/>
+          <a:lstStyle/>
+          <a:p>
+            <a:pPr algn="ctr"/>
+          </a:p>
+        </p:txBody>
+      </p:sp>
+      <p:sp>
+        <p:nvSpPr>
+          <p:cNvPr id="3" name="Right Triangle 2"/>
           <p:cNvSpPr/>
           <p:nvPr/>
         </p:nvSpPr>
         <p:spPr>
-          <a:xfrm>
-            <a:off x="6172200" y="1371600"/>
-            <a:ext cx="5257800" cy="2240280"/>
-          </a:xfrm>
-          <a:prstGeom prst="roundRect">
+          <a:xfrm rot="16200000">
+            <a:off x="0" y="4846320"/>
+            <a:ext cx="1097280" cy="2011680"/>
+          </a:xfrm>
+          <a:prstGeom prst="rtTriangle">
             <a:avLst/>
           </a:prstGeom>
           <a:solidFill>
-            <a:srgbClr val="161E31"/>
+            <a:srgbClr val="0F766E"/>
           </a:solidFill>
           <a:ln>
-            <a:solidFill>
-              <a:srgbClr val="2D3E5F"/>
-            </a:solidFill>
+            <a:noFill/>
           </a:ln>
         </p:spPr>
         <p:style>
@@ -7022,57 +8079,141 @@
           </a:fontRef>
         </p:style>
         <p:txBody>
-          <a:bodyPr rtlCol="0" anchor="ctr" wrap="square"/>
-          <a:lstStyle/>
-          <a:p>
-            <a:pPr algn="ctr">
-              <a:defRPr sz="1500" b="1">
-                <a:solidFill>
-                  <a:srgbClr val="10B981"/>
-                </a:solidFill>
-              </a:defRPr>
-            </a:pPr>
-            <a:r>
-              <a:t>Interactive 3D Orbit Visualizer (Detail)</a:t>
-            </a:r>
-          </a:p>
-          <a:p>
-            <a:pPr>
-              <a:spcBef>
-                <a:spcPts val="800"/>
-              </a:spcBef>
-              <a:defRPr sz="1200">
-                <a:solidFill>
-                  <a:srgbClr val="94A3B8"/>
-                </a:solidFill>
-              </a:defRPr>
-            </a:pPr>
-            <a:r>
-              <a:t>Full-bleed Three.js WebGL orbital scene with spacecraft and debris trajectories, 3-sigma covariance ellipsoids, and timeline playback scrubber.</a:t>
-            </a:r>
-          </a:p>
-        </p:txBody>
-      </p:sp>
-      <p:sp>
-        <p:nvSpPr>
-          <p:cNvPr id="6" name="Rounded Rectangle 5"/>
+          <a:bodyPr rtlCol="0" anchor="ctr"/>
+          <a:lstStyle/>
+          <a:p>
+            <a:pPr algn="ctr"/>
+          </a:p>
+        </p:txBody>
+      </p:sp>
+      <p:sp>
+        <p:nvSpPr>
+          <p:cNvPr id="4" name="TextBox 3"/>
+          <p:cNvSpPr txBox="1"/>
+          <p:nvPr/>
+        </p:nvSpPr>
+        <p:spPr>
+          <a:xfrm>
+            <a:off x="365760" y="274320"/>
+            <a:ext cx="1828800" cy="548640"/>
+          </a:xfrm>
+          <a:prstGeom prst="rect">
+            <a:avLst/>
+          </a:prstGeom>
+          <a:noFill/>
+        </p:spPr>
+        <p:txBody>
+          <a:bodyPr wrap="none">
+            <a:spAutoFit/>
+          </a:bodyPr>
+          <a:lstStyle/>
+          <a:p>
+            <a:pPr>
+              <a:defRPr sz="1800" b="1">
+                <a:solidFill>
+                  <a:srgbClr val="0F172A"/>
+                </a:solidFill>
+                <a:latin typeface="Arial"/>
+              </a:defRPr>
+            </a:pPr>
+            <a:r>
+              <a:t>Kmit</a:t>
+            </a:r>
+          </a:p>
+        </p:txBody>
+      </p:sp>
+      <p:sp>
+        <p:nvSpPr>
+          <p:cNvPr id="5" name="TextBox 4"/>
+          <p:cNvSpPr txBox="1"/>
+          <p:nvPr/>
+        </p:nvSpPr>
+        <p:spPr>
+          <a:xfrm>
+            <a:off x="1097280" y="274320"/>
+            <a:ext cx="9601200" cy="731520"/>
+          </a:xfrm>
+          <a:prstGeom prst="rect">
+            <a:avLst/>
+          </a:prstGeom>
+          <a:noFill/>
+        </p:spPr>
+        <p:txBody>
+          <a:bodyPr wrap="none">
+            <a:spAutoFit/>
+          </a:bodyPr>
+          <a:lstStyle/>
+          <a:p>
+            <a:pPr>
+              <a:defRPr sz="2600" b="1">
+                <a:solidFill>
+                  <a:srgbClr val="DC2626"/>
+                </a:solidFill>
+                <a:latin typeface="Arial"/>
+              </a:defRPr>
+            </a:pPr>
+            <a:r>
+              <a:t>TELEMETRY &amp; FEATURE ARCHITECTURE</a:t>
+            </a:r>
+          </a:p>
+        </p:txBody>
+      </p:sp>
+      <p:sp>
+        <p:nvSpPr>
+          <p:cNvPr id="6" name="TextBox 5"/>
+          <p:cNvSpPr txBox="1"/>
+          <p:nvPr/>
+        </p:nvSpPr>
+        <p:spPr>
+          <a:xfrm>
+            <a:off x="1097280" y="1005840"/>
+            <a:ext cx="10058400" cy="457200"/>
+          </a:xfrm>
+          <a:prstGeom prst="rect">
+            <a:avLst/>
+          </a:prstGeom>
+          <a:noFill/>
+        </p:spPr>
+        <p:txBody>
+          <a:bodyPr wrap="none">
+            <a:spAutoFit/>
+          </a:bodyPr>
+          <a:lstStyle/>
+          <a:p>
+            <a:pPr>
+              <a:defRPr sz="1600" b="1">
+                <a:solidFill>
+                  <a:srgbClr val="1E293B"/>
+                </a:solidFill>
+                <a:latin typeface="Arial"/>
+              </a:defRPr>
+            </a:pPr>
+            <a:r>
+              <a:t>100 Native Telemetry Parameters (Zero Synthetic Bloat)</a:t>
+            </a:r>
+          </a:p>
+        </p:txBody>
+      </p:sp>
+      <p:sp>
+        <p:nvSpPr>
+          <p:cNvPr id="7" name="Rounded Rectangle 6"/>
           <p:cNvSpPr/>
           <p:nvPr/>
         </p:nvSpPr>
         <p:spPr>
           <a:xfrm>
-            <a:off x="731520" y="3794760"/>
-            <a:ext cx="5257800" cy="2240280"/>
+            <a:off x="1097280" y="1554480"/>
+            <a:ext cx="4846320" cy="2286000"/>
           </a:xfrm>
           <a:prstGeom prst="roundRect">
             <a:avLst/>
           </a:prstGeom>
           <a:solidFill>
-            <a:srgbClr val="161E31"/>
+            <a:srgbClr val="FFFFFF"/>
           </a:solidFill>
-          <a:ln>
+          <a:ln w="19050">
             <a:solidFill>
-              <a:srgbClr val="2D3E5F"/>
+              <a:srgbClr val="0E7490"/>
             </a:solidFill>
           </a:ln>
         </p:spPr>
@@ -7095,14 +8236,15 @@
           <a:lstStyle/>
           <a:p>
             <a:pPr algn="ctr">
-              <a:defRPr sz="1500" b="1">
-                <a:solidFill>
-                  <a:srgbClr val="F59E0B"/>
-                </a:solidFill>
-              </a:defRPr>
-            </a:pPr>
-            <a:r>
-              <a:t>Model Lab &amp; Calibration Sandbox</a:t>
+              <a:defRPr sz="1300" b="1">
+                <a:solidFill>
+                  <a:srgbClr val="0E7490"/>
+                </a:solidFill>
+                <a:latin typeface="Arial"/>
+              </a:defRPr>
+            </a:pPr>
+            <a:r>
+              <a:t>1. Orbital Kinematics (20 Features)</a:t>
             </a:r>
           </a:p>
           <a:p>
@@ -7110,38 +8252,39 @@
               <a:spcBef>
                 <a:spcPts val="800"/>
               </a:spcBef>
-              <a:defRPr sz="1200">
-                <a:solidFill>
-                  <a:srgbClr val="94A3B8"/>
-                </a:solidFill>
-              </a:defRPr>
-            </a:pPr>
-            <a:r>
-              <a:t>Live threshold calibration slider (-8.0 to -2.0), SHAP feature importance charts, and categorized directory of all 100 native telemetry parameters.</a:t>
-            </a:r>
-          </a:p>
-        </p:txBody>
-      </p:sp>
-      <p:sp>
-        <p:nvSpPr>
-          <p:cNvPr id="7" name="Rounded Rectangle 6"/>
+              <a:defRPr sz="1100">
+                <a:solidFill>
+                  <a:srgbClr val="1E293B"/>
+                </a:solidFill>
+                <a:latin typeface="Arial"/>
+              </a:defRPr>
+            </a:pPr>
+            <a:r>
+              <a:t>Captures 3D spatial clearance, relative closing speed, RTN vectors, Keplerian semi-major axes, eccentricities, inclinations, and Mahalanobis statistical distance.</a:t>
+            </a:r>
+          </a:p>
+        </p:txBody>
+      </p:sp>
+      <p:sp>
+        <p:nvSpPr>
+          <p:cNvPr id="8" name="Rounded Rectangle 7"/>
           <p:cNvSpPr/>
           <p:nvPr/>
         </p:nvSpPr>
         <p:spPr>
           <a:xfrm>
-            <a:off x="6172200" y="3794760"/>
-            <a:ext cx="5257800" cy="2240280"/>
+            <a:off x="6309360" y="1554480"/>
+            <a:ext cx="4846320" cy="2286000"/>
           </a:xfrm>
           <a:prstGeom prst="roundRect">
             <a:avLst/>
           </a:prstGeom>
           <a:solidFill>
-            <a:srgbClr val="161E31"/>
+            <a:srgbClr val="FFFFFF"/>
           </a:solidFill>
-          <a:ln>
+          <a:ln w="19050">
             <a:solidFill>
-              <a:srgbClr val="2D3E5F"/>
+              <a:srgbClr val="0F766E"/>
             </a:solidFill>
           </a:ln>
         </p:spPr>
@@ -7164,14 +8307,15 @@
           <a:lstStyle/>
           <a:p>
             <a:pPr algn="ctr">
-              <a:defRPr sz="1500" b="1">
-                <a:solidFill>
-                  <a:srgbClr val="A855F7"/>
-                </a:solidFill>
-              </a:defRPr>
-            </a:pPr>
-            <a:r>
-              <a:t>Instant Telemetry Prediction Engine</a:t>
+              <a:defRPr sz="1300" b="1">
+                <a:solidFill>
+                  <a:srgbClr val="0F766E"/>
+                </a:solidFill>
+                <a:latin typeface="Arial"/>
+              </a:defRPr>
+            </a:pPr>
+            <a:r>
+              <a:t>2. Covariance Dispersion (36 Features)</a:t>
             </a:r>
           </a:p>
           <a:p>
@@ -7179,14 +8323,157 @@
               <a:spcBef>
                 <a:spcPts val="800"/>
               </a:spcBef>
-              <a:defRPr sz="1200">
-                <a:solidFill>
-                  <a:srgbClr val="94A3B8"/>
-                </a:solidFill>
-              </a:defRPr>
-            </a:pPr>
-            <a:r>
-              <a:t>Drag-and-drop CSV ingestion module providing sub-millisecond risk prediction, collision probability %, and physical parameter breakdown.</a:t>
+              <a:defRPr sz="1100">
+                <a:solidFill>
+                  <a:srgbClr val="1E293B"/>
+                </a:solidFill>
+                <a:latin typeface="Arial"/>
+              </a:defRPr>
+            </a:pPr>
+            <a:r>
+              <a:t>Encapsulates full 3D position and velocity 1-sigma error dispersions, 3x3 covariance matrix determinants (uncertainty volumes in m^6), and 18 RTN cross-correlation terms.</a:t>
+            </a:r>
+          </a:p>
+        </p:txBody>
+      </p:sp>
+      <p:sp>
+        <p:nvSpPr>
+          <p:cNvPr id="9" name="Rounded Rectangle 8"/>
+          <p:cNvSpPr/>
+          <p:nvPr/>
+        </p:nvSpPr>
+        <p:spPr>
+          <a:xfrm>
+            <a:off x="1097280" y="4023360"/>
+            <a:ext cx="4846320" cy="2286000"/>
+          </a:xfrm>
+          <a:prstGeom prst="roundRect">
+            <a:avLst/>
+          </a:prstGeom>
+          <a:solidFill>
+            <a:srgbClr val="FFFFFF"/>
+          </a:solidFill>
+          <a:ln w="19050">
+            <a:solidFill>
+              <a:srgbClr val="D97706"/>
+            </a:solidFill>
+          </a:ln>
+        </p:spPr>
+        <p:style>
+          <a:lnRef idx="1">
+            <a:schemeClr val="accent1"/>
+          </a:lnRef>
+          <a:fillRef idx="3">
+            <a:schemeClr val="accent1"/>
+          </a:fillRef>
+          <a:effectRef idx="2">
+            <a:schemeClr val="accent1"/>
+          </a:effectRef>
+          <a:fontRef idx="minor">
+            <a:schemeClr val="lt1"/>
+          </a:fontRef>
+        </p:style>
+        <p:txBody>
+          <a:bodyPr rtlCol="0" anchor="ctr" wrap="square"/>
+          <a:lstStyle/>
+          <a:p>
+            <a:pPr algn="ctr">
+              <a:defRPr sz="1300" b="1">
+                <a:solidFill>
+                  <a:srgbClr val="D97706"/>
+                </a:solidFill>
+                <a:latin typeface="Arial"/>
+              </a:defRPr>
+            </a:pPr>
+            <a:r>
+              <a:t>3. Solar &amp; Space Weather (4 Features)</a:t>
+            </a:r>
+          </a:p>
+          <a:p>
+            <a:pPr>
+              <a:spcBef>
+                <a:spcPts val="800"/>
+              </a:spcBef>
+              <a:defRPr sz="1100">
+                <a:solidFill>
+                  <a:srgbClr val="1E293B"/>
+                </a:solidFill>
+                <a:latin typeface="Arial"/>
+              </a:defRPr>
+            </a:pPr>
+            <a:r>
+              <a:t>Includes daily 10.7 cm solar flux (F10), 81-day centered flux (F3M), sunspot number (SSN), and geomagnetic index (AP) driving atmospheric drag density in LEO.</a:t>
+            </a:r>
+          </a:p>
+        </p:txBody>
+      </p:sp>
+      <p:sp>
+        <p:nvSpPr>
+          <p:cNvPr id="10" name="Rounded Rectangle 9"/>
+          <p:cNvSpPr/>
+          <p:nvPr/>
+        </p:nvSpPr>
+        <p:spPr>
+          <a:xfrm>
+            <a:off x="6309360" y="4023360"/>
+            <a:ext cx="4846320" cy="2286000"/>
+          </a:xfrm>
+          <a:prstGeom prst="roundRect">
+            <a:avLst/>
+          </a:prstGeom>
+          <a:solidFill>
+            <a:srgbClr val="FFFFFF"/>
+          </a:solidFill>
+          <a:ln w="19050">
+            <a:solidFill>
+              <a:srgbClr val="9333EA"/>
+            </a:solidFill>
+          </a:ln>
+        </p:spPr>
+        <p:style>
+          <a:lnRef idx="1">
+            <a:schemeClr val="accent1"/>
+          </a:lnRef>
+          <a:fillRef idx="3">
+            <a:schemeClr val="accent1"/>
+          </a:fillRef>
+          <a:effectRef idx="2">
+            <a:schemeClr val="accent1"/>
+          </a:effectRef>
+          <a:fontRef idx="minor">
+            <a:schemeClr val="lt1"/>
+          </a:fontRef>
+        </p:style>
+        <p:txBody>
+          <a:bodyPr rtlCol="0" anchor="ctr" wrap="square"/>
+          <a:lstStyle/>
+          <a:p>
+            <a:pPr algn="ctr">
+              <a:defRPr sz="1300" b="1">
+                <a:solidFill>
+                  <a:srgbClr val="9333EA"/>
+                </a:solidFill>
+                <a:latin typeface="Arial"/>
+              </a:defRPr>
+            </a:pPr>
+            <a:r>
+              <a:t>4. Tracking Observables (40 Features)</a:t>
+            </a:r>
+          </a:p>
+          <a:p>
+            <a:pPr>
+              <a:spcBef>
+                <a:spcPts val="800"/>
+              </a:spcBef>
+              <a:defRPr sz="1100">
+                <a:solidFill>
+                  <a:srgbClr val="1E293B"/>
+                </a:solidFill>
+                <a:latin typeface="Arial"/>
+              </a:defRPr>
+            </a:pPr>
+            <a:r>
+              <a:t>Contains radar pass counts (available vs. used), weighted RMS orbit fit residuals, radar cross section (RCS), ballistic area-to-mass ratios, and theoretical maximum risk bounds.</a:t>
             </a:r>
           </a:p>
         </p:txBody>
@@ -7202,14 +8489,6 @@
 <file path=ppt/slides/slide9.xml><?xml version="1.0" encoding="utf-8"?>
 <p:sld xmlns:a="http://schemas.openxmlformats.org/drawingml/2006/main" xmlns:p="http://schemas.openxmlformats.org/presentationml/2006/main" xmlns:r="http://schemas.openxmlformats.org/officeDocument/2006/relationships">
   <p:cSld>
-    <p:bg>
-      <p:bgPr>
-        <a:solidFill>
-          <a:srgbClr val="0B1120"/>
-        </a:solidFill>
-        <a:effectLst/>
-      </p:bgPr>
-    </p:bg>
     <p:spTree>
       <p:nvGrpSpPr>
         <p:cNvPr id="1" name=""/>
@@ -7219,95 +8498,23 @@
       <p:grpSpPr/>
       <p:sp>
         <p:nvSpPr>
-          <p:cNvPr id="2" name="TextBox 1"/>
-          <p:cNvSpPr txBox="1"/>
-          <p:nvPr/>
-        </p:nvSpPr>
-        <p:spPr>
-          <a:xfrm>
-            <a:off x="731520" y="365760"/>
-            <a:ext cx="10698480" cy="274320"/>
-          </a:xfrm>
-          <a:prstGeom prst="rect">
-            <a:avLst/>
-          </a:prstGeom>
-          <a:noFill/>
-        </p:spPr>
-        <p:txBody>
-          <a:bodyPr wrap="square">
-            <a:spAutoFit/>
-          </a:bodyPr>
-          <a:lstStyle/>
-          <a:p>
-            <a:pPr>
-              <a:defRPr sz="1000" b="1">
-                <a:solidFill>
-                  <a:srgbClr val="06B6D4"/>
-                </a:solidFill>
-              </a:defRPr>
-            </a:pPr>
-            <a:r>
-              <a:t>SUMMARY &amp; OUTLOOK</a:t>
-            </a:r>
-          </a:p>
-        </p:txBody>
-      </p:sp>
-      <p:sp>
-        <p:nvSpPr>
-          <p:cNvPr id="3" name="TextBox 2"/>
-          <p:cNvSpPr txBox="1"/>
-          <p:nvPr/>
-        </p:nvSpPr>
-        <p:spPr>
-          <a:xfrm>
-            <a:off x="731520" y="594360"/>
-            <a:ext cx="10698480" cy="548640"/>
-          </a:xfrm>
-          <a:prstGeom prst="rect">
-            <a:avLst/>
-          </a:prstGeom>
-          <a:noFill/>
-        </p:spPr>
-        <p:txBody>
-          <a:bodyPr wrap="square">
-            <a:spAutoFit/>
-          </a:bodyPr>
-          <a:lstStyle/>
-          <a:p>
-            <a:pPr>
-              <a:defRPr sz="2200" b="1">
-                <a:solidFill>
-                  <a:srgbClr val="F1F5F9"/>
-                </a:solidFill>
-              </a:defRPr>
-            </a:pPr>
-            <a:r>
-              <a:t>Conclusion &amp; Next-Generation Autonomous SSA Roadmap</a:t>
-            </a:r>
-          </a:p>
-        </p:txBody>
-      </p:sp>
-      <p:sp>
-        <p:nvSpPr>
-          <p:cNvPr id="4" name="Rounded Rectangle 3"/>
+          <p:cNvPr id="2" name="Right Triangle 1"/>
           <p:cNvSpPr/>
           <p:nvPr/>
         </p:nvSpPr>
         <p:spPr>
-          <a:xfrm>
-            <a:off x="731520" y="1371600"/>
-            <a:ext cx="5212080" cy="4754880"/>
-          </a:xfrm>
-          <a:prstGeom prst="roundRect">
+          <a:xfrm rot="5400000">
+            <a:off x="10972800" y="0"/>
+            <a:ext cx="1218895" cy="2011680"/>
+          </a:xfrm>
+          <a:prstGeom prst="rtTriangle">
             <a:avLst/>
           </a:prstGeom>
           <a:solidFill>
-            <a:srgbClr val="161E31"/>
+            <a:srgbClr val="EA580C"/>
           </a:solidFill>
           <a:ln>
-            <a:solidFill>
-              <a:srgbClr val="2D3E5F"/>
-            </a:solidFill>
+            <a:noFill/>
           </a:ln>
         </p:spPr>
         <p:style>
@@ -7325,158 +8532,32 @@
           </a:fontRef>
         </p:style>
         <p:txBody>
-          <a:bodyPr rtlCol="0" anchor="ctr" wrap="square"/>
-          <a:lstStyle/>
-          <a:p>
-            <a:pPr algn="ctr">
-              <a:defRPr sz="1600" b="1">
-                <a:solidFill>
-                  <a:srgbClr val="10B981"/>
-                </a:solidFill>
-              </a:defRPr>
-            </a:pPr>
-            <a:r>
-              <a:t>Core Research Contributions</a:t>
-            </a:r>
-          </a:p>
-          <a:p>
-            <a:pPr>
-              <a:spcBef>
-                <a:spcPts val="800"/>
-              </a:spcBef>
-            </a:pPr>
-            <a:r>
-              <a:rPr b="1" sz="1100">
-                <a:solidFill>
-                  <a:srgbClr val="F1F5F9"/>
-                </a:solidFill>
-              </a:rPr>
-              <a:t>✓ Eliminated Temporal Blindness: </a:t>
-            </a:r>
-            <a:r>
-              <a:rPr sz="1100">
-                <a:solidFill>
-                  <a:srgbClr val="94A3B8"/>
-                </a:solidFill>
-              </a:rPr>
-              <a:t>Provides 3 to 5 days of actionable lead time for collision avoidance burns.</a:t>
-            </a:r>
-          </a:p>
-          <a:p>
-            <a:pPr>
-              <a:spcBef>
-                <a:spcPts val="800"/>
-              </a:spcBef>
-            </a:pPr>
-            <a:r>
-              <a:rPr b="1" sz="1100">
-                <a:solidFill>
-                  <a:srgbClr val="F1F5F9"/>
-                </a:solidFill>
-              </a:rPr>
-              <a:t>✓ 92.70% High-Risk Recall: </a:t>
-            </a:r>
-            <a:r>
-              <a:rPr sz="1100">
-                <a:solidFill>
-                  <a:srgbClr val="94A3B8"/>
-                </a:solidFill>
-              </a:rPr>
-              <a:t>Catches 165 out of 178 dangerous collisions at the standard -6.0 alert threshold.</a:t>
-            </a:r>
-          </a:p>
-          <a:p>
-            <a:pPr>
-              <a:spcBef>
-                <a:spcPts val="800"/>
-              </a:spcBef>
-            </a:pPr>
-            <a:r>
-              <a:rPr b="1" sz="1100">
-                <a:solidFill>
-                  <a:srgbClr val="F1F5F9"/>
-                </a:solidFill>
-              </a:rPr>
-              <a:t>✓ 79.71% Precision (Only 42 False Alarms): </a:t>
-            </a:r>
-            <a:r>
-              <a:rPr sz="1100">
-                <a:solidFill>
-                  <a:srgbClr val="94A3B8"/>
-                </a:solidFill>
-              </a:rPr>
-              <a:t>Drastically cuts false alarms compared to Kalyanaraman et al. (85% false alarms).</a:t>
-            </a:r>
-          </a:p>
-          <a:p>
-            <a:pPr>
-              <a:spcBef>
-                <a:spcPts val="800"/>
-              </a:spcBef>
-            </a:pPr>
-            <a:r>
-              <a:rPr b="1" sz="1100">
-                <a:solidFill>
-                  <a:srgbClr val="F1F5F9"/>
-                </a:solidFill>
-              </a:rPr>
-              <a:t>✓ 100% Native Telemetry: </a:t>
-            </a:r>
-            <a:r>
-              <a:rPr sz="1100">
-                <a:solidFill>
-                  <a:srgbClr val="94A3B8"/>
-                </a:solidFill>
-              </a:rPr>
-              <a:t>Directly compatible with standard CCSDS CDM formats without synthetic feature bloat.</a:t>
-            </a:r>
-          </a:p>
-          <a:p>
-            <a:pPr>
-              <a:spcBef>
-                <a:spcPts val="800"/>
-              </a:spcBef>
-            </a:pPr>
-            <a:r>
-              <a:rPr b="1" sz="1100">
-                <a:solidFill>
-                  <a:srgbClr val="F1F5F9"/>
-                </a:solidFill>
-              </a:rPr>
-              <a:t>✓ Lightweight &amp; Real-Time: </a:t>
-            </a:r>
-            <a:r>
-              <a:rPr sz="1100">
-                <a:solidFill>
-                  <a:srgbClr val="94A3B8"/>
-                </a:solidFill>
-              </a:rPr>
-              <a:t>FastAPI backend delivers sub-50ms inference latency for mission-critical operations.</a:t>
-            </a:r>
-          </a:p>
-        </p:txBody>
-      </p:sp>
-      <p:sp>
-        <p:nvSpPr>
-          <p:cNvPr id="5" name="Rounded Rectangle 4"/>
+          <a:bodyPr rtlCol="0" anchor="ctr"/>
+          <a:lstStyle/>
+          <a:p>
+            <a:pPr algn="ctr"/>
+          </a:p>
+        </p:txBody>
+      </p:sp>
+      <p:sp>
+        <p:nvSpPr>
+          <p:cNvPr id="3" name="Right Triangle 2"/>
           <p:cNvSpPr/>
           <p:nvPr/>
         </p:nvSpPr>
         <p:spPr>
-          <a:xfrm>
-            <a:off x="6217920" y="1371600"/>
-            <a:ext cx="5212080" cy="4754880"/>
-          </a:xfrm>
-          <a:prstGeom prst="roundRect">
+          <a:xfrm rot="16200000">
+            <a:off x="0" y="4846320"/>
+            <a:ext cx="1097280" cy="2011680"/>
+          </a:xfrm>
+          <a:prstGeom prst="rtTriangle">
             <a:avLst/>
           </a:prstGeom>
           <a:solidFill>
-            <a:srgbClr val="161E31"/>
+            <a:srgbClr val="0F766E"/>
           </a:solidFill>
           <a:ln>
-            <a:solidFill>
-              <a:srgbClr val="2D3E5F"/>
-            </a:solidFill>
+            <a:noFill/>
           </a:ln>
         </p:spPr>
         <p:style>
@@ -7494,110 +8575,605 @@
           </a:fontRef>
         </p:style>
         <p:txBody>
+          <a:bodyPr rtlCol="0" anchor="ctr"/>
+          <a:lstStyle/>
+          <a:p>
+            <a:pPr algn="ctr"/>
+          </a:p>
+        </p:txBody>
+      </p:sp>
+      <p:sp>
+        <p:nvSpPr>
+          <p:cNvPr id="4" name="TextBox 3"/>
+          <p:cNvSpPr txBox="1"/>
+          <p:nvPr/>
+        </p:nvSpPr>
+        <p:spPr>
+          <a:xfrm>
+            <a:off x="365760" y="274320"/>
+            <a:ext cx="1828800" cy="548640"/>
+          </a:xfrm>
+          <a:prstGeom prst="rect">
+            <a:avLst/>
+          </a:prstGeom>
+          <a:noFill/>
+        </p:spPr>
+        <p:txBody>
+          <a:bodyPr wrap="none">
+            <a:spAutoFit/>
+          </a:bodyPr>
+          <a:lstStyle/>
+          <a:p>
+            <a:pPr>
+              <a:defRPr sz="1800" b="1">
+                <a:solidFill>
+                  <a:srgbClr val="0F172A"/>
+                </a:solidFill>
+                <a:latin typeface="Arial"/>
+              </a:defRPr>
+            </a:pPr>
+            <a:r>
+              <a:t>Kmit</a:t>
+            </a:r>
+          </a:p>
+        </p:txBody>
+      </p:sp>
+      <p:sp>
+        <p:nvSpPr>
+          <p:cNvPr id="5" name="TextBox 4"/>
+          <p:cNvSpPr txBox="1"/>
+          <p:nvPr/>
+        </p:nvSpPr>
+        <p:spPr>
+          <a:xfrm>
+            <a:off x="1097280" y="274320"/>
+            <a:ext cx="9601200" cy="731520"/>
+          </a:xfrm>
+          <a:prstGeom prst="rect">
+            <a:avLst/>
+          </a:prstGeom>
+          <a:noFill/>
+        </p:spPr>
+        <p:txBody>
+          <a:bodyPr wrap="none">
+            <a:spAutoFit/>
+          </a:bodyPr>
+          <a:lstStyle/>
+          <a:p>
+            <a:pPr>
+              <a:defRPr sz="2600" b="1">
+                <a:solidFill>
+                  <a:srgbClr val="DC2626"/>
+                </a:solidFill>
+                <a:latin typeface="Arial"/>
+              </a:defRPr>
+            </a:pPr>
+            <a:r>
+              <a:t>CLASS &amp; COMPONENT ARCHITECTURE</a:t>
+            </a:r>
+          </a:p>
+        </p:txBody>
+      </p:sp>
+      <p:sp>
+        <p:nvSpPr>
+          <p:cNvPr id="6" name="Rounded Rectangle 5"/>
+          <p:cNvSpPr/>
+          <p:nvPr/>
+        </p:nvSpPr>
+        <p:spPr>
+          <a:xfrm>
+            <a:off x="1097280" y="1371600"/>
+            <a:ext cx="4846320" cy="2377440"/>
+          </a:xfrm>
+          <a:prstGeom prst="roundRect">
+            <a:avLst/>
+          </a:prstGeom>
+          <a:solidFill>
+            <a:srgbClr val="FFFFFF"/>
+          </a:solidFill>
+          <a:ln w="19050">
+            <a:solidFill>
+              <a:srgbClr val="0E7490"/>
+            </a:solidFill>
+          </a:ln>
+        </p:spPr>
+        <p:style>
+          <a:lnRef idx="1">
+            <a:schemeClr val="accent1"/>
+          </a:lnRef>
+          <a:fillRef idx="3">
+            <a:schemeClr val="accent1"/>
+          </a:fillRef>
+          <a:effectRef idx="2">
+            <a:schemeClr val="accent1"/>
+          </a:effectRef>
+          <a:fontRef idx="minor">
+            <a:schemeClr val="lt1"/>
+          </a:fontRef>
+        </p:style>
+        <p:txBody>
           <a:bodyPr rtlCol="0" anchor="ctr" wrap="square"/>
           <a:lstStyle/>
           <a:p>
             <a:pPr algn="ctr">
-              <a:defRPr sz="1600" b="1">
-                <a:solidFill>
-                  <a:srgbClr val="06B6D4"/>
-                </a:solidFill>
-              </a:defRPr>
-            </a:pPr>
-            <a:r>
-              <a:t>Future Roadmap &amp; Extensions</a:t>
-            </a:r>
-          </a:p>
-          <a:p>
-            <a:pPr>
-              <a:spcBef>
-                <a:spcPts val="1000"/>
-              </a:spcBef>
-            </a:pPr>
-            <a:r>
-              <a:rPr b="1" sz="1100">
-                <a:solidFill>
-                  <a:srgbClr val="F1F5F9"/>
-                </a:solidFill>
-              </a:rPr>
-              <a:t>🚀 Autonomous Maneuver Optimization (CAM Delta-V): </a:t>
-            </a:r>
-            <a:r>
-              <a:rPr sz="1100">
-                <a:solidFill>
-                  <a:srgbClr val="94A3B8"/>
-                </a:solidFill>
-              </a:rPr>
-              <a:t>Integrating Reinforcement Learning to calculate fuel-optimal burn vectors Delta-V.</a:t>
-            </a:r>
-          </a:p>
-          <a:p>
-            <a:pPr>
-              <a:spcBef>
-                <a:spcPts val="1000"/>
-              </a:spcBef>
-            </a:pPr>
-            <a:r>
-              <a:rPr b="1" sz="1100">
-                <a:solidFill>
-                  <a:srgbClr val="F1F5F9"/>
-                </a:solidFill>
-              </a:rPr>
-              <a:t>🚀 Live Space-Track / ESA API Feed: </a:t>
-            </a:r>
-            <a:r>
-              <a:rPr sz="1100">
-                <a:solidFill>
-                  <a:srgbClr val="94A3B8"/>
-                </a:solidFill>
-              </a:rPr>
-              <a:t>Continuous ingestion of live Conjunction Data Messages from space surveillance portals.</a:t>
-            </a:r>
-          </a:p>
-          <a:p>
-            <a:pPr>
-              <a:spcBef>
-                <a:spcPts val="1000"/>
-              </a:spcBef>
-            </a:pPr>
-            <a:r>
-              <a:rPr b="1" sz="1100">
-                <a:solidFill>
-                  <a:srgbClr val="F1F5F9"/>
-                </a:solidFill>
-              </a:rPr>
-              <a:t>🚀 Constellation Multi-Object Screening: </a:t>
-            </a:r>
-            <a:r>
-              <a:rPr sz="1100">
-                <a:solidFill>
-                  <a:srgbClr val="94A3B8"/>
-                </a:solidFill>
-              </a:rPr>
-              <a:t>Verifying that avoidance maneuvers do not induce secondary conjunctions in dense orbital shells.</a:t>
-            </a:r>
-          </a:p>
-          <a:p>
-            <a:pPr>
-              <a:spcBef>
-                <a:spcPts val="1000"/>
-              </a:spcBef>
-            </a:pPr>
-            <a:r>
-              <a:rPr b="1" sz="1100">
-                <a:solidFill>
-                  <a:srgbClr val="F1F5F9"/>
-                </a:solidFill>
-              </a:rPr>
-              <a:t>🚀 Onboard Edge AI Deployment: </a:t>
-            </a:r>
-            <a:r>
-              <a:rPr sz="1100">
-                <a:solidFill>
-                  <a:srgbClr val="94A3B8"/>
-                </a:solidFill>
-              </a:rPr>
-              <a:t>Quantizing the XGBoost model for execution directly on radiation-hardened satellite flight computers.</a:t>
+              <a:defRPr sz="1300" b="1">
+                <a:solidFill>
+                  <a:srgbClr val="0E7490"/>
+                </a:solidFill>
+                <a:latin typeface="Arial"/>
+              </a:defRPr>
+            </a:pPr>
+            <a:r>
+              <a:t>FastAPI Application (main.py)</a:t>
+            </a:r>
+          </a:p>
+          <a:p>
+            <a:pPr>
+              <a:spcBef>
+                <a:spcPts val="400"/>
+              </a:spcBef>
+              <a:defRPr sz="1000">
+                <a:solidFill>
+                  <a:srgbClr val="1E293B"/>
+                </a:solidFill>
+                <a:latin typeface="Arial"/>
+              </a:defRPr>
+            </a:pPr>
+            <a:r>
+              <a:t>+ get_events(critical_only: bool)</a:t>
+            </a:r>
+          </a:p>
+          <a:p>
+            <a:pPr>
+              <a:spcBef>
+                <a:spcPts val="400"/>
+              </a:spcBef>
+              <a:defRPr sz="1000">
+                <a:solidFill>
+                  <a:srgbClr val="1E293B"/>
+                </a:solidFill>
+                <a:latin typeface="Arial"/>
+              </a:defRPr>
+            </a:pPr>
+            <a:r>
+              <a:t>+ get_event_details(event_id: str)</a:t>
+            </a:r>
+          </a:p>
+          <a:p>
+            <a:pPr>
+              <a:spcBef>
+                <a:spcPts val="400"/>
+              </a:spcBef>
+              <a:defRPr sz="1000">
+                <a:solidFill>
+                  <a:srgbClr val="1E293B"/>
+                </a:solidFill>
+                <a:latin typeface="Arial"/>
+              </a:defRPr>
+            </a:pPr>
+            <a:r>
+              <a:t>+ predict_cdm(file: UploadFile)</a:t>
+            </a:r>
+          </a:p>
+          <a:p>
+            <a:pPr>
+              <a:spcBef>
+                <a:spcPts val="400"/>
+              </a:spcBef>
+              <a:defRPr sz="1000">
+                <a:solidFill>
+                  <a:srgbClr val="1E293B"/>
+                </a:solidFill>
+                <a:latin typeface="Arial"/>
+              </a:defRPr>
+            </a:pPr>
+            <a:r>
+              <a:t>+ get_model_info(): Dict[str, Any]</a:t>
+            </a:r>
+          </a:p>
+          <a:p>
+            <a:pPr>
+              <a:spcBef>
+                <a:spcPts val="400"/>
+              </a:spcBef>
+              <a:defRPr sz="1000">
+                <a:solidFill>
+                  <a:srgbClr val="1E293B"/>
+                </a:solidFill>
+                <a:latin typeface="Arial"/>
+              </a:defRPr>
+            </a:pPr>
+            <a:r>
+              <a:t>+ health_check(): Dict[str, str]</a:t>
+            </a:r>
+          </a:p>
+        </p:txBody>
+      </p:sp>
+      <p:sp>
+        <p:nvSpPr>
+          <p:cNvPr id="7" name="Rounded Rectangle 6"/>
+          <p:cNvSpPr/>
+          <p:nvPr/>
+        </p:nvSpPr>
+        <p:spPr>
+          <a:xfrm>
+            <a:off x="6309360" y="1371600"/>
+            <a:ext cx="4846320" cy="2377440"/>
+          </a:xfrm>
+          <a:prstGeom prst="roundRect">
+            <a:avLst/>
+          </a:prstGeom>
+          <a:solidFill>
+            <a:srgbClr val="FFFFFF"/>
+          </a:solidFill>
+          <a:ln w="19050">
+            <a:solidFill>
+              <a:srgbClr val="DC2626"/>
+            </a:solidFill>
+          </a:ln>
+        </p:spPr>
+        <p:style>
+          <a:lnRef idx="1">
+            <a:schemeClr val="accent1"/>
+          </a:lnRef>
+          <a:fillRef idx="3">
+            <a:schemeClr val="accent1"/>
+          </a:fillRef>
+          <a:effectRef idx="2">
+            <a:schemeClr val="accent1"/>
+          </a:effectRef>
+          <a:fontRef idx="minor">
+            <a:schemeClr val="lt1"/>
+          </a:fontRef>
+        </p:style>
+        <p:txBody>
+          <a:bodyPr rtlCol="0" anchor="ctr" wrap="square"/>
+          <a:lstStyle/>
+          <a:p>
+            <a:pPr algn="ctr">
+              <a:defRPr sz="1300" b="1">
+                <a:solidFill>
+                  <a:srgbClr val="DC2626"/>
+                </a:solidFill>
+                <a:latin typeface="Arial"/>
+              </a:defRPr>
+            </a:pPr>
+            <a:r>
+              <a:t>PredictionService (prediction_service.py)</a:t>
+            </a:r>
+          </a:p>
+          <a:p>
+            <a:pPr>
+              <a:spcBef>
+                <a:spcPts val="400"/>
+              </a:spcBef>
+              <a:defRPr sz="1000">
+                <a:solidFill>
+                  <a:srgbClr val="1E293B"/>
+                </a:solidFill>
+                <a:latin typeface="Arial"/>
+              </a:defRPr>
+            </a:pPr>
+            <a:r>
+              <a:t>+ model: XGBRegressor</a:t>
+            </a:r>
+          </a:p>
+          <a:p>
+            <a:pPr>
+              <a:spcBef>
+                <a:spcPts val="400"/>
+              </a:spcBef>
+              <a:defRPr sz="1000">
+                <a:solidFill>
+                  <a:srgbClr val="1E293B"/>
+                </a:solidFill>
+                <a:latin typeface="Arial"/>
+              </a:defRPr>
+            </a:pPr>
+            <a:r>
+              <a:t>+ feature_cols: List[str] (100 cols)</a:t>
+            </a:r>
+          </a:p>
+          <a:p>
+            <a:pPr>
+              <a:spcBef>
+                <a:spcPts val="400"/>
+              </a:spcBef>
+              <a:defRPr sz="1000">
+                <a:solidFill>
+                  <a:srgbClr val="1E293B"/>
+                </a:solidFill>
+                <a:latin typeface="Arial"/>
+              </a:defRPr>
+            </a:pPr>
+            <a:r>
+              <a:t>+ medians: Dict[str, float]</a:t>
+            </a:r>
+          </a:p>
+          <a:p>
+            <a:pPr>
+              <a:spcBef>
+                <a:spcPts val="400"/>
+              </a:spcBef>
+              <a:defRPr sz="1000">
+                <a:solidFill>
+                  <a:srgbClr val="1E293B"/>
+                </a:solidFill>
+                <a:latin typeface="Arial"/>
+              </a:defRPr>
+            </a:pPr>
+            <a:r>
+              <a:t>+ predict_event(cdm_rows, threshold)</a:t>
+            </a:r>
+          </a:p>
+          <a:p>
+            <a:pPr>
+              <a:spcBef>
+                <a:spcPts val="400"/>
+              </a:spcBef>
+              <a:defRPr sz="1000">
+                <a:solidFill>
+                  <a:srgbClr val="1E293B"/>
+                </a:solidFill>
+                <a:latin typeface="Arial"/>
+              </a:defRPr>
+            </a:pPr>
+            <a:r>
+              <a:t>+ load_model(): bool</a:t>
+            </a:r>
+          </a:p>
+        </p:txBody>
+      </p:sp>
+      <p:sp>
+        <p:nvSpPr>
+          <p:cNvPr id="8" name="Rounded Rectangle 7"/>
+          <p:cNvSpPr/>
+          <p:nvPr/>
+        </p:nvSpPr>
+        <p:spPr>
+          <a:xfrm>
+            <a:off x="1097280" y="3931920"/>
+            <a:ext cx="4846320" cy="2377440"/>
+          </a:xfrm>
+          <a:prstGeom prst="roundRect">
+            <a:avLst/>
+          </a:prstGeom>
+          <a:solidFill>
+            <a:srgbClr val="FFFFFF"/>
+          </a:solidFill>
+          <a:ln w="19050">
+            <a:solidFill>
+              <a:srgbClr val="0F766E"/>
+            </a:solidFill>
+          </a:ln>
+        </p:spPr>
+        <p:style>
+          <a:lnRef idx="1">
+            <a:schemeClr val="accent1"/>
+          </a:lnRef>
+          <a:fillRef idx="3">
+            <a:schemeClr val="accent1"/>
+          </a:fillRef>
+          <a:effectRef idx="2">
+            <a:schemeClr val="accent1"/>
+          </a:effectRef>
+          <a:fontRef idx="minor">
+            <a:schemeClr val="lt1"/>
+          </a:fontRef>
+        </p:style>
+        <p:txBody>
+          <a:bodyPr rtlCol="0" anchor="ctr" wrap="square"/>
+          <a:lstStyle/>
+          <a:p>
+            <a:pPr algn="ctr">
+              <a:defRPr sz="1300" b="1">
+                <a:solidFill>
+                  <a:srgbClr val="0F766E"/>
+                </a:solidFill>
+                <a:latin typeface="Arial"/>
+              </a:defRPr>
+            </a:pPr>
+            <a:r>
+              <a:t>DatasetService (dataset_service.py)</a:t>
+            </a:r>
+          </a:p>
+          <a:p>
+            <a:pPr>
+              <a:spcBef>
+                <a:spcPts val="400"/>
+              </a:spcBef>
+              <a:defRPr sz="1000">
+                <a:solidFill>
+                  <a:srgbClr val="1E293B"/>
+                </a:solidFill>
+                <a:latin typeface="Arial"/>
+              </a:defRPr>
+            </a:pPr>
+            <a:r>
+              <a:t>+ df: DataFrame</a:t>
+            </a:r>
+          </a:p>
+          <a:p>
+            <a:pPr>
+              <a:spcBef>
+                <a:spcPts val="400"/>
+              </a:spcBef>
+              <a:defRPr sz="1000">
+                <a:solidFill>
+                  <a:srgbClr val="1E293B"/>
+                </a:solidFill>
+                <a:latin typeface="Arial"/>
+              </a:defRPr>
+            </a:pPr>
+            <a:r>
+              <a:t>+ events_cache: List[Dict]</a:t>
+            </a:r>
+          </a:p>
+          <a:p>
+            <a:pPr>
+              <a:spcBef>
+                <a:spcPts val="400"/>
+              </a:spcBef>
+              <a:defRPr sz="1000">
+                <a:solidFill>
+                  <a:srgbClr val="1E293B"/>
+                </a:solidFill>
+                <a:latin typeface="Arial"/>
+              </a:defRPr>
+            </a:pPr>
+            <a:r>
+              <a:t>+ load_dataset(): void</a:t>
+            </a:r>
+          </a:p>
+          <a:p>
+            <a:pPr>
+              <a:spcBef>
+                <a:spcPts val="400"/>
+              </a:spcBef>
+              <a:defRPr sz="1000">
+                <a:solidFill>
+                  <a:srgbClr val="1E293B"/>
+                </a:solidFill>
+                <a:latin typeface="Arial"/>
+              </a:defRPr>
+            </a:pPr>
+            <a:r>
+              <a:t>+ get_events(): List[Dict]</a:t>
+            </a:r>
+          </a:p>
+          <a:p>
+            <a:pPr>
+              <a:spcBef>
+                <a:spcPts val="400"/>
+              </a:spcBef>
+              <a:defRPr sz="1000">
+                <a:solidFill>
+                  <a:srgbClr val="1E293B"/>
+                </a:solidFill>
+                <a:latin typeface="Arial"/>
+              </a:defRPr>
+            </a:pPr>
+            <a:r>
+              <a:t>+ get_event_details(id): Dict</a:t>
+            </a:r>
+          </a:p>
+        </p:txBody>
+      </p:sp>
+      <p:sp>
+        <p:nvSpPr>
+          <p:cNvPr id="9" name="Rounded Rectangle 8"/>
+          <p:cNvSpPr/>
+          <p:nvPr/>
+        </p:nvSpPr>
+        <p:spPr>
+          <a:xfrm>
+            <a:off x="6309360" y="3931920"/>
+            <a:ext cx="4846320" cy="2377440"/>
+          </a:xfrm>
+          <a:prstGeom prst="roundRect">
+            <a:avLst/>
+          </a:prstGeom>
+          <a:solidFill>
+            <a:srgbClr val="FFFFFF"/>
+          </a:solidFill>
+          <a:ln w="19050">
+            <a:solidFill>
+              <a:srgbClr val="9333EA"/>
+            </a:solidFill>
+          </a:ln>
+        </p:spPr>
+        <p:style>
+          <a:lnRef idx="1">
+            <a:schemeClr val="accent1"/>
+          </a:lnRef>
+          <a:fillRef idx="3">
+            <a:schemeClr val="accent1"/>
+          </a:fillRef>
+          <a:effectRef idx="2">
+            <a:schemeClr val="accent1"/>
+          </a:effectRef>
+          <a:fontRef idx="minor">
+            <a:schemeClr val="lt1"/>
+          </a:fontRef>
+        </p:style>
+        <p:txBody>
+          <a:bodyPr rtlCol="0" anchor="ctr" wrap="square"/>
+          <a:lstStyle/>
+          <a:p>
+            <a:pPr algn="ctr">
+              <a:defRPr sz="1300" b="1">
+                <a:solidFill>
+                  <a:srgbClr val="9333EA"/>
+                </a:solidFill>
+                <a:latin typeface="Arial"/>
+              </a:defRPr>
+            </a:pPr>
+            <a:r>
+              <a:t>Mission Control UI (React + Three.js)</a:t>
+            </a:r>
+          </a:p>
+          <a:p>
+            <a:pPr>
+              <a:spcBef>
+                <a:spcPts val="400"/>
+              </a:spcBef>
+              <a:defRPr sz="1000">
+                <a:solidFill>
+                  <a:srgbClr val="1E293B"/>
+                </a:solidFill>
+                <a:latin typeface="Arial"/>
+              </a:defRPr>
+            </a:pPr>
+            <a:r>
+              <a:t>+ EncounterScene.tsx (3D WebGL Orbit Scene)</a:t>
+            </a:r>
+          </a:p>
+          <a:p>
+            <a:pPr>
+              <a:spcBef>
+                <a:spcPts val="400"/>
+              </a:spcBef>
+              <a:defRPr sz="1000">
+                <a:solidFill>
+                  <a:srgbClr val="1E293B"/>
+                </a:solidFill>
+                <a:latin typeface="Arial"/>
+              </a:defRPr>
+            </a:pPr>
+            <a:r>
+              <a:t>+ ModelLabPage.tsx (Threshold Slider &amp; SHAP)</a:t>
+            </a:r>
+          </a:p>
+          <a:p>
+            <a:pPr>
+              <a:spcBef>
+                <a:spcPts val="400"/>
+              </a:spcBef>
+              <a:defRPr sz="1000">
+                <a:solidFill>
+                  <a:srgbClr val="1E293B"/>
+                </a:solidFill>
+                <a:latin typeface="Arial"/>
+              </a:defRPr>
+            </a:pPr>
+            <a:r>
+              <a:t>+ OverviewPage.tsx (Live CDM Dashboard)</a:t>
+            </a:r>
+          </a:p>
+          <a:p>
+            <a:pPr>
+              <a:spcBef>
+                <a:spcPts val="400"/>
+              </a:spcBef>
+              <a:defRPr sz="1000">
+                <a:solidFill>
+                  <a:srgbClr val="1E293B"/>
+                </a:solidFill>
+                <a:latin typeface="Arial"/>
+              </a:defRPr>
+            </a:pPr>
+            <a:r>
+              <a:t>+ PredictionPage.tsx (CSV Upload Module)</a:t>
             </a:r>
           </a:p>
         </p:txBody>

--- a/docs/Prahari_Presentation.pptx
+++ b/docs/Prahari_Presentation.pptx
@@ -3100,102 +3100,40 @@
         <p:nvPr/>
       </p:nvGrpSpPr>
       <p:grpSpPr/>
-      <p:sp>
-        <p:nvSpPr>
-          <p:cNvPr id="2" name="Right Triangle 1"/>
-          <p:cNvSpPr/>
+      <p:pic>
+        <p:nvPicPr>
+          <p:cNvPr id="2" name="Picture 1" descr="bg_title_slide.png"/>
+          <p:cNvPicPr>
+            <a:picLocks noChangeAspect="1"/>
+          </p:cNvPicPr>
           <p:nvPr/>
-        </p:nvSpPr>
+        </p:nvPicPr>
+        <p:blipFill>
+          <a:blip r:embed="rId2"/>
+          <a:stretch>
+            <a:fillRect/>
+          </a:stretch>
+        </p:blipFill>
         <p:spPr>
-          <a:xfrm rot="5400000">
-            <a:off x="10972800" y="0"/>
-            <a:ext cx="1218895" cy="2011680"/>
+          <a:xfrm>
+            <a:off x="0" y="0"/>
+            <a:ext cx="12191695" cy="6858000"/>
           </a:xfrm>
-          <a:prstGeom prst="rtTriangle">
+          <a:prstGeom prst="rect">
             <a:avLst/>
           </a:prstGeom>
-          <a:solidFill>
-            <a:srgbClr val="EA580C"/>
-          </a:solidFill>
-          <a:ln>
-            <a:noFill/>
-          </a:ln>
         </p:spPr>
-        <p:style>
-          <a:lnRef idx="1">
-            <a:schemeClr val="accent1"/>
-          </a:lnRef>
-          <a:fillRef idx="3">
-            <a:schemeClr val="accent1"/>
-          </a:fillRef>
-          <a:effectRef idx="2">
-            <a:schemeClr val="accent1"/>
-          </a:effectRef>
-          <a:fontRef idx="minor">
-            <a:schemeClr val="lt1"/>
-          </a:fontRef>
-        </p:style>
-        <p:txBody>
-          <a:bodyPr rtlCol="0" anchor="ctr"/>
-          <a:lstStyle/>
-          <a:p>
-            <a:pPr algn="ctr"/>
-          </a:p>
-        </p:txBody>
-      </p:sp>
-      <p:sp>
-        <p:nvSpPr>
-          <p:cNvPr id="3" name="Right Triangle 2"/>
-          <p:cNvSpPr/>
-          <p:nvPr/>
-        </p:nvSpPr>
-        <p:spPr>
-          <a:xfrm rot="16200000">
-            <a:off x="0" y="4846320"/>
-            <a:ext cx="1097280" cy="2011680"/>
-          </a:xfrm>
-          <a:prstGeom prst="rtTriangle">
-            <a:avLst/>
-          </a:prstGeom>
-          <a:solidFill>
-            <a:srgbClr val="0F766E"/>
-          </a:solidFill>
-          <a:ln>
-            <a:noFill/>
-          </a:ln>
-        </p:spPr>
-        <p:style>
-          <a:lnRef idx="1">
-            <a:schemeClr val="accent1"/>
-          </a:lnRef>
-          <a:fillRef idx="3">
-            <a:schemeClr val="accent1"/>
-          </a:fillRef>
-          <a:effectRef idx="2">
-            <a:schemeClr val="accent1"/>
-          </a:effectRef>
-          <a:fontRef idx="minor">
-            <a:schemeClr val="lt1"/>
-          </a:fontRef>
-        </p:style>
-        <p:txBody>
-          <a:bodyPr rtlCol="0" anchor="ctr"/>
-          <a:lstStyle/>
-          <a:p>
-            <a:pPr algn="ctr"/>
-          </a:p>
-        </p:txBody>
-      </p:sp>
-      <p:sp>
-        <p:nvSpPr>
-          <p:cNvPr id="4" name="TextBox 3"/>
+      </p:pic>
+      <p:sp>
+        <p:nvSpPr>
+          <p:cNvPr id="3" name="TextBox 2"/>
           <p:cNvSpPr txBox="1"/>
           <p:nvPr/>
         </p:nvSpPr>
         <p:spPr>
           <a:xfrm>
-            <a:off x="365760" y="274320"/>
-            <a:ext cx="1828800" cy="548640"/>
+            <a:off x="1371600" y="2980944"/>
+            <a:ext cx="9448495" cy="731520"/>
           </a:xfrm>
           <a:prstGeom prst="rect">
             <a:avLst/>
@@ -3203,35 +3141,35 @@
           <a:noFill/>
         </p:spPr>
         <p:txBody>
-          <a:bodyPr wrap="none">
+          <a:bodyPr wrap="square">
             <a:spAutoFit/>
           </a:bodyPr>
           <a:lstStyle/>
           <a:p>
-            <a:pPr>
-              <a:defRPr sz="1800" b="1">
-                <a:solidFill>
-                  <a:srgbClr val="0F172A"/>
-                </a:solidFill>
-                <a:latin typeface="Arial"/>
-              </a:defRPr>
-            </a:pPr>
-            <a:r>
-              <a:t>Kmit</a:t>
-            </a:r>
-          </a:p>
-        </p:txBody>
-      </p:sp>
-      <p:sp>
-        <p:nvSpPr>
-          <p:cNvPr id="5" name="TextBox 4"/>
+            <a:pPr algn="ctr">
+              <a:defRPr sz="2000" b="1">
+                <a:solidFill>
+                  <a:srgbClr val="31859C"/>
+                </a:solidFill>
+                <a:latin typeface="Arial"/>
+              </a:defRPr>
+            </a:pPr>
+            <a:r>
+              <a:t>G-1400 | PRAHARI: Autonomous Spacecraft Conjunction Assessment &amp; High-Recall Collision Triage</a:t>
+            </a:r>
+          </a:p>
+        </p:txBody>
+      </p:sp>
+      <p:sp>
+        <p:nvSpPr>
+          <p:cNvPr id="4" name="TextBox 3"/>
           <p:cNvSpPr txBox="1"/>
           <p:nvPr/>
         </p:nvSpPr>
         <p:spPr>
           <a:xfrm>
-            <a:off x="1371600" y="1097280"/>
-            <a:ext cx="9445752" cy="1097280"/>
+            <a:off x="4114800" y="3767328"/>
+            <a:ext cx="3962095" cy="365760"/>
           </a:xfrm>
           <a:prstGeom prst="rect">
             <a:avLst/>
@@ -3239,7 +3177,7 @@
           <a:noFill/>
         </p:spPr>
         <p:txBody>
-          <a:bodyPr wrap="square">
+          <a:bodyPr wrap="none">
             <a:spAutoFit/>
           </a:bodyPr>
           <a:lstStyle/>
@@ -3247,96 +3185,27 @@
             <a:pPr algn="ctr">
               <a:defRPr sz="2000" b="1">
                 <a:solidFill>
-                  <a:srgbClr val="0D9488"/>
-                </a:solidFill>
-                <a:latin typeface="Arial"/>
-              </a:defRPr>
-            </a:pPr>
-            <a:r>
-              <a:t>KESHAV MEMORIAL INSTITUTE OF TECHNOLOGY</a:t>
-            </a:r>
-          </a:p>
-          <a:p>
-            <a:pPr algn="ctr">
-              <a:defRPr sz="1100" b="1">
-                <a:solidFill>
-                  <a:srgbClr val="475569"/>
-                </a:solidFill>
-                <a:latin typeface="Arial"/>
-              </a:defRPr>
-            </a:pPr>
-            <a:r>
-              <a:t>AN AUTONOMOUS INSTITUTION - ACCREDITED BY NAAC WITH 'A' GRADE</a:t>
-            </a:r>
-            <a:br/>
-            <a:r>
-              <a:t>Narayanaguda, Hyderabad.</a:t>
-            </a:r>
-          </a:p>
-        </p:txBody>
-      </p:sp>
-      <p:sp>
-        <p:nvSpPr>
-          <p:cNvPr id="6" name="TextBox 5"/>
-          <p:cNvSpPr txBox="1"/>
+                  <a:srgbClr val="31859C"/>
+                </a:solidFill>
+                <a:latin typeface="Arial"/>
+              </a:defRPr>
+            </a:pPr>
+            <a:r>
+              <a:t>Date: 25-09-2026</a:t>
+            </a:r>
+          </a:p>
+        </p:txBody>
+      </p:sp>
+      <p:sp>
+        <p:nvSpPr>
+          <p:cNvPr id="5" name="Rectangle 4"/>
+          <p:cNvSpPr/>
           <p:nvPr/>
         </p:nvSpPr>
         <p:spPr>
           <a:xfrm>
-            <a:off x="914400" y="2377440"/>
-            <a:ext cx="10360152" cy="914400"/>
-          </a:xfrm>
-          <a:prstGeom prst="rect">
-            <a:avLst/>
-          </a:prstGeom>
-          <a:noFill/>
-        </p:spPr>
-        <p:txBody>
-          <a:bodyPr wrap="square">
-            <a:spAutoFit/>
-          </a:bodyPr>
-          <a:lstStyle/>
-          <a:p>
-            <a:pPr algn="ctr">
-              <a:defRPr sz="1600" b="1">
-                <a:solidFill>
-                  <a:srgbClr val="0284C7"/>
-                </a:solidFill>
-                <a:latin typeface="Arial"/>
-              </a:defRPr>
-            </a:pPr>
-            <a:r>
-              <a:t>G-1400 | PRAHARI: Autonomous Spacecraft Conjunction Assessment &amp; High-Recall Collision Triage</a:t>
-            </a:r>
-          </a:p>
-          <a:p>
-            <a:pPr algn="ctr">
-              <a:spcBef>
-                <a:spcPts val="600"/>
-              </a:spcBef>
-              <a:defRPr sz="1300" b="1">
-                <a:solidFill>
-                  <a:srgbClr val="0E7490"/>
-                </a:solidFill>
-                <a:latin typeface="Arial"/>
-              </a:defRPr>
-            </a:pPr>
-            <a:r>
-              <a:t>Date: 25-09-2026</a:t>
-            </a:r>
-          </a:p>
-        </p:txBody>
-      </p:sp>
-      <p:sp>
-        <p:nvSpPr>
-          <p:cNvPr id="7" name="Rectangle 6"/>
-          <p:cNvSpPr/>
-          <p:nvPr/>
-        </p:nvSpPr>
-        <p:spPr>
-          <a:xfrm>
-            <a:off x="2011680" y="3840480"/>
-            <a:ext cx="3931920" cy="2377440"/>
+            <a:off x="2029968" y="4379976"/>
+            <a:ext cx="4818888" cy="2157984"/>
           </a:xfrm>
           <a:prstGeom prst="rect">
             <a:avLst/>
@@ -3344,9 +3213,9 @@
           <a:solidFill>
             <a:srgbClr val="FFFFFF"/>
           </a:solidFill>
-          <a:ln>
+          <a:ln w="19050">
             <a:solidFill>
-              <a:srgbClr val="64748B"/>
+              <a:srgbClr val="000000"/>
             </a:solidFill>
           </a:ln>
         </p:spPr>
@@ -3369,9 +3238,9 @@
           <a:lstStyle/>
           <a:p>
             <a:pPr algn="ctr">
-              <a:defRPr sz="1300" b="1" u="sng">
-                <a:solidFill>
-                  <a:srgbClr val="1E293B"/>
+              <a:defRPr sz="1800" b="1" u="sng">
+                <a:solidFill>
+                  <a:srgbClr val="000000"/>
                 </a:solidFill>
                 <a:latin typeface="Arial"/>
               </a:defRPr>
@@ -3383,95 +3252,95 @@
           <a:p>
             <a:pPr>
               <a:spcBef>
-                <a:spcPts val="300"/>
-              </a:spcBef>
-              <a:defRPr sz="1100">
-                <a:solidFill>
-                  <a:srgbClr val="1E293B"/>
-                </a:solidFill>
-                <a:latin typeface="Arial"/>
-              </a:defRPr>
-            </a:pPr>
-            <a:r>
-              <a:t>1. Akshay Bharadwaj</a:t>
-            </a:r>
-          </a:p>
-          <a:p>
-            <a:pPr>
-              <a:spcBef>
-                <a:spcPts val="300"/>
-              </a:spcBef>
-              <a:defRPr sz="1100">
-                <a:solidFill>
-                  <a:srgbClr val="1E293B"/>
-                </a:solidFill>
-                <a:latin typeface="Arial"/>
-              </a:defRPr>
-            </a:pPr>
-            <a:r>
-              <a:t>2. Team Member 2</a:t>
-            </a:r>
-          </a:p>
-          <a:p>
-            <a:pPr>
-              <a:spcBef>
-                <a:spcPts val="300"/>
-              </a:spcBef>
-              <a:defRPr sz="1100">
-                <a:solidFill>
-                  <a:srgbClr val="1E293B"/>
-                </a:solidFill>
-                <a:latin typeface="Arial"/>
-              </a:defRPr>
-            </a:pPr>
-            <a:r>
-              <a:t>3. Team Member 3</a:t>
-            </a:r>
-          </a:p>
-          <a:p>
-            <a:pPr>
-              <a:spcBef>
-                <a:spcPts val="300"/>
-              </a:spcBef>
-              <a:defRPr sz="1100">
-                <a:solidFill>
-                  <a:srgbClr val="1E293B"/>
-                </a:solidFill>
-                <a:latin typeface="Arial"/>
-              </a:defRPr>
-            </a:pPr>
-            <a:r>
-              <a:t>4. Team Member 4</a:t>
-            </a:r>
-          </a:p>
-          <a:p>
-            <a:pPr>
-              <a:spcBef>
-                <a:spcPts val="300"/>
-              </a:spcBef>
-              <a:defRPr sz="1100">
-                <a:solidFill>
-                  <a:srgbClr val="1E293B"/>
-                </a:solidFill>
-                <a:latin typeface="Arial"/>
-              </a:defRPr>
-            </a:pPr>
-            <a:r>
-              <a:t>5. Team Member 5</a:t>
-            </a:r>
-          </a:p>
-        </p:txBody>
-      </p:sp>
-      <p:sp>
-        <p:nvSpPr>
-          <p:cNvPr id="8" name="Rectangle 7"/>
+                <a:spcPts val="200"/>
+              </a:spcBef>
+              <a:defRPr sz="1550">
+                <a:solidFill>
+                  <a:srgbClr val="000000"/>
+                </a:solidFill>
+                <a:latin typeface="Arial"/>
+              </a:defRPr>
+            </a:pPr>
+            <a:r>
+              <a:t>1.  Akshay Bharadwaj       -24BD1A052K</a:t>
+            </a:r>
+          </a:p>
+          <a:p>
+            <a:pPr>
+              <a:spcBef>
+                <a:spcPts val="200"/>
+              </a:spcBef>
+              <a:defRPr sz="1550">
+                <a:solidFill>
+                  <a:srgbClr val="000000"/>
+                </a:solidFill>
+                <a:latin typeface="Arial"/>
+              </a:defRPr>
+            </a:pPr>
+            <a:r>
+              <a:t>2.  M. Lakshmi Srivani      - 24BD1A0533</a:t>
+            </a:r>
+          </a:p>
+          <a:p>
+            <a:pPr>
+              <a:spcBef>
+                <a:spcPts val="200"/>
+              </a:spcBef>
+              <a:defRPr sz="1550">
+                <a:solidFill>
+                  <a:srgbClr val="000000"/>
+                </a:solidFill>
+                <a:latin typeface="Arial"/>
+              </a:defRPr>
+            </a:pPr>
+            <a:r>
+              <a:t>3.  P. Pragna                     - 24BD1A053B</a:t>
+            </a:r>
+          </a:p>
+          <a:p>
+            <a:pPr>
+              <a:spcBef>
+                <a:spcPts val="200"/>
+              </a:spcBef>
+              <a:defRPr sz="1550">
+                <a:solidFill>
+                  <a:srgbClr val="000000"/>
+                </a:solidFill>
+                <a:latin typeface="Arial"/>
+              </a:defRPr>
+            </a:pPr>
+            <a:r>
+              <a:t>4.  R. Lahari                      - 24BD1A053N</a:t>
+            </a:r>
+          </a:p>
+          <a:p>
+            <a:pPr>
+              <a:spcBef>
+                <a:spcPts val="200"/>
+              </a:spcBef>
+              <a:defRPr sz="1550">
+                <a:solidFill>
+                  <a:srgbClr val="000000"/>
+                </a:solidFill>
+                <a:latin typeface="Arial"/>
+              </a:defRPr>
+            </a:pPr>
+            <a:r>
+              <a:t>5.  S. Meghana                 - 24BD1A053R</a:t>
+            </a:r>
+          </a:p>
+        </p:txBody>
+      </p:sp>
+      <p:sp>
+        <p:nvSpPr>
+          <p:cNvPr id="6" name="Rectangle 5"/>
           <p:cNvSpPr/>
           <p:nvPr/>
         </p:nvSpPr>
         <p:spPr>
           <a:xfrm>
-            <a:off x="6217920" y="3840480"/>
-            <a:ext cx="3931920" cy="2377440"/>
+            <a:off x="7031736" y="4379976"/>
+            <a:ext cx="4206240" cy="2157984"/>
           </a:xfrm>
           <a:prstGeom prst="rect">
             <a:avLst/>
@@ -3479,9 +3348,9 @@
           <a:solidFill>
             <a:srgbClr val="FFFFFF"/>
           </a:solidFill>
-          <a:ln>
+          <a:ln w="19050">
             <a:solidFill>
-              <a:srgbClr val="64748B"/>
+              <a:srgbClr val="000000"/>
             </a:solidFill>
           </a:ln>
         </p:spPr>
@@ -3504,11 +3373,11 @@
           <a:lstStyle/>
           <a:p>
             <a:pPr algn="ctr">
-              <a:defRPr sz="1300" b="1" u="sng">
-                <a:solidFill>
-                  <a:srgbClr val="1E293B"/>
-                </a:solidFill>
-                <a:latin typeface="Arial"/>
+              <a:defRPr sz="2000" b="1" u="sng">
+                <a:solidFill>
+                  <a:srgbClr val="000000"/>
+                </a:solidFill>
+                <a:latin typeface="Times New Roman"/>
               </a:defRPr>
             </a:pPr>
             <a:r>
@@ -3520,15 +3389,15 @@
               <a:spcBef>
                 <a:spcPts val="3600"/>
               </a:spcBef>
-              <a:defRPr sz="1300" b="1">
-                <a:solidFill>
-                  <a:srgbClr val="1E293B"/>
-                </a:solidFill>
-                <a:latin typeface="Arial"/>
-              </a:defRPr>
-            </a:pPr>
-            <a:r>
-              <a:t>Faculty Mentor / Project Guide</a:t>
+              <a:defRPr sz="2000" b="1">
+                <a:solidFill>
+                  <a:srgbClr val="000000"/>
+                </a:solidFill>
+                <a:latin typeface="Times New Roman"/>
+              </a:defRPr>
+            </a:pPr>
+            <a:r>
+              <a:t>T Rupa Devi Ma’am</a:t>
             </a:r>
           </a:p>
         </p:txBody>
@@ -3551,102 +3420,40 @@
         <p:nvPr/>
       </p:nvGrpSpPr>
       <p:grpSpPr/>
-      <p:sp>
-        <p:nvSpPr>
-          <p:cNvPr id="2" name="Right Triangle 1"/>
-          <p:cNvSpPr/>
+      <p:pic>
+        <p:nvPicPr>
+          <p:cNvPr id="2" name="Picture 1" descr="bg_content_slide.png"/>
+          <p:cNvPicPr>
+            <a:picLocks noChangeAspect="1"/>
+          </p:cNvPicPr>
           <p:nvPr/>
-        </p:nvSpPr>
+        </p:nvPicPr>
+        <p:blipFill>
+          <a:blip r:embed="rId2"/>
+          <a:stretch>
+            <a:fillRect/>
+          </a:stretch>
+        </p:blipFill>
         <p:spPr>
-          <a:xfrm rot="5400000">
-            <a:off x="10972800" y="0"/>
-            <a:ext cx="1218895" cy="2011680"/>
+          <a:xfrm>
+            <a:off x="0" y="0"/>
+            <a:ext cx="12191695" cy="6858000"/>
           </a:xfrm>
-          <a:prstGeom prst="rtTriangle">
+          <a:prstGeom prst="rect">
             <a:avLst/>
           </a:prstGeom>
-          <a:solidFill>
-            <a:srgbClr val="EA580C"/>
-          </a:solidFill>
-          <a:ln>
-            <a:noFill/>
-          </a:ln>
         </p:spPr>
-        <p:style>
-          <a:lnRef idx="1">
-            <a:schemeClr val="accent1"/>
-          </a:lnRef>
-          <a:fillRef idx="3">
-            <a:schemeClr val="accent1"/>
-          </a:fillRef>
-          <a:effectRef idx="2">
-            <a:schemeClr val="accent1"/>
-          </a:effectRef>
-          <a:fontRef idx="minor">
-            <a:schemeClr val="lt1"/>
-          </a:fontRef>
-        </p:style>
-        <p:txBody>
-          <a:bodyPr rtlCol="0" anchor="ctr"/>
-          <a:lstStyle/>
-          <a:p>
-            <a:pPr algn="ctr"/>
-          </a:p>
-        </p:txBody>
-      </p:sp>
-      <p:sp>
-        <p:nvSpPr>
-          <p:cNvPr id="3" name="Right Triangle 2"/>
-          <p:cNvSpPr/>
-          <p:nvPr/>
-        </p:nvSpPr>
-        <p:spPr>
-          <a:xfrm rot="16200000">
-            <a:off x="0" y="4846320"/>
-            <a:ext cx="1097280" cy="2011680"/>
-          </a:xfrm>
-          <a:prstGeom prst="rtTriangle">
-            <a:avLst/>
-          </a:prstGeom>
-          <a:solidFill>
-            <a:srgbClr val="0F766E"/>
-          </a:solidFill>
-          <a:ln>
-            <a:noFill/>
-          </a:ln>
-        </p:spPr>
-        <p:style>
-          <a:lnRef idx="1">
-            <a:schemeClr val="accent1"/>
-          </a:lnRef>
-          <a:fillRef idx="3">
-            <a:schemeClr val="accent1"/>
-          </a:fillRef>
-          <a:effectRef idx="2">
-            <a:schemeClr val="accent1"/>
-          </a:effectRef>
-          <a:fontRef idx="minor">
-            <a:schemeClr val="lt1"/>
-          </a:fontRef>
-        </p:style>
-        <p:txBody>
-          <a:bodyPr rtlCol="0" anchor="ctr"/>
-          <a:lstStyle/>
-          <a:p>
-            <a:pPr algn="ctr"/>
-          </a:p>
-        </p:txBody>
-      </p:sp>
-      <p:sp>
-        <p:nvSpPr>
-          <p:cNvPr id="4" name="TextBox 3"/>
+      </p:pic>
+      <p:sp>
+        <p:nvSpPr>
+          <p:cNvPr id="3" name="TextBox 2"/>
           <p:cNvSpPr txBox="1"/>
           <p:nvPr/>
         </p:nvSpPr>
         <p:spPr>
           <a:xfrm>
-            <a:off x="365760" y="274320"/>
-            <a:ext cx="1828800" cy="548640"/>
+            <a:off x="978408" y="329184"/>
+            <a:ext cx="9601200" cy="502920"/>
           </a:xfrm>
           <a:prstGeom prst="rect">
             <a:avLst/>
@@ -3654,70 +3461,34 @@
           <a:noFill/>
         </p:spPr>
         <p:txBody>
-          <a:bodyPr wrap="none">
+          <a:bodyPr wrap="square">
             <a:spAutoFit/>
           </a:bodyPr>
           <a:lstStyle/>
           <a:p>
             <a:pPr>
-              <a:defRPr sz="1800" b="1">
-                <a:solidFill>
-                  <a:srgbClr val="0F172A"/>
-                </a:solidFill>
-                <a:latin typeface="Arial"/>
-              </a:defRPr>
-            </a:pPr>
-            <a:r>
-              <a:t>Kmit</a:t>
-            </a:r>
-          </a:p>
-        </p:txBody>
-      </p:sp>
-      <p:sp>
-        <p:nvSpPr>
-          <p:cNvPr id="5" name="TextBox 4"/>
+              <a:defRPr sz="3200" b="1">
+                <a:solidFill>
+                  <a:srgbClr val="FF0000"/>
+                </a:solidFill>
+                <a:latin typeface="Arial"/>
+              </a:defRPr>
+            </a:pPr>
+            <a:r>
+              <a:t>DEVELOPMENT</a:t>
+            </a:r>
+          </a:p>
+        </p:txBody>
+      </p:sp>
+      <p:sp>
+        <p:nvSpPr>
+          <p:cNvPr id="4" name="TextBox 3"/>
           <p:cNvSpPr txBox="1"/>
           <p:nvPr/>
         </p:nvSpPr>
         <p:spPr>
           <a:xfrm>
-            <a:off x="1097280" y="274320"/>
-            <a:ext cx="9601200" cy="731520"/>
-          </a:xfrm>
-          <a:prstGeom prst="rect">
-            <a:avLst/>
-          </a:prstGeom>
-          <a:noFill/>
-        </p:spPr>
-        <p:txBody>
-          <a:bodyPr wrap="none">
-            <a:spAutoFit/>
-          </a:bodyPr>
-          <a:lstStyle/>
-          <a:p>
-            <a:pPr>
-              <a:defRPr sz="2600" b="1">
-                <a:solidFill>
-                  <a:srgbClr val="DC2626"/>
-                </a:solidFill>
-                <a:latin typeface="Arial"/>
-              </a:defRPr>
-            </a:pPr>
-            <a:r>
-              <a:t>DEVELOPMENT</a:t>
-            </a:r>
-          </a:p>
-        </p:txBody>
-      </p:sp>
-      <p:sp>
-        <p:nvSpPr>
-          <p:cNvPr id="6" name="TextBox 5"/>
-          <p:cNvSpPr txBox="1"/>
-          <p:nvPr/>
-        </p:nvSpPr>
-        <p:spPr>
-          <a:xfrm>
-            <a:off x="1097280" y="1188720"/>
+            <a:off x="1051560" y="1097280"/>
             <a:ext cx="10058400" cy="5303520"/>
           </a:xfrm>
           <a:prstGeom prst="rect">
@@ -3732,9 +3503,9 @@
           <a:lstStyle/>
           <a:p>
             <a:pPr>
-              <a:defRPr sz="1400" b="1">
-                <a:solidFill>
-                  <a:srgbClr val="1E293B"/>
+              <a:defRPr sz="2000" b="1">
+                <a:solidFill>
+                  <a:srgbClr val="000000"/>
                 </a:solidFill>
                 <a:latin typeface="Arial"/>
               </a:defRPr>
@@ -3748,9 +3519,9 @@
               <a:spcBef>
                 <a:spcPts val="300"/>
               </a:spcBef>
-              <a:defRPr sz="1100">
-                <a:solidFill>
-                  <a:srgbClr val="475569"/>
+              <a:defRPr sz="1550">
+                <a:solidFill>
+                  <a:srgbClr val="000000"/>
                 </a:solidFill>
                 <a:latin typeface="Arial"/>
               </a:defRPr>
@@ -3764,9 +3535,9 @@
               <a:spcBef>
                 <a:spcPts val="300"/>
               </a:spcBef>
-              <a:defRPr sz="1100">
-                <a:solidFill>
-                  <a:srgbClr val="475569"/>
+              <a:defRPr sz="1550">
+                <a:solidFill>
+                  <a:srgbClr val="000000"/>
                 </a:solidFill>
                 <a:latin typeface="Arial"/>
               </a:defRPr>
@@ -3780,9 +3551,9 @@
               <a:spcBef>
                 <a:spcPts val="300"/>
               </a:spcBef>
-              <a:defRPr sz="1100">
-                <a:solidFill>
-                  <a:srgbClr val="475569"/>
+              <a:defRPr sz="1550">
+                <a:solidFill>
+                  <a:srgbClr val="000000"/>
                 </a:solidFill>
                 <a:latin typeface="Arial"/>
               </a:defRPr>
@@ -3796,9 +3567,9 @@
               <a:spcBef>
                 <a:spcPts val="300"/>
               </a:spcBef>
-              <a:defRPr sz="1100">
-                <a:solidFill>
-                  <a:srgbClr val="475569"/>
+              <a:defRPr sz="1550">
+                <a:solidFill>
+                  <a:srgbClr val="000000"/>
                 </a:solidFill>
                 <a:latin typeface="Arial"/>
               </a:defRPr>
@@ -3812,9 +3583,9 @@
               <a:spcBef>
                 <a:spcPts val="300"/>
               </a:spcBef>
-              <a:defRPr sz="1100">
-                <a:solidFill>
-                  <a:srgbClr val="475569"/>
+              <a:defRPr sz="1550">
+                <a:solidFill>
+                  <a:srgbClr val="000000"/>
                 </a:solidFill>
                 <a:latin typeface="Arial"/>
               </a:defRPr>
@@ -3828,9 +3599,9 @@
               <a:spcBef>
                 <a:spcPts val="300"/>
               </a:spcBef>
-              <a:defRPr sz="1100">
-                <a:solidFill>
-                  <a:srgbClr val="475569"/>
+              <a:defRPr sz="1550">
+                <a:solidFill>
+                  <a:srgbClr val="000000"/>
                 </a:solidFill>
                 <a:latin typeface="Arial"/>
               </a:defRPr>
@@ -3844,9 +3615,9 @@
               <a:spcBef>
                 <a:spcPts val="300"/>
               </a:spcBef>
-              <a:defRPr sz="1100">
-                <a:solidFill>
-                  <a:srgbClr val="475569"/>
+              <a:defRPr sz="1550">
+                <a:solidFill>
+                  <a:srgbClr val="000000"/>
                 </a:solidFill>
                 <a:latin typeface="Arial"/>
               </a:defRPr>
@@ -3860,9 +3631,9 @@
               <a:spcBef>
                 <a:spcPts val="300"/>
               </a:spcBef>
-              <a:defRPr sz="1100">
-                <a:solidFill>
-                  <a:srgbClr val="475569"/>
+              <a:defRPr sz="1550">
+                <a:solidFill>
+                  <a:srgbClr val="000000"/>
                 </a:solidFill>
                 <a:latin typeface="Arial"/>
               </a:defRPr>
@@ -3874,11 +3645,11 @@
           <a:p>
             <a:pPr>
               <a:spcBef>
-                <a:spcPts val="800"/>
-              </a:spcBef>
-              <a:defRPr sz="1400" b="1">
-                <a:solidFill>
-                  <a:srgbClr val="1E293B"/>
+                <a:spcPts val="1000"/>
+              </a:spcBef>
+              <a:defRPr sz="2000" b="1">
+                <a:solidFill>
+                  <a:srgbClr val="000000"/>
                 </a:solidFill>
                 <a:latin typeface="Arial"/>
               </a:defRPr>
@@ -3892,9 +3663,9 @@
               <a:spcBef>
                 <a:spcPts val="300"/>
               </a:spcBef>
-              <a:defRPr sz="1100">
-                <a:solidFill>
-                  <a:srgbClr val="475569"/>
+              <a:defRPr sz="1550">
+                <a:solidFill>
+                  <a:srgbClr val="000000"/>
                 </a:solidFill>
                 <a:latin typeface="Arial"/>
               </a:defRPr>
@@ -3908,9 +3679,9 @@
               <a:spcBef>
                 <a:spcPts val="300"/>
               </a:spcBef>
-              <a:defRPr sz="1100">
-                <a:solidFill>
-                  <a:srgbClr val="475569"/>
+              <a:defRPr sz="1550">
+                <a:solidFill>
+                  <a:srgbClr val="000000"/>
                 </a:solidFill>
                 <a:latin typeface="Arial"/>
               </a:defRPr>
@@ -3924,9 +3695,9 @@
               <a:spcBef>
                 <a:spcPts val="300"/>
               </a:spcBef>
-              <a:defRPr sz="1100">
-                <a:solidFill>
-                  <a:srgbClr val="475569"/>
+              <a:defRPr sz="1550">
+                <a:solidFill>
+                  <a:srgbClr val="000000"/>
                 </a:solidFill>
                 <a:latin typeface="Arial"/>
               </a:defRPr>
@@ -3940,9 +3711,9 @@
               <a:spcBef>
                 <a:spcPts val="300"/>
               </a:spcBef>
-              <a:defRPr sz="1100">
-                <a:solidFill>
-                  <a:srgbClr val="475569"/>
+              <a:defRPr sz="1550">
+                <a:solidFill>
+                  <a:srgbClr val="000000"/>
                 </a:solidFill>
                 <a:latin typeface="Arial"/>
               </a:defRPr>
@@ -3956,9 +3727,9 @@
               <a:spcBef>
                 <a:spcPts val="300"/>
               </a:spcBef>
-              <a:defRPr sz="1100">
-                <a:solidFill>
-                  <a:srgbClr val="475569"/>
+              <a:defRPr sz="1550">
+                <a:solidFill>
+                  <a:srgbClr val="000000"/>
                 </a:solidFill>
                 <a:latin typeface="Arial"/>
               </a:defRPr>
@@ -3972,9 +3743,9 @@
               <a:spcBef>
                 <a:spcPts val="300"/>
               </a:spcBef>
-              <a:defRPr sz="1100">
-                <a:solidFill>
-                  <a:srgbClr val="475569"/>
+              <a:defRPr sz="1550">
+                <a:solidFill>
+                  <a:srgbClr val="000000"/>
                 </a:solidFill>
                 <a:latin typeface="Arial"/>
               </a:defRPr>
@@ -4003,102 +3774,40 @@
         <p:nvPr/>
       </p:nvGrpSpPr>
       <p:grpSpPr/>
-      <p:sp>
-        <p:nvSpPr>
-          <p:cNvPr id="2" name="Right Triangle 1"/>
-          <p:cNvSpPr/>
+      <p:pic>
+        <p:nvPicPr>
+          <p:cNvPr id="2" name="Picture 1" descr="bg_content_slide.png"/>
+          <p:cNvPicPr>
+            <a:picLocks noChangeAspect="1"/>
+          </p:cNvPicPr>
           <p:nvPr/>
-        </p:nvSpPr>
+        </p:nvPicPr>
+        <p:blipFill>
+          <a:blip r:embed="rId2"/>
+          <a:stretch>
+            <a:fillRect/>
+          </a:stretch>
+        </p:blipFill>
         <p:spPr>
-          <a:xfrm rot="5400000">
-            <a:off x="10972800" y="0"/>
-            <a:ext cx="1218895" cy="2011680"/>
+          <a:xfrm>
+            <a:off x="0" y="0"/>
+            <a:ext cx="12191695" cy="6858000"/>
           </a:xfrm>
-          <a:prstGeom prst="rtTriangle">
+          <a:prstGeom prst="rect">
             <a:avLst/>
           </a:prstGeom>
-          <a:solidFill>
-            <a:srgbClr val="EA580C"/>
-          </a:solidFill>
-          <a:ln>
-            <a:noFill/>
-          </a:ln>
         </p:spPr>
-        <p:style>
-          <a:lnRef idx="1">
-            <a:schemeClr val="accent1"/>
-          </a:lnRef>
-          <a:fillRef idx="3">
-            <a:schemeClr val="accent1"/>
-          </a:fillRef>
-          <a:effectRef idx="2">
-            <a:schemeClr val="accent1"/>
-          </a:effectRef>
-          <a:fontRef idx="minor">
-            <a:schemeClr val="lt1"/>
-          </a:fontRef>
-        </p:style>
-        <p:txBody>
-          <a:bodyPr rtlCol="0" anchor="ctr"/>
-          <a:lstStyle/>
-          <a:p>
-            <a:pPr algn="ctr"/>
-          </a:p>
-        </p:txBody>
-      </p:sp>
-      <p:sp>
-        <p:nvSpPr>
-          <p:cNvPr id="3" name="Right Triangle 2"/>
-          <p:cNvSpPr/>
-          <p:nvPr/>
-        </p:nvSpPr>
-        <p:spPr>
-          <a:xfrm rot="16200000">
-            <a:off x="0" y="4846320"/>
-            <a:ext cx="1097280" cy="2011680"/>
-          </a:xfrm>
-          <a:prstGeom prst="rtTriangle">
-            <a:avLst/>
-          </a:prstGeom>
-          <a:solidFill>
-            <a:srgbClr val="0F766E"/>
-          </a:solidFill>
-          <a:ln>
-            <a:noFill/>
-          </a:ln>
-        </p:spPr>
-        <p:style>
-          <a:lnRef idx="1">
-            <a:schemeClr val="accent1"/>
-          </a:lnRef>
-          <a:fillRef idx="3">
-            <a:schemeClr val="accent1"/>
-          </a:fillRef>
-          <a:effectRef idx="2">
-            <a:schemeClr val="accent1"/>
-          </a:effectRef>
-          <a:fontRef idx="minor">
-            <a:schemeClr val="lt1"/>
-          </a:fontRef>
-        </p:style>
-        <p:txBody>
-          <a:bodyPr rtlCol="0" anchor="ctr"/>
-          <a:lstStyle/>
-          <a:p>
-            <a:pPr algn="ctr"/>
-          </a:p>
-        </p:txBody>
-      </p:sp>
-      <p:sp>
-        <p:nvSpPr>
-          <p:cNvPr id="4" name="TextBox 3"/>
+      </p:pic>
+      <p:sp>
+        <p:nvSpPr>
+          <p:cNvPr id="3" name="TextBox 2"/>
           <p:cNvSpPr txBox="1"/>
           <p:nvPr/>
         </p:nvSpPr>
         <p:spPr>
           <a:xfrm>
-            <a:off x="365760" y="274320"/>
-            <a:ext cx="1828800" cy="548640"/>
+            <a:off x="978408" y="329184"/>
+            <a:ext cx="9601200" cy="502920"/>
           </a:xfrm>
           <a:prstGeom prst="rect">
             <a:avLst/>
@@ -4106,70 +3815,34 @@
           <a:noFill/>
         </p:spPr>
         <p:txBody>
-          <a:bodyPr wrap="none">
+          <a:bodyPr wrap="square">
             <a:spAutoFit/>
           </a:bodyPr>
           <a:lstStyle/>
           <a:p>
             <a:pPr>
-              <a:defRPr sz="1800" b="1">
-                <a:solidFill>
-                  <a:srgbClr val="0F172A"/>
-                </a:solidFill>
-                <a:latin typeface="Arial"/>
-              </a:defRPr>
-            </a:pPr>
-            <a:r>
-              <a:t>Kmit</a:t>
-            </a:r>
-          </a:p>
-        </p:txBody>
-      </p:sp>
-      <p:sp>
-        <p:nvSpPr>
-          <p:cNvPr id="5" name="TextBox 4"/>
+              <a:defRPr sz="3200" b="1">
+                <a:solidFill>
+                  <a:srgbClr val="FF0000"/>
+                </a:solidFill>
+                <a:latin typeface="Arial"/>
+              </a:defRPr>
+            </a:pPr>
+            <a:r>
+              <a:t>PROJECT OUTCOME</a:t>
+            </a:r>
+          </a:p>
+        </p:txBody>
+      </p:sp>
+      <p:sp>
+        <p:nvSpPr>
+          <p:cNvPr id="4" name="TextBox 3"/>
           <p:cNvSpPr txBox="1"/>
           <p:nvPr/>
         </p:nvSpPr>
         <p:spPr>
           <a:xfrm>
-            <a:off x="1097280" y="274320"/>
-            <a:ext cx="9601200" cy="731520"/>
-          </a:xfrm>
-          <a:prstGeom prst="rect">
-            <a:avLst/>
-          </a:prstGeom>
-          <a:noFill/>
-        </p:spPr>
-        <p:txBody>
-          <a:bodyPr wrap="none">
-            <a:spAutoFit/>
-          </a:bodyPr>
-          <a:lstStyle/>
-          <a:p>
-            <a:pPr>
-              <a:defRPr sz="2600" b="1">
-                <a:solidFill>
-                  <a:srgbClr val="DC2626"/>
-                </a:solidFill>
-                <a:latin typeface="Arial"/>
-              </a:defRPr>
-            </a:pPr>
-            <a:r>
-              <a:t>PROJECT OUTCOME</a:t>
-            </a:r>
-          </a:p>
-        </p:txBody>
-      </p:sp>
-      <p:sp>
-        <p:nvSpPr>
-          <p:cNvPr id="6" name="TextBox 5"/>
-          <p:cNvSpPr txBox="1"/>
-          <p:nvPr/>
-        </p:nvSpPr>
-        <p:spPr>
-          <a:xfrm>
-            <a:off x="1097280" y="1188720"/>
+            <a:off x="1051560" y="1097280"/>
             <a:ext cx="10058400" cy="5303520"/>
           </a:xfrm>
           <a:prstGeom prst="rect">
@@ -4184,9 +3857,9 @@
           <a:lstStyle/>
           <a:p>
             <a:pPr>
-              <a:defRPr sz="1400" b="1">
-                <a:solidFill>
-                  <a:srgbClr val="1E293B"/>
+              <a:defRPr sz="2000" b="1">
+                <a:solidFill>
+                  <a:srgbClr val="000000"/>
                 </a:solidFill>
                 <a:latin typeface="Arial"/>
               </a:defRPr>
@@ -4198,11 +3871,11 @@
           <a:p>
             <a:pPr>
               <a:spcBef>
-                <a:spcPts val="300"/>
-              </a:spcBef>
-              <a:defRPr sz="1100">
-                <a:solidFill>
-                  <a:srgbClr val="475569"/>
+                <a:spcPts val="250"/>
+              </a:spcBef>
+              <a:defRPr sz="1500">
+                <a:solidFill>
+                  <a:srgbClr val="000000"/>
                 </a:solidFill>
                 <a:latin typeface="Arial"/>
               </a:defRPr>
@@ -4214,11 +3887,11 @@
           <a:p>
             <a:pPr>
               <a:spcBef>
-                <a:spcPts val="300"/>
-              </a:spcBef>
-              <a:defRPr sz="1100">
-                <a:solidFill>
-                  <a:srgbClr val="475569"/>
+                <a:spcPts val="250"/>
+              </a:spcBef>
+              <a:defRPr sz="1500">
+                <a:solidFill>
+                  <a:srgbClr val="000000"/>
                 </a:solidFill>
                 <a:latin typeface="Arial"/>
               </a:defRPr>
@@ -4230,11 +3903,11 @@
           <a:p>
             <a:pPr>
               <a:spcBef>
-                <a:spcPts val="300"/>
-              </a:spcBef>
-              <a:defRPr sz="1100">
-                <a:solidFill>
-                  <a:srgbClr val="475569"/>
+                <a:spcPts val="250"/>
+              </a:spcBef>
+              <a:defRPr sz="1500">
+                <a:solidFill>
+                  <a:srgbClr val="000000"/>
                 </a:solidFill>
                 <a:latin typeface="Arial"/>
               </a:defRPr>
@@ -4246,11 +3919,11 @@
           <a:p>
             <a:pPr>
               <a:spcBef>
-                <a:spcPts val="300"/>
-              </a:spcBef>
-              <a:defRPr sz="1100">
-                <a:solidFill>
-                  <a:srgbClr val="475569"/>
+                <a:spcPts val="250"/>
+              </a:spcBef>
+              <a:defRPr sz="1500">
+                <a:solidFill>
+                  <a:srgbClr val="000000"/>
                 </a:solidFill>
                 <a:latin typeface="Arial"/>
               </a:defRPr>
@@ -4262,11 +3935,11 @@
           <a:p>
             <a:pPr>
               <a:spcBef>
-                <a:spcPts val="300"/>
-              </a:spcBef>
-              <a:defRPr sz="1100">
-                <a:solidFill>
-                  <a:srgbClr val="475569"/>
+                <a:spcPts val="250"/>
+              </a:spcBef>
+              <a:defRPr sz="1500">
+                <a:solidFill>
+                  <a:srgbClr val="000000"/>
                 </a:solidFill>
                 <a:latin typeface="Arial"/>
               </a:defRPr>
@@ -4278,11 +3951,11 @@
           <a:p>
             <a:pPr>
               <a:spcBef>
-                <a:spcPts val="300"/>
-              </a:spcBef>
-              <a:defRPr sz="1100">
-                <a:solidFill>
-                  <a:srgbClr val="475569"/>
+                <a:spcPts val="250"/>
+              </a:spcBef>
+              <a:defRPr sz="1500">
+                <a:solidFill>
+                  <a:srgbClr val="000000"/>
                 </a:solidFill>
                 <a:latin typeface="Arial"/>
               </a:defRPr>
@@ -4294,11 +3967,11 @@
           <a:p>
             <a:pPr>
               <a:spcBef>
-                <a:spcPts val="800"/>
-              </a:spcBef>
-              <a:defRPr sz="1400" b="1">
-                <a:solidFill>
-                  <a:srgbClr val="1E293B"/>
+                <a:spcPts val="900"/>
+              </a:spcBef>
+              <a:defRPr sz="2000" b="1">
+                <a:solidFill>
+                  <a:srgbClr val="000000"/>
                 </a:solidFill>
                 <a:latin typeface="Arial"/>
               </a:defRPr>
@@ -4310,11 +3983,11 @@
           <a:p>
             <a:pPr>
               <a:spcBef>
-                <a:spcPts val="300"/>
-              </a:spcBef>
-              <a:defRPr sz="1100">
-                <a:solidFill>
-                  <a:srgbClr val="475569"/>
+                <a:spcPts val="250"/>
+              </a:spcBef>
+              <a:defRPr sz="1500">
+                <a:solidFill>
+                  <a:srgbClr val="000000"/>
                 </a:solidFill>
                 <a:latin typeface="Arial"/>
               </a:defRPr>
@@ -4326,11 +3999,11 @@
           <a:p>
             <a:pPr>
               <a:spcBef>
-                <a:spcPts val="300"/>
-              </a:spcBef>
-              <a:defRPr sz="1100">
-                <a:solidFill>
-                  <a:srgbClr val="475569"/>
+                <a:spcPts val="250"/>
+              </a:spcBef>
+              <a:defRPr sz="1500">
+                <a:solidFill>
+                  <a:srgbClr val="000000"/>
                 </a:solidFill>
                 <a:latin typeface="Arial"/>
               </a:defRPr>
@@ -4342,11 +4015,11 @@
           <a:p>
             <a:pPr>
               <a:spcBef>
-                <a:spcPts val="800"/>
-              </a:spcBef>
-              <a:defRPr sz="1400" b="1">
-                <a:solidFill>
-                  <a:srgbClr val="1E293B"/>
+                <a:spcPts val="900"/>
+              </a:spcBef>
+              <a:defRPr sz="2000" b="1">
+                <a:solidFill>
+                  <a:srgbClr val="000000"/>
                 </a:solidFill>
                 <a:latin typeface="Arial"/>
               </a:defRPr>
@@ -4358,11 +4031,11 @@
           <a:p>
             <a:pPr>
               <a:spcBef>
-                <a:spcPts val="300"/>
-              </a:spcBef>
-              <a:defRPr sz="1100">
-                <a:solidFill>
-                  <a:srgbClr val="475569"/>
+                <a:spcPts val="250"/>
+              </a:spcBef>
+              <a:defRPr sz="1500">
+                <a:solidFill>
+                  <a:srgbClr val="000000"/>
                 </a:solidFill>
                 <a:latin typeface="Arial"/>
               </a:defRPr>
@@ -4374,11 +4047,11 @@
           <a:p>
             <a:pPr>
               <a:spcBef>
-                <a:spcPts val="300"/>
-              </a:spcBef>
-              <a:defRPr sz="1100">
-                <a:solidFill>
-                  <a:srgbClr val="475569"/>
+                <a:spcPts val="250"/>
+              </a:spcBef>
+              <a:defRPr sz="1500">
+                <a:solidFill>
+                  <a:srgbClr val="000000"/>
                 </a:solidFill>
                 <a:latin typeface="Arial"/>
               </a:defRPr>
@@ -4390,11 +4063,11 @@
           <a:p>
             <a:pPr>
               <a:spcBef>
-                <a:spcPts val="300"/>
-              </a:spcBef>
-              <a:defRPr sz="1100">
-                <a:solidFill>
-                  <a:srgbClr val="475569"/>
+                <a:spcPts val="250"/>
+              </a:spcBef>
+              <a:defRPr sz="1500">
+                <a:solidFill>
+                  <a:srgbClr val="000000"/>
                 </a:solidFill>
                 <a:latin typeface="Arial"/>
               </a:defRPr>
@@ -4406,11 +4079,11 @@
           <a:p>
             <a:pPr>
               <a:spcBef>
-                <a:spcPts val="800"/>
-              </a:spcBef>
-              <a:defRPr sz="1400" b="1">
-                <a:solidFill>
-                  <a:srgbClr val="1E293B"/>
+                <a:spcPts val="900"/>
+              </a:spcBef>
+              <a:defRPr sz="2000" b="1">
+                <a:solidFill>
+                  <a:srgbClr val="000000"/>
                 </a:solidFill>
                 <a:latin typeface="Arial"/>
               </a:defRPr>
@@ -4422,17 +4095,17 @@
           <a:p>
             <a:pPr>
               <a:spcBef>
-                <a:spcPts val="300"/>
-              </a:spcBef>
-              <a:defRPr sz="1100">
-                <a:solidFill>
-                  <a:srgbClr val="475569"/>
-                </a:solidFill>
-                <a:latin typeface="Arial"/>
-              </a:defRPr>
-            </a:pPr>
-            <a:r>
-              <a:t>•  Status: Research paper is complete and formatted for journal submission at docs/Prahari_Research_Paper.docx.</a:t>
+                <a:spcPts val="200"/>
+              </a:spcBef>
+              <a:defRPr sz="1500">
+                <a:solidFill>
+                  <a:srgbClr val="000000"/>
+                </a:solidFill>
+                <a:latin typeface="Arial"/>
+              </a:defRPr>
+            </a:pPr>
+            <a:r>
+              <a:t>Status: Research paper is complete and formatted for journal submission at docs/Prahari_Research_Paper.docx.</a:t>
             </a:r>
           </a:p>
         </p:txBody>
@@ -4455,102 +4128,40 @@
         <p:nvPr/>
       </p:nvGrpSpPr>
       <p:grpSpPr/>
-      <p:sp>
-        <p:nvSpPr>
-          <p:cNvPr id="2" name="Right Triangle 1"/>
-          <p:cNvSpPr/>
+      <p:pic>
+        <p:nvPicPr>
+          <p:cNvPr id="2" name="Picture 1" descr="bg_content_slide.png"/>
+          <p:cNvPicPr>
+            <a:picLocks noChangeAspect="1"/>
+          </p:cNvPicPr>
           <p:nvPr/>
-        </p:nvSpPr>
+        </p:nvPicPr>
+        <p:blipFill>
+          <a:blip r:embed="rId2"/>
+          <a:stretch>
+            <a:fillRect/>
+          </a:stretch>
+        </p:blipFill>
         <p:spPr>
-          <a:xfrm rot="5400000">
-            <a:off x="10972800" y="0"/>
-            <a:ext cx="1218895" cy="2011680"/>
+          <a:xfrm>
+            <a:off x="0" y="0"/>
+            <a:ext cx="12191695" cy="6858000"/>
           </a:xfrm>
-          <a:prstGeom prst="rtTriangle">
+          <a:prstGeom prst="rect">
             <a:avLst/>
           </a:prstGeom>
-          <a:solidFill>
-            <a:srgbClr val="EA580C"/>
-          </a:solidFill>
-          <a:ln>
-            <a:noFill/>
-          </a:ln>
         </p:spPr>
-        <p:style>
-          <a:lnRef idx="1">
-            <a:schemeClr val="accent1"/>
-          </a:lnRef>
-          <a:fillRef idx="3">
-            <a:schemeClr val="accent1"/>
-          </a:fillRef>
-          <a:effectRef idx="2">
-            <a:schemeClr val="accent1"/>
-          </a:effectRef>
-          <a:fontRef idx="minor">
-            <a:schemeClr val="lt1"/>
-          </a:fontRef>
-        </p:style>
-        <p:txBody>
-          <a:bodyPr rtlCol="0" anchor="ctr"/>
-          <a:lstStyle/>
-          <a:p>
-            <a:pPr algn="ctr"/>
-          </a:p>
-        </p:txBody>
-      </p:sp>
-      <p:sp>
-        <p:nvSpPr>
-          <p:cNvPr id="3" name="Right Triangle 2"/>
-          <p:cNvSpPr/>
-          <p:nvPr/>
-        </p:nvSpPr>
-        <p:spPr>
-          <a:xfrm rot="16200000">
-            <a:off x="0" y="4846320"/>
-            <a:ext cx="1097280" cy="2011680"/>
-          </a:xfrm>
-          <a:prstGeom prst="rtTriangle">
-            <a:avLst/>
-          </a:prstGeom>
-          <a:solidFill>
-            <a:srgbClr val="0F766E"/>
-          </a:solidFill>
-          <a:ln>
-            <a:noFill/>
-          </a:ln>
-        </p:spPr>
-        <p:style>
-          <a:lnRef idx="1">
-            <a:schemeClr val="accent1"/>
-          </a:lnRef>
-          <a:fillRef idx="3">
-            <a:schemeClr val="accent1"/>
-          </a:fillRef>
-          <a:effectRef idx="2">
-            <a:schemeClr val="accent1"/>
-          </a:effectRef>
-          <a:fontRef idx="minor">
-            <a:schemeClr val="lt1"/>
-          </a:fontRef>
-        </p:style>
-        <p:txBody>
-          <a:bodyPr rtlCol="0" anchor="ctr"/>
-          <a:lstStyle/>
-          <a:p>
-            <a:pPr algn="ctr"/>
-          </a:p>
-        </p:txBody>
-      </p:sp>
-      <p:sp>
-        <p:nvSpPr>
-          <p:cNvPr id="4" name="TextBox 3"/>
+      </p:pic>
+      <p:sp>
+        <p:nvSpPr>
+          <p:cNvPr id="3" name="TextBox 2"/>
           <p:cNvSpPr txBox="1"/>
           <p:nvPr/>
         </p:nvSpPr>
         <p:spPr>
           <a:xfrm>
-            <a:off x="365760" y="274320"/>
-            <a:ext cx="1828800" cy="548640"/>
+            <a:off x="978408" y="329184"/>
+            <a:ext cx="9601200" cy="502920"/>
           </a:xfrm>
           <a:prstGeom prst="rect">
             <a:avLst/>
@@ -4558,70 +4169,34 @@
           <a:noFill/>
         </p:spPr>
         <p:txBody>
-          <a:bodyPr wrap="none">
+          <a:bodyPr wrap="square">
             <a:spAutoFit/>
           </a:bodyPr>
           <a:lstStyle/>
           <a:p>
             <a:pPr>
-              <a:defRPr sz="1800" b="1">
-                <a:solidFill>
-                  <a:srgbClr val="0F172A"/>
-                </a:solidFill>
-                <a:latin typeface="Arial"/>
-              </a:defRPr>
-            </a:pPr>
-            <a:r>
-              <a:t>Kmit</a:t>
-            </a:r>
-          </a:p>
-        </p:txBody>
-      </p:sp>
-      <p:sp>
-        <p:nvSpPr>
-          <p:cNvPr id="5" name="TextBox 4"/>
+              <a:defRPr sz="3200" b="1">
+                <a:solidFill>
+                  <a:srgbClr val="FF0000"/>
+                </a:solidFill>
+                <a:latin typeface="Arial"/>
+              </a:defRPr>
+            </a:pPr>
+            <a:r>
+              <a:t>CONCLUSION</a:t>
+            </a:r>
+          </a:p>
+        </p:txBody>
+      </p:sp>
+      <p:sp>
+        <p:nvSpPr>
+          <p:cNvPr id="4" name="TextBox 3"/>
           <p:cNvSpPr txBox="1"/>
           <p:nvPr/>
         </p:nvSpPr>
         <p:spPr>
           <a:xfrm>
-            <a:off x="1097280" y="274320"/>
-            <a:ext cx="9601200" cy="731520"/>
-          </a:xfrm>
-          <a:prstGeom prst="rect">
-            <a:avLst/>
-          </a:prstGeom>
-          <a:noFill/>
-        </p:spPr>
-        <p:txBody>
-          <a:bodyPr wrap="none">
-            <a:spAutoFit/>
-          </a:bodyPr>
-          <a:lstStyle/>
-          <a:p>
-            <a:pPr>
-              <a:defRPr sz="2600" b="1">
-                <a:solidFill>
-                  <a:srgbClr val="DC2626"/>
-                </a:solidFill>
-                <a:latin typeface="Arial"/>
-              </a:defRPr>
-            </a:pPr>
-            <a:r>
-              <a:t>CONCLUSION</a:t>
-            </a:r>
-          </a:p>
-        </p:txBody>
-      </p:sp>
-      <p:sp>
-        <p:nvSpPr>
-          <p:cNvPr id="6" name="TextBox 5"/>
-          <p:cNvSpPr txBox="1"/>
-          <p:nvPr/>
-        </p:nvSpPr>
-        <p:spPr>
-          <a:xfrm>
-            <a:off x="1097280" y="1188720"/>
+            <a:off x="1051560" y="1097280"/>
             <a:ext cx="10058400" cy="5303520"/>
           </a:xfrm>
           <a:prstGeom prst="rect">
@@ -4636,9 +4211,9 @@
           <a:lstStyle/>
           <a:p>
             <a:pPr>
-              <a:defRPr sz="1400" b="1">
-                <a:solidFill>
-                  <a:srgbClr val="1E293B"/>
+              <a:defRPr sz="2000" b="1">
+                <a:solidFill>
+                  <a:srgbClr val="000000"/>
                 </a:solidFill>
                 <a:latin typeface="Arial"/>
               </a:defRPr>
@@ -4652,9 +4227,9 @@
               <a:spcBef>
                 <a:spcPts val="300"/>
               </a:spcBef>
-              <a:defRPr sz="1100">
-                <a:solidFill>
-                  <a:srgbClr val="475569"/>
+              <a:defRPr sz="1550">
+                <a:solidFill>
+                  <a:srgbClr val="000000"/>
                 </a:solidFill>
                 <a:latin typeface="Arial"/>
               </a:defRPr>
@@ -4668,9 +4243,9 @@
               <a:spcBef>
                 <a:spcPts val="300"/>
               </a:spcBef>
-              <a:defRPr sz="1100">
-                <a:solidFill>
-                  <a:srgbClr val="475569"/>
+              <a:defRPr sz="1550">
+                <a:solidFill>
+                  <a:srgbClr val="000000"/>
                 </a:solidFill>
                 <a:latin typeface="Arial"/>
               </a:defRPr>
@@ -4684,9 +4259,9 @@
               <a:spcBef>
                 <a:spcPts val="300"/>
               </a:spcBef>
-              <a:defRPr sz="1100">
-                <a:solidFill>
-                  <a:srgbClr val="475569"/>
+              <a:defRPr sz="1550">
+                <a:solidFill>
+                  <a:srgbClr val="000000"/>
                 </a:solidFill>
                 <a:latin typeface="Arial"/>
               </a:defRPr>
@@ -4700,9 +4275,9 @@
               <a:spcBef>
                 <a:spcPts val="300"/>
               </a:spcBef>
-              <a:defRPr sz="1100">
-                <a:solidFill>
-                  <a:srgbClr val="475569"/>
+              <a:defRPr sz="1550">
+                <a:solidFill>
+                  <a:srgbClr val="000000"/>
                 </a:solidFill>
                 <a:latin typeface="Arial"/>
               </a:defRPr>
@@ -4714,11 +4289,11 @@
           <a:p>
             <a:pPr>
               <a:spcBef>
-                <a:spcPts val="800"/>
-              </a:spcBef>
-              <a:defRPr sz="1400" b="1">
-                <a:solidFill>
-                  <a:srgbClr val="1E293B"/>
+                <a:spcPts val="1000"/>
+              </a:spcBef>
+              <a:defRPr sz="2000" b="1">
+                <a:solidFill>
+                  <a:srgbClr val="000000"/>
                 </a:solidFill>
                 <a:latin typeface="Arial"/>
               </a:defRPr>
@@ -4732,9 +4307,9 @@
               <a:spcBef>
                 <a:spcPts val="300"/>
               </a:spcBef>
-              <a:defRPr sz="1100">
-                <a:solidFill>
-                  <a:srgbClr val="475569"/>
+              <a:defRPr sz="1550">
+                <a:solidFill>
+                  <a:srgbClr val="000000"/>
                 </a:solidFill>
                 <a:latin typeface="Arial"/>
               </a:defRPr>
@@ -4748,9 +4323,9 @@
               <a:spcBef>
                 <a:spcPts val="300"/>
               </a:spcBef>
-              <a:defRPr sz="1100">
-                <a:solidFill>
-                  <a:srgbClr val="475569"/>
+              <a:defRPr sz="1550">
+                <a:solidFill>
+                  <a:srgbClr val="000000"/>
                 </a:solidFill>
                 <a:latin typeface="Arial"/>
               </a:defRPr>
@@ -4764,9 +4339,9 @@
               <a:spcBef>
                 <a:spcPts val="300"/>
               </a:spcBef>
-              <a:defRPr sz="1100">
-                <a:solidFill>
-                  <a:srgbClr val="475569"/>
+              <a:defRPr sz="1550">
+                <a:solidFill>
+                  <a:srgbClr val="000000"/>
                 </a:solidFill>
                 <a:latin typeface="Arial"/>
               </a:defRPr>
@@ -4780,9 +4355,9 @@
               <a:spcBef>
                 <a:spcPts val="300"/>
               </a:spcBef>
-              <a:defRPr sz="1100">
-                <a:solidFill>
-                  <a:srgbClr val="475569"/>
+              <a:defRPr sz="1550">
+                <a:solidFill>
+                  <a:srgbClr val="000000"/>
                 </a:solidFill>
                 <a:latin typeface="Arial"/>
               </a:defRPr>
@@ -4796,9 +4371,9 @@
               <a:spcBef>
                 <a:spcPts val="300"/>
               </a:spcBef>
-              <a:defRPr sz="1100">
-                <a:solidFill>
-                  <a:srgbClr val="475569"/>
+              <a:defRPr sz="1550">
+                <a:solidFill>
+                  <a:srgbClr val="000000"/>
                 </a:solidFill>
                 <a:latin typeface="Arial"/>
               </a:defRPr>
@@ -4812,9 +4387,9 @@
               <a:spcBef>
                 <a:spcPts val="300"/>
               </a:spcBef>
-              <a:defRPr sz="1100">
-                <a:solidFill>
-                  <a:srgbClr val="475569"/>
+              <a:defRPr sz="1550">
+                <a:solidFill>
+                  <a:srgbClr val="000000"/>
                 </a:solidFill>
                 <a:latin typeface="Arial"/>
               </a:defRPr>
@@ -4828,9 +4403,9 @@
               <a:spcBef>
                 <a:spcPts val="300"/>
               </a:spcBef>
-              <a:defRPr sz="1100">
-                <a:solidFill>
-                  <a:srgbClr val="475569"/>
+              <a:defRPr sz="1550">
+                <a:solidFill>
+                  <a:srgbClr val="000000"/>
                 </a:solidFill>
                 <a:latin typeface="Arial"/>
               </a:defRPr>
@@ -4859,102 +4434,40 @@
         <p:nvPr/>
       </p:nvGrpSpPr>
       <p:grpSpPr/>
-      <p:sp>
-        <p:nvSpPr>
-          <p:cNvPr id="2" name="Right Triangle 1"/>
-          <p:cNvSpPr/>
+      <p:pic>
+        <p:nvPicPr>
+          <p:cNvPr id="2" name="Picture 1" descr="bg_content_slide.png"/>
+          <p:cNvPicPr>
+            <a:picLocks noChangeAspect="1"/>
+          </p:cNvPicPr>
           <p:nvPr/>
-        </p:nvSpPr>
+        </p:nvPicPr>
+        <p:blipFill>
+          <a:blip r:embed="rId2"/>
+          <a:stretch>
+            <a:fillRect/>
+          </a:stretch>
+        </p:blipFill>
         <p:spPr>
-          <a:xfrm rot="5400000">
-            <a:off x="10972800" y="0"/>
-            <a:ext cx="1218895" cy="2011680"/>
+          <a:xfrm>
+            <a:off x="0" y="0"/>
+            <a:ext cx="12191695" cy="6858000"/>
           </a:xfrm>
-          <a:prstGeom prst="rtTriangle">
+          <a:prstGeom prst="rect">
             <a:avLst/>
           </a:prstGeom>
-          <a:solidFill>
-            <a:srgbClr val="EA580C"/>
-          </a:solidFill>
-          <a:ln>
-            <a:noFill/>
-          </a:ln>
         </p:spPr>
-        <p:style>
-          <a:lnRef idx="1">
-            <a:schemeClr val="accent1"/>
-          </a:lnRef>
-          <a:fillRef idx="3">
-            <a:schemeClr val="accent1"/>
-          </a:fillRef>
-          <a:effectRef idx="2">
-            <a:schemeClr val="accent1"/>
-          </a:effectRef>
-          <a:fontRef idx="minor">
-            <a:schemeClr val="lt1"/>
-          </a:fontRef>
-        </p:style>
-        <p:txBody>
-          <a:bodyPr rtlCol="0" anchor="ctr"/>
-          <a:lstStyle/>
-          <a:p>
-            <a:pPr algn="ctr"/>
-          </a:p>
-        </p:txBody>
-      </p:sp>
-      <p:sp>
-        <p:nvSpPr>
-          <p:cNvPr id="3" name="Right Triangle 2"/>
-          <p:cNvSpPr/>
-          <p:nvPr/>
-        </p:nvSpPr>
-        <p:spPr>
-          <a:xfrm rot="16200000">
-            <a:off x="0" y="4846320"/>
-            <a:ext cx="1097280" cy="2011680"/>
-          </a:xfrm>
-          <a:prstGeom prst="rtTriangle">
-            <a:avLst/>
-          </a:prstGeom>
-          <a:solidFill>
-            <a:srgbClr val="0F766E"/>
-          </a:solidFill>
-          <a:ln>
-            <a:noFill/>
-          </a:ln>
-        </p:spPr>
-        <p:style>
-          <a:lnRef idx="1">
-            <a:schemeClr val="accent1"/>
-          </a:lnRef>
-          <a:fillRef idx="3">
-            <a:schemeClr val="accent1"/>
-          </a:fillRef>
-          <a:effectRef idx="2">
-            <a:schemeClr val="accent1"/>
-          </a:effectRef>
-          <a:fontRef idx="minor">
-            <a:schemeClr val="lt1"/>
-          </a:fontRef>
-        </p:style>
-        <p:txBody>
-          <a:bodyPr rtlCol="0" anchor="ctr"/>
-          <a:lstStyle/>
-          <a:p>
-            <a:pPr algn="ctr"/>
-          </a:p>
-        </p:txBody>
-      </p:sp>
-      <p:sp>
-        <p:nvSpPr>
-          <p:cNvPr id="4" name="TextBox 3"/>
+      </p:pic>
+      <p:sp>
+        <p:nvSpPr>
+          <p:cNvPr id="3" name="TextBox 2"/>
           <p:cNvSpPr txBox="1"/>
           <p:nvPr/>
         </p:nvSpPr>
         <p:spPr>
           <a:xfrm>
-            <a:off x="365760" y="274320"/>
-            <a:ext cx="1828800" cy="548640"/>
+            <a:off x="0" y="2926080"/>
+            <a:ext cx="12191695" cy="1371600"/>
           </a:xfrm>
           <a:prstGeom prst="rect">
             <a:avLst/>
@@ -4967,77 +4480,16 @@
           </a:bodyPr>
           <a:lstStyle/>
           <a:p>
-            <a:pPr>
-              <a:defRPr sz="1800" b="1">
-                <a:solidFill>
-                  <a:srgbClr val="0F172A"/>
-                </a:solidFill>
-                <a:latin typeface="Arial"/>
-              </a:defRPr>
-            </a:pPr>
-            <a:r>
-              <a:t>Kmit</a:t>
-            </a:r>
-          </a:p>
-        </p:txBody>
-      </p:sp>
-      <p:sp>
-        <p:nvSpPr>
-          <p:cNvPr id="5" name="TextBox 4"/>
-          <p:cNvSpPr txBox="1"/>
-          <p:nvPr/>
-        </p:nvSpPr>
-        <p:spPr>
-          <a:xfrm>
-            <a:off x="1828800" y="2560320"/>
-            <a:ext cx="8531352" cy="1828800"/>
-          </a:xfrm>
-          <a:prstGeom prst="rect">
-            <a:avLst/>
-          </a:prstGeom>
-          <a:noFill/>
-        </p:spPr>
-        <p:txBody>
-          <a:bodyPr wrap="none">
-            <a:spAutoFit/>
-          </a:bodyPr>
-          <a:lstStyle/>
-          <a:p>
             <a:pPr algn="ctr">
               <a:defRPr sz="4800" b="1">
                 <a:solidFill>
-                  <a:srgbClr val="1E293B"/>
+                  <a:srgbClr val="000000"/>
                 </a:solidFill>
                 <a:latin typeface="Arial"/>
               </a:defRPr>
             </a:pPr>
             <a:r>
               <a:t>Thank you!</a:t>
-            </a:r>
-          </a:p>
-          <a:p>
-            <a:pPr algn="ctr">
-              <a:spcBef>
-                <a:spcPts val="1600"/>
-              </a:spcBef>
-              <a:defRPr sz="1400">
-                <a:solidFill>
-                  <a:srgbClr val="475569"/>
-                </a:solidFill>
-                <a:latin typeface="Arial"/>
-              </a:defRPr>
-            </a:pPr>
-            <a:r>
-              <a:t>Questions &amp; Discussion</a:t>
-            </a:r>
-            <a:br/>
-            <a:br/>
-            <a:r>
-              <a:t>PRAHARI: Autonomous Spacecraft Conjunction Triage Platform</a:t>
-            </a:r>
-            <a:br/>
-            <a:r>
-              <a:t>https://github.com/akshaybharadwaj45/prahari</a:t>
             </a:r>
           </a:p>
         </p:txBody>
@@ -5060,102 +4512,40 @@
         <p:nvPr/>
       </p:nvGrpSpPr>
       <p:grpSpPr/>
-      <p:sp>
-        <p:nvSpPr>
-          <p:cNvPr id="2" name="Right Triangle 1"/>
-          <p:cNvSpPr/>
+      <p:pic>
+        <p:nvPicPr>
+          <p:cNvPr id="2" name="Picture 1" descr="bg_content_slide.png"/>
+          <p:cNvPicPr>
+            <a:picLocks noChangeAspect="1"/>
+          </p:cNvPicPr>
           <p:nvPr/>
-        </p:nvSpPr>
+        </p:nvPicPr>
+        <p:blipFill>
+          <a:blip r:embed="rId2"/>
+          <a:stretch>
+            <a:fillRect/>
+          </a:stretch>
+        </p:blipFill>
         <p:spPr>
-          <a:xfrm rot="5400000">
-            <a:off x="10972800" y="0"/>
-            <a:ext cx="1218895" cy="2011680"/>
+          <a:xfrm>
+            <a:off x="0" y="0"/>
+            <a:ext cx="12191695" cy="6858000"/>
           </a:xfrm>
-          <a:prstGeom prst="rtTriangle">
+          <a:prstGeom prst="rect">
             <a:avLst/>
           </a:prstGeom>
-          <a:solidFill>
-            <a:srgbClr val="EA580C"/>
-          </a:solidFill>
-          <a:ln>
-            <a:noFill/>
-          </a:ln>
         </p:spPr>
-        <p:style>
-          <a:lnRef idx="1">
-            <a:schemeClr val="accent1"/>
-          </a:lnRef>
-          <a:fillRef idx="3">
-            <a:schemeClr val="accent1"/>
-          </a:fillRef>
-          <a:effectRef idx="2">
-            <a:schemeClr val="accent1"/>
-          </a:effectRef>
-          <a:fontRef idx="minor">
-            <a:schemeClr val="lt1"/>
-          </a:fontRef>
-        </p:style>
-        <p:txBody>
-          <a:bodyPr rtlCol="0" anchor="ctr"/>
-          <a:lstStyle/>
-          <a:p>
-            <a:pPr algn="ctr"/>
-          </a:p>
-        </p:txBody>
-      </p:sp>
-      <p:sp>
-        <p:nvSpPr>
-          <p:cNvPr id="3" name="Right Triangle 2"/>
-          <p:cNvSpPr/>
-          <p:nvPr/>
-        </p:nvSpPr>
-        <p:spPr>
-          <a:xfrm rot="16200000">
-            <a:off x="0" y="4846320"/>
-            <a:ext cx="1097280" cy="2011680"/>
-          </a:xfrm>
-          <a:prstGeom prst="rtTriangle">
-            <a:avLst/>
-          </a:prstGeom>
-          <a:solidFill>
-            <a:srgbClr val="0F766E"/>
-          </a:solidFill>
-          <a:ln>
-            <a:noFill/>
-          </a:ln>
-        </p:spPr>
-        <p:style>
-          <a:lnRef idx="1">
-            <a:schemeClr val="accent1"/>
-          </a:lnRef>
-          <a:fillRef idx="3">
-            <a:schemeClr val="accent1"/>
-          </a:fillRef>
-          <a:effectRef idx="2">
-            <a:schemeClr val="accent1"/>
-          </a:effectRef>
-          <a:fontRef idx="minor">
-            <a:schemeClr val="lt1"/>
-          </a:fontRef>
-        </p:style>
-        <p:txBody>
-          <a:bodyPr rtlCol="0" anchor="ctr"/>
-          <a:lstStyle/>
-          <a:p>
-            <a:pPr algn="ctr"/>
-          </a:p>
-        </p:txBody>
-      </p:sp>
-      <p:sp>
-        <p:nvSpPr>
-          <p:cNvPr id="4" name="TextBox 3"/>
+      </p:pic>
+      <p:sp>
+        <p:nvSpPr>
+          <p:cNvPr id="3" name="TextBox 2"/>
           <p:cNvSpPr txBox="1"/>
           <p:nvPr/>
         </p:nvSpPr>
         <p:spPr>
           <a:xfrm>
-            <a:off x="365760" y="274320"/>
-            <a:ext cx="1828800" cy="548640"/>
+            <a:off x="978408" y="329184"/>
+            <a:ext cx="9601200" cy="502920"/>
           </a:xfrm>
           <a:prstGeom prst="rect">
             <a:avLst/>
@@ -5163,35 +4553,35 @@
           <a:noFill/>
         </p:spPr>
         <p:txBody>
-          <a:bodyPr wrap="none">
+          <a:bodyPr wrap="square">
             <a:spAutoFit/>
           </a:bodyPr>
           <a:lstStyle/>
           <a:p>
             <a:pPr>
-              <a:defRPr sz="1800" b="1">
-                <a:solidFill>
-                  <a:srgbClr val="0F172A"/>
-                </a:solidFill>
-                <a:latin typeface="Arial"/>
-              </a:defRPr>
-            </a:pPr>
-            <a:r>
-              <a:t>Kmit</a:t>
-            </a:r>
-          </a:p>
-        </p:txBody>
-      </p:sp>
-      <p:sp>
-        <p:nvSpPr>
-          <p:cNvPr id="5" name="TextBox 4"/>
+              <a:defRPr sz="3200" b="1">
+                <a:solidFill>
+                  <a:srgbClr val="FF0000"/>
+                </a:solidFill>
+                <a:latin typeface="Arial"/>
+              </a:defRPr>
+            </a:pPr>
+            <a:r>
+              <a:t>CONTENTS</a:t>
+            </a:r>
+          </a:p>
+        </p:txBody>
+      </p:sp>
+      <p:sp>
+        <p:nvSpPr>
+          <p:cNvPr id="4" name="TextBox 3"/>
           <p:cNvSpPr txBox="1"/>
           <p:nvPr/>
         </p:nvSpPr>
         <p:spPr>
           <a:xfrm>
-            <a:off x="1097280" y="274320"/>
-            <a:ext cx="9601200" cy="731520"/>
+            <a:off x="1051560" y="1024128"/>
+            <a:ext cx="9601200" cy="5486400"/>
           </a:xfrm>
           <a:prstGeom prst="rect">
             <a:avLst/>
@@ -5199,60 +4589,37 @@
           <a:noFill/>
         </p:spPr>
         <p:txBody>
-          <a:bodyPr wrap="none">
+          <a:bodyPr wrap="square">
             <a:spAutoFit/>
           </a:bodyPr>
           <a:lstStyle/>
           <a:p>
             <a:pPr>
-              <a:defRPr sz="2600" b="1">
-                <a:solidFill>
-                  <a:srgbClr val="DC2626"/>
-                </a:solidFill>
-                <a:latin typeface="Arial"/>
-              </a:defRPr>
-            </a:pPr>
-            <a:r>
-              <a:t>CONTENTS</a:t>
-            </a:r>
-          </a:p>
-        </p:txBody>
-      </p:sp>
-      <p:sp>
-        <p:nvSpPr>
-          <p:cNvPr id="6" name="TextBox 5"/>
-          <p:cNvSpPr txBox="1"/>
-          <p:nvPr/>
-        </p:nvSpPr>
-        <p:spPr>
-          <a:xfrm>
-            <a:off x="1371600" y="1188720"/>
-            <a:ext cx="9144000" cy="5303520"/>
-          </a:xfrm>
-          <a:prstGeom prst="rect">
-            <a:avLst/>
-          </a:prstGeom>
-          <a:noFill/>
-        </p:spPr>
-        <p:txBody>
-          <a:bodyPr wrap="none">
-            <a:spAutoFit/>
-          </a:bodyPr>
-          <a:lstStyle/>
+              <a:defRPr sz="1800">
+                <a:solidFill>
+                  <a:srgbClr val="000000"/>
+                </a:solidFill>
+                <a:latin typeface="Arial"/>
+              </a:defRPr>
+            </a:pPr>
+            <a:r>
+              <a:t>1. Title Slide</a:t>
+            </a:r>
+          </a:p>
           <a:p>
             <a:pPr>
               <a:spcBef>
                 <a:spcPts val="400"/>
               </a:spcBef>
-              <a:defRPr sz="1300">
-                <a:solidFill>
-                  <a:srgbClr val="1E293B"/>
-                </a:solidFill>
-                <a:latin typeface="Arial"/>
-              </a:defRPr>
-            </a:pPr>
-            <a:r>
-              <a:t>1. Title Slide</a:t>
+              <a:defRPr sz="1800">
+                <a:solidFill>
+                  <a:srgbClr val="000000"/>
+                </a:solidFill>
+                <a:latin typeface="Arial"/>
+              </a:defRPr>
+            </a:pPr>
+            <a:r>
+              <a:t>2. Content</a:t>
             </a:r>
           </a:p>
           <a:p>
@@ -5260,15 +4627,15 @@
               <a:spcBef>
                 <a:spcPts val="400"/>
               </a:spcBef>
-              <a:defRPr sz="1300">
-                <a:solidFill>
-                  <a:srgbClr val="1E293B"/>
-                </a:solidFill>
-                <a:latin typeface="Arial"/>
-              </a:defRPr>
-            </a:pPr>
-            <a:r>
-              <a:t>2. Content</a:t>
+              <a:defRPr sz="1800">
+                <a:solidFill>
+                  <a:srgbClr val="000000"/>
+                </a:solidFill>
+                <a:latin typeface="Arial"/>
+              </a:defRPr>
+            </a:pPr>
+            <a:r>
+              <a:t>3. Introduction</a:t>
             </a:r>
           </a:p>
           <a:p>
@@ -5276,15 +4643,15 @@
               <a:spcBef>
                 <a:spcPts val="400"/>
               </a:spcBef>
-              <a:defRPr sz="1300">
-                <a:solidFill>
-                  <a:srgbClr val="1E293B"/>
-                </a:solidFill>
-                <a:latin typeface="Arial"/>
-              </a:defRPr>
-            </a:pPr>
-            <a:r>
-              <a:t>3. Introduction</a:t>
+              <a:defRPr sz="1800">
+                <a:solidFill>
+                  <a:srgbClr val="000000"/>
+                </a:solidFill>
+                <a:latin typeface="Arial"/>
+              </a:defRPr>
+            </a:pPr>
+            <a:r>
+              <a:t>4. Technology Used</a:t>
             </a:r>
           </a:p>
           <a:p>
@@ -5292,15 +4659,15 @@
               <a:spcBef>
                 <a:spcPts val="400"/>
               </a:spcBef>
-              <a:defRPr sz="1300">
-                <a:solidFill>
-                  <a:srgbClr val="1E293B"/>
-                </a:solidFill>
-                <a:latin typeface="Arial"/>
-              </a:defRPr>
-            </a:pPr>
-            <a:r>
-              <a:t>4. Technology Used</a:t>
+              <a:defRPr sz="1800">
+                <a:solidFill>
+                  <a:srgbClr val="000000"/>
+                </a:solidFill>
+                <a:latin typeface="Arial"/>
+              </a:defRPr>
+            </a:pPr>
+            <a:r>
+              <a:t>5. Base Paper / Research Reference</a:t>
             </a:r>
           </a:p>
           <a:p>
@@ -5308,15 +4675,15 @@
               <a:spcBef>
                 <a:spcPts val="400"/>
               </a:spcBef>
-              <a:defRPr sz="1300">
-                <a:solidFill>
-                  <a:srgbClr val="1E293B"/>
-                </a:solidFill>
-                <a:latin typeface="Arial"/>
-              </a:defRPr>
-            </a:pPr>
-            <a:r>
-              <a:t>5. Base Paper / Research Reference</a:t>
+              <a:defRPr sz="1800">
+                <a:solidFill>
+                  <a:srgbClr val="000000"/>
+                </a:solidFill>
+                <a:latin typeface="Arial"/>
+              </a:defRPr>
+            </a:pPr>
+            <a:r>
+              <a:t>6. Requirement</a:t>
             </a:r>
           </a:p>
           <a:p>
@@ -5324,15 +4691,15 @@
               <a:spcBef>
                 <a:spcPts val="400"/>
               </a:spcBef>
-              <a:defRPr sz="1300">
-                <a:solidFill>
-                  <a:srgbClr val="1E293B"/>
-                </a:solidFill>
-                <a:latin typeface="Arial"/>
-              </a:defRPr>
-            </a:pPr>
-            <a:r>
-              <a:t>6. Requirement</a:t>
+              <a:defRPr sz="1800">
+                <a:solidFill>
+                  <a:srgbClr val="000000"/>
+                </a:solidFill>
+                <a:latin typeface="Arial"/>
+              </a:defRPr>
+            </a:pPr>
+            <a:r>
+              <a:t>7. Design (System Architecture)</a:t>
             </a:r>
           </a:p>
           <a:p>
@@ -5340,15 +4707,15 @@
               <a:spcBef>
                 <a:spcPts val="400"/>
               </a:spcBef>
-              <a:defRPr sz="1300">
-                <a:solidFill>
-                  <a:srgbClr val="1E293B"/>
-                </a:solidFill>
-                <a:latin typeface="Arial"/>
-              </a:defRPr>
-            </a:pPr>
-            <a:r>
-              <a:t>7. Design (System Architecture)</a:t>
+              <a:defRPr sz="1800">
+                <a:solidFill>
+                  <a:srgbClr val="000000"/>
+                </a:solidFill>
+                <a:latin typeface="Arial"/>
+              </a:defRPr>
+            </a:pPr>
+            <a:r>
+              <a:t>8. Telemetry &amp; Conjunction Data Schema</a:t>
             </a:r>
           </a:p>
           <a:p>
@@ -5356,15 +4723,15 @@
               <a:spcBef>
                 <a:spcPts val="400"/>
               </a:spcBef>
-              <a:defRPr sz="1300">
-                <a:solidFill>
-                  <a:srgbClr val="1E293B"/>
-                </a:solidFill>
-                <a:latin typeface="Arial"/>
-              </a:defRPr>
-            </a:pPr>
-            <a:r>
-              <a:t>8. Telemetry &amp; Feature Architecture</a:t>
+              <a:defRPr sz="1800">
+                <a:solidFill>
+                  <a:srgbClr val="000000"/>
+                </a:solidFill>
+                <a:latin typeface="Arial"/>
+              </a:defRPr>
+            </a:pPr>
+            <a:r>
+              <a:t>9. Class &amp; Component Architecture</a:t>
             </a:r>
           </a:p>
           <a:p>
@@ -5372,15 +4739,15 @@
               <a:spcBef>
                 <a:spcPts val="400"/>
               </a:spcBef>
-              <a:defRPr sz="1300">
-                <a:solidFill>
-                  <a:srgbClr val="1E293B"/>
-                </a:solidFill>
-                <a:latin typeface="Arial"/>
-              </a:defRPr>
-            </a:pPr>
-            <a:r>
-              <a:t>9. Execution Flow &amp; Class Diagram</a:t>
+              <a:defRPr sz="1800">
+                <a:solidFill>
+                  <a:srgbClr val="000000"/>
+                </a:solidFill>
+                <a:latin typeface="Arial"/>
+              </a:defRPr>
+            </a:pPr>
+            <a:r>
+              <a:t>10. Development</a:t>
             </a:r>
           </a:p>
           <a:p>
@@ -5388,15 +4755,15 @@
               <a:spcBef>
                 <a:spcPts val="400"/>
               </a:spcBef>
-              <a:defRPr sz="1300">
-                <a:solidFill>
-                  <a:srgbClr val="1E293B"/>
-                </a:solidFill>
-                <a:latin typeface="Arial"/>
-              </a:defRPr>
-            </a:pPr>
-            <a:r>
-              <a:t>10. Development</a:t>
+              <a:defRPr sz="1800">
+                <a:solidFill>
+                  <a:srgbClr val="000000"/>
+                </a:solidFill>
+                <a:latin typeface="Arial"/>
+              </a:defRPr>
+            </a:pPr>
+            <a:r>
+              <a:t>11. Project Outcome</a:t>
             </a:r>
           </a:p>
           <a:p>
@@ -5404,15 +4771,15 @@
               <a:spcBef>
                 <a:spcPts val="400"/>
               </a:spcBef>
-              <a:defRPr sz="1300">
-                <a:solidFill>
-                  <a:srgbClr val="1E293B"/>
-                </a:solidFill>
-                <a:latin typeface="Arial"/>
-              </a:defRPr>
-            </a:pPr>
-            <a:r>
-              <a:t>11. Project Outcome</a:t>
+              <a:defRPr sz="1800">
+                <a:solidFill>
+                  <a:srgbClr val="000000"/>
+                </a:solidFill>
+                <a:latin typeface="Arial"/>
+              </a:defRPr>
+            </a:pPr>
+            <a:r>
+              <a:t>12. Conclusion</a:t>
             </a:r>
           </a:p>
           <a:p>
@@ -5420,25 +4787,9 @@
               <a:spcBef>
                 <a:spcPts val="400"/>
               </a:spcBef>
-              <a:defRPr sz="1300">
-                <a:solidFill>
-                  <a:srgbClr val="1E293B"/>
-                </a:solidFill>
-                <a:latin typeface="Arial"/>
-              </a:defRPr>
-            </a:pPr>
-            <a:r>
-              <a:t>12. Conclusion</a:t>
-            </a:r>
-          </a:p>
-          <a:p>
-            <a:pPr>
-              <a:spcBef>
-                <a:spcPts val="400"/>
-              </a:spcBef>
-              <a:defRPr sz="1300">
-                <a:solidFill>
-                  <a:srgbClr val="1E293B"/>
+              <a:defRPr sz="1800">
+                <a:solidFill>
+                  <a:srgbClr val="000000"/>
                 </a:solidFill>
                 <a:latin typeface="Arial"/>
               </a:defRPr>
@@ -5467,102 +4818,40 @@
         <p:nvPr/>
       </p:nvGrpSpPr>
       <p:grpSpPr/>
-      <p:sp>
-        <p:nvSpPr>
-          <p:cNvPr id="2" name="Right Triangle 1"/>
-          <p:cNvSpPr/>
+      <p:pic>
+        <p:nvPicPr>
+          <p:cNvPr id="2" name="Picture 1" descr="bg_content_slide.png"/>
+          <p:cNvPicPr>
+            <a:picLocks noChangeAspect="1"/>
+          </p:cNvPicPr>
           <p:nvPr/>
-        </p:nvSpPr>
+        </p:nvPicPr>
+        <p:blipFill>
+          <a:blip r:embed="rId2"/>
+          <a:stretch>
+            <a:fillRect/>
+          </a:stretch>
+        </p:blipFill>
         <p:spPr>
-          <a:xfrm rot="5400000">
-            <a:off x="10972800" y="0"/>
-            <a:ext cx="1218895" cy="2011680"/>
+          <a:xfrm>
+            <a:off x="0" y="0"/>
+            <a:ext cx="12191695" cy="6858000"/>
           </a:xfrm>
-          <a:prstGeom prst="rtTriangle">
+          <a:prstGeom prst="rect">
             <a:avLst/>
           </a:prstGeom>
-          <a:solidFill>
-            <a:srgbClr val="EA580C"/>
-          </a:solidFill>
-          <a:ln>
-            <a:noFill/>
-          </a:ln>
         </p:spPr>
-        <p:style>
-          <a:lnRef idx="1">
-            <a:schemeClr val="accent1"/>
-          </a:lnRef>
-          <a:fillRef idx="3">
-            <a:schemeClr val="accent1"/>
-          </a:fillRef>
-          <a:effectRef idx="2">
-            <a:schemeClr val="accent1"/>
-          </a:effectRef>
-          <a:fontRef idx="minor">
-            <a:schemeClr val="lt1"/>
-          </a:fontRef>
-        </p:style>
-        <p:txBody>
-          <a:bodyPr rtlCol="0" anchor="ctr"/>
-          <a:lstStyle/>
-          <a:p>
-            <a:pPr algn="ctr"/>
-          </a:p>
-        </p:txBody>
-      </p:sp>
-      <p:sp>
-        <p:nvSpPr>
-          <p:cNvPr id="3" name="Right Triangle 2"/>
-          <p:cNvSpPr/>
-          <p:nvPr/>
-        </p:nvSpPr>
-        <p:spPr>
-          <a:xfrm rot="16200000">
-            <a:off x="0" y="4846320"/>
-            <a:ext cx="1097280" cy="2011680"/>
-          </a:xfrm>
-          <a:prstGeom prst="rtTriangle">
-            <a:avLst/>
-          </a:prstGeom>
-          <a:solidFill>
-            <a:srgbClr val="0F766E"/>
-          </a:solidFill>
-          <a:ln>
-            <a:noFill/>
-          </a:ln>
-        </p:spPr>
-        <p:style>
-          <a:lnRef idx="1">
-            <a:schemeClr val="accent1"/>
-          </a:lnRef>
-          <a:fillRef idx="3">
-            <a:schemeClr val="accent1"/>
-          </a:fillRef>
-          <a:effectRef idx="2">
-            <a:schemeClr val="accent1"/>
-          </a:effectRef>
-          <a:fontRef idx="minor">
-            <a:schemeClr val="lt1"/>
-          </a:fontRef>
-        </p:style>
-        <p:txBody>
-          <a:bodyPr rtlCol="0" anchor="ctr"/>
-          <a:lstStyle/>
-          <a:p>
-            <a:pPr algn="ctr"/>
-          </a:p>
-        </p:txBody>
-      </p:sp>
-      <p:sp>
-        <p:nvSpPr>
-          <p:cNvPr id="4" name="TextBox 3"/>
+      </p:pic>
+      <p:sp>
+        <p:nvSpPr>
+          <p:cNvPr id="3" name="TextBox 2"/>
           <p:cNvSpPr txBox="1"/>
           <p:nvPr/>
         </p:nvSpPr>
         <p:spPr>
           <a:xfrm>
-            <a:off x="365760" y="274320"/>
-            <a:ext cx="1828800" cy="548640"/>
+            <a:off x="978408" y="329184"/>
+            <a:ext cx="9601200" cy="502920"/>
           </a:xfrm>
           <a:prstGeom prst="rect">
             <a:avLst/>
@@ -5570,70 +4859,34 @@
           <a:noFill/>
         </p:spPr>
         <p:txBody>
-          <a:bodyPr wrap="none">
+          <a:bodyPr wrap="square">
             <a:spAutoFit/>
           </a:bodyPr>
           <a:lstStyle/>
           <a:p>
             <a:pPr>
-              <a:defRPr sz="1800" b="1">
-                <a:solidFill>
-                  <a:srgbClr val="0F172A"/>
-                </a:solidFill>
-                <a:latin typeface="Arial"/>
-              </a:defRPr>
-            </a:pPr>
-            <a:r>
-              <a:t>Kmit</a:t>
-            </a:r>
-          </a:p>
-        </p:txBody>
-      </p:sp>
-      <p:sp>
-        <p:nvSpPr>
-          <p:cNvPr id="5" name="TextBox 4"/>
+              <a:defRPr sz="3200" b="1">
+                <a:solidFill>
+                  <a:srgbClr val="FF0000"/>
+                </a:solidFill>
+                <a:latin typeface="Arial"/>
+              </a:defRPr>
+            </a:pPr>
+            <a:r>
+              <a:t>INTRODUCTION</a:t>
+            </a:r>
+          </a:p>
+        </p:txBody>
+      </p:sp>
+      <p:sp>
+        <p:nvSpPr>
+          <p:cNvPr id="4" name="TextBox 3"/>
           <p:cNvSpPr txBox="1"/>
           <p:nvPr/>
         </p:nvSpPr>
         <p:spPr>
           <a:xfrm>
-            <a:off x="1097280" y="274320"/>
-            <a:ext cx="9601200" cy="731520"/>
-          </a:xfrm>
-          <a:prstGeom prst="rect">
-            <a:avLst/>
-          </a:prstGeom>
-          <a:noFill/>
-        </p:spPr>
-        <p:txBody>
-          <a:bodyPr wrap="none">
-            <a:spAutoFit/>
-          </a:bodyPr>
-          <a:lstStyle/>
-          <a:p>
-            <a:pPr>
-              <a:defRPr sz="2600" b="1">
-                <a:solidFill>
-                  <a:srgbClr val="DC2626"/>
-                </a:solidFill>
-                <a:latin typeface="Arial"/>
-              </a:defRPr>
-            </a:pPr>
-            <a:r>
-              <a:t>INTRODUCTION</a:t>
-            </a:r>
-          </a:p>
-        </p:txBody>
-      </p:sp>
-      <p:sp>
-        <p:nvSpPr>
-          <p:cNvPr id="6" name="TextBox 5"/>
-          <p:cNvSpPr txBox="1"/>
-          <p:nvPr/>
-        </p:nvSpPr>
-        <p:spPr>
-          <a:xfrm>
-            <a:off x="1097280" y="1188720"/>
+            <a:off x="978408" y="1097280"/>
             <a:ext cx="10058400" cy="5303520"/>
           </a:xfrm>
           <a:prstGeom prst="rect">
@@ -5648,9 +4901,9 @@
           <a:lstStyle/>
           <a:p>
             <a:pPr>
-              <a:defRPr sz="1400" b="1">
-                <a:solidFill>
-                  <a:srgbClr val="1E293B"/>
+              <a:defRPr sz="2000" b="1">
+                <a:solidFill>
+                  <a:srgbClr val="000000"/>
                 </a:solidFill>
                 <a:latin typeface="Arial"/>
               </a:defRPr>
@@ -5664,15 +4917,15 @@
               <a:spcBef>
                 <a:spcPts val="300"/>
               </a:spcBef>
-              <a:defRPr sz="1100">
-                <a:solidFill>
-                  <a:srgbClr val="475569"/>
-                </a:solidFill>
-                <a:latin typeface="Arial"/>
-              </a:defRPr>
-            </a:pPr>
-            <a:r>
-              <a:t>•  Over 36,000 tracked debris objects and mega-constellations create thousands of close orbital conjunctions weekly in Low Earth Orbit (LEO).</a:t>
+              <a:defRPr sz="1550">
+                <a:solidFill>
+                  <a:srgbClr val="000000"/>
+                </a:solidFill>
+                <a:latin typeface="Arial"/>
+              </a:defRPr>
+            </a:pPr>
+            <a:r>
+              <a:t>•  Over 36,000 tracked debris objects and constellations create thousands of close conjunctions weekly in LEO.</a:t>
             </a:r>
           </a:p>
           <a:p>
@@ -5680,15 +4933,15 @@
               <a:spcBef>
                 <a:spcPts val="300"/>
               </a:spcBef>
-              <a:defRPr sz="1100">
-                <a:solidFill>
-                  <a:srgbClr val="475569"/>
-                </a:solidFill>
-                <a:latin typeface="Arial"/>
-              </a:defRPr>
-            </a:pPr>
-            <a:r>
-              <a:t>•  Missing a real collision event (False Negative) leads to permanent spacecraft destruction and runaway orbital debris cascading (Kessler syndrome).</a:t>
+              <a:defRPr sz="1550">
+                <a:solidFill>
+                  <a:srgbClr val="000000"/>
+                </a:solidFill>
+                <a:latin typeface="Arial"/>
+              </a:defRPr>
+            </a:pPr>
+            <a:r>
+              <a:t>•  Missing a real collision event (False Negative) leads to permanent satellite loss and cascading Kessler syndrome.</a:t>
             </a:r>
           </a:p>
           <a:p>
@@ -5696,25 +4949,25 @@
               <a:spcBef>
                 <a:spcPts val="300"/>
               </a:spcBef>
-              <a:defRPr sz="1100">
-                <a:solidFill>
-                  <a:srgbClr val="475569"/>
-                </a:solidFill>
-                <a:latin typeface="Arial"/>
-              </a:defRPr>
-            </a:pPr>
-            <a:r>
-              <a:t>•  Current manual screening of Conjunction Data Messages (CDMs) is time-consuming and vulnerable to human fatigue under high alert volumes.</a:t>
-            </a:r>
-          </a:p>
-          <a:p>
-            <a:pPr>
-              <a:spcBef>
-                <a:spcPts val="800"/>
-              </a:spcBef>
-              <a:defRPr sz="1400" b="1">
-                <a:solidFill>
-                  <a:srgbClr val="1E293B"/>
+              <a:defRPr sz="1550">
+                <a:solidFill>
+                  <a:srgbClr val="000000"/>
+                </a:solidFill>
+                <a:latin typeface="Arial"/>
+              </a:defRPr>
+            </a:pPr>
+            <a:r>
+              <a:t>•  Conventional manual screening of Conjunction Data Messages (CDMs) is slow, fatigue-prone, and unscalable.</a:t>
+            </a:r>
+          </a:p>
+          <a:p>
+            <a:pPr>
+              <a:spcBef>
+                <a:spcPts val="1000"/>
+              </a:spcBef>
+              <a:defRPr sz="2000" b="1">
+                <a:solidFill>
+                  <a:srgbClr val="000000"/>
                 </a:solidFill>
                 <a:latin typeface="Arial"/>
               </a:defRPr>
@@ -5728,9 +4981,9 @@
               <a:spcBef>
                 <a:spcPts val="300"/>
               </a:spcBef>
-              <a:defRPr sz="1100">
-                <a:solidFill>
-                  <a:srgbClr val="475569"/>
+              <a:defRPr sz="1550">
+                <a:solidFill>
+                  <a:srgbClr val="000000"/>
                 </a:solidFill>
                 <a:latin typeface="Arial"/>
               </a:defRPr>
@@ -5744,15 +4997,15 @@
               <a:spcBef>
                 <a:spcPts val="300"/>
               </a:spcBef>
-              <a:defRPr sz="1100">
-                <a:solidFill>
-                  <a:srgbClr val="475569"/>
-                </a:solidFill>
-                <a:latin typeface="Arial"/>
-              </a:defRPr>
-            </a:pPr>
-            <a:r>
-              <a:t>•  Ingest standard multi-pass CDMs to predict collision probability log10(Pc) with high precision and actionable early warning.</a:t>
+              <a:defRPr sz="1550">
+                <a:solidFill>
+                  <a:srgbClr val="000000"/>
+                </a:solidFill>
+                <a:latin typeface="Arial"/>
+              </a:defRPr>
+            </a:pPr>
+            <a:r>
+              <a:t>•  Predict collision probability log10(Pc) with high precision and actionable early warning across multi-pass CDMs.</a:t>
             </a:r>
           </a:p>
           <a:p>
@@ -5760,9 +5013,9 @@
               <a:spcBef>
                 <a:spcPts val="300"/>
               </a:spcBef>
-              <a:defRPr sz="1100">
-                <a:solidFill>
-                  <a:srgbClr val="475569"/>
+              <a:defRPr sz="1550">
+                <a:solidFill>
+                  <a:srgbClr val="000000"/>
                 </a:solidFill>
                 <a:latin typeface="Arial"/>
               </a:defRPr>
@@ -5774,11 +5027,11 @@
           <a:p>
             <a:pPr>
               <a:spcBef>
-                <a:spcPts val="800"/>
-              </a:spcBef>
-              <a:defRPr sz="1400" b="1">
-                <a:solidFill>
-                  <a:srgbClr val="1E293B"/>
+                <a:spcPts val="1000"/>
+              </a:spcBef>
+              <a:defRPr sz="2000" b="1">
+                <a:solidFill>
+                  <a:srgbClr val="000000"/>
                 </a:solidFill>
                 <a:latin typeface="Arial"/>
               </a:defRPr>
@@ -5792,9 +5045,9 @@
               <a:spcBef>
                 <a:spcPts val="300"/>
               </a:spcBef>
-              <a:defRPr sz="1100">
-                <a:solidFill>
-                  <a:srgbClr val="475569"/>
+              <a:defRPr sz="1550">
+                <a:solidFill>
+                  <a:srgbClr val="000000"/>
                 </a:solidFill>
                 <a:latin typeface="Arial"/>
               </a:defRPr>
@@ -5808,9 +5061,9 @@
               <a:spcBef>
                 <a:spcPts val="300"/>
               </a:spcBef>
-              <a:defRPr sz="1100">
-                <a:solidFill>
-                  <a:srgbClr val="475569"/>
+              <a:defRPr sz="1550">
+                <a:solidFill>
+                  <a:srgbClr val="000000"/>
                 </a:solidFill>
                 <a:latin typeface="Arial"/>
               </a:defRPr>
@@ -5824,9 +5077,9 @@
               <a:spcBef>
                 <a:spcPts val="300"/>
               </a:spcBef>
-              <a:defRPr sz="1100">
-                <a:solidFill>
-                  <a:srgbClr val="475569"/>
+              <a:defRPr sz="1550">
+                <a:solidFill>
+                  <a:srgbClr val="000000"/>
                 </a:solidFill>
                 <a:latin typeface="Arial"/>
               </a:defRPr>
@@ -5840,15 +5093,15 @@
               <a:spcBef>
                 <a:spcPts val="300"/>
               </a:spcBef>
-              <a:defRPr sz="1100">
-                <a:solidFill>
-                  <a:srgbClr val="475569"/>
-                </a:solidFill>
-                <a:latin typeface="Arial"/>
-              </a:defRPr>
-            </a:pPr>
-            <a:r>
-              <a:t>•  Enables automated triage and real-time 3D orbital encounter screening.</a:t>
+              <a:defRPr sz="1550">
+                <a:solidFill>
+                  <a:srgbClr val="000000"/>
+                </a:solidFill>
+                <a:latin typeface="Arial"/>
+              </a:defRPr>
+            </a:pPr>
+            <a:r>
+              <a:t>•  Enables automated multi-tier triage and real-time 3D orbital encounter screening.</a:t>
             </a:r>
           </a:p>
         </p:txBody>
@@ -5871,102 +5124,40 @@
         <p:nvPr/>
       </p:nvGrpSpPr>
       <p:grpSpPr/>
-      <p:sp>
-        <p:nvSpPr>
-          <p:cNvPr id="2" name="Right Triangle 1"/>
-          <p:cNvSpPr/>
+      <p:pic>
+        <p:nvPicPr>
+          <p:cNvPr id="2" name="Picture 1" descr="bg_content_slide.png"/>
+          <p:cNvPicPr>
+            <a:picLocks noChangeAspect="1"/>
+          </p:cNvPicPr>
           <p:nvPr/>
-        </p:nvSpPr>
+        </p:nvPicPr>
+        <p:blipFill>
+          <a:blip r:embed="rId2"/>
+          <a:stretch>
+            <a:fillRect/>
+          </a:stretch>
+        </p:blipFill>
         <p:spPr>
-          <a:xfrm rot="5400000">
-            <a:off x="10972800" y="0"/>
-            <a:ext cx="1218895" cy="2011680"/>
+          <a:xfrm>
+            <a:off x="0" y="0"/>
+            <a:ext cx="12191695" cy="6858000"/>
           </a:xfrm>
-          <a:prstGeom prst="rtTriangle">
+          <a:prstGeom prst="rect">
             <a:avLst/>
           </a:prstGeom>
-          <a:solidFill>
-            <a:srgbClr val="EA580C"/>
-          </a:solidFill>
-          <a:ln>
-            <a:noFill/>
-          </a:ln>
         </p:spPr>
-        <p:style>
-          <a:lnRef idx="1">
-            <a:schemeClr val="accent1"/>
-          </a:lnRef>
-          <a:fillRef idx="3">
-            <a:schemeClr val="accent1"/>
-          </a:fillRef>
-          <a:effectRef idx="2">
-            <a:schemeClr val="accent1"/>
-          </a:effectRef>
-          <a:fontRef idx="minor">
-            <a:schemeClr val="lt1"/>
-          </a:fontRef>
-        </p:style>
-        <p:txBody>
-          <a:bodyPr rtlCol="0" anchor="ctr"/>
-          <a:lstStyle/>
-          <a:p>
-            <a:pPr algn="ctr"/>
-          </a:p>
-        </p:txBody>
-      </p:sp>
-      <p:sp>
-        <p:nvSpPr>
-          <p:cNvPr id="3" name="Right Triangle 2"/>
-          <p:cNvSpPr/>
-          <p:nvPr/>
-        </p:nvSpPr>
-        <p:spPr>
-          <a:xfrm rot="16200000">
-            <a:off x="0" y="4846320"/>
-            <a:ext cx="1097280" cy="2011680"/>
-          </a:xfrm>
-          <a:prstGeom prst="rtTriangle">
-            <a:avLst/>
-          </a:prstGeom>
-          <a:solidFill>
-            <a:srgbClr val="0F766E"/>
-          </a:solidFill>
-          <a:ln>
-            <a:noFill/>
-          </a:ln>
-        </p:spPr>
-        <p:style>
-          <a:lnRef idx="1">
-            <a:schemeClr val="accent1"/>
-          </a:lnRef>
-          <a:fillRef idx="3">
-            <a:schemeClr val="accent1"/>
-          </a:fillRef>
-          <a:effectRef idx="2">
-            <a:schemeClr val="accent1"/>
-          </a:effectRef>
-          <a:fontRef idx="minor">
-            <a:schemeClr val="lt1"/>
-          </a:fontRef>
-        </p:style>
-        <p:txBody>
-          <a:bodyPr rtlCol="0" anchor="ctr"/>
-          <a:lstStyle/>
-          <a:p>
-            <a:pPr algn="ctr"/>
-          </a:p>
-        </p:txBody>
-      </p:sp>
-      <p:sp>
-        <p:nvSpPr>
-          <p:cNvPr id="4" name="TextBox 3"/>
+      </p:pic>
+      <p:sp>
+        <p:nvSpPr>
+          <p:cNvPr id="3" name="TextBox 2"/>
           <p:cNvSpPr txBox="1"/>
           <p:nvPr/>
         </p:nvSpPr>
         <p:spPr>
           <a:xfrm>
-            <a:off x="365760" y="274320"/>
-            <a:ext cx="1828800" cy="548640"/>
+            <a:off x="978408" y="329184"/>
+            <a:ext cx="9601200" cy="502920"/>
           </a:xfrm>
           <a:prstGeom prst="rect">
             <a:avLst/>
@@ -5974,70 +5165,34 @@
           <a:noFill/>
         </p:spPr>
         <p:txBody>
-          <a:bodyPr wrap="none">
+          <a:bodyPr wrap="square">
             <a:spAutoFit/>
           </a:bodyPr>
           <a:lstStyle/>
           <a:p>
             <a:pPr>
-              <a:defRPr sz="1800" b="1">
-                <a:solidFill>
-                  <a:srgbClr val="0F172A"/>
-                </a:solidFill>
-                <a:latin typeface="Arial"/>
-              </a:defRPr>
-            </a:pPr>
-            <a:r>
-              <a:t>Kmit</a:t>
-            </a:r>
-          </a:p>
-        </p:txBody>
-      </p:sp>
-      <p:sp>
-        <p:nvSpPr>
-          <p:cNvPr id="5" name="TextBox 4"/>
+              <a:defRPr sz="3200" b="1">
+                <a:solidFill>
+                  <a:srgbClr val="FF0000"/>
+                </a:solidFill>
+                <a:latin typeface="Arial"/>
+              </a:defRPr>
+            </a:pPr>
+            <a:r>
+              <a:t>TECHNOLOGY USED</a:t>
+            </a:r>
+          </a:p>
+        </p:txBody>
+      </p:sp>
+      <p:sp>
+        <p:nvSpPr>
+          <p:cNvPr id="4" name="TextBox 3"/>
           <p:cNvSpPr txBox="1"/>
           <p:nvPr/>
         </p:nvSpPr>
         <p:spPr>
           <a:xfrm>
-            <a:off x="1097280" y="274320"/>
-            <a:ext cx="9601200" cy="731520"/>
-          </a:xfrm>
-          <a:prstGeom prst="rect">
-            <a:avLst/>
-          </a:prstGeom>
-          <a:noFill/>
-        </p:spPr>
-        <p:txBody>
-          <a:bodyPr wrap="none">
-            <a:spAutoFit/>
-          </a:bodyPr>
-          <a:lstStyle/>
-          <a:p>
-            <a:pPr>
-              <a:defRPr sz="2600" b="1">
-                <a:solidFill>
-                  <a:srgbClr val="DC2626"/>
-                </a:solidFill>
-                <a:latin typeface="Arial"/>
-              </a:defRPr>
-            </a:pPr>
-            <a:r>
-              <a:t>TECHNOLOGY USED</a:t>
-            </a:r>
-          </a:p>
-        </p:txBody>
-      </p:sp>
-      <p:sp>
-        <p:nvSpPr>
-          <p:cNvPr id="6" name="TextBox 5"/>
-          <p:cNvSpPr txBox="1"/>
-          <p:nvPr/>
-        </p:nvSpPr>
-        <p:spPr>
-          <a:xfrm>
-            <a:off x="1097280" y="1188720"/>
+            <a:off x="1051560" y="1097280"/>
             <a:ext cx="10058400" cy="5303520"/>
           </a:xfrm>
           <a:prstGeom prst="rect">
@@ -6052,9 +5207,9 @@
           <a:lstStyle/>
           <a:p>
             <a:pPr>
-              <a:defRPr sz="1400" b="1">
-                <a:solidFill>
-                  <a:srgbClr val="1E293B"/>
+              <a:defRPr sz="2000" b="1">
+                <a:solidFill>
+                  <a:srgbClr val="000000"/>
                 </a:solidFill>
                 <a:latin typeface="Arial"/>
               </a:defRPr>
@@ -6068,9 +5223,9 @@
               <a:spcBef>
                 <a:spcPts val="300"/>
               </a:spcBef>
-              <a:defRPr sz="1100">
-                <a:solidFill>
-                  <a:srgbClr val="475569"/>
+              <a:defRPr sz="1550">
+                <a:solidFill>
+                  <a:srgbClr val="000000"/>
                 </a:solidFill>
                 <a:latin typeface="Arial"/>
               </a:defRPr>
@@ -6084,9 +5239,9 @@
               <a:spcBef>
                 <a:spcPts val="300"/>
               </a:spcBef>
-              <a:defRPr sz="1100">
-                <a:solidFill>
-                  <a:srgbClr val="475569"/>
+              <a:defRPr sz="1550">
+                <a:solidFill>
+                  <a:srgbClr val="000000"/>
                 </a:solidFill>
                 <a:latin typeface="Arial"/>
               </a:defRPr>
@@ -6100,9 +5255,9 @@
               <a:spcBef>
                 <a:spcPts val="300"/>
               </a:spcBef>
-              <a:defRPr sz="1100">
-                <a:solidFill>
-                  <a:srgbClr val="475569"/>
+              <a:defRPr sz="1550">
+                <a:solidFill>
+                  <a:srgbClr val="000000"/>
                 </a:solidFill>
                 <a:latin typeface="Arial"/>
               </a:defRPr>
@@ -6116,9 +5271,9 @@
               <a:spcBef>
                 <a:spcPts val="300"/>
               </a:spcBef>
-              <a:defRPr sz="1100">
-                <a:solidFill>
-                  <a:srgbClr val="475569"/>
+              <a:defRPr sz="1550">
+                <a:solidFill>
+                  <a:srgbClr val="000000"/>
                 </a:solidFill>
                 <a:latin typeface="Arial"/>
               </a:defRPr>
@@ -6132,9 +5287,9 @@
               <a:spcBef>
                 <a:spcPts val="300"/>
               </a:spcBef>
-              <a:defRPr sz="1100">
-                <a:solidFill>
-                  <a:srgbClr val="475569"/>
+              <a:defRPr sz="1550">
+                <a:solidFill>
+                  <a:srgbClr val="000000"/>
                 </a:solidFill>
                 <a:latin typeface="Arial"/>
               </a:defRPr>
@@ -6148,9 +5303,9 @@
               <a:spcBef>
                 <a:spcPts val="300"/>
               </a:spcBef>
-              <a:defRPr sz="1100">
-                <a:solidFill>
-                  <a:srgbClr val="475569"/>
+              <a:defRPr sz="1550">
+                <a:solidFill>
+                  <a:srgbClr val="000000"/>
                 </a:solidFill>
                 <a:latin typeface="Arial"/>
               </a:defRPr>
@@ -6164,9 +5319,9 @@
               <a:spcBef>
                 <a:spcPts val="300"/>
               </a:spcBef>
-              <a:defRPr sz="1100">
-                <a:solidFill>
-                  <a:srgbClr val="475569"/>
+              <a:defRPr sz="1550">
+                <a:solidFill>
+                  <a:srgbClr val="000000"/>
                 </a:solidFill>
                 <a:latin typeface="Arial"/>
               </a:defRPr>
@@ -6180,9 +5335,9 @@
               <a:spcBef>
                 <a:spcPts val="300"/>
               </a:spcBef>
-              <a:defRPr sz="1100">
-                <a:solidFill>
-                  <a:srgbClr val="475569"/>
+              <a:defRPr sz="1550">
+                <a:solidFill>
+                  <a:srgbClr val="000000"/>
                 </a:solidFill>
                 <a:latin typeface="Arial"/>
               </a:defRPr>
@@ -6196,9 +5351,9 @@
               <a:spcBef>
                 <a:spcPts val="300"/>
               </a:spcBef>
-              <a:defRPr sz="1100">
-                <a:solidFill>
-                  <a:srgbClr val="475569"/>
+              <a:defRPr sz="1550">
+                <a:solidFill>
+                  <a:srgbClr val="000000"/>
                 </a:solidFill>
                 <a:latin typeface="Arial"/>
               </a:defRPr>
@@ -6210,11 +5365,11 @@
           <a:p>
             <a:pPr>
               <a:spcBef>
-                <a:spcPts val="800"/>
-              </a:spcBef>
-              <a:defRPr sz="1400" b="1">
-                <a:solidFill>
-                  <a:srgbClr val="1E293B"/>
+                <a:spcPts val="1200"/>
+              </a:spcBef>
+              <a:defRPr sz="2000" b="1">
+                <a:solidFill>
+                  <a:srgbClr val="000000"/>
                 </a:solidFill>
                 <a:latin typeface="Arial"/>
               </a:defRPr>
@@ -6228,15 +5383,15 @@
               <a:spcBef>
                 <a:spcPts val="300"/>
               </a:spcBef>
-              <a:defRPr sz="1100">
-                <a:solidFill>
-                  <a:srgbClr val="475569"/>
-                </a:solidFill>
-                <a:latin typeface="Arial"/>
-              </a:defRPr>
-            </a:pPr>
-            <a:r>
-              <a:t>•  "Machine Learning Approaches for Spacecraft Collision Avoidance Challenge"</a:t>
+              <a:defRPr sz="1650">
+                <a:solidFill>
+                  <a:srgbClr val="000000"/>
+                </a:solidFill>
+                <a:latin typeface="Arial"/>
+              </a:defRPr>
+            </a:pPr>
+            <a:r>
+              <a:t>“Machine Learning Approaches for Spacecraft Collision Avoidance Challenge”</a:t>
             </a:r>
           </a:p>
           <a:p>
@@ -6244,15 +5399,15 @@
               <a:spcBef>
                 <a:spcPts val="300"/>
               </a:spcBef>
-              <a:defRPr sz="1100">
-                <a:solidFill>
-                  <a:srgbClr val="475569"/>
-                </a:solidFill>
-                <a:latin typeface="Arial"/>
-              </a:defRPr>
-            </a:pPr>
-            <a:r>
-              <a:t>•  Authors: Kalyanaraman et al. (EPJ Web of Conferences, 2026) &amp; Uriot et al. (ESA ACT, 2020)</a:t>
+              <a:defRPr sz="1550">
+                <a:solidFill>
+                  <a:srgbClr val="000000"/>
+                </a:solidFill>
+                <a:latin typeface="Arial"/>
+              </a:defRPr>
+            </a:pPr>
+            <a:r>
+              <a:t>Authors: Kalyanaraman et al. (EPJ Web of Conferences, 2026) &amp; Uriot et al. (ESA Advanced Concepts Team)</a:t>
             </a:r>
           </a:p>
         </p:txBody>
@@ -6275,102 +5430,40 @@
         <p:nvPr/>
       </p:nvGrpSpPr>
       <p:grpSpPr/>
-      <p:sp>
-        <p:nvSpPr>
-          <p:cNvPr id="2" name="Right Triangle 1"/>
-          <p:cNvSpPr/>
+      <p:pic>
+        <p:nvPicPr>
+          <p:cNvPr id="2" name="Picture 1" descr="bg_content_slide.png"/>
+          <p:cNvPicPr>
+            <a:picLocks noChangeAspect="1"/>
+          </p:cNvPicPr>
           <p:nvPr/>
-        </p:nvSpPr>
+        </p:nvPicPr>
+        <p:blipFill>
+          <a:blip r:embed="rId2"/>
+          <a:stretch>
+            <a:fillRect/>
+          </a:stretch>
+        </p:blipFill>
         <p:spPr>
-          <a:xfrm rot="5400000">
-            <a:off x="10972800" y="0"/>
-            <a:ext cx="1218895" cy="2011680"/>
+          <a:xfrm>
+            <a:off x="0" y="0"/>
+            <a:ext cx="12191695" cy="6858000"/>
           </a:xfrm>
-          <a:prstGeom prst="rtTriangle">
+          <a:prstGeom prst="rect">
             <a:avLst/>
           </a:prstGeom>
-          <a:solidFill>
-            <a:srgbClr val="EA580C"/>
-          </a:solidFill>
-          <a:ln>
-            <a:noFill/>
-          </a:ln>
         </p:spPr>
-        <p:style>
-          <a:lnRef idx="1">
-            <a:schemeClr val="accent1"/>
-          </a:lnRef>
-          <a:fillRef idx="3">
-            <a:schemeClr val="accent1"/>
-          </a:fillRef>
-          <a:effectRef idx="2">
-            <a:schemeClr val="accent1"/>
-          </a:effectRef>
-          <a:fontRef idx="minor">
-            <a:schemeClr val="lt1"/>
-          </a:fontRef>
-        </p:style>
-        <p:txBody>
-          <a:bodyPr rtlCol="0" anchor="ctr"/>
-          <a:lstStyle/>
-          <a:p>
-            <a:pPr algn="ctr"/>
-          </a:p>
-        </p:txBody>
-      </p:sp>
-      <p:sp>
-        <p:nvSpPr>
-          <p:cNvPr id="3" name="Right Triangle 2"/>
-          <p:cNvSpPr/>
-          <p:nvPr/>
-        </p:nvSpPr>
-        <p:spPr>
-          <a:xfrm rot="16200000">
-            <a:off x="0" y="4846320"/>
-            <a:ext cx="1097280" cy="2011680"/>
-          </a:xfrm>
-          <a:prstGeom prst="rtTriangle">
-            <a:avLst/>
-          </a:prstGeom>
-          <a:solidFill>
-            <a:srgbClr val="0F766E"/>
-          </a:solidFill>
-          <a:ln>
-            <a:noFill/>
-          </a:ln>
-        </p:spPr>
-        <p:style>
-          <a:lnRef idx="1">
-            <a:schemeClr val="accent1"/>
-          </a:lnRef>
-          <a:fillRef idx="3">
-            <a:schemeClr val="accent1"/>
-          </a:fillRef>
-          <a:effectRef idx="2">
-            <a:schemeClr val="accent1"/>
-          </a:effectRef>
-          <a:fontRef idx="minor">
-            <a:schemeClr val="lt1"/>
-          </a:fontRef>
-        </p:style>
-        <p:txBody>
-          <a:bodyPr rtlCol="0" anchor="ctr"/>
-          <a:lstStyle/>
-          <a:p>
-            <a:pPr algn="ctr"/>
-          </a:p>
-        </p:txBody>
-      </p:sp>
-      <p:sp>
-        <p:nvSpPr>
-          <p:cNvPr id="4" name="TextBox 3"/>
+      </p:pic>
+      <p:sp>
+        <p:nvSpPr>
+          <p:cNvPr id="3" name="TextBox 2"/>
           <p:cNvSpPr txBox="1"/>
           <p:nvPr/>
         </p:nvSpPr>
         <p:spPr>
           <a:xfrm>
-            <a:off x="365760" y="274320"/>
-            <a:ext cx="1828800" cy="548640"/>
+            <a:off x="978408" y="329184"/>
+            <a:ext cx="9601200" cy="502920"/>
           </a:xfrm>
           <a:prstGeom prst="rect">
             <a:avLst/>
@@ -6378,35 +5471,35 @@
           <a:noFill/>
         </p:spPr>
         <p:txBody>
-          <a:bodyPr wrap="none">
+          <a:bodyPr wrap="square">
             <a:spAutoFit/>
           </a:bodyPr>
           <a:lstStyle/>
           <a:p>
             <a:pPr>
-              <a:defRPr sz="1800" b="1">
-                <a:solidFill>
-                  <a:srgbClr val="0F172A"/>
-                </a:solidFill>
-                <a:latin typeface="Arial"/>
-              </a:defRPr>
-            </a:pPr>
-            <a:r>
-              <a:t>Kmit</a:t>
-            </a:r>
-          </a:p>
-        </p:txBody>
-      </p:sp>
-      <p:sp>
-        <p:nvSpPr>
-          <p:cNvPr id="5" name="TextBox 4"/>
+              <a:defRPr sz="3200" b="1">
+                <a:solidFill>
+                  <a:srgbClr val="FF0000"/>
+                </a:solidFill>
+                <a:latin typeface="Arial"/>
+              </a:defRPr>
+            </a:pPr>
+            <a:r>
+              <a:t>BASE PAPER / RESEARCH REFERENCE</a:t>
+            </a:r>
+          </a:p>
+        </p:txBody>
+      </p:sp>
+      <p:sp>
+        <p:nvSpPr>
+          <p:cNvPr id="4" name="TextBox 3"/>
           <p:cNvSpPr txBox="1"/>
           <p:nvPr/>
         </p:nvSpPr>
         <p:spPr>
           <a:xfrm>
-            <a:off x="1097280" y="274320"/>
-            <a:ext cx="9601200" cy="731520"/>
+            <a:off x="1078992" y="1097280"/>
+            <a:ext cx="10058400" cy="1554480"/>
           </a:xfrm>
           <a:prstGeom prst="rect">
             <a:avLst/>
@@ -6414,35 +5507,83 @@
           <a:noFill/>
         </p:spPr>
         <p:txBody>
-          <a:bodyPr wrap="none">
+          <a:bodyPr wrap="square">
             <a:spAutoFit/>
           </a:bodyPr>
           <a:lstStyle/>
           <a:p>
             <a:pPr>
-              <a:defRPr sz="2600" b="1">
-                <a:solidFill>
-                  <a:srgbClr val="DC2626"/>
-                </a:solidFill>
-                <a:latin typeface="Arial"/>
-              </a:defRPr>
-            </a:pPr>
-            <a:r>
-              <a:t>BASE PAPER / RESEARCH REFERENCE</a:t>
-            </a:r>
-          </a:p>
-        </p:txBody>
-      </p:sp>
-      <p:sp>
-        <p:nvSpPr>
-          <p:cNvPr id="6" name="TextBox 5"/>
+              <a:defRPr sz="2000" b="1">
+                <a:solidFill>
+                  <a:srgbClr val="000000"/>
+                </a:solidFill>
+                <a:latin typeface="Arial"/>
+              </a:defRPr>
+            </a:pPr>
+            <a:r>
+              <a:t>Paper Title:</a:t>
+            </a:r>
+          </a:p>
+          <a:p>
+            <a:pPr>
+              <a:spcBef>
+                <a:spcPts val="200"/>
+              </a:spcBef>
+              <a:defRPr sz="1750">
+                <a:solidFill>
+                  <a:srgbClr val="000000"/>
+                </a:solidFill>
+                <a:latin typeface="Arial"/>
+              </a:defRPr>
+            </a:pPr>
+            <a:r>
+              <a:t>“Machine Learning Approaches for Spacecraft Collision Avoidance Challenge”</a:t>
+            </a:r>
+          </a:p>
+          <a:p>
+            <a:pPr>
+              <a:spcBef>
+                <a:spcPts val="200"/>
+              </a:spcBef>
+              <a:defRPr sz="1650">
+                <a:solidFill>
+                  <a:srgbClr val="000000"/>
+                </a:solidFill>
+                <a:latin typeface="Arial"/>
+              </a:defRPr>
+            </a:pPr>
+            <a:r>
+              <a:t>Focus: Spacecraft Collision Risk Prediction, CDM Assessment &amp; Orbit Uncertainty</a:t>
+            </a:r>
+          </a:p>
+          <a:p>
+            <a:pPr>
+              <a:spcBef>
+                <a:spcPts val="200"/>
+              </a:spcBef>
+              <a:defRPr sz="1650">
+                <a:solidFill>
+                  <a:srgbClr val="000000"/>
+                </a:solidFill>
+                <a:latin typeface="Arial"/>
+              </a:defRPr>
+            </a:pPr>
+            <a:r>
+              <a:t>Authors: Kalyanaraman et al. (2026) &amp; Uriot et al. (ESA Advanced Concepts Team)</a:t>
+            </a:r>
+          </a:p>
+        </p:txBody>
+      </p:sp>
+      <p:sp>
+        <p:nvSpPr>
+          <p:cNvPr id="5" name="TextBox 4"/>
           <p:cNvSpPr txBox="1"/>
           <p:nvPr/>
         </p:nvSpPr>
         <p:spPr>
           <a:xfrm>
-            <a:off x="1097280" y="1097280"/>
-            <a:ext cx="10058400" cy="1645920"/>
+            <a:off x="1078992" y="2880360"/>
+            <a:ext cx="5029200" cy="3657600"/>
           </a:xfrm>
           <a:prstGeom prst="rect">
             <a:avLst/>
@@ -6456,238 +5597,125 @@
           <a:lstStyle/>
           <a:p>
             <a:pPr>
-              <a:defRPr sz="1300" b="1">
-                <a:solidFill>
-                  <a:srgbClr val="1E293B"/>
-                </a:solidFill>
-                <a:latin typeface="Arial"/>
-              </a:defRPr>
-            </a:pPr>
-            <a:r>
-              <a:t>Paper Title:</a:t>
-            </a:r>
-          </a:p>
-          <a:p>
-            <a:pPr>
-              <a:defRPr sz="1200" b="1">
-                <a:solidFill>
-                  <a:srgbClr val="0E7490"/>
-                </a:solidFill>
-                <a:latin typeface="Arial"/>
-              </a:defRPr>
-            </a:pPr>
-            <a:r>
-              <a:t>"Machine Learning Approaches for Spacecraft Collision Avoidance Challenge"</a:t>
-            </a:r>
-          </a:p>
-          <a:p>
-            <a:pPr>
-              <a:defRPr sz="1100">
-                <a:solidFill>
-                  <a:srgbClr val="475569"/>
-                </a:solidFill>
-                <a:latin typeface="Arial"/>
-              </a:defRPr>
-            </a:pPr>
-            <a:r>
-              <a:t>Focus: Spacecraft Collision Risk Prediction, CDM Assessment &amp; Orbit Uncertainty</a:t>
-            </a:r>
-          </a:p>
-          <a:p>
-            <a:pPr>
-              <a:defRPr sz="1100">
-                <a:solidFill>
-                  <a:srgbClr val="475569"/>
-                </a:solidFill>
-                <a:latin typeface="Arial"/>
-              </a:defRPr>
-            </a:pPr>
-            <a:r>
-              <a:t>Authors: Kalyanaraman et al. (2026) &amp; Uriot et al. (ESA Advanced Concepts Team)</a:t>
-            </a:r>
-          </a:p>
-        </p:txBody>
-      </p:sp>
-      <p:sp>
-        <p:nvSpPr>
-          <p:cNvPr id="7" name="Rectangle 6"/>
-          <p:cNvSpPr/>
+              <a:defRPr sz="2000" b="1">
+                <a:solidFill>
+                  <a:srgbClr val="000000"/>
+                </a:solidFill>
+                <a:latin typeface="Arial"/>
+              </a:defRPr>
+            </a:pPr>
+            <a:r>
+              <a:t>Existing approach :</a:t>
+            </a:r>
+          </a:p>
+          <a:p>
+            <a:pPr>
+              <a:spcBef>
+                <a:spcPts val="500"/>
+              </a:spcBef>
+              <a:defRPr sz="1550">
+                <a:solidFill>
+                  <a:srgbClr val="000000"/>
+                </a:solidFill>
+                <a:latin typeface="Arial"/>
+              </a:defRPr>
+            </a:pPr>
+            <a:r>
+              <a:t>•  Static single-snapshot CDM evaluation</a:t>
+            </a:r>
+          </a:p>
+          <a:p>
+            <a:pPr>
+              <a:spcBef>
+                <a:spcPts val="500"/>
+              </a:spcBef>
+              <a:defRPr sz="1550">
+                <a:solidFill>
+                  <a:srgbClr val="000000"/>
+                </a:solidFill>
+                <a:latin typeface="Arial"/>
+              </a:defRPr>
+            </a:pPr>
+            <a:r>
+              <a:t>•  Evaluated strictly at TCA (t = 0 hours)</a:t>
+            </a:r>
+          </a:p>
+          <a:p>
+            <a:pPr>
+              <a:spcBef>
+                <a:spcPts val="500"/>
+              </a:spcBef>
+              <a:defRPr sz="1550">
+                <a:solidFill>
+                  <a:srgbClr val="000000"/>
+                </a:solidFill>
+                <a:latin typeface="Arial"/>
+              </a:defRPr>
+            </a:pPr>
+            <a:r>
+              <a:t>•  Standard binary classification with SMOTE</a:t>
+            </a:r>
+          </a:p>
+          <a:p>
+            <a:pPr>
+              <a:spcBef>
+                <a:spcPts val="500"/>
+              </a:spcBef>
+              <a:defRPr sz="1550">
+                <a:solidFill>
+                  <a:srgbClr val="000000"/>
+                </a:solidFill>
+                <a:latin typeface="Arial"/>
+              </a:defRPr>
+            </a:pPr>
+            <a:r>
+              <a:t>•  Assumes equal cost between False Positives and False Negatives</a:t>
+            </a:r>
+          </a:p>
+          <a:p>
+            <a:pPr>
+              <a:spcBef>
+                <a:spcPts val="500"/>
+              </a:spcBef>
+              <a:defRPr sz="1550">
+                <a:solidFill>
+                  <a:srgbClr val="000000"/>
+                </a:solidFill>
+                <a:latin typeface="Arial"/>
+              </a:defRPr>
+            </a:pPr>
+            <a:r>
+              <a:t>•  Black-box feature engineering with opaque synthetic indices</a:t>
+            </a:r>
+          </a:p>
+        </p:txBody>
+      </p:sp>
+      <p:sp>
+        <p:nvSpPr>
+          <p:cNvPr id="6" name="TextBox 5"/>
+          <p:cNvSpPr txBox="1"/>
           <p:nvPr/>
         </p:nvSpPr>
         <p:spPr>
           <a:xfrm>
-            <a:off x="1097280" y="2834640"/>
-            <a:ext cx="4846320" cy="3566160"/>
+            <a:off x="6537960" y="2880360"/>
+            <a:ext cx="5029200" cy="3657600"/>
           </a:xfrm>
           <a:prstGeom prst="rect">
             <a:avLst/>
           </a:prstGeom>
-          <a:solidFill>
-            <a:srgbClr val="FFFFFF"/>
-          </a:solidFill>
-          <a:ln>
-            <a:solidFill>
-              <a:srgbClr val="64748B"/>
-            </a:solidFill>
-          </a:ln>
+          <a:noFill/>
         </p:spPr>
-        <p:style>
-          <a:lnRef idx="1">
-            <a:schemeClr val="accent1"/>
-          </a:lnRef>
-          <a:fillRef idx="3">
-            <a:schemeClr val="accent1"/>
-          </a:fillRef>
-          <a:effectRef idx="2">
-            <a:schemeClr val="accent1"/>
-          </a:effectRef>
-          <a:fontRef idx="minor">
-            <a:schemeClr val="lt1"/>
-          </a:fontRef>
-        </p:style>
-        <p:txBody>
-          <a:bodyPr rtlCol="0" anchor="ctr" wrap="square"/>
-          <a:lstStyle/>
-          <a:p>
-            <a:pPr algn="ctr">
-              <a:defRPr sz="1300" b="1">
-                <a:solidFill>
-                  <a:srgbClr val="1E293B"/>
-                </a:solidFill>
-                <a:latin typeface="Arial"/>
-              </a:defRPr>
-            </a:pPr>
-            <a:r>
-              <a:t>Existing approach :</a:t>
-            </a:r>
-          </a:p>
-          <a:p>
-            <a:pPr>
-              <a:spcBef>
-                <a:spcPts val="600"/>
-              </a:spcBef>
-              <a:defRPr sz="1100">
-                <a:solidFill>
-                  <a:srgbClr val="475569"/>
-                </a:solidFill>
-                <a:latin typeface="Arial"/>
-              </a:defRPr>
-            </a:pPr>
-            <a:r>
-              <a:t>•  Static single-snapshot CDM evaluation</a:t>
-            </a:r>
-          </a:p>
-          <a:p>
-            <a:pPr>
-              <a:spcBef>
-                <a:spcPts val="600"/>
-              </a:spcBef>
-              <a:defRPr sz="1100">
-                <a:solidFill>
-                  <a:srgbClr val="475569"/>
-                </a:solidFill>
-                <a:latin typeface="Arial"/>
-              </a:defRPr>
-            </a:pPr>
-            <a:r>
-              <a:t>•  Evaluated strictly at TCA (t = 0 hours)</a:t>
-            </a:r>
-          </a:p>
-          <a:p>
-            <a:pPr>
-              <a:spcBef>
-                <a:spcPts val="600"/>
-              </a:spcBef>
-              <a:defRPr sz="1100">
-                <a:solidFill>
-                  <a:srgbClr val="475569"/>
-                </a:solidFill>
-                <a:latin typeface="Arial"/>
-              </a:defRPr>
-            </a:pPr>
-            <a:r>
-              <a:t>•  Standard binary classification with SMOTE</a:t>
-            </a:r>
-          </a:p>
-          <a:p>
-            <a:pPr>
-              <a:spcBef>
-                <a:spcPts val="600"/>
-              </a:spcBef>
-              <a:defRPr sz="1100">
-                <a:solidFill>
-                  <a:srgbClr val="475569"/>
-                </a:solidFill>
-                <a:latin typeface="Arial"/>
-              </a:defRPr>
-            </a:pPr>
-            <a:r>
-              <a:t>•  Assumes equal cost between False Positives and False Negatives</a:t>
-            </a:r>
-          </a:p>
-          <a:p>
-            <a:pPr>
-              <a:spcBef>
-                <a:spcPts val="600"/>
-              </a:spcBef>
-              <a:defRPr sz="1100">
-                <a:solidFill>
-                  <a:srgbClr val="475569"/>
-                </a:solidFill>
-                <a:latin typeface="Arial"/>
-              </a:defRPr>
-            </a:pPr>
-            <a:r>
-              <a:t>•  Black-box feature engineering with opaque synthetic indices</a:t>
-            </a:r>
-          </a:p>
-        </p:txBody>
-      </p:sp>
-      <p:sp>
-        <p:nvSpPr>
-          <p:cNvPr id="8" name="Rectangle 7"/>
-          <p:cNvSpPr/>
-          <p:nvPr/>
-        </p:nvSpPr>
-        <p:spPr>
-          <a:xfrm>
-            <a:off x="6309360" y="2834640"/>
-            <a:ext cx="4846320" cy="3566160"/>
-          </a:xfrm>
-          <a:prstGeom prst="rect">
-            <a:avLst/>
-          </a:prstGeom>
-          <a:solidFill>
-            <a:srgbClr val="FFFFFF"/>
-          </a:solidFill>
-          <a:ln>
-            <a:solidFill>
-              <a:srgbClr val="64748B"/>
-            </a:solidFill>
-          </a:ln>
-        </p:spPr>
-        <p:style>
-          <a:lnRef idx="1">
-            <a:schemeClr val="accent1"/>
-          </a:lnRef>
-          <a:fillRef idx="3">
-            <a:schemeClr val="accent1"/>
-          </a:fillRef>
-          <a:effectRef idx="2">
-            <a:schemeClr val="accent1"/>
-          </a:effectRef>
-          <a:fontRef idx="minor">
-            <a:schemeClr val="lt1"/>
-          </a:fontRef>
-        </p:style>
-        <p:txBody>
-          <a:bodyPr rtlCol="0" anchor="ctr" wrap="square"/>
-          <a:lstStyle/>
-          <a:p>
-            <a:pPr algn="ctr">
-              <a:defRPr sz="1300" b="1">
-                <a:solidFill>
-                  <a:srgbClr val="DC2626"/>
+        <p:txBody>
+          <a:bodyPr wrap="square">
+            <a:spAutoFit/>
+          </a:bodyPr>
+          <a:lstStyle/>
+          <a:p>
+            <a:pPr>
+              <a:defRPr sz="2000" b="1">
+                <a:solidFill>
+                  <a:srgbClr val="000000"/>
                 </a:solidFill>
                 <a:latin typeface="Arial"/>
               </a:defRPr>
@@ -6699,11 +5727,11 @@
           <a:p>
             <a:pPr>
               <a:spcBef>
-                <a:spcPts val="600"/>
-              </a:spcBef>
-              <a:defRPr sz="1100">
-                <a:solidFill>
-                  <a:srgbClr val="475569"/>
+                <a:spcPts val="500"/>
+              </a:spcBef>
+              <a:defRPr sz="1550">
+                <a:solidFill>
+                  <a:srgbClr val="000000"/>
                 </a:solidFill>
                 <a:latin typeface="Arial"/>
               </a:defRPr>
@@ -6715,11 +5743,11 @@
           <a:p>
             <a:pPr>
               <a:spcBef>
-                <a:spcPts val="600"/>
-              </a:spcBef>
-              <a:defRPr sz="1100">
-                <a:solidFill>
-                  <a:srgbClr val="475569"/>
+                <a:spcPts val="500"/>
+              </a:spcBef>
+              <a:defRPr sz="1550">
+                <a:solidFill>
+                  <a:srgbClr val="000000"/>
                 </a:solidFill>
                 <a:latin typeface="Arial"/>
               </a:defRPr>
@@ -6731,11 +5759,11 @@
           <a:p>
             <a:pPr>
               <a:spcBef>
-                <a:spcPts val="600"/>
-              </a:spcBef>
-              <a:defRPr sz="1100">
-                <a:solidFill>
-                  <a:srgbClr val="475569"/>
+                <a:spcPts val="500"/>
+              </a:spcBef>
+              <a:defRPr sz="1550">
+                <a:solidFill>
+                  <a:srgbClr val="000000"/>
                 </a:solidFill>
                 <a:latin typeface="Arial"/>
               </a:defRPr>
@@ -6747,11 +5775,11 @@
           <a:p>
             <a:pPr>
               <a:spcBef>
-                <a:spcPts val="600"/>
-              </a:spcBef>
-              <a:defRPr sz="1100">
-                <a:solidFill>
-                  <a:srgbClr val="475569"/>
+                <a:spcPts val="500"/>
+              </a:spcBef>
+              <a:defRPr sz="1550">
+                <a:solidFill>
+                  <a:srgbClr val="000000"/>
                 </a:solidFill>
                 <a:latin typeface="Arial"/>
               </a:defRPr>
@@ -6763,11 +5791,11 @@
           <a:p>
             <a:pPr>
               <a:spcBef>
-                <a:spcPts val="600"/>
-              </a:spcBef>
-              <a:defRPr sz="1100">
-                <a:solidFill>
-                  <a:srgbClr val="475569"/>
+                <a:spcPts val="500"/>
+              </a:spcBef>
+              <a:defRPr sz="1550">
+                <a:solidFill>
+                  <a:srgbClr val="000000"/>
                 </a:solidFill>
                 <a:latin typeface="Arial"/>
               </a:defRPr>
@@ -6796,102 +5824,40 @@
         <p:nvPr/>
       </p:nvGrpSpPr>
       <p:grpSpPr/>
-      <p:sp>
-        <p:nvSpPr>
-          <p:cNvPr id="2" name="Right Triangle 1"/>
-          <p:cNvSpPr/>
+      <p:pic>
+        <p:nvPicPr>
+          <p:cNvPr id="2" name="Picture 1" descr="bg_content_slide.png"/>
+          <p:cNvPicPr>
+            <a:picLocks noChangeAspect="1"/>
+          </p:cNvPicPr>
           <p:nvPr/>
-        </p:nvSpPr>
+        </p:nvPicPr>
+        <p:blipFill>
+          <a:blip r:embed="rId2"/>
+          <a:stretch>
+            <a:fillRect/>
+          </a:stretch>
+        </p:blipFill>
         <p:spPr>
-          <a:xfrm rot="5400000">
-            <a:off x="10972800" y="0"/>
-            <a:ext cx="1218895" cy="2011680"/>
+          <a:xfrm>
+            <a:off x="0" y="0"/>
+            <a:ext cx="12191695" cy="6858000"/>
           </a:xfrm>
-          <a:prstGeom prst="rtTriangle">
+          <a:prstGeom prst="rect">
             <a:avLst/>
           </a:prstGeom>
-          <a:solidFill>
-            <a:srgbClr val="EA580C"/>
-          </a:solidFill>
-          <a:ln>
-            <a:noFill/>
-          </a:ln>
         </p:spPr>
-        <p:style>
-          <a:lnRef idx="1">
-            <a:schemeClr val="accent1"/>
-          </a:lnRef>
-          <a:fillRef idx="3">
-            <a:schemeClr val="accent1"/>
-          </a:fillRef>
-          <a:effectRef idx="2">
-            <a:schemeClr val="accent1"/>
-          </a:effectRef>
-          <a:fontRef idx="minor">
-            <a:schemeClr val="lt1"/>
-          </a:fontRef>
-        </p:style>
-        <p:txBody>
-          <a:bodyPr rtlCol="0" anchor="ctr"/>
-          <a:lstStyle/>
-          <a:p>
-            <a:pPr algn="ctr"/>
-          </a:p>
-        </p:txBody>
-      </p:sp>
-      <p:sp>
-        <p:nvSpPr>
-          <p:cNvPr id="3" name="Right Triangle 2"/>
-          <p:cNvSpPr/>
-          <p:nvPr/>
-        </p:nvSpPr>
-        <p:spPr>
-          <a:xfrm rot="16200000">
-            <a:off x="0" y="4846320"/>
-            <a:ext cx="1097280" cy="2011680"/>
-          </a:xfrm>
-          <a:prstGeom prst="rtTriangle">
-            <a:avLst/>
-          </a:prstGeom>
-          <a:solidFill>
-            <a:srgbClr val="0F766E"/>
-          </a:solidFill>
-          <a:ln>
-            <a:noFill/>
-          </a:ln>
-        </p:spPr>
-        <p:style>
-          <a:lnRef idx="1">
-            <a:schemeClr val="accent1"/>
-          </a:lnRef>
-          <a:fillRef idx="3">
-            <a:schemeClr val="accent1"/>
-          </a:fillRef>
-          <a:effectRef idx="2">
-            <a:schemeClr val="accent1"/>
-          </a:effectRef>
-          <a:fontRef idx="minor">
-            <a:schemeClr val="lt1"/>
-          </a:fontRef>
-        </p:style>
-        <p:txBody>
-          <a:bodyPr rtlCol="0" anchor="ctr"/>
-          <a:lstStyle/>
-          <a:p>
-            <a:pPr algn="ctr"/>
-          </a:p>
-        </p:txBody>
-      </p:sp>
-      <p:sp>
-        <p:nvSpPr>
-          <p:cNvPr id="4" name="TextBox 3"/>
+      </p:pic>
+      <p:sp>
+        <p:nvSpPr>
+          <p:cNvPr id="3" name="TextBox 2"/>
           <p:cNvSpPr txBox="1"/>
           <p:nvPr/>
         </p:nvSpPr>
         <p:spPr>
           <a:xfrm>
-            <a:off x="365760" y="274320"/>
-            <a:ext cx="1828800" cy="548640"/>
+            <a:off x="978408" y="329184"/>
+            <a:ext cx="9601200" cy="502920"/>
           </a:xfrm>
           <a:prstGeom prst="rect">
             <a:avLst/>
@@ -6899,70 +5865,34 @@
           <a:noFill/>
         </p:spPr>
         <p:txBody>
-          <a:bodyPr wrap="none">
+          <a:bodyPr wrap="square">
             <a:spAutoFit/>
           </a:bodyPr>
           <a:lstStyle/>
           <a:p>
             <a:pPr>
-              <a:defRPr sz="1800" b="1">
-                <a:solidFill>
-                  <a:srgbClr val="0F172A"/>
-                </a:solidFill>
-                <a:latin typeface="Arial"/>
-              </a:defRPr>
-            </a:pPr>
-            <a:r>
-              <a:t>Kmit</a:t>
-            </a:r>
-          </a:p>
-        </p:txBody>
-      </p:sp>
-      <p:sp>
-        <p:nvSpPr>
-          <p:cNvPr id="5" name="TextBox 4"/>
+              <a:defRPr sz="3200" b="1">
+                <a:solidFill>
+                  <a:srgbClr val="FF0000"/>
+                </a:solidFill>
+                <a:latin typeface="Arial"/>
+              </a:defRPr>
+            </a:pPr>
+            <a:r>
+              <a:t>REQUIREMENT</a:t>
+            </a:r>
+          </a:p>
+        </p:txBody>
+      </p:sp>
+      <p:sp>
+        <p:nvSpPr>
+          <p:cNvPr id="4" name="TextBox 3"/>
           <p:cNvSpPr txBox="1"/>
           <p:nvPr/>
         </p:nvSpPr>
         <p:spPr>
           <a:xfrm>
-            <a:off x="1097280" y="274320"/>
-            <a:ext cx="9601200" cy="731520"/>
-          </a:xfrm>
-          <a:prstGeom prst="rect">
-            <a:avLst/>
-          </a:prstGeom>
-          <a:noFill/>
-        </p:spPr>
-        <p:txBody>
-          <a:bodyPr wrap="none">
-            <a:spAutoFit/>
-          </a:bodyPr>
-          <a:lstStyle/>
-          <a:p>
-            <a:pPr>
-              <a:defRPr sz="2600" b="1">
-                <a:solidFill>
-                  <a:srgbClr val="DC2626"/>
-                </a:solidFill>
-                <a:latin typeface="Arial"/>
-              </a:defRPr>
-            </a:pPr>
-            <a:r>
-              <a:t>REQUIREMENT</a:t>
-            </a:r>
-          </a:p>
-        </p:txBody>
-      </p:sp>
-      <p:sp>
-        <p:nvSpPr>
-          <p:cNvPr id="6" name="TextBox 5"/>
-          <p:cNvSpPr txBox="1"/>
-          <p:nvPr/>
-        </p:nvSpPr>
-        <p:spPr>
-          <a:xfrm>
-            <a:off x="1097280" y="1188720"/>
+            <a:off x="978408" y="1097280"/>
             <a:ext cx="10058400" cy="5303520"/>
           </a:xfrm>
           <a:prstGeom prst="rect">
@@ -6977,9 +5907,9 @@
           <a:lstStyle/>
           <a:p>
             <a:pPr>
-              <a:defRPr sz="1400" b="1">
-                <a:solidFill>
-                  <a:srgbClr val="1E293B"/>
+              <a:defRPr sz="2000" b="1">
+                <a:solidFill>
+                  <a:srgbClr val="000000"/>
                 </a:solidFill>
                 <a:latin typeface="Arial"/>
               </a:defRPr>
@@ -6991,33 +5921,49 @@
           <a:p>
             <a:pPr>
               <a:spcBef>
+                <a:spcPts val="200"/>
+              </a:spcBef>
+              <a:defRPr sz="1650">
+                <a:solidFill>
+                  <a:srgbClr val="000000"/>
+                </a:solidFill>
+                <a:latin typeface="Arial"/>
+              </a:defRPr>
+            </a:pPr>
+            <a:r>
+              <a:t>Prahari: Autonomous Spacecraft Conjunction Triage &amp; Collision Avoidance Decision-Support System</a:t>
+            </a:r>
+          </a:p>
+          <a:p>
+            <a:pPr>
+              <a:spcBef>
+                <a:spcPts val="1000"/>
+              </a:spcBef>
+              <a:defRPr sz="2000" b="1">
+                <a:solidFill>
+                  <a:srgbClr val="000000"/>
+                </a:solidFill>
+                <a:latin typeface="Arial"/>
+              </a:defRPr>
+            </a:pPr>
+            <a:r>
+              <a:t>Features:</a:t>
+            </a:r>
+          </a:p>
+          <a:p>
+            <a:pPr>
+              <a:spcBef>
                 <a:spcPts val="300"/>
               </a:spcBef>
-              <a:defRPr sz="1100">
-                <a:solidFill>
-                  <a:srgbClr val="475569"/>
-                </a:solidFill>
-                <a:latin typeface="Arial"/>
-              </a:defRPr>
-            </a:pPr>
-            <a:r>
-              <a:t>•  Prahari: Autonomous Spacecraft Conjunction Triage &amp; Collision Avoidance Decision-Support System</a:t>
-            </a:r>
-          </a:p>
-          <a:p>
-            <a:pPr>
-              <a:spcBef>
-                <a:spcPts val="800"/>
-              </a:spcBef>
-              <a:defRPr sz="1400" b="1">
-                <a:solidFill>
-                  <a:srgbClr val="1E293B"/>
-                </a:solidFill>
-                <a:latin typeface="Arial"/>
-              </a:defRPr>
-            </a:pPr>
-            <a:r>
-              <a:t>Features:</a:t>
+              <a:defRPr sz="1500">
+                <a:solidFill>
+                  <a:srgbClr val="000000"/>
+                </a:solidFill>
+                <a:latin typeface="Arial"/>
+              </a:defRPr>
+            </a:pPr>
+            <a:r>
+              <a:t>•  Automated Multi-Pass CDM Ingestion &amp; Telemetry Preprocessing</a:t>
             </a:r>
           </a:p>
           <a:p>
@@ -7025,15 +5971,15 @@
               <a:spcBef>
                 <a:spcPts val="300"/>
               </a:spcBef>
-              <a:defRPr sz="1100">
-                <a:solidFill>
-                  <a:srgbClr val="475569"/>
-                </a:solidFill>
-                <a:latin typeface="Arial"/>
-              </a:defRPr>
-            </a:pPr>
-            <a:r>
-              <a:t>•  Automated Multi-Pass CDM Ingestion &amp; Telemetry Preprocessing</a:t>
+              <a:defRPr sz="1500">
+                <a:solidFill>
+                  <a:srgbClr val="000000"/>
+                </a:solidFill>
+                <a:latin typeface="Arial"/>
+              </a:defRPr>
+            </a:pPr>
+            <a:r>
+              <a:t>•  High-Recall XGBoost Conjunction Risk Regression (log10 Pc prediction)</a:t>
             </a:r>
           </a:p>
           <a:p>
@@ -7041,15 +5987,15 @@
               <a:spcBef>
                 <a:spcPts val="300"/>
               </a:spcBef>
-              <a:defRPr sz="1100">
-                <a:solidFill>
-                  <a:srgbClr val="475569"/>
-                </a:solidFill>
-                <a:latin typeface="Arial"/>
-              </a:defRPr>
-            </a:pPr>
-            <a:r>
-              <a:t>•  High-Recall XGBoost Conjunction Risk Regression (log10 Pc prediction)</a:t>
+              <a:defRPr sz="1500">
+                <a:solidFill>
+                  <a:srgbClr val="000000"/>
+                </a:solidFill>
+                <a:latin typeface="Arial"/>
+              </a:defRPr>
+            </a:pPr>
+            <a:r>
+              <a:t>•  Asymmetric Risk Thresholding calibrated at the official -6.0 alert boundary</a:t>
             </a:r>
           </a:p>
           <a:p>
@@ -7057,15 +6003,15 @@
               <a:spcBef>
                 <a:spcPts val="300"/>
               </a:spcBef>
-              <a:defRPr sz="1100">
-                <a:solidFill>
-                  <a:srgbClr val="475569"/>
-                </a:solidFill>
-                <a:latin typeface="Arial"/>
-              </a:defRPr>
-            </a:pPr>
-            <a:r>
-              <a:t>•  Asymmetric Risk Thresholding calibrated at the official -6.0 alert boundary</a:t>
+              <a:defRPr sz="1500">
+                <a:solidFill>
+                  <a:srgbClr val="000000"/>
+                </a:solidFill>
+                <a:latin typeface="Arial"/>
+              </a:defRPr>
+            </a:pPr>
+            <a:r>
+              <a:t>•  Real-time Multi-Tier Action Protocol (CRITICAL, HIGH, ELEVATED, LOW bands)</a:t>
             </a:r>
           </a:p>
           <a:p>
@@ -7073,15 +6019,15 @@
               <a:spcBef>
                 <a:spcPts val="300"/>
               </a:spcBef>
-              <a:defRPr sz="1100">
-                <a:solidFill>
-                  <a:srgbClr val="475569"/>
-                </a:solidFill>
-                <a:latin typeface="Arial"/>
-              </a:defRPr>
-            </a:pPr>
-            <a:r>
-              <a:t>•  Real-time Multi-Tier Action Protocol (CRITICAL, HIGH, ELEVATED, LOW bands)</a:t>
+              <a:defRPr sz="1500">
+                <a:solidFill>
+                  <a:srgbClr val="000000"/>
+                </a:solidFill>
+                <a:latin typeface="Arial"/>
+              </a:defRPr>
+            </a:pPr>
+            <a:r>
+              <a:t>•  100 Native Telemetry Directory (Kinematics, Covariance, Solar Weather, Tracking)</a:t>
             </a:r>
           </a:p>
           <a:p>
@@ -7089,15 +6035,15 @@
               <a:spcBef>
                 <a:spcPts val="300"/>
               </a:spcBef>
-              <a:defRPr sz="1100">
-                <a:solidFill>
-                  <a:srgbClr val="475569"/>
-                </a:solidFill>
-                <a:latin typeface="Arial"/>
-              </a:defRPr>
-            </a:pPr>
-            <a:r>
-              <a:t>•  100 Native Telemetry Directory (Kinematics, Covariance, Solar Weather, Tracking)</a:t>
+              <a:defRPr sz="1500">
+                <a:solidFill>
+                  <a:srgbClr val="000000"/>
+                </a:solidFill>
+                <a:latin typeface="Arial"/>
+              </a:defRPr>
+            </a:pPr>
+            <a:r>
+              <a:t>•  Interactive 3D WebGL Orbit &amp; Covariance Ellipsoid Encounter Visualizer</a:t>
             </a:r>
           </a:p>
           <a:p>
@@ -7105,15 +6051,15 @@
               <a:spcBef>
                 <a:spcPts val="300"/>
               </a:spcBef>
-              <a:defRPr sz="1100">
-                <a:solidFill>
-                  <a:srgbClr val="475569"/>
-                </a:solidFill>
-                <a:latin typeface="Arial"/>
-              </a:defRPr>
-            </a:pPr>
-            <a:r>
-              <a:t>•  Interactive 3D WebGL Orbit &amp; Covariance Ellipsoid Encounter Visualizer</a:t>
+              <a:defRPr sz="1500">
+                <a:solidFill>
+                  <a:srgbClr val="000000"/>
+                </a:solidFill>
+                <a:latin typeface="Arial"/>
+              </a:defRPr>
+            </a:pPr>
+            <a:r>
+              <a:t>•  Temporal Timeline Playback Scrubber for multi-day radar update evolution</a:t>
             </a:r>
           </a:p>
           <a:p>
@@ -7121,15 +6067,15 @@
               <a:spcBef>
                 <a:spcPts val="300"/>
               </a:spcBef>
-              <a:defRPr sz="1100">
-                <a:solidFill>
-                  <a:srgbClr val="475569"/>
-                </a:solidFill>
-                <a:latin typeface="Arial"/>
-              </a:defRPr>
-            </a:pPr>
-            <a:r>
-              <a:t>•  Temporal Timeline Playback Scrubber for multi-day radar update evolution</a:t>
+              <a:defRPr sz="1500">
+                <a:solidFill>
+                  <a:srgbClr val="000000"/>
+                </a:solidFill>
+                <a:latin typeface="Arial"/>
+              </a:defRPr>
+            </a:pPr>
+            <a:r>
+              <a:t>•  Model Lab with live threshold calibration slider and SHAP feature importance charts</a:t>
             </a:r>
           </a:p>
           <a:p>
@@ -7137,15 +6083,15 @@
               <a:spcBef>
                 <a:spcPts val="300"/>
               </a:spcBef>
-              <a:defRPr sz="1100">
-                <a:solidFill>
-                  <a:srgbClr val="475569"/>
-                </a:solidFill>
-                <a:latin typeface="Arial"/>
-              </a:defRPr>
-            </a:pPr>
-            <a:r>
-              <a:t>•  Model Lab with live threshold calibration slider and SHAP feature importance charts</a:t>
+              <a:defRPr sz="1500">
+                <a:solidFill>
+                  <a:srgbClr val="000000"/>
+                </a:solidFill>
+                <a:latin typeface="Arial"/>
+              </a:defRPr>
+            </a:pPr>
+            <a:r>
+              <a:t>•  Drag-and-Drop Live Telemetry Prediction Sandbox for operational passes</a:t>
             </a:r>
           </a:p>
           <a:p>
@@ -7153,25 +6099,9 @@
               <a:spcBef>
                 <a:spcPts val="300"/>
               </a:spcBef>
-              <a:defRPr sz="1100">
-                <a:solidFill>
-                  <a:srgbClr val="475569"/>
-                </a:solidFill>
-                <a:latin typeface="Arial"/>
-              </a:defRPr>
-            </a:pPr>
-            <a:r>
-              <a:t>•  Drag-and-Drop Live Telemetry Prediction Sandbox for operational passes</a:t>
-            </a:r>
-          </a:p>
-          <a:p>
-            <a:pPr>
-              <a:spcBef>
-                <a:spcPts val="300"/>
-              </a:spcBef>
-              <a:defRPr sz="1100">
-                <a:solidFill>
-                  <a:srgbClr val="475569"/>
+              <a:defRPr sz="1500">
+                <a:solidFill>
+                  <a:srgbClr val="000000"/>
                 </a:solidFill>
                 <a:latin typeface="Arial"/>
               </a:defRPr>
@@ -7200,102 +6130,40 @@
         <p:nvPr/>
       </p:nvGrpSpPr>
       <p:grpSpPr/>
-      <p:sp>
-        <p:nvSpPr>
-          <p:cNvPr id="2" name="Right Triangle 1"/>
-          <p:cNvSpPr/>
+      <p:pic>
+        <p:nvPicPr>
+          <p:cNvPr id="2" name="Picture 1" descr="bg_content_slide.png"/>
+          <p:cNvPicPr>
+            <a:picLocks noChangeAspect="1"/>
+          </p:cNvPicPr>
           <p:nvPr/>
-        </p:nvSpPr>
+        </p:nvPicPr>
+        <p:blipFill>
+          <a:blip r:embed="rId2"/>
+          <a:stretch>
+            <a:fillRect/>
+          </a:stretch>
+        </p:blipFill>
         <p:spPr>
-          <a:xfrm rot="5400000">
-            <a:off x="10972800" y="0"/>
-            <a:ext cx="1218895" cy="2011680"/>
+          <a:xfrm>
+            <a:off x="0" y="0"/>
+            <a:ext cx="12191695" cy="6858000"/>
           </a:xfrm>
-          <a:prstGeom prst="rtTriangle">
+          <a:prstGeom prst="rect">
             <a:avLst/>
           </a:prstGeom>
-          <a:solidFill>
-            <a:srgbClr val="EA580C"/>
-          </a:solidFill>
-          <a:ln>
-            <a:noFill/>
-          </a:ln>
         </p:spPr>
-        <p:style>
-          <a:lnRef idx="1">
-            <a:schemeClr val="accent1"/>
-          </a:lnRef>
-          <a:fillRef idx="3">
-            <a:schemeClr val="accent1"/>
-          </a:fillRef>
-          <a:effectRef idx="2">
-            <a:schemeClr val="accent1"/>
-          </a:effectRef>
-          <a:fontRef idx="minor">
-            <a:schemeClr val="lt1"/>
-          </a:fontRef>
-        </p:style>
-        <p:txBody>
-          <a:bodyPr rtlCol="0" anchor="ctr"/>
-          <a:lstStyle/>
-          <a:p>
-            <a:pPr algn="ctr"/>
-          </a:p>
-        </p:txBody>
-      </p:sp>
-      <p:sp>
-        <p:nvSpPr>
-          <p:cNvPr id="3" name="Right Triangle 2"/>
-          <p:cNvSpPr/>
-          <p:nvPr/>
-        </p:nvSpPr>
-        <p:spPr>
-          <a:xfrm rot="16200000">
-            <a:off x="0" y="4846320"/>
-            <a:ext cx="1097280" cy="2011680"/>
-          </a:xfrm>
-          <a:prstGeom prst="rtTriangle">
-            <a:avLst/>
-          </a:prstGeom>
-          <a:solidFill>
-            <a:srgbClr val="0F766E"/>
-          </a:solidFill>
-          <a:ln>
-            <a:noFill/>
-          </a:ln>
-        </p:spPr>
-        <p:style>
-          <a:lnRef idx="1">
-            <a:schemeClr val="accent1"/>
-          </a:lnRef>
-          <a:fillRef idx="3">
-            <a:schemeClr val="accent1"/>
-          </a:fillRef>
-          <a:effectRef idx="2">
-            <a:schemeClr val="accent1"/>
-          </a:effectRef>
-          <a:fontRef idx="minor">
-            <a:schemeClr val="lt1"/>
-          </a:fontRef>
-        </p:style>
-        <p:txBody>
-          <a:bodyPr rtlCol="0" anchor="ctr"/>
-          <a:lstStyle/>
-          <a:p>
-            <a:pPr algn="ctr"/>
-          </a:p>
-        </p:txBody>
-      </p:sp>
-      <p:sp>
-        <p:nvSpPr>
-          <p:cNvPr id="4" name="TextBox 3"/>
+      </p:pic>
+      <p:sp>
+        <p:nvSpPr>
+          <p:cNvPr id="3" name="TextBox 2"/>
           <p:cNvSpPr txBox="1"/>
           <p:nvPr/>
         </p:nvSpPr>
         <p:spPr>
           <a:xfrm>
-            <a:off x="365760" y="274320"/>
-            <a:ext cx="1828800" cy="548640"/>
+            <a:off x="978408" y="329184"/>
+            <a:ext cx="9601200" cy="502920"/>
           </a:xfrm>
           <a:prstGeom prst="rect">
             <a:avLst/>
@@ -7303,70 +6171,34 @@
           <a:noFill/>
         </p:spPr>
         <p:txBody>
-          <a:bodyPr wrap="none">
+          <a:bodyPr wrap="square">
             <a:spAutoFit/>
           </a:bodyPr>
           <a:lstStyle/>
           <a:p>
             <a:pPr>
-              <a:defRPr sz="1800" b="1">
-                <a:solidFill>
-                  <a:srgbClr val="0F172A"/>
-                </a:solidFill>
-                <a:latin typeface="Arial"/>
-              </a:defRPr>
-            </a:pPr>
-            <a:r>
-              <a:t>Kmit</a:t>
-            </a:r>
-          </a:p>
-        </p:txBody>
-      </p:sp>
-      <p:sp>
-        <p:nvSpPr>
-          <p:cNvPr id="5" name="TextBox 4"/>
+              <a:defRPr sz="3200" b="1">
+                <a:solidFill>
+                  <a:srgbClr val="FF0000"/>
+                </a:solidFill>
+                <a:latin typeface="Arial"/>
+              </a:defRPr>
+            </a:pPr>
+            <a:r>
+              <a:t>DESIGN</a:t>
+            </a:r>
+          </a:p>
+        </p:txBody>
+      </p:sp>
+      <p:sp>
+        <p:nvSpPr>
+          <p:cNvPr id="4" name="TextBox 3"/>
           <p:cNvSpPr txBox="1"/>
           <p:nvPr/>
         </p:nvSpPr>
         <p:spPr>
           <a:xfrm>
-            <a:off x="1097280" y="274320"/>
-            <a:ext cx="9601200" cy="731520"/>
-          </a:xfrm>
-          <a:prstGeom prst="rect">
-            <a:avLst/>
-          </a:prstGeom>
-          <a:noFill/>
-        </p:spPr>
-        <p:txBody>
-          <a:bodyPr wrap="none">
-            <a:spAutoFit/>
-          </a:bodyPr>
-          <a:lstStyle/>
-          <a:p>
-            <a:pPr>
-              <a:defRPr sz="2600" b="1">
-                <a:solidFill>
-                  <a:srgbClr val="DC2626"/>
-                </a:solidFill>
-                <a:latin typeface="Arial"/>
-              </a:defRPr>
-            </a:pPr>
-            <a:r>
-              <a:t>DESIGN</a:t>
-            </a:r>
-          </a:p>
-        </p:txBody>
-      </p:sp>
-      <p:sp>
-        <p:nvSpPr>
-          <p:cNvPr id="6" name="TextBox 5"/>
-          <p:cNvSpPr txBox="1"/>
-          <p:nvPr/>
-        </p:nvSpPr>
-        <p:spPr>
-          <a:xfrm>
-            <a:off x="1097280" y="1005840"/>
+            <a:off x="978408" y="896112"/>
             <a:ext cx="10058400" cy="457200"/>
           </a:xfrm>
           <a:prstGeom prst="rect">
@@ -7380,608 +6212,44 @@
           </a:bodyPr>
           <a:lstStyle/>
           <a:p>
-            <a:pPr>
-              <a:defRPr sz="1600" b="1">
-                <a:solidFill>
-                  <a:srgbClr val="1E293B"/>
-                </a:solidFill>
-                <a:latin typeface="Arial"/>
-              </a:defRPr>
-            </a:pPr>
-            <a:r>
-              <a:t>Prahari - System Design Architecture</a:t>
-            </a:r>
-          </a:p>
-        </p:txBody>
-      </p:sp>
-      <p:sp>
-        <p:nvSpPr>
-          <p:cNvPr id="7" name="Rounded Rectangle 6"/>
-          <p:cNvSpPr/>
+            <a:pPr algn="ctr">
+              <a:defRPr sz="2000" b="1">
+                <a:solidFill>
+                  <a:srgbClr val="000000"/>
+                </a:solidFill>
+                <a:latin typeface="Arial"/>
+              </a:defRPr>
+            </a:pPr>
+            <a:r>
+              <a:t>Prahari – System Design &amp; Pipeline Architecture</a:t>
+            </a:r>
+          </a:p>
+        </p:txBody>
+      </p:sp>
+      <p:pic>
+        <p:nvPicPr>
+          <p:cNvPr id="5" name="Picture 4" descr="system_design_diagram.png"/>
+          <p:cNvPicPr>
+            <a:picLocks noChangeAspect="1"/>
+          </p:cNvPicPr>
           <p:nvPr/>
-        </p:nvSpPr>
+        </p:nvPicPr>
+        <p:blipFill>
+          <a:blip r:embed="rId3"/>
+          <a:stretch>
+            <a:fillRect/>
+          </a:stretch>
+        </p:blipFill>
         <p:spPr>
           <a:xfrm>
-            <a:off x="1097280" y="1645920"/>
-            <a:ext cx="2286000" cy="4572000"/>
+            <a:off x="1280160" y="1463040"/>
+            <a:ext cx="9628632" cy="4937760"/>
           </a:xfrm>
-          <a:prstGeom prst="roundRect">
+          <a:prstGeom prst="rect">
             <a:avLst/>
           </a:prstGeom>
-          <a:solidFill>
-            <a:srgbClr val="FFFFFF"/>
-          </a:solidFill>
-          <a:ln w="25400">
-            <a:solidFill>
-              <a:srgbClr val="0E7490"/>
-            </a:solidFill>
-          </a:ln>
         </p:spPr>
-        <p:style>
-          <a:lnRef idx="1">
-            <a:schemeClr val="accent1"/>
-          </a:lnRef>
-          <a:fillRef idx="3">
-            <a:schemeClr val="accent1"/>
-          </a:fillRef>
-          <a:effectRef idx="2">
-            <a:schemeClr val="accent1"/>
-          </a:effectRef>
-          <a:fontRef idx="minor">
-            <a:schemeClr val="lt1"/>
-          </a:fontRef>
-        </p:style>
-        <p:txBody>
-          <a:bodyPr rtlCol="0" anchor="ctr" wrap="square"/>
-          <a:lstStyle/>
-          <a:p>
-            <a:pPr algn="ctr">
-              <a:defRPr sz="1300" b="1">
-                <a:solidFill>
-                  <a:srgbClr val="0E7490"/>
-                </a:solidFill>
-                <a:latin typeface="Arial"/>
-              </a:defRPr>
-            </a:pPr>
-            <a:r>
-              <a:t>1. Input Data Stream</a:t>
-            </a:r>
-          </a:p>
-          <a:p>
-            <a:pPr>
-              <a:spcBef>
-                <a:spcPts val="600"/>
-              </a:spcBef>
-              <a:defRPr sz="1000">
-                <a:solidFill>
-                  <a:srgbClr val="1E293B"/>
-                </a:solidFill>
-                <a:latin typeface="Arial"/>
-              </a:defRPr>
-            </a:pPr>
-            <a:r>
-              <a:t>•  Space Surveillance Network (SSN)</a:t>
-            </a:r>
-          </a:p>
-          <a:p>
-            <a:pPr>
-              <a:spcBef>
-                <a:spcPts val="600"/>
-              </a:spcBef>
-              <a:defRPr sz="1000">
-                <a:solidFill>
-                  <a:srgbClr val="1E293B"/>
-                </a:solidFill>
-                <a:latin typeface="Arial"/>
-              </a:defRPr>
-            </a:pPr>
-            <a:r>
-              <a:t>•  ESA Kelvins Portal</a:t>
-            </a:r>
-          </a:p>
-          <a:p>
-            <a:pPr>
-              <a:spcBef>
-                <a:spcPts val="600"/>
-              </a:spcBef>
-              <a:defRPr sz="1000">
-                <a:solidFill>
-                  <a:srgbClr val="1E293B"/>
-                </a:solidFill>
-                <a:latin typeface="Arial"/>
-              </a:defRPr>
-            </a:pPr>
-            <a:r>
-              <a:t>•  CCSDS Standard CDMs</a:t>
-            </a:r>
-          </a:p>
-          <a:p>
-            <a:pPr>
-              <a:spcBef>
-                <a:spcPts val="600"/>
-              </a:spcBef>
-              <a:defRPr sz="1000">
-                <a:solidFill>
-                  <a:srgbClr val="1E293B"/>
-                </a:solidFill>
-                <a:latin typeface="Arial"/>
-              </a:defRPr>
-            </a:pPr>
-            <a:r>
-              <a:t>•  Multi-Pass Observation Arc</a:t>
-            </a:r>
-          </a:p>
-          <a:p>
-            <a:pPr>
-              <a:spcBef>
-                <a:spcPts val="600"/>
-              </a:spcBef>
-              <a:defRPr sz="1000">
-                <a:solidFill>
-                  <a:srgbClr val="1E293B"/>
-                </a:solidFill>
-                <a:latin typeface="Arial"/>
-              </a:defRPr>
-            </a:pPr>
-            <a:r>
-              <a:t>•  Solar Weather Feeds (F10, AP)</a:t>
-            </a:r>
-          </a:p>
-        </p:txBody>
-      </p:sp>
-      <p:sp>
-        <p:nvSpPr>
-          <p:cNvPr id="8" name="Rounded Rectangle 7"/>
-          <p:cNvSpPr/>
-          <p:nvPr/>
-        </p:nvSpPr>
-        <p:spPr>
-          <a:xfrm>
-            <a:off x="3657600" y="1645920"/>
-            <a:ext cx="2286000" cy="4572000"/>
-          </a:xfrm>
-          <a:prstGeom prst="roundRect">
-            <a:avLst/>
-          </a:prstGeom>
-          <a:solidFill>
-            <a:srgbClr val="FFFFFF"/>
-          </a:solidFill>
-          <a:ln w="25400">
-            <a:solidFill>
-              <a:srgbClr val="A855F7"/>
-            </a:solidFill>
-          </a:ln>
-        </p:spPr>
-        <p:style>
-          <a:lnRef idx="1">
-            <a:schemeClr val="accent1"/>
-          </a:lnRef>
-          <a:fillRef idx="3">
-            <a:schemeClr val="accent1"/>
-          </a:fillRef>
-          <a:effectRef idx="2">
-            <a:schemeClr val="accent1"/>
-          </a:effectRef>
-          <a:fontRef idx="minor">
-            <a:schemeClr val="lt1"/>
-          </a:fontRef>
-        </p:style>
-        <p:txBody>
-          <a:bodyPr rtlCol="0" anchor="ctr" wrap="square"/>
-          <a:lstStyle/>
-          <a:p>
-            <a:pPr algn="ctr">
-              <a:defRPr sz="1300" b="1">
-                <a:solidFill>
-                  <a:srgbClr val="A855F7"/>
-                </a:solidFill>
-                <a:latin typeface="Arial"/>
-              </a:defRPr>
-            </a:pPr>
-            <a:r>
-              <a:t>2. Telemetry Processing</a:t>
-            </a:r>
-          </a:p>
-          <a:p>
-            <a:pPr>
-              <a:spcBef>
-                <a:spcPts val="600"/>
-              </a:spcBef>
-              <a:defRPr sz="1000">
-                <a:solidFill>
-                  <a:srgbClr val="1E293B"/>
-                </a:solidFill>
-                <a:latin typeface="Arial"/>
-              </a:defRPr>
-            </a:pPr>
-            <a:r>
-              <a:t>•  100 Raw Feature Extractor</a:t>
-            </a:r>
-          </a:p>
-          <a:p>
-            <a:pPr>
-              <a:spcBef>
-                <a:spcPts val="600"/>
-              </a:spcBef>
-              <a:defRPr sz="1000">
-                <a:solidFill>
-                  <a:srgbClr val="1E293B"/>
-                </a:solidFill>
-                <a:latin typeface="Arial"/>
-              </a:defRPr>
-            </a:pPr>
-            <a:r>
-              <a:t>•  Kinematics (20 cols)</a:t>
-            </a:r>
-          </a:p>
-          <a:p>
-            <a:pPr>
-              <a:spcBef>
-                <a:spcPts val="600"/>
-              </a:spcBef>
-              <a:defRPr sz="1000">
-                <a:solidFill>
-                  <a:srgbClr val="1E293B"/>
-                </a:solidFill>
-                <a:latin typeface="Arial"/>
-              </a:defRPr>
-            </a:pPr>
-            <a:r>
-              <a:t>•  Covariances (36 cols)</a:t>
-            </a:r>
-          </a:p>
-          <a:p>
-            <a:pPr>
-              <a:spcBef>
-                <a:spcPts val="600"/>
-              </a:spcBef>
-              <a:defRPr sz="1000">
-                <a:solidFill>
-                  <a:srgbClr val="1E293B"/>
-                </a:solidFill>
-                <a:latin typeface="Arial"/>
-              </a:defRPr>
-            </a:pPr>
-            <a:r>
-              <a:t>•  Solar Drag (4 cols)</a:t>
-            </a:r>
-          </a:p>
-          <a:p>
-            <a:pPr>
-              <a:spcBef>
-                <a:spcPts val="600"/>
-              </a:spcBef>
-              <a:defRPr sz="1000">
-                <a:solidFill>
-                  <a:srgbClr val="1E293B"/>
-                </a:solidFill>
-                <a:latin typeface="Arial"/>
-              </a:defRPr>
-            </a:pPr>
-            <a:r>
-              <a:t>•  Tracking Residuals (40 cols)</a:t>
-            </a:r>
-          </a:p>
-          <a:p>
-            <a:pPr>
-              <a:spcBef>
-                <a:spcPts val="600"/>
-              </a:spcBef>
-              <a:defRPr sz="1000">
-                <a:solidFill>
-                  <a:srgbClr val="1E293B"/>
-                </a:solidFill>
-                <a:latin typeface="Arial"/>
-              </a:defRPr>
-            </a:pPr>
-            <a:r>
-              <a:t>•  Median Imputation Matrix</a:t>
-            </a:r>
-          </a:p>
-        </p:txBody>
-      </p:sp>
-      <p:sp>
-        <p:nvSpPr>
-          <p:cNvPr id="9" name="Rounded Rectangle 8"/>
-          <p:cNvSpPr/>
-          <p:nvPr/>
-        </p:nvSpPr>
-        <p:spPr>
-          <a:xfrm>
-            <a:off x="6217920" y="1645920"/>
-            <a:ext cx="2286000" cy="4572000"/>
-          </a:xfrm>
-          <a:prstGeom prst="roundRect">
-            <a:avLst/>
-          </a:prstGeom>
-          <a:solidFill>
-            <a:srgbClr val="FFFFFF"/>
-          </a:solidFill>
-          <a:ln w="25400">
-            <a:solidFill>
-              <a:srgbClr val="DC2626"/>
-            </a:solidFill>
-          </a:ln>
-        </p:spPr>
-        <p:style>
-          <a:lnRef idx="1">
-            <a:schemeClr val="accent1"/>
-          </a:lnRef>
-          <a:fillRef idx="3">
-            <a:schemeClr val="accent1"/>
-          </a:fillRef>
-          <a:effectRef idx="2">
-            <a:schemeClr val="accent1"/>
-          </a:effectRef>
-          <a:fontRef idx="minor">
-            <a:schemeClr val="lt1"/>
-          </a:fontRef>
-        </p:style>
-        <p:txBody>
-          <a:bodyPr rtlCol="0" anchor="ctr" wrap="square"/>
-          <a:lstStyle/>
-          <a:p>
-            <a:pPr algn="ctr">
-              <a:defRPr sz="1300" b="1">
-                <a:solidFill>
-                  <a:srgbClr val="DC2626"/>
-                </a:solidFill>
-                <a:latin typeface="Arial"/>
-              </a:defRPr>
-            </a:pPr>
-            <a:r>
-              <a:t>3. High-Recall AI Core</a:t>
-            </a:r>
-          </a:p>
-          <a:p>
-            <a:pPr>
-              <a:spcBef>
-                <a:spcPts val="600"/>
-              </a:spcBef>
-              <a:defRPr sz="1000">
-                <a:solidFill>
-                  <a:srgbClr val="1E293B"/>
-                </a:solidFill>
-                <a:latin typeface="Arial"/>
-              </a:defRPr>
-            </a:pPr>
-            <a:r>
-              <a:t>•  XGBoost Regressor</a:t>
-            </a:r>
-          </a:p>
-          <a:p>
-            <a:pPr>
-              <a:spcBef>
-                <a:spcPts val="600"/>
-              </a:spcBef>
-              <a:defRPr sz="1000">
-                <a:solidFill>
-                  <a:srgbClr val="1E293B"/>
-                </a:solidFill>
-                <a:latin typeface="Arial"/>
-              </a:defRPr>
-            </a:pPr>
-            <a:r>
-              <a:t>•  Asymmetric Loss (w=30x)</a:t>
-            </a:r>
-          </a:p>
-          <a:p>
-            <a:pPr>
-              <a:spcBef>
-                <a:spcPts val="600"/>
-              </a:spcBef>
-              <a:defRPr sz="1000">
-                <a:solidFill>
-                  <a:srgbClr val="1E293B"/>
-                </a:solidFill>
-                <a:latin typeface="Arial"/>
-              </a:defRPr>
-            </a:pPr>
-            <a:r>
-              <a:t>•  Continuous log10(Pc) Output</a:t>
-            </a:r>
-          </a:p>
-          <a:p>
-            <a:pPr>
-              <a:spcBef>
-                <a:spcPts val="600"/>
-              </a:spcBef>
-              <a:defRPr sz="1000">
-                <a:solidFill>
-                  <a:srgbClr val="1E293B"/>
-                </a:solidFill>
-                <a:latin typeface="Arial"/>
-              </a:defRPr>
-            </a:pPr>
-            <a:r>
-              <a:t>•  Threshold Filter (tau = -6.0)</a:t>
-            </a:r>
-          </a:p>
-          <a:p>
-            <a:pPr>
-              <a:spcBef>
-                <a:spcPts val="600"/>
-              </a:spcBef>
-              <a:defRPr sz="1000">
-                <a:solidFill>
-                  <a:srgbClr val="1E293B"/>
-                </a:solidFill>
-                <a:latin typeface="Arial"/>
-              </a:defRPr>
-            </a:pPr>
-            <a:r>
-              <a:t>•  92.70% High-Risk Recall</a:t>
-            </a:r>
-          </a:p>
-          <a:p>
-            <a:pPr>
-              <a:spcBef>
-                <a:spcPts val="600"/>
-              </a:spcBef>
-              <a:defRPr sz="1000">
-                <a:solidFill>
-                  <a:srgbClr val="1E293B"/>
-                </a:solidFill>
-                <a:latin typeface="Arial"/>
-              </a:defRPr>
-            </a:pPr>
-            <a:r>
-              <a:t>•  89.77% Safety F2 Score</a:t>
-            </a:r>
-          </a:p>
-        </p:txBody>
-      </p:sp>
-      <p:sp>
-        <p:nvSpPr>
-          <p:cNvPr id="10" name="Rounded Rectangle 9"/>
-          <p:cNvSpPr/>
-          <p:nvPr/>
-        </p:nvSpPr>
-        <p:spPr>
-          <a:xfrm>
-            <a:off x="8778240" y="1645920"/>
-            <a:ext cx="2286000" cy="4572000"/>
-          </a:xfrm>
-          <a:prstGeom prst="roundRect">
-            <a:avLst/>
-          </a:prstGeom>
-          <a:solidFill>
-            <a:srgbClr val="FFFFFF"/>
-          </a:solidFill>
-          <a:ln w="25400">
-            <a:solidFill>
-              <a:srgbClr val="0F766E"/>
-            </a:solidFill>
-          </a:ln>
-        </p:spPr>
-        <p:style>
-          <a:lnRef idx="1">
-            <a:schemeClr val="accent1"/>
-          </a:lnRef>
-          <a:fillRef idx="3">
-            <a:schemeClr val="accent1"/>
-          </a:fillRef>
-          <a:effectRef idx="2">
-            <a:schemeClr val="accent1"/>
-          </a:effectRef>
-          <a:fontRef idx="minor">
-            <a:schemeClr val="lt1"/>
-          </a:fontRef>
-        </p:style>
-        <p:txBody>
-          <a:bodyPr rtlCol="0" anchor="ctr" wrap="square"/>
-          <a:lstStyle/>
-          <a:p>
-            <a:pPr algn="ctr">
-              <a:defRPr sz="1300" b="1">
-                <a:solidFill>
-                  <a:srgbClr val="0F766E"/>
-                </a:solidFill>
-                <a:latin typeface="Arial"/>
-              </a:defRPr>
-            </a:pPr>
-            <a:r>
-              <a:t>4. Mission Control UI</a:t>
-            </a:r>
-          </a:p>
-          <a:p>
-            <a:pPr>
-              <a:spcBef>
-                <a:spcPts val="600"/>
-              </a:spcBef>
-              <a:defRPr sz="1000">
-                <a:solidFill>
-                  <a:srgbClr val="1E293B"/>
-                </a:solidFill>
-                <a:latin typeface="Arial"/>
-              </a:defRPr>
-            </a:pPr>
-            <a:r>
-              <a:t>•  React 18 + Vite Frontend</a:t>
-            </a:r>
-          </a:p>
-          <a:p>
-            <a:pPr>
-              <a:spcBef>
-                <a:spcPts val="600"/>
-              </a:spcBef>
-              <a:defRPr sz="1000">
-                <a:solidFill>
-                  <a:srgbClr val="1E293B"/>
-                </a:solidFill>
-                <a:latin typeface="Arial"/>
-              </a:defRPr>
-            </a:pPr>
-            <a:r>
-              <a:t>•  Three.js 3D Orbit Scene</a:t>
-            </a:r>
-          </a:p>
-          <a:p>
-            <a:pPr>
-              <a:spcBef>
-                <a:spcPts val="600"/>
-              </a:spcBef>
-              <a:defRPr sz="1000">
-                <a:solidFill>
-                  <a:srgbClr val="1E293B"/>
-                </a:solidFill>
-                <a:latin typeface="Arial"/>
-              </a:defRPr>
-            </a:pPr>
-            <a:r>
-              <a:t>•  Timeline Playback Scrubber</a:t>
-            </a:r>
-          </a:p>
-          <a:p>
-            <a:pPr>
-              <a:spcBef>
-                <a:spcPts val="600"/>
-              </a:spcBef>
-              <a:defRPr sz="1000">
-                <a:solidFill>
-                  <a:srgbClr val="1E293B"/>
-                </a:solidFill>
-                <a:latin typeface="Arial"/>
-              </a:defRPr>
-            </a:pPr>
-            <a:r>
-              <a:t>•  Model Lab Calibration</a:t>
-            </a:r>
-          </a:p>
-          <a:p>
-            <a:pPr>
-              <a:spcBef>
-                <a:spcPts val="600"/>
-              </a:spcBef>
-              <a:defRPr sz="1000">
-                <a:solidFill>
-                  <a:srgbClr val="1E293B"/>
-                </a:solidFill>
-                <a:latin typeface="Arial"/>
-              </a:defRPr>
-            </a:pPr>
-            <a:r>
-              <a:t>•  Instant CSV Predictor</a:t>
-            </a:r>
-          </a:p>
-          <a:p>
-            <a:pPr>
-              <a:spcBef>
-                <a:spcPts val="600"/>
-              </a:spcBef>
-              <a:defRPr sz="1000">
-                <a:solidFill>
-                  <a:srgbClr val="1E293B"/>
-                </a:solidFill>
-                <a:latin typeface="Arial"/>
-              </a:defRPr>
-            </a:pPr>
-            <a:r>
-              <a:t>•  CAM Action Protocol</a:t>
-            </a:r>
-          </a:p>
-        </p:txBody>
-      </p:sp>
+      </p:pic>
     </p:spTree>
   </p:cSld>
   <p:clrMapOvr>
@@ -8000,102 +6268,40 @@
         <p:nvPr/>
       </p:nvGrpSpPr>
       <p:grpSpPr/>
-      <p:sp>
-        <p:nvSpPr>
-          <p:cNvPr id="2" name="Right Triangle 1"/>
-          <p:cNvSpPr/>
+      <p:pic>
+        <p:nvPicPr>
+          <p:cNvPr id="2" name="Picture 1" descr="bg_content_slide.png"/>
+          <p:cNvPicPr>
+            <a:picLocks noChangeAspect="1"/>
+          </p:cNvPicPr>
           <p:nvPr/>
-        </p:nvSpPr>
+        </p:nvPicPr>
+        <p:blipFill>
+          <a:blip r:embed="rId2"/>
+          <a:stretch>
+            <a:fillRect/>
+          </a:stretch>
+        </p:blipFill>
         <p:spPr>
-          <a:xfrm rot="5400000">
-            <a:off x="10972800" y="0"/>
-            <a:ext cx="1218895" cy="2011680"/>
+          <a:xfrm>
+            <a:off x="0" y="0"/>
+            <a:ext cx="12191695" cy="6858000"/>
           </a:xfrm>
-          <a:prstGeom prst="rtTriangle">
+          <a:prstGeom prst="rect">
             <a:avLst/>
           </a:prstGeom>
-          <a:solidFill>
-            <a:srgbClr val="EA580C"/>
-          </a:solidFill>
-          <a:ln>
-            <a:noFill/>
-          </a:ln>
         </p:spPr>
-        <p:style>
-          <a:lnRef idx="1">
-            <a:schemeClr val="accent1"/>
-          </a:lnRef>
-          <a:fillRef idx="3">
-            <a:schemeClr val="accent1"/>
-          </a:fillRef>
-          <a:effectRef idx="2">
-            <a:schemeClr val="accent1"/>
-          </a:effectRef>
-          <a:fontRef idx="minor">
-            <a:schemeClr val="lt1"/>
-          </a:fontRef>
-        </p:style>
-        <p:txBody>
-          <a:bodyPr rtlCol="0" anchor="ctr"/>
-          <a:lstStyle/>
-          <a:p>
-            <a:pPr algn="ctr"/>
-          </a:p>
-        </p:txBody>
-      </p:sp>
-      <p:sp>
-        <p:nvSpPr>
-          <p:cNvPr id="3" name="Right Triangle 2"/>
-          <p:cNvSpPr/>
-          <p:nvPr/>
-        </p:nvSpPr>
-        <p:spPr>
-          <a:xfrm rot="16200000">
-            <a:off x="0" y="4846320"/>
-            <a:ext cx="1097280" cy="2011680"/>
-          </a:xfrm>
-          <a:prstGeom prst="rtTriangle">
-            <a:avLst/>
-          </a:prstGeom>
-          <a:solidFill>
-            <a:srgbClr val="0F766E"/>
-          </a:solidFill>
-          <a:ln>
-            <a:noFill/>
-          </a:ln>
-        </p:spPr>
-        <p:style>
-          <a:lnRef idx="1">
-            <a:schemeClr val="accent1"/>
-          </a:lnRef>
-          <a:fillRef idx="3">
-            <a:schemeClr val="accent1"/>
-          </a:fillRef>
-          <a:effectRef idx="2">
-            <a:schemeClr val="accent1"/>
-          </a:effectRef>
-          <a:fontRef idx="minor">
-            <a:schemeClr val="lt1"/>
-          </a:fontRef>
-        </p:style>
-        <p:txBody>
-          <a:bodyPr rtlCol="0" anchor="ctr"/>
-          <a:lstStyle/>
-          <a:p>
-            <a:pPr algn="ctr"/>
-          </a:p>
-        </p:txBody>
-      </p:sp>
-      <p:sp>
-        <p:nvSpPr>
-          <p:cNvPr id="4" name="TextBox 3"/>
+      </p:pic>
+      <p:sp>
+        <p:nvSpPr>
+          <p:cNvPr id="3" name="TextBox 2"/>
           <p:cNvSpPr txBox="1"/>
           <p:nvPr/>
         </p:nvSpPr>
         <p:spPr>
           <a:xfrm>
-            <a:off x="365760" y="274320"/>
-            <a:ext cx="1828800" cy="548640"/>
+            <a:off x="978408" y="329184"/>
+            <a:ext cx="9601200" cy="502920"/>
           </a:xfrm>
           <a:prstGeom prst="rect">
             <a:avLst/>
@@ -8103,70 +6309,34 @@
           <a:noFill/>
         </p:spPr>
         <p:txBody>
-          <a:bodyPr wrap="none">
+          <a:bodyPr wrap="square">
             <a:spAutoFit/>
           </a:bodyPr>
           <a:lstStyle/>
           <a:p>
             <a:pPr>
-              <a:defRPr sz="1800" b="1">
-                <a:solidFill>
-                  <a:srgbClr val="0F172A"/>
-                </a:solidFill>
-                <a:latin typeface="Arial"/>
-              </a:defRPr>
-            </a:pPr>
-            <a:r>
-              <a:t>Kmit</a:t>
-            </a:r>
-          </a:p>
-        </p:txBody>
-      </p:sp>
-      <p:sp>
-        <p:nvSpPr>
-          <p:cNvPr id="5" name="TextBox 4"/>
+              <a:defRPr sz="3200" b="1">
+                <a:solidFill>
+                  <a:srgbClr val="FF0000"/>
+                </a:solidFill>
+                <a:latin typeface="Arial"/>
+              </a:defRPr>
+            </a:pPr>
+            <a:r>
+              <a:t>DESIGN</a:t>
+            </a:r>
+          </a:p>
+        </p:txBody>
+      </p:sp>
+      <p:sp>
+        <p:nvSpPr>
+          <p:cNvPr id="4" name="TextBox 3"/>
           <p:cNvSpPr txBox="1"/>
           <p:nvPr/>
         </p:nvSpPr>
         <p:spPr>
           <a:xfrm>
-            <a:off x="1097280" y="274320"/>
-            <a:ext cx="9601200" cy="731520"/>
-          </a:xfrm>
-          <a:prstGeom prst="rect">
-            <a:avLst/>
-          </a:prstGeom>
-          <a:noFill/>
-        </p:spPr>
-        <p:txBody>
-          <a:bodyPr wrap="none">
-            <a:spAutoFit/>
-          </a:bodyPr>
-          <a:lstStyle/>
-          <a:p>
-            <a:pPr>
-              <a:defRPr sz="2600" b="1">
-                <a:solidFill>
-                  <a:srgbClr val="DC2626"/>
-                </a:solidFill>
-                <a:latin typeface="Arial"/>
-              </a:defRPr>
-            </a:pPr>
-            <a:r>
-              <a:t>TELEMETRY &amp; FEATURE ARCHITECTURE</a:t>
-            </a:r>
-          </a:p>
-        </p:txBody>
-      </p:sp>
-      <p:sp>
-        <p:nvSpPr>
-          <p:cNvPr id="6" name="TextBox 5"/>
-          <p:cNvSpPr txBox="1"/>
-          <p:nvPr/>
-        </p:nvSpPr>
-        <p:spPr>
-          <a:xfrm>
-            <a:off x="1097280" y="1005840"/>
+            <a:off x="978408" y="896112"/>
             <a:ext cx="10058400" cy="457200"/>
           </a:xfrm>
           <a:prstGeom prst="rect">
@@ -8180,304 +6350,44 @@
           </a:bodyPr>
           <a:lstStyle/>
           <a:p>
-            <a:pPr>
-              <a:defRPr sz="1600" b="1">
-                <a:solidFill>
-                  <a:srgbClr val="1E293B"/>
-                </a:solidFill>
-                <a:latin typeface="Arial"/>
-              </a:defRPr>
-            </a:pPr>
-            <a:r>
-              <a:t>100 Native Telemetry Parameters (Zero Synthetic Bloat)</a:t>
-            </a:r>
-          </a:p>
-        </p:txBody>
-      </p:sp>
-      <p:sp>
-        <p:nvSpPr>
-          <p:cNvPr id="7" name="Rounded Rectangle 6"/>
-          <p:cNvSpPr/>
+            <a:pPr algn="ctr">
+              <a:defRPr sz="2000" b="1">
+                <a:solidFill>
+                  <a:srgbClr val="000000"/>
+                </a:solidFill>
+                <a:latin typeface="Arial"/>
+              </a:defRPr>
+            </a:pPr>
+            <a:r>
+              <a:t>Prahari – Telemetry &amp; Conjunction Data Schema</a:t>
+            </a:r>
+          </a:p>
+        </p:txBody>
+      </p:sp>
+      <p:pic>
+        <p:nvPicPr>
+          <p:cNvPr id="5" name="Picture 4" descr="database_diagram.png"/>
+          <p:cNvPicPr>
+            <a:picLocks noChangeAspect="1"/>
+          </p:cNvPicPr>
           <p:nvPr/>
-        </p:nvSpPr>
+        </p:nvPicPr>
+        <p:blipFill>
+          <a:blip r:embed="rId3"/>
+          <a:stretch>
+            <a:fillRect/>
+          </a:stretch>
+        </p:blipFill>
         <p:spPr>
           <a:xfrm>
-            <a:off x="1097280" y="1554480"/>
-            <a:ext cx="4846320" cy="2286000"/>
+            <a:off x="1280160" y="1463040"/>
+            <a:ext cx="9628632" cy="4937760"/>
           </a:xfrm>
-          <a:prstGeom prst="roundRect">
+          <a:prstGeom prst="rect">
             <a:avLst/>
           </a:prstGeom>
-          <a:solidFill>
-            <a:srgbClr val="FFFFFF"/>
-          </a:solidFill>
-          <a:ln w="19050">
-            <a:solidFill>
-              <a:srgbClr val="0E7490"/>
-            </a:solidFill>
-          </a:ln>
         </p:spPr>
-        <p:style>
-          <a:lnRef idx="1">
-            <a:schemeClr val="accent1"/>
-          </a:lnRef>
-          <a:fillRef idx="3">
-            <a:schemeClr val="accent1"/>
-          </a:fillRef>
-          <a:effectRef idx="2">
-            <a:schemeClr val="accent1"/>
-          </a:effectRef>
-          <a:fontRef idx="minor">
-            <a:schemeClr val="lt1"/>
-          </a:fontRef>
-        </p:style>
-        <p:txBody>
-          <a:bodyPr rtlCol="0" anchor="ctr" wrap="square"/>
-          <a:lstStyle/>
-          <a:p>
-            <a:pPr algn="ctr">
-              <a:defRPr sz="1300" b="1">
-                <a:solidFill>
-                  <a:srgbClr val="0E7490"/>
-                </a:solidFill>
-                <a:latin typeface="Arial"/>
-              </a:defRPr>
-            </a:pPr>
-            <a:r>
-              <a:t>1. Orbital Kinematics (20 Features)</a:t>
-            </a:r>
-          </a:p>
-          <a:p>
-            <a:pPr>
-              <a:spcBef>
-                <a:spcPts val="800"/>
-              </a:spcBef>
-              <a:defRPr sz="1100">
-                <a:solidFill>
-                  <a:srgbClr val="1E293B"/>
-                </a:solidFill>
-                <a:latin typeface="Arial"/>
-              </a:defRPr>
-            </a:pPr>
-            <a:r>
-              <a:t>Captures 3D spatial clearance, relative closing speed, RTN vectors, Keplerian semi-major axes, eccentricities, inclinations, and Mahalanobis statistical distance.</a:t>
-            </a:r>
-          </a:p>
-        </p:txBody>
-      </p:sp>
-      <p:sp>
-        <p:nvSpPr>
-          <p:cNvPr id="8" name="Rounded Rectangle 7"/>
-          <p:cNvSpPr/>
-          <p:nvPr/>
-        </p:nvSpPr>
-        <p:spPr>
-          <a:xfrm>
-            <a:off x="6309360" y="1554480"/>
-            <a:ext cx="4846320" cy="2286000"/>
-          </a:xfrm>
-          <a:prstGeom prst="roundRect">
-            <a:avLst/>
-          </a:prstGeom>
-          <a:solidFill>
-            <a:srgbClr val="FFFFFF"/>
-          </a:solidFill>
-          <a:ln w="19050">
-            <a:solidFill>
-              <a:srgbClr val="0F766E"/>
-            </a:solidFill>
-          </a:ln>
-        </p:spPr>
-        <p:style>
-          <a:lnRef idx="1">
-            <a:schemeClr val="accent1"/>
-          </a:lnRef>
-          <a:fillRef idx="3">
-            <a:schemeClr val="accent1"/>
-          </a:fillRef>
-          <a:effectRef idx="2">
-            <a:schemeClr val="accent1"/>
-          </a:effectRef>
-          <a:fontRef idx="minor">
-            <a:schemeClr val="lt1"/>
-          </a:fontRef>
-        </p:style>
-        <p:txBody>
-          <a:bodyPr rtlCol="0" anchor="ctr" wrap="square"/>
-          <a:lstStyle/>
-          <a:p>
-            <a:pPr algn="ctr">
-              <a:defRPr sz="1300" b="1">
-                <a:solidFill>
-                  <a:srgbClr val="0F766E"/>
-                </a:solidFill>
-                <a:latin typeface="Arial"/>
-              </a:defRPr>
-            </a:pPr>
-            <a:r>
-              <a:t>2. Covariance Dispersion (36 Features)</a:t>
-            </a:r>
-          </a:p>
-          <a:p>
-            <a:pPr>
-              <a:spcBef>
-                <a:spcPts val="800"/>
-              </a:spcBef>
-              <a:defRPr sz="1100">
-                <a:solidFill>
-                  <a:srgbClr val="1E293B"/>
-                </a:solidFill>
-                <a:latin typeface="Arial"/>
-              </a:defRPr>
-            </a:pPr>
-            <a:r>
-              <a:t>Encapsulates full 3D position and velocity 1-sigma error dispersions, 3x3 covariance matrix determinants (uncertainty volumes in m^6), and 18 RTN cross-correlation terms.</a:t>
-            </a:r>
-          </a:p>
-        </p:txBody>
-      </p:sp>
-      <p:sp>
-        <p:nvSpPr>
-          <p:cNvPr id="9" name="Rounded Rectangle 8"/>
-          <p:cNvSpPr/>
-          <p:nvPr/>
-        </p:nvSpPr>
-        <p:spPr>
-          <a:xfrm>
-            <a:off x="1097280" y="4023360"/>
-            <a:ext cx="4846320" cy="2286000"/>
-          </a:xfrm>
-          <a:prstGeom prst="roundRect">
-            <a:avLst/>
-          </a:prstGeom>
-          <a:solidFill>
-            <a:srgbClr val="FFFFFF"/>
-          </a:solidFill>
-          <a:ln w="19050">
-            <a:solidFill>
-              <a:srgbClr val="D97706"/>
-            </a:solidFill>
-          </a:ln>
-        </p:spPr>
-        <p:style>
-          <a:lnRef idx="1">
-            <a:schemeClr val="accent1"/>
-          </a:lnRef>
-          <a:fillRef idx="3">
-            <a:schemeClr val="accent1"/>
-          </a:fillRef>
-          <a:effectRef idx="2">
-            <a:schemeClr val="accent1"/>
-          </a:effectRef>
-          <a:fontRef idx="minor">
-            <a:schemeClr val="lt1"/>
-          </a:fontRef>
-        </p:style>
-        <p:txBody>
-          <a:bodyPr rtlCol="0" anchor="ctr" wrap="square"/>
-          <a:lstStyle/>
-          <a:p>
-            <a:pPr algn="ctr">
-              <a:defRPr sz="1300" b="1">
-                <a:solidFill>
-                  <a:srgbClr val="D97706"/>
-                </a:solidFill>
-                <a:latin typeface="Arial"/>
-              </a:defRPr>
-            </a:pPr>
-            <a:r>
-              <a:t>3. Solar &amp; Space Weather (4 Features)</a:t>
-            </a:r>
-          </a:p>
-          <a:p>
-            <a:pPr>
-              <a:spcBef>
-                <a:spcPts val="800"/>
-              </a:spcBef>
-              <a:defRPr sz="1100">
-                <a:solidFill>
-                  <a:srgbClr val="1E293B"/>
-                </a:solidFill>
-                <a:latin typeface="Arial"/>
-              </a:defRPr>
-            </a:pPr>
-            <a:r>
-              <a:t>Includes daily 10.7 cm solar flux (F10), 81-day centered flux (F3M), sunspot number (SSN), and geomagnetic index (AP) driving atmospheric drag density in LEO.</a:t>
-            </a:r>
-          </a:p>
-        </p:txBody>
-      </p:sp>
-      <p:sp>
-        <p:nvSpPr>
-          <p:cNvPr id="10" name="Rounded Rectangle 9"/>
-          <p:cNvSpPr/>
-          <p:nvPr/>
-        </p:nvSpPr>
-        <p:spPr>
-          <a:xfrm>
-            <a:off x="6309360" y="4023360"/>
-            <a:ext cx="4846320" cy="2286000"/>
-          </a:xfrm>
-          <a:prstGeom prst="roundRect">
-            <a:avLst/>
-          </a:prstGeom>
-          <a:solidFill>
-            <a:srgbClr val="FFFFFF"/>
-          </a:solidFill>
-          <a:ln w="19050">
-            <a:solidFill>
-              <a:srgbClr val="9333EA"/>
-            </a:solidFill>
-          </a:ln>
-        </p:spPr>
-        <p:style>
-          <a:lnRef idx="1">
-            <a:schemeClr val="accent1"/>
-          </a:lnRef>
-          <a:fillRef idx="3">
-            <a:schemeClr val="accent1"/>
-          </a:fillRef>
-          <a:effectRef idx="2">
-            <a:schemeClr val="accent1"/>
-          </a:effectRef>
-          <a:fontRef idx="minor">
-            <a:schemeClr val="lt1"/>
-          </a:fontRef>
-        </p:style>
-        <p:txBody>
-          <a:bodyPr rtlCol="0" anchor="ctr" wrap="square"/>
-          <a:lstStyle/>
-          <a:p>
-            <a:pPr algn="ctr">
-              <a:defRPr sz="1300" b="1">
-                <a:solidFill>
-                  <a:srgbClr val="9333EA"/>
-                </a:solidFill>
-                <a:latin typeface="Arial"/>
-              </a:defRPr>
-            </a:pPr>
-            <a:r>
-              <a:t>4. Tracking Observables (40 Features)</a:t>
-            </a:r>
-          </a:p>
-          <a:p>
-            <a:pPr>
-              <a:spcBef>
-                <a:spcPts val="800"/>
-              </a:spcBef>
-              <a:defRPr sz="1100">
-                <a:solidFill>
-                  <a:srgbClr val="1E293B"/>
-                </a:solidFill>
-                <a:latin typeface="Arial"/>
-              </a:defRPr>
-            </a:pPr>
-            <a:r>
-              <a:t>Contains radar pass counts (available vs. used), weighted RMS orbit fit residuals, radar cross section (RCS), ballistic area-to-mass ratios, and theoretical maximum risk bounds.</a:t>
-            </a:r>
-          </a:p>
-        </p:txBody>
-      </p:sp>
+      </p:pic>
     </p:spTree>
   </p:cSld>
   <p:clrMapOvr>
@@ -8496,102 +6406,40 @@
         <p:nvPr/>
       </p:nvGrpSpPr>
       <p:grpSpPr/>
-      <p:sp>
-        <p:nvSpPr>
-          <p:cNvPr id="2" name="Right Triangle 1"/>
-          <p:cNvSpPr/>
+      <p:pic>
+        <p:nvPicPr>
+          <p:cNvPr id="2" name="Picture 1" descr="bg_content_slide.png"/>
+          <p:cNvPicPr>
+            <a:picLocks noChangeAspect="1"/>
+          </p:cNvPicPr>
           <p:nvPr/>
-        </p:nvSpPr>
+        </p:nvPicPr>
+        <p:blipFill>
+          <a:blip r:embed="rId2"/>
+          <a:stretch>
+            <a:fillRect/>
+          </a:stretch>
+        </p:blipFill>
         <p:spPr>
-          <a:xfrm rot="5400000">
-            <a:off x="10972800" y="0"/>
-            <a:ext cx="1218895" cy="2011680"/>
+          <a:xfrm>
+            <a:off x="0" y="0"/>
+            <a:ext cx="12191695" cy="6858000"/>
           </a:xfrm>
-          <a:prstGeom prst="rtTriangle">
+          <a:prstGeom prst="rect">
             <a:avLst/>
           </a:prstGeom>
-          <a:solidFill>
-            <a:srgbClr val="EA580C"/>
-          </a:solidFill>
-          <a:ln>
-            <a:noFill/>
-          </a:ln>
         </p:spPr>
-        <p:style>
-          <a:lnRef idx="1">
-            <a:schemeClr val="accent1"/>
-          </a:lnRef>
-          <a:fillRef idx="3">
-            <a:schemeClr val="accent1"/>
-          </a:fillRef>
-          <a:effectRef idx="2">
-            <a:schemeClr val="accent1"/>
-          </a:effectRef>
-          <a:fontRef idx="minor">
-            <a:schemeClr val="lt1"/>
-          </a:fontRef>
-        </p:style>
-        <p:txBody>
-          <a:bodyPr rtlCol="0" anchor="ctr"/>
-          <a:lstStyle/>
-          <a:p>
-            <a:pPr algn="ctr"/>
-          </a:p>
-        </p:txBody>
-      </p:sp>
-      <p:sp>
-        <p:nvSpPr>
-          <p:cNvPr id="3" name="Right Triangle 2"/>
-          <p:cNvSpPr/>
-          <p:nvPr/>
-        </p:nvSpPr>
-        <p:spPr>
-          <a:xfrm rot="16200000">
-            <a:off x="0" y="4846320"/>
-            <a:ext cx="1097280" cy="2011680"/>
-          </a:xfrm>
-          <a:prstGeom prst="rtTriangle">
-            <a:avLst/>
-          </a:prstGeom>
-          <a:solidFill>
-            <a:srgbClr val="0F766E"/>
-          </a:solidFill>
-          <a:ln>
-            <a:noFill/>
-          </a:ln>
-        </p:spPr>
-        <p:style>
-          <a:lnRef idx="1">
-            <a:schemeClr val="accent1"/>
-          </a:lnRef>
-          <a:fillRef idx="3">
-            <a:schemeClr val="accent1"/>
-          </a:fillRef>
-          <a:effectRef idx="2">
-            <a:schemeClr val="accent1"/>
-          </a:effectRef>
-          <a:fontRef idx="minor">
-            <a:schemeClr val="lt1"/>
-          </a:fontRef>
-        </p:style>
-        <p:txBody>
-          <a:bodyPr rtlCol="0" anchor="ctr"/>
-          <a:lstStyle/>
-          <a:p>
-            <a:pPr algn="ctr"/>
-          </a:p>
-        </p:txBody>
-      </p:sp>
-      <p:sp>
-        <p:nvSpPr>
-          <p:cNvPr id="4" name="TextBox 3"/>
+      </p:pic>
+      <p:sp>
+        <p:nvSpPr>
+          <p:cNvPr id="3" name="TextBox 2"/>
           <p:cNvSpPr txBox="1"/>
           <p:nvPr/>
         </p:nvSpPr>
         <p:spPr>
           <a:xfrm>
-            <a:off x="365760" y="274320"/>
-            <a:ext cx="1828800" cy="548640"/>
+            <a:off x="978408" y="329184"/>
+            <a:ext cx="9601200" cy="502920"/>
           </a:xfrm>
           <a:prstGeom prst="rect">
             <a:avLst/>
@@ -8599,35 +6447,35 @@
           <a:noFill/>
         </p:spPr>
         <p:txBody>
-          <a:bodyPr wrap="none">
+          <a:bodyPr wrap="square">
             <a:spAutoFit/>
           </a:bodyPr>
           <a:lstStyle/>
           <a:p>
             <a:pPr>
-              <a:defRPr sz="1800" b="1">
-                <a:solidFill>
-                  <a:srgbClr val="0F172A"/>
-                </a:solidFill>
-                <a:latin typeface="Arial"/>
-              </a:defRPr>
-            </a:pPr>
-            <a:r>
-              <a:t>Kmit</a:t>
-            </a:r>
-          </a:p>
-        </p:txBody>
-      </p:sp>
-      <p:sp>
-        <p:nvSpPr>
-          <p:cNvPr id="5" name="TextBox 4"/>
+              <a:defRPr sz="3200" b="1">
+                <a:solidFill>
+                  <a:srgbClr val="FF0000"/>
+                </a:solidFill>
+                <a:latin typeface="Arial"/>
+              </a:defRPr>
+            </a:pPr>
+            <a:r>
+              <a:t>DESIGN</a:t>
+            </a:r>
+          </a:p>
+        </p:txBody>
+      </p:sp>
+      <p:sp>
+        <p:nvSpPr>
+          <p:cNvPr id="4" name="TextBox 3"/>
           <p:cNvSpPr txBox="1"/>
           <p:nvPr/>
         </p:nvSpPr>
         <p:spPr>
           <a:xfrm>
-            <a:off x="1097280" y="274320"/>
-            <a:ext cx="9601200" cy="731520"/>
+            <a:off x="978408" y="896112"/>
+            <a:ext cx="10058400" cy="457200"/>
           </a:xfrm>
           <a:prstGeom prst="rect">
             <a:avLst/>
@@ -8640,544 +6488,44 @@
           </a:bodyPr>
           <a:lstStyle/>
           <a:p>
-            <a:pPr>
-              <a:defRPr sz="2600" b="1">
-                <a:solidFill>
-                  <a:srgbClr val="DC2626"/>
-                </a:solidFill>
-                <a:latin typeface="Arial"/>
-              </a:defRPr>
-            </a:pPr>
-            <a:r>
-              <a:t>CLASS &amp; COMPONENT ARCHITECTURE</a:t>
-            </a:r>
-          </a:p>
-        </p:txBody>
-      </p:sp>
-      <p:sp>
-        <p:nvSpPr>
-          <p:cNvPr id="6" name="Rounded Rectangle 5"/>
-          <p:cNvSpPr/>
+            <a:pPr algn="ctr">
+              <a:defRPr sz="2000" b="1">
+                <a:solidFill>
+                  <a:srgbClr val="000000"/>
+                </a:solidFill>
+                <a:latin typeface="Arial"/>
+              </a:defRPr>
+            </a:pPr>
+            <a:r>
+              <a:t>Prahari – Component &amp; Class Architecture</a:t>
+            </a:r>
+          </a:p>
+        </p:txBody>
+      </p:sp>
+      <p:pic>
+        <p:nvPicPr>
+          <p:cNvPr id="5" name="Picture 4" descr="class_diagram.png"/>
+          <p:cNvPicPr>
+            <a:picLocks noChangeAspect="1"/>
+          </p:cNvPicPr>
           <p:nvPr/>
-        </p:nvSpPr>
+        </p:nvPicPr>
+        <p:blipFill>
+          <a:blip r:embed="rId3"/>
+          <a:stretch>
+            <a:fillRect/>
+          </a:stretch>
+        </p:blipFill>
         <p:spPr>
           <a:xfrm>
-            <a:off x="1097280" y="1371600"/>
-            <a:ext cx="4846320" cy="2377440"/>
+            <a:off x="1280160" y="1463040"/>
+            <a:ext cx="9628632" cy="4937760"/>
           </a:xfrm>
-          <a:prstGeom prst="roundRect">
+          <a:prstGeom prst="rect">
             <a:avLst/>
           </a:prstGeom>
-          <a:solidFill>
-            <a:srgbClr val="FFFFFF"/>
-          </a:solidFill>
-          <a:ln w="19050">
-            <a:solidFill>
-              <a:srgbClr val="0E7490"/>
-            </a:solidFill>
-          </a:ln>
         </p:spPr>
-        <p:style>
-          <a:lnRef idx="1">
-            <a:schemeClr val="accent1"/>
-          </a:lnRef>
-          <a:fillRef idx="3">
-            <a:schemeClr val="accent1"/>
-          </a:fillRef>
-          <a:effectRef idx="2">
-            <a:schemeClr val="accent1"/>
-          </a:effectRef>
-          <a:fontRef idx="minor">
-            <a:schemeClr val="lt1"/>
-          </a:fontRef>
-        </p:style>
-        <p:txBody>
-          <a:bodyPr rtlCol="0" anchor="ctr" wrap="square"/>
-          <a:lstStyle/>
-          <a:p>
-            <a:pPr algn="ctr">
-              <a:defRPr sz="1300" b="1">
-                <a:solidFill>
-                  <a:srgbClr val="0E7490"/>
-                </a:solidFill>
-                <a:latin typeface="Arial"/>
-              </a:defRPr>
-            </a:pPr>
-            <a:r>
-              <a:t>FastAPI Application (main.py)</a:t>
-            </a:r>
-          </a:p>
-          <a:p>
-            <a:pPr>
-              <a:spcBef>
-                <a:spcPts val="400"/>
-              </a:spcBef>
-              <a:defRPr sz="1000">
-                <a:solidFill>
-                  <a:srgbClr val="1E293B"/>
-                </a:solidFill>
-                <a:latin typeface="Arial"/>
-              </a:defRPr>
-            </a:pPr>
-            <a:r>
-              <a:t>+ get_events(critical_only: bool)</a:t>
-            </a:r>
-          </a:p>
-          <a:p>
-            <a:pPr>
-              <a:spcBef>
-                <a:spcPts val="400"/>
-              </a:spcBef>
-              <a:defRPr sz="1000">
-                <a:solidFill>
-                  <a:srgbClr val="1E293B"/>
-                </a:solidFill>
-                <a:latin typeface="Arial"/>
-              </a:defRPr>
-            </a:pPr>
-            <a:r>
-              <a:t>+ get_event_details(event_id: str)</a:t>
-            </a:r>
-          </a:p>
-          <a:p>
-            <a:pPr>
-              <a:spcBef>
-                <a:spcPts val="400"/>
-              </a:spcBef>
-              <a:defRPr sz="1000">
-                <a:solidFill>
-                  <a:srgbClr val="1E293B"/>
-                </a:solidFill>
-                <a:latin typeface="Arial"/>
-              </a:defRPr>
-            </a:pPr>
-            <a:r>
-              <a:t>+ predict_cdm(file: UploadFile)</a:t>
-            </a:r>
-          </a:p>
-          <a:p>
-            <a:pPr>
-              <a:spcBef>
-                <a:spcPts val="400"/>
-              </a:spcBef>
-              <a:defRPr sz="1000">
-                <a:solidFill>
-                  <a:srgbClr val="1E293B"/>
-                </a:solidFill>
-                <a:latin typeface="Arial"/>
-              </a:defRPr>
-            </a:pPr>
-            <a:r>
-              <a:t>+ get_model_info(): Dict[str, Any]</a:t>
-            </a:r>
-          </a:p>
-          <a:p>
-            <a:pPr>
-              <a:spcBef>
-                <a:spcPts val="400"/>
-              </a:spcBef>
-              <a:defRPr sz="1000">
-                <a:solidFill>
-                  <a:srgbClr val="1E293B"/>
-                </a:solidFill>
-                <a:latin typeface="Arial"/>
-              </a:defRPr>
-            </a:pPr>
-            <a:r>
-              <a:t>+ health_check(): Dict[str, str]</a:t>
-            </a:r>
-          </a:p>
-        </p:txBody>
-      </p:sp>
-      <p:sp>
-        <p:nvSpPr>
-          <p:cNvPr id="7" name="Rounded Rectangle 6"/>
-          <p:cNvSpPr/>
-          <p:nvPr/>
-        </p:nvSpPr>
-        <p:spPr>
-          <a:xfrm>
-            <a:off x="6309360" y="1371600"/>
-            <a:ext cx="4846320" cy="2377440"/>
-          </a:xfrm>
-          <a:prstGeom prst="roundRect">
-            <a:avLst/>
-          </a:prstGeom>
-          <a:solidFill>
-            <a:srgbClr val="FFFFFF"/>
-          </a:solidFill>
-          <a:ln w="19050">
-            <a:solidFill>
-              <a:srgbClr val="DC2626"/>
-            </a:solidFill>
-          </a:ln>
-        </p:spPr>
-        <p:style>
-          <a:lnRef idx="1">
-            <a:schemeClr val="accent1"/>
-          </a:lnRef>
-          <a:fillRef idx="3">
-            <a:schemeClr val="accent1"/>
-          </a:fillRef>
-          <a:effectRef idx="2">
-            <a:schemeClr val="accent1"/>
-          </a:effectRef>
-          <a:fontRef idx="minor">
-            <a:schemeClr val="lt1"/>
-          </a:fontRef>
-        </p:style>
-        <p:txBody>
-          <a:bodyPr rtlCol="0" anchor="ctr" wrap="square"/>
-          <a:lstStyle/>
-          <a:p>
-            <a:pPr algn="ctr">
-              <a:defRPr sz="1300" b="1">
-                <a:solidFill>
-                  <a:srgbClr val="DC2626"/>
-                </a:solidFill>
-                <a:latin typeface="Arial"/>
-              </a:defRPr>
-            </a:pPr>
-            <a:r>
-              <a:t>PredictionService (prediction_service.py)</a:t>
-            </a:r>
-          </a:p>
-          <a:p>
-            <a:pPr>
-              <a:spcBef>
-                <a:spcPts val="400"/>
-              </a:spcBef>
-              <a:defRPr sz="1000">
-                <a:solidFill>
-                  <a:srgbClr val="1E293B"/>
-                </a:solidFill>
-                <a:latin typeface="Arial"/>
-              </a:defRPr>
-            </a:pPr>
-            <a:r>
-              <a:t>+ model: XGBRegressor</a:t>
-            </a:r>
-          </a:p>
-          <a:p>
-            <a:pPr>
-              <a:spcBef>
-                <a:spcPts val="400"/>
-              </a:spcBef>
-              <a:defRPr sz="1000">
-                <a:solidFill>
-                  <a:srgbClr val="1E293B"/>
-                </a:solidFill>
-                <a:latin typeface="Arial"/>
-              </a:defRPr>
-            </a:pPr>
-            <a:r>
-              <a:t>+ feature_cols: List[str] (100 cols)</a:t>
-            </a:r>
-          </a:p>
-          <a:p>
-            <a:pPr>
-              <a:spcBef>
-                <a:spcPts val="400"/>
-              </a:spcBef>
-              <a:defRPr sz="1000">
-                <a:solidFill>
-                  <a:srgbClr val="1E293B"/>
-                </a:solidFill>
-                <a:latin typeface="Arial"/>
-              </a:defRPr>
-            </a:pPr>
-            <a:r>
-              <a:t>+ medians: Dict[str, float]</a:t>
-            </a:r>
-          </a:p>
-          <a:p>
-            <a:pPr>
-              <a:spcBef>
-                <a:spcPts val="400"/>
-              </a:spcBef>
-              <a:defRPr sz="1000">
-                <a:solidFill>
-                  <a:srgbClr val="1E293B"/>
-                </a:solidFill>
-                <a:latin typeface="Arial"/>
-              </a:defRPr>
-            </a:pPr>
-            <a:r>
-              <a:t>+ predict_event(cdm_rows, threshold)</a:t>
-            </a:r>
-          </a:p>
-          <a:p>
-            <a:pPr>
-              <a:spcBef>
-                <a:spcPts val="400"/>
-              </a:spcBef>
-              <a:defRPr sz="1000">
-                <a:solidFill>
-                  <a:srgbClr val="1E293B"/>
-                </a:solidFill>
-                <a:latin typeface="Arial"/>
-              </a:defRPr>
-            </a:pPr>
-            <a:r>
-              <a:t>+ load_model(): bool</a:t>
-            </a:r>
-          </a:p>
-        </p:txBody>
-      </p:sp>
-      <p:sp>
-        <p:nvSpPr>
-          <p:cNvPr id="8" name="Rounded Rectangle 7"/>
-          <p:cNvSpPr/>
-          <p:nvPr/>
-        </p:nvSpPr>
-        <p:spPr>
-          <a:xfrm>
-            <a:off x="1097280" y="3931920"/>
-            <a:ext cx="4846320" cy="2377440"/>
-          </a:xfrm>
-          <a:prstGeom prst="roundRect">
-            <a:avLst/>
-          </a:prstGeom>
-          <a:solidFill>
-            <a:srgbClr val="FFFFFF"/>
-          </a:solidFill>
-          <a:ln w="19050">
-            <a:solidFill>
-              <a:srgbClr val="0F766E"/>
-            </a:solidFill>
-          </a:ln>
-        </p:spPr>
-        <p:style>
-          <a:lnRef idx="1">
-            <a:schemeClr val="accent1"/>
-          </a:lnRef>
-          <a:fillRef idx="3">
-            <a:schemeClr val="accent1"/>
-          </a:fillRef>
-          <a:effectRef idx="2">
-            <a:schemeClr val="accent1"/>
-          </a:effectRef>
-          <a:fontRef idx="minor">
-            <a:schemeClr val="lt1"/>
-          </a:fontRef>
-        </p:style>
-        <p:txBody>
-          <a:bodyPr rtlCol="0" anchor="ctr" wrap="square"/>
-          <a:lstStyle/>
-          <a:p>
-            <a:pPr algn="ctr">
-              <a:defRPr sz="1300" b="1">
-                <a:solidFill>
-                  <a:srgbClr val="0F766E"/>
-                </a:solidFill>
-                <a:latin typeface="Arial"/>
-              </a:defRPr>
-            </a:pPr>
-            <a:r>
-              <a:t>DatasetService (dataset_service.py)</a:t>
-            </a:r>
-          </a:p>
-          <a:p>
-            <a:pPr>
-              <a:spcBef>
-                <a:spcPts val="400"/>
-              </a:spcBef>
-              <a:defRPr sz="1000">
-                <a:solidFill>
-                  <a:srgbClr val="1E293B"/>
-                </a:solidFill>
-                <a:latin typeface="Arial"/>
-              </a:defRPr>
-            </a:pPr>
-            <a:r>
-              <a:t>+ df: DataFrame</a:t>
-            </a:r>
-          </a:p>
-          <a:p>
-            <a:pPr>
-              <a:spcBef>
-                <a:spcPts val="400"/>
-              </a:spcBef>
-              <a:defRPr sz="1000">
-                <a:solidFill>
-                  <a:srgbClr val="1E293B"/>
-                </a:solidFill>
-                <a:latin typeface="Arial"/>
-              </a:defRPr>
-            </a:pPr>
-            <a:r>
-              <a:t>+ events_cache: List[Dict]</a:t>
-            </a:r>
-          </a:p>
-          <a:p>
-            <a:pPr>
-              <a:spcBef>
-                <a:spcPts val="400"/>
-              </a:spcBef>
-              <a:defRPr sz="1000">
-                <a:solidFill>
-                  <a:srgbClr val="1E293B"/>
-                </a:solidFill>
-                <a:latin typeface="Arial"/>
-              </a:defRPr>
-            </a:pPr>
-            <a:r>
-              <a:t>+ load_dataset(): void</a:t>
-            </a:r>
-          </a:p>
-          <a:p>
-            <a:pPr>
-              <a:spcBef>
-                <a:spcPts val="400"/>
-              </a:spcBef>
-              <a:defRPr sz="1000">
-                <a:solidFill>
-                  <a:srgbClr val="1E293B"/>
-                </a:solidFill>
-                <a:latin typeface="Arial"/>
-              </a:defRPr>
-            </a:pPr>
-            <a:r>
-              <a:t>+ get_events(): List[Dict]</a:t>
-            </a:r>
-          </a:p>
-          <a:p>
-            <a:pPr>
-              <a:spcBef>
-                <a:spcPts val="400"/>
-              </a:spcBef>
-              <a:defRPr sz="1000">
-                <a:solidFill>
-                  <a:srgbClr val="1E293B"/>
-                </a:solidFill>
-                <a:latin typeface="Arial"/>
-              </a:defRPr>
-            </a:pPr>
-            <a:r>
-              <a:t>+ get_event_details(id): Dict</a:t>
-            </a:r>
-          </a:p>
-        </p:txBody>
-      </p:sp>
-      <p:sp>
-        <p:nvSpPr>
-          <p:cNvPr id="9" name="Rounded Rectangle 8"/>
-          <p:cNvSpPr/>
-          <p:nvPr/>
-        </p:nvSpPr>
-        <p:spPr>
-          <a:xfrm>
-            <a:off x="6309360" y="3931920"/>
-            <a:ext cx="4846320" cy="2377440"/>
-          </a:xfrm>
-          <a:prstGeom prst="roundRect">
-            <a:avLst/>
-          </a:prstGeom>
-          <a:solidFill>
-            <a:srgbClr val="FFFFFF"/>
-          </a:solidFill>
-          <a:ln w="19050">
-            <a:solidFill>
-              <a:srgbClr val="9333EA"/>
-            </a:solidFill>
-          </a:ln>
-        </p:spPr>
-        <p:style>
-          <a:lnRef idx="1">
-            <a:schemeClr val="accent1"/>
-          </a:lnRef>
-          <a:fillRef idx="3">
-            <a:schemeClr val="accent1"/>
-          </a:fillRef>
-          <a:effectRef idx="2">
-            <a:schemeClr val="accent1"/>
-          </a:effectRef>
-          <a:fontRef idx="minor">
-            <a:schemeClr val="lt1"/>
-          </a:fontRef>
-        </p:style>
-        <p:txBody>
-          <a:bodyPr rtlCol="0" anchor="ctr" wrap="square"/>
-          <a:lstStyle/>
-          <a:p>
-            <a:pPr algn="ctr">
-              <a:defRPr sz="1300" b="1">
-                <a:solidFill>
-                  <a:srgbClr val="9333EA"/>
-                </a:solidFill>
-                <a:latin typeface="Arial"/>
-              </a:defRPr>
-            </a:pPr>
-            <a:r>
-              <a:t>Mission Control UI (React + Three.js)</a:t>
-            </a:r>
-          </a:p>
-          <a:p>
-            <a:pPr>
-              <a:spcBef>
-                <a:spcPts val="400"/>
-              </a:spcBef>
-              <a:defRPr sz="1000">
-                <a:solidFill>
-                  <a:srgbClr val="1E293B"/>
-                </a:solidFill>
-                <a:latin typeface="Arial"/>
-              </a:defRPr>
-            </a:pPr>
-            <a:r>
-              <a:t>+ EncounterScene.tsx (3D WebGL Orbit Scene)</a:t>
-            </a:r>
-          </a:p>
-          <a:p>
-            <a:pPr>
-              <a:spcBef>
-                <a:spcPts val="400"/>
-              </a:spcBef>
-              <a:defRPr sz="1000">
-                <a:solidFill>
-                  <a:srgbClr val="1E293B"/>
-                </a:solidFill>
-                <a:latin typeface="Arial"/>
-              </a:defRPr>
-            </a:pPr>
-            <a:r>
-              <a:t>+ ModelLabPage.tsx (Threshold Slider &amp; SHAP)</a:t>
-            </a:r>
-          </a:p>
-          <a:p>
-            <a:pPr>
-              <a:spcBef>
-                <a:spcPts val="400"/>
-              </a:spcBef>
-              <a:defRPr sz="1000">
-                <a:solidFill>
-                  <a:srgbClr val="1E293B"/>
-                </a:solidFill>
-                <a:latin typeface="Arial"/>
-              </a:defRPr>
-            </a:pPr>
-            <a:r>
-              <a:t>+ OverviewPage.tsx (Live CDM Dashboard)</a:t>
-            </a:r>
-          </a:p>
-          <a:p>
-            <a:pPr>
-              <a:spcBef>
-                <a:spcPts val="400"/>
-              </a:spcBef>
-              <a:defRPr sz="1000">
-                <a:solidFill>
-                  <a:srgbClr val="1E293B"/>
-                </a:solidFill>
-                <a:latin typeface="Arial"/>
-              </a:defRPr>
-            </a:pPr>
-            <a:r>
-              <a:t>+ PredictionPage.tsx (CSV Upload Module)</a:t>
-            </a:r>
-          </a:p>
-        </p:txBody>
-      </p:sp>
+      </p:pic>
     </p:spTree>
   </p:cSld>
   <p:clrMapOvr>

--- a/docs/Prahari_Presentation.pptx
+++ b/docs/Prahari_Presentation.pptx
@@ -5,21 +5,21 @@
     <p:sldMasterId id="2147483648" r:id="rId1"/>
   </p:sldMasterIdLst>
   <p:sldIdLst>
-    <p:sldId id="256" r:id="rId7"/>
-    <p:sldId id="257" r:id="rId8"/>
-    <p:sldId id="258" r:id="rId9"/>
-    <p:sldId id="259" r:id="rId10"/>
-    <p:sldId id="260" r:id="rId11"/>
-    <p:sldId id="261" r:id="rId12"/>
-    <p:sldId id="262" r:id="rId13"/>
-    <p:sldId id="263" r:id="rId14"/>
-    <p:sldId id="264" r:id="rId15"/>
-    <p:sldId id="265" r:id="rId16"/>
-    <p:sldId id="266" r:id="rId17"/>
-    <p:sldId id="267" r:id="rId18"/>
-    <p:sldId id="268" r:id="rId19"/>
+    <p:sldId id="256" r:id="rId2"/>
+    <p:sldId id="257" r:id="rId3"/>
+    <p:sldId id="258" r:id="rId4"/>
+    <p:sldId id="259" r:id="rId5"/>
+    <p:sldId id="260" r:id="rId6"/>
+    <p:sldId id="261" r:id="rId7"/>
+    <p:sldId id="262" r:id="rId8"/>
+    <p:sldId id="263" r:id="rId9"/>
+    <p:sldId id="264" r:id="rId10"/>
+    <p:sldId id="265" r:id="rId11"/>
+    <p:sldId id="266" r:id="rId12"/>
+    <p:sldId id="267" r:id="rId13"/>
+    <p:sldId id="268" r:id="rId14"/>
   </p:sldIdLst>
-  <p:sldSz cx="12191695" cy="6858000" type="screen4x3"/>
+  <p:sldSz cx="12192000" cy="6858000"/>
   <p:notesSz cx="6858000" cy="9144000"/>
   <p:defaultTextStyle>
     <a:defPPr>
@@ -116,6 +116,22 @@
       </a:defRPr>
     </a:lvl9pPr>
   </p:defaultTextStyle>
+  <p:extLst>
+    <p:ext uri="{EFAFB233-063F-42B5-8137-9DF3F51BA10A}">
+      <p15:sldGuideLst xmlns:p15="http://schemas.microsoft.com/office/powerpoint/2012/main">
+        <p15:guide id="1" orient="horz" pos="2160">
+          <p15:clr>
+            <a:srgbClr val="A4A3A4"/>
+          </p15:clr>
+        </p15:guide>
+        <p15:guide id="2" pos="2880">
+          <p15:clr>
+            <a:srgbClr val="A4A3A4"/>
+          </p15:clr>
+        </p15:guide>
+      </p15:sldGuideLst>
+    </p:ext>
+  </p:extLst>
 </p:presentation>
 </file>
 
@@ -157,10 +173,9 @@
           <a:lstStyle/>
           <a:p>
             <a:r>
-              <a:rPr lang="en-US" smtClean="0"/>
+              <a:rPr lang="en-US"/>
               <a:t>Click to edit Master title style</a:t>
             </a:r>
-            <a:endParaRPr lang="en-US"/>
           </a:p>
         </p:txBody>
       </p:sp>
@@ -276,10 +291,9 @@
           </a:lstStyle>
           <a:p>
             <a:r>
-              <a:rPr lang="en-US" smtClean="0"/>
+              <a:rPr lang="en-US"/>
               <a:t>Click to edit Master subtitle style</a:t>
             </a:r>
-            <a:endParaRPr lang="en-US"/>
           </a:p>
         </p:txBody>
       </p:sp>
@@ -300,7 +314,7 @@
           <a:p>
             <a:fld id="{5BCAD085-E8A6-8845-BD4E-CB4CCA059FC4}" type="datetimeFigureOut">
               <a:rPr lang="en-US" smtClean="0"/>
-              <a:t>1/27/13</a:t>
+              <a:t>9/25/2026</a:t>
             </a:fld>
             <a:endParaRPr lang="en-US"/>
           </a:p>
@@ -394,10 +408,9 @@
           <a:lstStyle/>
           <a:p>
             <a:r>
-              <a:rPr lang="en-US" smtClean="0"/>
+              <a:rPr lang="en-US"/>
               <a:t>Click to edit Master title style</a:t>
             </a:r>
-            <a:endParaRPr lang="en-US"/>
           </a:p>
         </p:txBody>
       </p:sp>
@@ -418,38 +431,37 @@
           <a:p>
             <a:pPr lvl="0"/>
             <a:r>
-              <a:rPr lang="en-US" smtClean="0"/>
+              <a:rPr lang="en-US"/>
               <a:t>Click to edit Master text styles</a:t>
             </a:r>
           </a:p>
           <a:p>
             <a:pPr lvl="1"/>
             <a:r>
-              <a:rPr lang="en-US" smtClean="0"/>
+              <a:rPr lang="en-US"/>
               <a:t>Second level</a:t>
             </a:r>
           </a:p>
           <a:p>
             <a:pPr lvl="2"/>
             <a:r>
-              <a:rPr lang="en-US" smtClean="0"/>
+              <a:rPr lang="en-US"/>
               <a:t>Third level</a:t>
             </a:r>
           </a:p>
           <a:p>
             <a:pPr lvl="3"/>
             <a:r>
-              <a:rPr lang="en-US" smtClean="0"/>
+              <a:rPr lang="en-US"/>
               <a:t>Fourth level</a:t>
             </a:r>
           </a:p>
           <a:p>
             <a:pPr lvl="4"/>
             <a:r>
-              <a:rPr lang="en-US" smtClean="0"/>
+              <a:rPr lang="en-US"/>
               <a:t>Fifth level</a:t>
             </a:r>
-            <a:endParaRPr lang="en-US"/>
           </a:p>
         </p:txBody>
       </p:sp>
@@ -470,7 +482,7 @@
           <a:p>
             <a:fld id="{5BCAD085-E8A6-8845-BD4E-CB4CCA059FC4}" type="datetimeFigureOut">
               <a:rPr lang="en-US" smtClean="0"/>
-              <a:t>1/27/13</a:t>
+              <a:t>9/25/2026</a:t>
             </a:fld>
             <a:endParaRPr lang="en-US"/>
           </a:p>
@@ -569,10 +581,9 @@
           <a:lstStyle/>
           <a:p>
             <a:r>
-              <a:rPr lang="en-US" smtClean="0"/>
+              <a:rPr lang="en-US"/>
               <a:t>Click to edit Master title style</a:t>
             </a:r>
-            <a:endParaRPr lang="en-US"/>
           </a:p>
         </p:txBody>
       </p:sp>
@@ -598,38 +609,37 @@
           <a:p>
             <a:pPr lvl="0"/>
             <a:r>
-              <a:rPr lang="en-US" smtClean="0"/>
+              <a:rPr lang="en-US"/>
               <a:t>Click to edit Master text styles</a:t>
             </a:r>
           </a:p>
           <a:p>
             <a:pPr lvl="1"/>
             <a:r>
-              <a:rPr lang="en-US" smtClean="0"/>
+              <a:rPr lang="en-US"/>
               <a:t>Second level</a:t>
             </a:r>
           </a:p>
           <a:p>
             <a:pPr lvl="2"/>
             <a:r>
-              <a:rPr lang="en-US" smtClean="0"/>
+              <a:rPr lang="en-US"/>
               <a:t>Third level</a:t>
             </a:r>
           </a:p>
           <a:p>
             <a:pPr lvl="3"/>
             <a:r>
-              <a:rPr lang="en-US" smtClean="0"/>
+              <a:rPr lang="en-US"/>
               <a:t>Fourth level</a:t>
             </a:r>
           </a:p>
           <a:p>
             <a:pPr lvl="4"/>
             <a:r>
-              <a:rPr lang="en-US" smtClean="0"/>
+              <a:rPr lang="en-US"/>
               <a:t>Fifth level</a:t>
             </a:r>
-            <a:endParaRPr lang="en-US"/>
           </a:p>
         </p:txBody>
       </p:sp>
@@ -650,7 +660,7 @@
           <a:p>
             <a:fld id="{5BCAD085-E8A6-8845-BD4E-CB4CCA059FC4}" type="datetimeFigureOut">
               <a:rPr lang="en-US" smtClean="0"/>
-              <a:t>1/27/13</a:t>
+              <a:t>9/25/2026</a:t>
             </a:fld>
             <a:endParaRPr lang="en-US"/>
           </a:p>
@@ -744,10 +754,9 @@
           <a:lstStyle/>
           <a:p>
             <a:r>
-              <a:rPr lang="en-US" smtClean="0"/>
+              <a:rPr lang="en-US"/>
               <a:t>Click to edit Master title style</a:t>
             </a:r>
-            <a:endParaRPr lang="en-US"/>
           </a:p>
         </p:txBody>
       </p:sp>
@@ -768,38 +777,37 @@
           <a:p>
             <a:pPr lvl="0"/>
             <a:r>
-              <a:rPr lang="en-US" smtClean="0"/>
+              <a:rPr lang="en-US"/>
               <a:t>Click to edit Master text styles</a:t>
             </a:r>
           </a:p>
           <a:p>
             <a:pPr lvl="1"/>
             <a:r>
-              <a:rPr lang="en-US" smtClean="0"/>
+              <a:rPr lang="en-US"/>
               <a:t>Second level</a:t>
             </a:r>
           </a:p>
           <a:p>
             <a:pPr lvl="2"/>
             <a:r>
-              <a:rPr lang="en-US" smtClean="0"/>
+              <a:rPr lang="en-US"/>
               <a:t>Third level</a:t>
             </a:r>
           </a:p>
           <a:p>
             <a:pPr lvl="3"/>
             <a:r>
-              <a:rPr lang="en-US" smtClean="0"/>
+              <a:rPr lang="en-US"/>
               <a:t>Fourth level</a:t>
             </a:r>
           </a:p>
           <a:p>
             <a:pPr lvl="4"/>
             <a:r>
-              <a:rPr lang="en-US" smtClean="0"/>
+              <a:rPr lang="en-US"/>
               <a:t>Fifth level</a:t>
             </a:r>
-            <a:endParaRPr lang="en-US"/>
           </a:p>
         </p:txBody>
       </p:sp>
@@ -820,7 +828,7 @@
           <a:p>
             <a:fld id="{5BCAD085-E8A6-8845-BD4E-CB4CCA059FC4}" type="datetimeFigureOut">
               <a:rPr lang="en-US" smtClean="0"/>
-              <a:t>1/27/13</a:t>
+              <a:t>9/25/2026</a:t>
             </a:fld>
             <a:endParaRPr lang="en-US"/>
           </a:p>
@@ -923,10 +931,9 @@
           </a:lstStyle>
           <a:p>
             <a:r>
-              <a:rPr lang="en-US" smtClean="0"/>
+              <a:rPr lang="en-US"/>
               <a:t>Click to edit Master title style</a:t>
             </a:r>
-            <a:endParaRPr lang="en-US"/>
           </a:p>
         </p:txBody>
       </p:sp>
@@ -1043,7 +1050,7 @@
           <a:p>
             <a:pPr lvl="0"/>
             <a:r>
-              <a:rPr lang="en-US" smtClean="0"/>
+              <a:rPr lang="en-US"/>
               <a:t>Click to edit Master text styles</a:t>
             </a:r>
           </a:p>
@@ -1066,7 +1073,7 @@
           <a:p>
             <a:fld id="{5BCAD085-E8A6-8845-BD4E-CB4CCA059FC4}" type="datetimeFigureOut">
               <a:rPr lang="en-US" smtClean="0"/>
-              <a:t>1/27/13</a:t>
+              <a:t>9/25/2026</a:t>
             </a:fld>
             <a:endParaRPr lang="en-US"/>
           </a:p>
@@ -1160,10 +1167,9 @@
           <a:lstStyle/>
           <a:p>
             <a:r>
-              <a:rPr lang="en-US" smtClean="0"/>
+              <a:rPr lang="en-US"/>
               <a:t>Click to edit Master title style</a:t>
             </a:r>
-            <a:endParaRPr lang="en-US"/>
           </a:p>
         </p:txBody>
       </p:sp>
@@ -1217,38 +1223,37 @@
           <a:p>
             <a:pPr lvl="0"/>
             <a:r>
-              <a:rPr lang="en-US" smtClean="0"/>
+              <a:rPr lang="en-US"/>
               <a:t>Click to edit Master text styles</a:t>
             </a:r>
           </a:p>
           <a:p>
             <a:pPr lvl="1"/>
             <a:r>
-              <a:rPr lang="en-US" smtClean="0"/>
+              <a:rPr lang="en-US"/>
               <a:t>Second level</a:t>
             </a:r>
           </a:p>
           <a:p>
             <a:pPr lvl="2"/>
             <a:r>
-              <a:rPr lang="en-US" smtClean="0"/>
+              <a:rPr lang="en-US"/>
               <a:t>Third level</a:t>
             </a:r>
           </a:p>
           <a:p>
             <a:pPr lvl="3"/>
             <a:r>
-              <a:rPr lang="en-US" smtClean="0"/>
+              <a:rPr lang="en-US"/>
               <a:t>Fourth level</a:t>
             </a:r>
           </a:p>
           <a:p>
             <a:pPr lvl="4"/>
             <a:r>
-              <a:rPr lang="en-US" smtClean="0"/>
+              <a:rPr lang="en-US"/>
               <a:t>Fifth level</a:t>
             </a:r>
-            <a:endParaRPr lang="en-US"/>
           </a:p>
         </p:txBody>
       </p:sp>
@@ -1302,38 +1307,37 @@
           <a:p>
             <a:pPr lvl="0"/>
             <a:r>
-              <a:rPr lang="en-US" smtClean="0"/>
+              <a:rPr lang="en-US"/>
               <a:t>Click to edit Master text styles</a:t>
             </a:r>
           </a:p>
           <a:p>
             <a:pPr lvl="1"/>
             <a:r>
-              <a:rPr lang="en-US" smtClean="0"/>
+              <a:rPr lang="en-US"/>
               <a:t>Second level</a:t>
             </a:r>
           </a:p>
           <a:p>
             <a:pPr lvl="2"/>
             <a:r>
-              <a:rPr lang="en-US" smtClean="0"/>
+              <a:rPr lang="en-US"/>
               <a:t>Third level</a:t>
             </a:r>
           </a:p>
           <a:p>
             <a:pPr lvl="3"/>
             <a:r>
-              <a:rPr lang="en-US" smtClean="0"/>
+              <a:rPr lang="en-US"/>
               <a:t>Fourth level</a:t>
             </a:r>
           </a:p>
           <a:p>
             <a:pPr lvl="4"/>
             <a:r>
-              <a:rPr lang="en-US" smtClean="0"/>
+              <a:rPr lang="en-US"/>
               <a:t>Fifth level</a:t>
             </a:r>
-            <a:endParaRPr lang="en-US"/>
           </a:p>
         </p:txBody>
       </p:sp>
@@ -1354,7 +1358,7 @@
           <a:p>
             <a:fld id="{5BCAD085-E8A6-8845-BD4E-CB4CCA059FC4}" type="datetimeFigureOut">
               <a:rPr lang="en-US" smtClean="0"/>
-              <a:t>1/27/13</a:t>
+              <a:t>9/25/2026</a:t>
             </a:fld>
             <a:endParaRPr lang="en-US"/>
           </a:p>
@@ -1452,10 +1456,9 @@
           </a:lstStyle>
           <a:p>
             <a:r>
-              <a:rPr lang="en-US" smtClean="0"/>
+              <a:rPr lang="en-US"/>
               <a:t>Click to edit Master title style</a:t>
             </a:r>
-            <a:endParaRPr lang="en-US"/>
           </a:p>
         </p:txBody>
       </p:sp>
@@ -1518,7 +1521,7 @@
           <a:p>
             <a:pPr lvl="0"/>
             <a:r>
-              <a:rPr lang="en-US" smtClean="0"/>
+              <a:rPr lang="en-US"/>
               <a:t>Click to edit Master text styles</a:t>
             </a:r>
           </a:p>
@@ -1574,38 +1577,37 @@
           <a:p>
             <a:pPr lvl="0"/>
             <a:r>
-              <a:rPr lang="en-US" smtClean="0"/>
+              <a:rPr lang="en-US"/>
               <a:t>Click to edit Master text styles</a:t>
             </a:r>
           </a:p>
           <a:p>
             <a:pPr lvl="1"/>
             <a:r>
-              <a:rPr lang="en-US" smtClean="0"/>
+              <a:rPr lang="en-US"/>
               <a:t>Second level</a:t>
             </a:r>
           </a:p>
           <a:p>
             <a:pPr lvl="2"/>
             <a:r>
-              <a:rPr lang="en-US" smtClean="0"/>
+              <a:rPr lang="en-US"/>
               <a:t>Third level</a:t>
             </a:r>
           </a:p>
           <a:p>
             <a:pPr lvl="3"/>
             <a:r>
-              <a:rPr lang="en-US" smtClean="0"/>
+              <a:rPr lang="en-US"/>
               <a:t>Fourth level</a:t>
             </a:r>
           </a:p>
           <a:p>
             <a:pPr lvl="4"/>
             <a:r>
-              <a:rPr lang="en-US" smtClean="0"/>
+              <a:rPr lang="en-US"/>
               <a:t>Fifth level</a:t>
             </a:r>
-            <a:endParaRPr lang="en-US"/>
           </a:p>
         </p:txBody>
       </p:sp>
@@ -1668,7 +1670,7 @@
           <a:p>
             <a:pPr lvl="0"/>
             <a:r>
-              <a:rPr lang="en-US" smtClean="0"/>
+              <a:rPr lang="en-US"/>
               <a:t>Click to edit Master text styles</a:t>
             </a:r>
           </a:p>
@@ -1724,38 +1726,37 @@
           <a:p>
             <a:pPr lvl="0"/>
             <a:r>
-              <a:rPr lang="en-US" smtClean="0"/>
+              <a:rPr lang="en-US"/>
               <a:t>Click to edit Master text styles</a:t>
             </a:r>
           </a:p>
           <a:p>
             <a:pPr lvl="1"/>
             <a:r>
-              <a:rPr lang="en-US" smtClean="0"/>
+              <a:rPr lang="en-US"/>
               <a:t>Second level</a:t>
             </a:r>
           </a:p>
           <a:p>
             <a:pPr lvl="2"/>
             <a:r>
-              <a:rPr lang="en-US" smtClean="0"/>
+              <a:rPr lang="en-US"/>
               <a:t>Third level</a:t>
             </a:r>
           </a:p>
           <a:p>
             <a:pPr lvl="3"/>
             <a:r>
-              <a:rPr lang="en-US" smtClean="0"/>
+              <a:rPr lang="en-US"/>
               <a:t>Fourth level</a:t>
             </a:r>
           </a:p>
           <a:p>
             <a:pPr lvl="4"/>
             <a:r>
-              <a:rPr lang="en-US" smtClean="0"/>
+              <a:rPr lang="en-US"/>
               <a:t>Fifth level</a:t>
             </a:r>
-            <a:endParaRPr lang="en-US"/>
           </a:p>
         </p:txBody>
       </p:sp>
@@ -1776,7 +1777,7 @@
           <a:p>
             <a:fld id="{5BCAD085-E8A6-8845-BD4E-CB4CCA059FC4}" type="datetimeFigureOut">
               <a:rPr lang="en-US" smtClean="0"/>
-              <a:t>1/27/13</a:t>
+              <a:t>9/25/2026</a:t>
             </a:fld>
             <a:endParaRPr lang="en-US"/>
           </a:p>
@@ -1870,10 +1871,9 @@
           <a:lstStyle/>
           <a:p>
             <a:r>
-              <a:rPr lang="en-US" smtClean="0"/>
+              <a:rPr lang="en-US"/>
               <a:t>Click to edit Master title style</a:t>
             </a:r>
-            <a:endParaRPr lang="en-US"/>
           </a:p>
         </p:txBody>
       </p:sp>
@@ -1894,7 +1894,7 @@
           <a:p>
             <a:fld id="{5BCAD085-E8A6-8845-BD4E-CB4CCA059FC4}" type="datetimeFigureOut">
               <a:rPr lang="en-US" smtClean="0"/>
-              <a:t>1/27/13</a:t>
+              <a:t>9/25/2026</a:t>
             </a:fld>
             <a:endParaRPr lang="en-US"/>
           </a:p>
@@ -1989,7 +1989,7 @@
           <a:p>
             <a:fld id="{5BCAD085-E8A6-8845-BD4E-CB4CCA059FC4}" type="datetimeFigureOut">
               <a:rPr lang="en-US" smtClean="0"/>
-              <a:t>1/27/13</a:t>
+              <a:t>9/25/2026</a:t>
             </a:fld>
             <a:endParaRPr lang="en-US"/>
           </a:p>
@@ -2092,10 +2092,9 @@
           </a:lstStyle>
           <a:p>
             <a:r>
-              <a:rPr lang="en-US" smtClean="0"/>
+              <a:rPr lang="en-US"/>
               <a:t>Click to edit Master title style</a:t>
             </a:r>
-            <a:endParaRPr lang="en-US"/>
           </a:p>
         </p:txBody>
       </p:sp>
@@ -2149,38 +2148,37 @@
           <a:p>
             <a:pPr lvl="0"/>
             <a:r>
-              <a:rPr lang="en-US" smtClean="0"/>
+              <a:rPr lang="en-US"/>
               <a:t>Click to edit Master text styles</a:t>
             </a:r>
           </a:p>
           <a:p>
             <a:pPr lvl="1"/>
             <a:r>
-              <a:rPr lang="en-US" smtClean="0"/>
+              <a:rPr lang="en-US"/>
               <a:t>Second level</a:t>
             </a:r>
           </a:p>
           <a:p>
             <a:pPr lvl="2"/>
             <a:r>
-              <a:rPr lang="en-US" smtClean="0"/>
+              <a:rPr lang="en-US"/>
               <a:t>Third level</a:t>
             </a:r>
           </a:p>
           <a:p>
             <a:pPr lvl="3"/>
             <a:r>
-              <a:rPr lang="en-US" smtClean="0"/>
+              <a:rPr lang="en-US"/>
               <a:t>Fourth level</a:t>
             </a:r>
           </a:p>
           <a:p>
             <a:pPr lvl="4"/>
             <a:r>
-              <a:rPr lang="en-US" smtClean="0"/>
+              <a:rPr lang="en-US"/>
               <a:t>Fifth level</a:t>
             </a:r>
-            <a:endParaRPr lang="en-US"/>
           </a:p>
         </p:txBody>
       </p:sp>
@@ -2243,7 +2241,7 @@
           <a:p>
             <a:pPr lvl="0"/>
             <a:r>
-              <a:rPr lang="en-US" smtClean="0"/>
+              <a:rPr lang="en-US"/>
               <a:t>Click to edit Master text styles</a:t>
             </a:r>
           </a:p>
@@ -2266,7 +2264,7 @@
           <a:p>
             <a:fld id="{5BCAD085-E8A6-8845-BD4E-CB4CCA059FC4}" type="datetimeFigureOut">
               <a:rPr lang="en-US" smtClean="0"/>
-              <a:t>1/27/13</a:t>
+              <a:t>9/25/2026</a:t>
             </a:fld>
             <a:endParaRPr lang="en-US"/>
           </a:p>
@@ -2369,10 +2367,9 @@
           </a:lstStyle>
           <a:p>
             <a:r>
-              <a:rPr lang="en-US" smtClean="0"/>
+              <a:rPr lang="en-US"/>
               <a:t>Click to edit Master title style</a:t>
             </a:r>
-            <a:endParaRPr lang="en-US"/>
           </a:p>
         </p:txBody>
       </p:sp>
@@ -2496,7 +2493,7 @@
           <a:p>
             <a:pPr lvl="0"/>
             <a:r>
-              <a:rPr lang="en-US" smtClean="0"/>
+              <a:rPr lang="en-US"/>
               <a:t>Click to edit Master text styles</a:t>
             </a:r>
           </a:p>
@@ -2519,7 +2516,7 @@
           <a:p>
             <a:fld id="{5BCAD085-E8A6-8845-BD4E-CB4CCA059FC4}" type="datetimeFigureOut">
               <a:rPr lang="en-US" smtClean="0"/>
-              <a:t>1/27/13</a:t>
+              <a:t>9/25/2026</a:t>
             </a:fld>
             <a:endParaRPr lang="en-US"/>
           </a:p>
@@ -2628,10 +2625,9 @@
           <a:lstStyle/>
           <a:p>
             <a:r>
-              <a:rPr lang="en-US" smtClean="0"/>
+              <a:rPr lang="en-US"/>
               <a:t>Click to edit Master title style</a:t>
             </a:r>
-            <a:endParaRPr lang="en-US"/>
           </a:p>
         </p:txBody>
       </p:sp>
@@ -2662,38 +2658,37 @@
           <a:p>
             <a:pPr lvl="0"/>
             <a:r>
-              <a:rPr lang="en-US" smtClean="0"/>
+              <a:rPr lang="en-US"/>
               <a:t>Click to edit Master text styles</a:t>
             </a:r>
           </a:p>
           <a:p>
             <a:pPr lvl="1"/>
             <a:r>
-              <a:rPr lang="en-US" smtClean="0"/>
+              <a:rPr lang="en-US"/>
               <a:t>Second level</a:t>
             </a:r>
           </a:p>
           <a:p>
             <a:pPr lvl="2"/>
             <a:r>
-              <a:rPr lang="en-US" smtClean="0"/>
+              <a:rPr lang="en-US"/>
               <a:t>Third level</a:t>
             </a:r>
           </a:p>
           <a:p>
             <a:pPr lvl="3"/>
             <a:r>
-              <a:rPr lang="en-US" smtClean="0"/>
+              <a:rPr lang="en-US"/>
               <a:t>Fourth level</a:t>
             </a:r>
           </a:p>
           <a:p>
             <a:pPr lvl="4"/>
             <a:r>
-              <a:rPr lang="en-US" smtClean="0"/>
+              <a:rPr lang="en-US"/>
               <a:t>Fifth level</a:t>
             </a:r>
-            <a:endParaRPr lang="en-US"/>
           </a:p>
         </p:txBody>
       </p:sp>
@@ -2732,7 +2727,7 @@
           <a:p>
             <a:fld id="{5BCAD085-E8A6-8845-BD4E-CB4CCA059FC4}" type="datetimeFigureOut">
               <a:rPr lang="en-US" smtClean="0"/>
-              <a:t>1/27/13</a:t>
+              <a:t>9/25/2026</a:t>
             </a:fld>
             <a:endParaRPr lang="en-US"/>
           </a:p>
@@ -3091,7 +3086,7 @@
 </file>
 
 <file path=ppt/slides/slide1.xml><?xml version="1.0" encoding="utf-8"?>
-<p:sld xmlns:a="http://schemas.openxmlformats.org/drawingml/2006/main" xmlns:p="http://schemas.openxmlformats.org/presentationml/2006/main" xmlns:r="http://schemas.openxmlformats.org/officeDocument/2006/relationships">
+<p:sld xmlns:a="http://schemas.openxmlformats.org/drawingml/2006/main" xmlns:r="http://schemas.openxmlformats.org/officeDocument/2006/relationships" xmlns:p="http://schemas.openxmlformats.org/presentationml/2006/main">
   <p:cSld>
     <p:spTree>
       <p:nvGrpSpPr>
@@ -3099,7 +3094,14 @@
         <p:cNvGrpSpPr/>
         <p:nvPr/>
       </p:nvGrpSpPr>
-      <p:grpSpPr/>
+      <p:grpSpPr>
+        <a:xfrm>
+          <a:off x="0" y="0"/>
+          <a:ext cx="0" cy="0"/>
+          <a:chOff x="0" y="0"/>
+          <a:chExt cx="0" cy="0"/>
+        </a:xfrm>
+      </p:grpSpPr>
       <p:pic>
         <p:nvPicPr>
           <p:cNvPr id="2" name="Picture 1" descr="bg_title_slide.png"/>
@@ -3234,7 +3236,7 @@
           </a:fontRef>
         </p:style>
         <p:txBody>
-          <a:bodyPr rtlCol="0" anchor="ctr" wrap="square"/>
+          <a:bodyPr wrap="square" rtlCol="0" anchor="ctr"/>
           <a:lstStyle/>
           <a:p>
             <a:pPr algn="ctr">
@@ -3246,6 +3248,7 @@
               </a:defRPr>
             </a:pPr>
             <a:r>
+              <a:rPr dirty="0"/>
               <a:t>Team Members</a:t>
             </a:r>
           </a:p>
@@ -3262,7 +3265,11 @@
               </a:defRPr>
             </a:pPr>
             <a:r>
-              <a:t>1.  Akshay Bharadwaj       -24BD1A052K</a:t>
+              <a:t>1.     </a:t>
+            </a:r>
+            <a:r>
+              <a:rPr dirty="0"/>
+              <a:t>-24BD1A052K</a:t>
             </a:r>
           </a:p>
           <a:p>
@@ -3278,7 +3285,24 @@
               </a:defRPr>
             </a:pPr>
             <a:r>
-              <a:t>2.  M. Lakshmi Srivani      - 24BD1A0533</a:t>
+              <a:rPr dirty="0"/>
+              <a:t>2.  M</a:t>
+            </a:r>
+            <a:r>
+              <a:rPr lang="en-IN" dirty="0"/>
+              <a:t>. Lakshmi </a:t>
+            </a:r>
+            <a:r>
+              <a:rPr lang="en-IN" dirty="0" err="1"/>
+              <a:t>Srivani</a:t>
+            </a:r>
+            <a:r>
+              <a:rPr lang="en-IN" dirty="0"/>
+              <a:t>  </a:t>
+            </a:r>
+            <a:r>
+              <a:rPr dirty="0"/>
+              <a:t>    - 24BD1A0533</a:t>
             </a:r>
           </a:p>
           <a:p>
@@ -3294,7 +3318,24 @@
               </a:defRPr>
             </a:pPr>
             <a:r>
-              <a:t>3.  P. Pragna                     - 24BD1A053B</a:t>
+              <a:rPr dirty="0"/>
+              <a:t>3.  </a:t>
+            </a:r>
+            <a:r>
+              <a:rPr lang="en-IN" dirty="0"/>
+              <a:t>P. </a:t>
+            </a:r>
+            <a:r>
+              <a:rPr lang="en-IN" dirty="0" err="1"/>
+              <a:t>Prag</a:t>
+            </a:r>
+            <a:r>
+              <a:rPr dirty="0" err="1"/>
+              <a:t>na</a:t>
+            </a:r>
+            <a:r>
+              <a:rPr dirty="0"/>
+              <a:t>                     - 24BD1A053B</a:t>
             </a:r>
           </a:p>
           <a:p>
@@ -3310,7 +3351,16 @@
               </a:defRPr>
             </a:pPr>
             <a:r>
-              <a:t>4.  R. Lahari                      - 24BD1A053N</a:t>
+              <a:rPr dirty="0"/>
+              <a:t>4.  R. </a:t>
+            </a:r>
+            <a:r>
+              <a:rPr dirty="0" err="1"/>
+              <a:t>Lahari</a:t>
+            </a:r>
+            <a:r>
+              <a:rPr dirty="0"/>
+              <a:t>                      - 24BD1A053N</a:t>
             </a:r>
           </a:p>
           <a:p>
@@ -3326,6 +3376,7 @@
               </a:defRPr>
             </a:pPr>
             <a:r>
+              <a:rPr dirty="0"/>
               <a:t>5.  S. Meghana                 - 24BD1A053R</a:t>
             </a:r>
           </a:p>
@@ -3369,7 +3420,7 @@
           </a:fontRef>
         </p:style>
         <p:txBody>
-          <a:bodyPr rtlCol="0" anchor="ctr" wrap="square"/>
+          <a:bodyPr wrap="square" rtlCol="0" anchor="ctr"/>
           <a:lstStyle/>
           <a:p>
             <a:pPr algn="ctr">
@@ -3411,7 +3462,7 @@
 </file>
 
 <file path=ppt/slides/slide10.xml><?xml version="1.0" encoding="utf-8"?>
-<p:sld xmlns:a="http://schemas.openxmlformats.org/drawingml/2006/main" xmlns:p="http://schemas.openxmlformats.org/presentationml/2006/main" xmlns:r="http://schemas.openxmlformats.org/officeDocument/2006/relationships">
+<p:sld xmlns:a="http://schemas.openxmlformats.org/drawingml/2006/main" xmlns:r="http://schemas.openxmlformats.org/officeDocument/2006/relationships" xmlns:p="http://schemas.openxmlformats.org/presentationml/2006/main">
   <p:cSld>
     <p:spTree>
       <p:nvGrpSpPr>
@@ -3419,7 +3470,14 @@
         <p:cNvGrpSpPr/>
         <p:nvPr/>
       </p:nvGrpSpPr>
-      <p:grpSpPr/>
+      <p:grpSpPr>
+        <a:xfrm>
+          <a:off x="0" y="0"/>
+          <a:ext cx="0" cy="0"/>
+          <a:chOff x="0" y="0"/>
+          <a:chExt cx="0" cy="0"/>
+        </a:xfrm>
+      </p:grpSpPr>
       <p:pic>
         <p:nvPicPr>
           <p:cNvPr id="2" name="Picture 1" descr="bg_content_slide.png"/>
@@ -3765,7 +3823,7 @@
 </file>
 
 <file path=ppt/slides/slide11.xml><?xml version="1.0" encoding="utf-8"?>
-<p:sld xmlns:a="http://schemas.openxmlformats.org/drawingml/2006/main" xmlns:p="http://schemas.openxmlformats.org/presentationml/2006/main" xmlns:r="http://schemas.openxmlformats.org/officeDocument/2006/relationships">
+<p:sld xmlns:a="http://schemas.openxmlformats.org/drawingml/2006/main" xmlns:r="http://schemas.openxmlformats.org/officeDocument/2006/relationships" xmlns:p="http://schemas.openxmlformats.org/presentationml/2006/main">
   <p:cSld>
     <p:spTree>
       <p:nvGrpSpPr>
@@ -3773,7 +3831,14 @@
         <p:cNvGrpSpPr/>
         <p:nvPr/>
       </p:nvGrpSpPr>
-      <p:grpSpPr/>
+      <p:grpSpPr>
+        <a:xfrm>
+          <a:off x="0" y="0"/>
+          <a:ext cx="0" cy="0"/>
+          <a:chOff x="0" y="0"/>
+          <a:chExt cx="0" cy="0"/>
+        </a:xfrm>
+      </p:grpSpPr>
       <p:pic>
         <p:nvPicPr>
           <p:cNvPr id="2" name="Picture 1" descr="bg_content_slide.png"/>
@@ -4119,7 +4184,7 @@
 </file>
 
 <file path=ppt/slides/slide12.xml><?xml version="1.0" encoding="utf-8"?>
-<p:sld xmlns:a="http://schemas.openxmlformats.org/drawingml/2006/main" xmlns:p="http://schemas.openxmlformats.org/presentationml/2006/main" xmlns:r="http://schemas.openxmlformats.org/officeDocument/2006/relationships">
+<p:sld xmlns:a="http://schemas.openxmlformats.org/drawingml/2006/main" xmlns:r="http://schemas.openxmlformats.org/officeDocument/2006/relationships" xmlns:p="http://schemas.openxmlformats.org/presentationml/2006/main">
   <p:cSld>
     <p:spTree>
       <p:nvGrpSpPr>
@@ -4127,7 +4192,14 @@
         <p:cNvGrpSpPr/>
         <p:nvPr/>
       </p:nvGrpSpPr>
-      <p:grpSpPr/>
+      <p:grpSpPr>
+        <a:xfrm>
+          <a:off x="0" y="0"/>
+          <a:ext cx="0" cy="0"/>
+          <a:chOff x="0" y="0"/>
+          <a:chExt cx="0" cy="0"/>
+        </a:xfrm>
+      </p:grpSpPr>
       <p:pic>
         <p:nvPicPr>
           <p:cNvPr id="2" name="Picture 1" descr="bg_content_slide.png"/>
@@ -4425,7 +4497,7 @@
 </file>
 
 <file path=ppt/slides/slide13.xml><?xml version="1.0" encoding="utf-8"?>
-<p:sld xmlns:a="http://schemas.openxmlformats.org/drawingml/2006/main" xmlns:p="http://schemas.openxmlformats.org/presentationml/2006/main" xmlns:r="http://schemas.openxmlformats.org/officeDocument/2006/relationships">
+<p:sld xmlns:a="http://schemas.openxmlformats.org/drawingml/2006/main" xmlns:r="http://schemas.openxmlformats.org/officeDocument/2006/relationships" xmlns:p="http://schemas.openxmlformats.org/presentationml/2006/main">
   <p:cSld>
     <p:spTree>
       <p:nvGrpSpPr>
@@ -4433,7 +4505,14 @@
         <p:cNvGrpSpPr/>
         <p:nvPr/>
       </p:nvGrpSpPr>
-      <p:grpSpPr/>
+      <p:grpSpPr>
+        <a:xfrm>
+          <a:off x="0" y="0"/>
+          <a:ext cx="0" cy="0"/>
+          <a:chOff x="0" y="0"/>
+          <a:chExt cx="0" cy="0"/>
+        </a:xfrm>
+      </p:grpSpPr>
       <p:pic>
         <p:nvPicPr>
           <p:cNvPr id="2" name="Picture 1" descr="bg_content_slide.png"/>
@@ -4503,7 +4582,7 @@
 </file>
 
 <file path=ppt/slides/slide2.xml><?xml version="1.0" encoding="utf-8"?>
-<p:sld xmlns:a="http://schemas.openxmlformats.org/drawingml/2006/main" xmlns:p="http://schemas.openxmlformats.org/presentationml/2006/main" xmlns:r="http://schemas.openxmlformats.org/officeDocument/2006/relationships">
+<p:sld xmlns:a="http://schemas.openxmlformats.org/drawingml/2006/main" xmlns:r="http://schemas.openxmlformats.org/officeDocument/2006/relationships" xmlns:p="http://schemas.openxmlformats.org/presentationml/2006/main">
   <p:cSld>
     <p:spTree>
       <p:nvGrpSpPr>
@@ -4511,7 +4590,14 @@
         <p:cNvGrpSpPr/>
         <p:nvPr/>
       </p:nvGrpSpPr>
-      <p:grpSpPr/>
+      <p:grpSpPr>
+        <a:xfrm>
+          <a:off x="0" y="0"/>
+          <a:ext cx="0" cy="0"/>
+          <a:chOff x="0" y="0"/>
+          <a:chExt cx="0" cy="0"/>
+        </a:xfrm>
+      </p:grpSpPr>
       <p:pic>
         <p:nvPicPr>
           <p:cNvPr id="2" name="Picture 1" descr="bg_content_slide.png"/>
@@ -4809,7 +4895,7 @@
 </file>
 
 <file path=ppt/slides/slide3.xml><?xml version="1.0" encoding="utf-8"?>
-<p:sld xmlns:a="http://schemas.openxmlformats.org/drawingml/2006/main" xmlns:p="http://schemas.openxmlformats.org/presentationml/2006/main" xmlns:r="http://schemas.openxmlformats.org/officeDocument/2006/relationships">
+<p:sld xmlns:a="http://schemas.openxmlformats.org/drawingml/2006/main" xmlns:r="http://schemas.openxmlformats.org/officeDocument/2006/relationships" xmlns:p="http://schemas.openxmlformats.org/presentationml/2006/main">
   <p:cSld>
     <p:spTree>
       <p:nvGrpSpPr>
@@ -4817,7 +4903,14 @@
         <p:cNvGrpSpPr/>
         <p:nvPr/>
       </p:nvGrpSpPr>
-      <p:grpSpPr/>
+      <p:grpSpPr>
+        <a:xfrm>
+          <a:off x="0" y="0"/>
+          <a:ext cx="0" cy="0"/>
+          <a:chOff x="0" y="0"/>
+          <a:chExt cx="0" cy="0"/>
+        </a:xfrm>
+      </p:grpSpPr>
       <p:pic>
         <p:nvPicPr>
           <p:cNvPr id="2" name="Picture 1" descr="bg_content_slide.png"/>
@@ -5115,7 +5208,7 @@
 </file>
 
 <file path=ppt/slides/slide4.xml><?xml version="1.0" encoding="utf-8"?>
-<p:sld xmlns:a="http://schemas.openxmlformats.org/drawingml/2006/main" xmlns:p="http://schemas.openxmlformats.org/presentationml/2006/main" xmlns:r="http://schemas.openxmlformats.org/officeDocument/2006/relationships">
+<p:sld xmlns:a="http://schemas.openxmlformats.org/drawingml/2006/main" xmlns:r="http://schemas.openxmlformats.org/officeDocument/2006/relationships" xmlns:p="http://schemas.openxmlformats.org/presentationml/2006/main">
   <p:cSld>
     <p:spTree>
       <p:nvGrpSpPr>
@@ -5123,7 +5216,14 @@
         <p:cNvGrpSpPr/>
         <p:nvPr/>
       </p:nvGrpSpPr>
-      <p:grpSpPr/>
+      <p:grpSpPr>
+        <a:xfrm>
+          <a:off x="0" y="0"/>
+          <a:ext cx="0" cy="0"/>
+          <a:chOff x="0" y="0"/>
+          <a:chExt cx="0" cy="0"/>
+        </a:xfrm>
+      </p:grpSpPr>
       <p:pic>
         <p:nvPicPr>
           <p:cNvPr id="2" name="Picture 1" descr="bg_content_slide.png"/>
@@ -5421,7 +5521,7 @@
 </file>
 
 <file path=ppt/slides/slide5.xml><?xml version="1.0" encoding="utf-8"?>
-<p:sld xmlns:a="http://schemas.openxmlformats.org/drawingml/2006/main" xmlns:p="http://schemas.openxmlformats.org/presentationml/2006/main" xmlns:r="http://schemas.openxmlformats.org/officeDocument/2006/relationships">
+<p:sld xmlns:a="http://schemas.openxmlformats.org/drawingml/2006/main" xmlns:r="http://schemas.openxmlformats.org/officeDocument/2006/relationships" xmlns:p="http://schemas.openxmlformats.org/presentationml/2006/main">
   <p:cSld>
     <p:spTree>
       <p:nvGrpSpPr>
@@ -5429,7 +5529,14 @@
         <p:cNvGrpSpPr/>
         <p:nvPr/>
       </p:nvGrpSpPr>
-      <p:grpSpPr/>
+      <p:grpSpPr>
+        <a:xfrm>
+          <a:off x="0" y="0"/>
+          <a:ext cx="0" cy="0"/>
+          <a:chOff x="0" y="0"/>
+          <a:chExt cx="0" cy="0"/>
+        </a:xfrm>
+      </p:grpSpPr>
       <p:pic>
         <p:nvPicPr>
           <p:cNvPr id="2" name="Picture 1" descr="bg_content_slide.png"/>
@@ -5815,7 +5922,7 @@
 </file>
 
 <file path=ppt/slides/slide6.xml><?xml version="1.0" encoding="utf-8"?>
-<p:sld xmlns:a="http://schemas.openxmlformats.org/drawingml/2006/main" xmlns:p="http://schemas.openxmlformats.org/presentationml/2006/main" xmlns:r="http://schemas.openxmlformats.org/officeDocument/2006/relationships">
+<p:sld xmlns:a="http://schemas.openxmlformats.org/drawingml/2006/main" xmlns:r="http://schemas.openxmlformats.org/officeDocument/2006/relationships" xmlns:p="http://schemas.openxmlformats.org/presentationml/2006/main">
   <p:cSld>
     <p:spTree>
       <p:nvGrpSpPr>
@@ -5823,7 +5930,14 @@
         <p:cNvGrpSpPr/>
         <p:nvPr/>
       </p:nvGrpSpPr>
-      <p:grpSpPr/>
+      <p:grpSpPr>
+        <a:xfrm>
+          <a:off x="0" y="0"/>
+          <a:ext cx="0" cy="0"/>
+          <a:chOff x="0" y="0"/>
+          <a:chExt cx="0" cy="0"/>
+        </a:xfrm>
+      </p:grpSpPr>
       <p:pic>
         <p:nvPicPr>
           <p:cNvPr id="2" name="Picture 1" descr="bg_content_slide.png"/>
@@ -6121,7 +6235,7 @@
 </file>
 
 <file path=ppt/slides/slide7.xml><?xml version="1.0" encoding="utf-8"?>
-<p:sld xmlns:a="http://schemas.openxmlformats.org/drawingml/2006/main" xmlns:p="http://schemas.openxmlformats.org/presentationml/2006/main" xmlns:r="http://schemas.openxmlformats.org/officeDocument/2006/relationships">
+<p:sld xmlns:a="http://schemas.openxmlformats.org/drawingml/2006/main" xmlns:r="http://schemas.openxmlformats.org/officeDocument/2006/relationships" xmlns:p="http://schemas.openxmlformats.org/presentationml/2006/main">
   <p:cSld>
     <p:spTree>
       <p:nvGrpSpPr>
@@ -6129,7 +6243,14 @@
         <p:cNvGrpSpPr/>
         <p:nvPr/>
       </p:nvGrpSpPr>
-      <p:grpSpPr/>
+      <p:grpSpPr>
+        <a:xfrm>
+          <a:off x="0" y="0"/>
+          <a:ext cx="0" cy="0"/>
+          <a:chOff x="0" y="0"/>
+          <a:chExt cx="0" cy="0"/>
+        </a:xfrm>
+      </p:grpSpPr>
       <p:pic>
         <p:nvPicPr>
           <p:cNvPr id="2" name="Picture 1" descr="bg_content_slide.png"/>
@@ -6259,7 +6380,7 @@
 </file>
 
 <file path=ppt/slides/slide8.xml><?xml version="1.0" encoding="utf-8"?>
-<p:sld xmlns:a="http://schemas.openxmlformats.org/drawingml/2006/main" xmlns:p="http://schemas.openxmlformats.org/presentationml/2006/main" xmlns:r="http://schemas.openxmlformats.org/officeDocument/2006/relationships">
+<p:sld xmlns:a="http://schemas.openxmlformats.org/drawingml/2006/main" xmlns:r="http://schemas.openxmlformats.org/officeDocument/2006/relationships" xmlns:p="http://schemas.openxmlformats.org/presentationml/2006/main">
   <p:cSld>
     <p:spTree>
       <p:nvGrpSpPr>
@@ -6267,7 +6388,14 @@
         <p:cNvGrpSpPr/>
         <p:nvPr/>
       </p:nvGrpSpPr>
-      <p:grpSpPr/>
+      <p:grpSpPr>
+        <a:xfrm>
+          <a:off x="0" y="0"/>
+          <a:ext cx="0" cy="0"/>
+          <a:chOff x="0" y="0"/>
+          <a:chExt cx="0" cy="0"/>
+        </a:xfrm>
+      </p:grpSpPr>
       <p:pic>
         <p:nvPicPr>
           <p:cNvPr id="2" name="Picture 1" descr="bg_content_slide.png"/>
@@ -6397,7 +6525,7 @@
 </file>
 
 <file path=ppt/slides/slide9.xml><?xml version="1.0" encoding="utf-8"?>
-<p:sld xmlns:a="http://schemas.openxmlformats.org/drawingml/2006/main" xmlns:p="http://schemas.openxmlformats.org/presentationml/2006/main" xmlns:r="http://schemas.openxmlformats.org/officeDocument/2006/relationships">
+<p:sld xmlns:a="http://schemas.openxmlformats.org/drawingml/2006/main" xmlns:r="http://schemas.openxmlformats.org/officeDocument/2006/relationships" xmlns:p="http://schemas.openxmlformats.org/presentationml/2006/main">
   <p:cSld>
     <p:spTree>
       <p:nvGrpSpPr>
@@ -6405,7 +6533,14 @@
         <p:cNvGrpSpPr/>
         <p:nvPr/>
       </p:nvGrpSpPr>
-      <p:grpSpPr/>
+      <p:grpSpPr>
+        <a:xfrm>
+          <a:off x="0" y="0"/>
+          <a:ext cx="0" cy="0"/>
+          <a:chOff x="0" y="0"/>
+          <a:chExt cx="0" cy="0"/>
+        </a:xfrm>
+      </p:grpSpPr>
       <p:pic>
         <p:nvPicPr>
           <p:cNvPr id="2" name="Picture 1" descr="bg_content_slide.png"/>
